--- a/decks/Micro_05_Blood-Cultures-Sepsis-Infection-Control.pptx
+++ b/decks/Micro_05_Blood-Cultures-Sepsis-Infection-Control.pptx
@@ -25,9 +25,14 @@
     <p:sldId id="273" r:id="rId19"/>
     <p:sldId id="274" r:id="rId20"/>
     <p:sldId id="275" r:id="rId21"/>
+    <p:sldId id="276" r:id="rId22"/>
+    <p:sldId id="277" r:id="rId23"/>
+    <p:sldId id="278" r:id="rId24"/>
+    <p:sldId id="279" r:id="rId25"/>
+    <p:sldId id="280" r:id="rId26"/>
   </p:sldIdLst>
   <p:notesMasterIdLst>
-    <p:notesMasterId r:id="rId22"/>
+    <p:notesMasterId r:id="rId27"/>
   </p:notesMasterIdLst>
   <p:sldSz cx="12191695" cy="6858000"/>
   <p:notesSz cx="6858000" cy="12191695"/>
@@ -1601,6 +1606,446 @@
             <a:fld id="{F7021451-1387-4CA6-816F-3879F97B5CBC}" type="slidenum">
               <a:rPr lang="en-US"/>
               <a:t>20</a:t>
+            </a:fld>
+            <a:endParaRPr lang="en-US"/>
+          </a:p>
+        </p:txBody>
+      </p:sp>
+    </p:spTree>
+    <p:extLst>
+      <p:ext uri="{BB962C8B-B14F-4D97-AF65-F5344CB8AC3E}">
+        <p14:creationId xmlns:p14="http://schemas.microsoft.com/office/powerpoint/2010/main" val="1024086991"/>
+      </p:ext>
+    </p:extLst>
+  </p:cSld>
+  <p:clrMapOvr>
+    <a:masterClrMapping/>
+  </p:clrMapOvr>
+</p:notes>
+</file>
+
+<file path=ppt/notesSlides/notesSlide21.xml><?xml version="1.0" encoding="utf-8"?>
+<p:notes xmlns:a="http://schemas.openxmlformats.org/drawingml/2006/main" xmlns:r="http://schemas.openxmlformats.org/officeDocument/2006/relationships" xmlns:p="http://schemas.openxmlformats.org/presentationml/2006/main">
+  <p:cSld>
+    <p:spTree>
+      <p:nvGrpSpPr>
+        <p:cNvPr id="1" name=""/>
+        <p:cNvGrpSpPr/>
+        <p:nvPr/>
+      </p:nvGrpSpPr>
+      <p:grpSpPr>
+        <a:xfrm>
+          <a:off x="0" y="0"/>
+          <a:ext cx="0" cy="0"/>
+          <a:chOff x="0" y="0"/>
+          <a:chExt cx="0" cy="0"/>
+        </a:xfrm>
+      </p:grpSpPr>
+      <p:sp>
+        <p:nvSpPr>
+          <p:cNvPr id="2" name="Slide Image Placeholder 1"/>
+          <p:cNvSpPr>
+            <a:spLocks noGrp="1" noRot="1" noChangeAspect="1"/>
+          </p:cNvSpPr>
+          <p:nvPr>
+            <p:ph type="sldImg"/>
+          </p:nvPr>
+        </p:nvSpPr>
+        <p:spPr/>
+      </p:sp>
+      <p:sp>
+        <p:nvSpPr>
+          <p:cNvPr id="3" name="Notes Placeholder 2"/>
+          <p:cNvSpPr>
+            <a:spLocks noGrp="1"/>
+          </p:cNvSpPr>
+          <p:nvPr>
+            <p:ph type="body" idx="1"/>
+          </p:nvPr>
+        </p:nvSpPr>
+        <p:spPr/>
+        <p:txBody>
+          <a:bodyPr/>
+          <a:lstStyle/>
+          <a:p>
+            <a:r>
+              <a:rPr lang="en-US" dirty="0"/>
+              <a:t/>
+            </a:r>
+            <a:endParaRPr lang="en-US" dirty="0"/>
+          </a:p>
+        </p:txBody>
+      </p:sp>
+      <p:sp>
+        <p:nvSpPr>
+          <p:cNvPr id="4" name="Slide Number Placeholder 3"/>
+          <p:cNvSpPr>
+            <a:spLocks noGrp="1"/>
+          </p:cNvSpPr>
+          <p:nvPr>
+            <p:ph type="sldNum" sz="quarter" idx="10"/>
+          </p:nvPr>
+        </p:nvSpPr>
+        <p:spPr/>
+        <p:txBody>
+          <a:bodyPr/>
+          <a:lstStyle/>
+          <a:p>
+            <a:fld id="{F7021451-1387-4CA6-816F-3879F97B5CBC}" type="slidenum">
+              <a:rPr lang="en-US"/>
+              <a:t>21</a:t>
+            </a:fld>
+            <a:endParaRPr lang="en-US"/>
+          </a:p>
+        </p:txBody>
+      </p:sp>
+    </p:spTree>
+    <p:extLst>
+      <p:ext uri="{BB962C8B-B14F-4D97-AF65-F5344CB8AC3E}">
+        <p14:creationId xmlns:p14="http://schemas.microsoft.com/office/powerpoint/2010/main" val="1024086991"/>
+      </p:ext>
+    </p:extLst>
+  </p:cSld>
+  <p:clrMapOvr>
+    <a:masterClrMapping/>
+  </p:clrMapOvr>
+</p:notes>
+</file>
+
+<file path=ppt/notesSlides/notesSlide22.xml><?xml version="1.0" encoding="utf-8"?>
+<p:notes xmlns:a="http://schemas.openxmlformats.org/drawingml/2006/main" xmlns:r="http://schemas.openxmlformats.org/officeDocument/2006/relationships" xmlns:p="http://schemas.openxmlformats.org/presentationml/2006/main">
+  <p:cSld>
+    <p:spTree>
+      <p:nvGrpSpPr>
+        <p:cNvPr id="1" name=""/>
+        <p:cNvGrpSpPr/>
+        <p:nvPr/>
+      </p:nvGrpSpPr>
+      <p:grpSpPr>
+        <a:xfrm>
+          <a:off x="0" y="0"/>
+          <a:ext cx="0" cy="0"/>
+          <a:chOff x="0" y="0"/>
+          <a:chExt cx="0" cy="0"/>
+        </a:xfrm>
+      </p:grpSpPr>
+      <p:sp>
+        <p:nvSpPr>
+          <p:cNvPr id="2" name="Slide Image Placeholder 1"/>
+          <p:cNvSpPr>
+            <a:spLocks noGrp="1" noRot="1" noChangeAspect="1"/>
+          </p:cNvSpPr>
+          <p:nvPr>
+            <p:ph type="sldImg"/>
+          </p:nvPr>
+        </p:nvSpPr>
+        <p:spPr/>
+      </p:sp>
+      <p:sp>
+        <p:nvSpPr>
+          <p:cNvPr id="3" name="Notes Placeholder 2"/>
+          <p:cNvSpPr>
+            <a:spLocks noGrp="1"/>
+          </p:cNvSpPr>
+          <p:nvPr>
+            <p:ph type="body" idx="1"/>
+          </p:nvPr>
+        </p:nvSpPr>
+        <p:spPr/>
+        <p:txBody>
+          <a:bodyPr/>
+          <a:lstStyle/>
+          <a:p>
+            <a:r>
+              <a:rPr lang="en-US" dirty="0"/>
+              <a:t/>
+            </a:r>
+            <a:endParaRPr lang="en-US" dirty="0"/>
+          </a:p>
+        </p:txBody>
+      </p:sp>
+      <p:sp>
+        <p:nvSpPr>
+          <p:cNvPr id="4" name="Slide Number Placeholder 3"/>
+          <p:cNvSpPr>
+            <a:spLocks noGrp="1"/>
+          </p:cNvSpPr>
+          <p:nvPr>
+            <p:ph type="sldNum" sz="quarter" idx="10"/>
+          </p:nvPr>
+        </p:nvSpPr>
+        <p:spPr/>
+        <p:txBody>
+          <a:bodyPr/>
+          <a:lstStyle/>
+          <a:p>
+            <a:fld id="{F7021451-1387-4CA6-816F-3879F97B5CBC}" type="slidenum">
+              <a:rPr lang="en-US"/>
+              <a:t>22</a:t>
+            </a:fld>
+            <a:endParaRPr lang="en-US"/>
+          </a:p>
+        </p:txBody>
+      </p:sp>
+    </p:spTree>
+    <p:extLst>
+      <p:ext uri="{BB962C8B-B14F-4D97-AF65-F5344CB8AC3E}">
+        <p14:creationId xmlns:p14="http://schemas.microsoft.com/office/powerpoint/2010/main" val="1024086991"/>
+      </p:ext>
+    </p:extLst>
+  </p:cSld>
+  <p:clrMapOvr>
+    <a:masterClrMapping/>
+  </p:clrMapOvr>
+</p:notes>
+</file>
+
+<file path=ppt/notesSlides/notesSlide23.xml><?xml version="1.0" encoding="utf-8"?>
+<p:notes xmlns:a="http://schemas.openxmlformats.org/drawingml/2006/main" xmlns:r="http://schemas.openxmlformats.org/officeDocument/2006/relationships" xmlns:p="http://schemas.openxmlformats.org/presentationml/2006/main">
+  <p:cSld>
+    <p:spTree>
+      <p:nvGrpSpPr>
+        <p:cNvPr id="1" name=""/>
+        <p:cNvGrpSpPr/>
+        <p:nvPr/>
+      </p:nvGrpSpPr>
+      <p:grpSpPr>
+        <a:xfrm>
+          <a:off x="0" y="0"/>
+          <a:ext cx="0" cy="0"/>
+          <a:chOff x="0" y="0"/>
+          <a:chExt cx="0" cy="0"/>
+        </a:xfrm>
+      </p:grpSpPr>
+      <p:sp>
+        <p:nvSpPr>
+          <p:cNvPr id="2" name="Slide Image Placeholder 1"/>
+          <p:cNvSpPr>
+            <a:spLocks noGrp="1" noRot="1" noChangeAspect="1"/>
+          </p:cNvSpPr>
+          <p:nvPr>
+            <p:ph type="sldImg"/>
+          </p:nvPr>
+        </p:nvSpPr>
+        <p:spPr/>
+      </p:sp>
+      <p:sp>
+        <p:nvSpPr>
+          <p:cNvPr id="3" name="Notes Placeholder 2"/>
+          <p:cNvSpPr>
+            <a:spLocks noGrp="1"/>
+          </p:cNvSpPr>
+          <p:nvPr>
+            <p:ph type="body" idx="1"/>
+          </p:nvPr>
+        </p:nvSpPr>
+        <p:spPr/>
+        <p:txBody>
+          <a:bodyPr/>
+          <a:lstStyle/>
+          <a:p>
+            <a:r>
+              <a:rPr lang="en-US" dirty="0"/>
+              <a:t/>
+            </a:r>
+            <a:endParaRPr lang="en-US" dirty="0"/>
+          </a:p>
+        </p:txBody>
+      </p:sp>
+      <p:sp>
+        <p:nvSpPr>
+          <p:cNvPr id="4" name="Slide Number Placeholder 3"/>
+          <p:cNvSpPr>
+            <a:spLocks noGrp="1"/>
+          </p:cNvSpPr>
+          <p:nvPr>
+            <p:ph type="sldNum" sz="quarter" idx="10"/>
+          </p:nvPr>
+        </p:nvSpPr>
+        <p:spPr/>
+        <p:txBody>
+          <a:bodyPr/>
+          <a:lstStyle/>
+          <a:p>
+            <a:fld id="{F7021451-1387-4CA6-816F-3879F97B5CBC}" type="slidenum">
+              <a:rPr lang="en-US"/>
+              <a:t>23</a:t>
+            </a:fld>
+            <a:endParaRPr lang="en-US"/>
+          </a:p>
+        </p:txBody>
+      </p:sp>
+    </p:spTree>
+    <p:extLst>
+      <p:ext uri="{BB962C8B-B14F-4D97-AF65-F5344CB8AC3E}">
+        <p14:creationId xmlns:p14="http://schemas.microsoft.com/office/powerpoint/2010/main" val="1024086991"/>
+      </p:ext>
+    </p:extLst>
+  </p:cSld>
+  <p:clrMapOvr>
+    <a:masterClrMapping/>
+  </p:clrMapOvr>
+</p:notes>
+</file>
+
+<file path=ppt/notesSlides/notesSlide24.xml><?xml version="1.0" encoding="utf-8"?>
+<p:notes xmlns:a="http://schemas.openxmlformats.org/drawingml/2006/main" xmlns:r="http://schemas.openxmlformats.org/officeDocument/2006/relationships" xmlns:p="http://schemas.openxmlformats.org/presentationml/2006/main">
+  <p:cSld>
+    <p:spTree>
+      <p:nvGrpSpPr>
+        <p:cNvPr id="1" name=""/>
+        <p:cNvGrpSpPr/>
+        <p:nvPr/>
+      </p:nvGrpSpPr>
+      <p:grpSpPr>
+        <a:xfrm>
+          <a:off x="0" y="0"/>
+          <a:ext cx="0" cy="0"/>
+          <a:chOff x="0" y="0"/>
+          <a:chExt cx="0" cy="0"/>
+        </a:xfrm>
+      </p:grpSpPr>
+      <p:sp>
+        <p:nvSpPr>
+          <p:cNvPr id="2" name="Slide Image Placeholder 1"/>
+          <p:cNvSpPr>
+            <a:spLocks noGrp="1" noRot="1" noChangeAspect="1"/>
+          </p:cNvSpPr>
+          <p:nvPr>
+            <p:ph type="sldImg"/>
+          </p:nvPr>
+        </p:nvSpPr>
+        <p:spPr/>
+      </p:sp>
+      <p:sp>
+        <p:nvSpPr>
+          <p:cNvPr id="3" name="Notes Placeholder 2"/>
+          <p:cNvSpPr>
+            <a:spLocks noGrp="1"/>
+          </p:cNvSpPr>
+          <p:nvPr>
+            <p:ph type="body" idx="1"/>
+          </p:nvPr>
+        </p:nvSpPr>
+        <p:spPr/>
+        <p:txBody>
+          <a:bodyPr/>
+          <a:lstStyle/>
+          <a:p>
+            <a:r>
+              <a:rPr lang="en-US" dirty="0"/>
+              <a:t/>
+            </a:r>
+            <a:endParaRPr lang="en-US" dirty="0"/>
+          </a:p>
+        </p:txBody>
+      </p:sp>
+      <p:sp>
+        <p:nvSpPr>
+          <p:cNvPr id="4" name="Slide Number Placeholder 3"/>
+          <p:cNvSpPr>
+            <a:spLocks noGrp="1"/>
+          </p:cNvSpPr>
+          <p:nvPr>
+            <p:ph type="sldNum" sz="quarter" idx="10"/>
+          </p:nvPr>
+        </p:nvSpPr>
+        <p:spPr/>
+        <p:txBody>
+          <a:bodyPr/>
+          <a:lstStyle/>
+          <a:p>
+            <a:fld id="{F7021451-1387-4CA6-816F-3879F97B5CBC}" type="slidenum">
+              <a:rPr lang="en-US"/>
+              <a:t>24</a:t>
+            </a:fld>
+            <a:endParaRPr lang="en-US"/>
+          </a:p>
+        </p:txBody>
+      </p:sp>
+    </p:spTree>
+    <p:extLst>
+      <p:ext uri="{BB962C8B-B14F-4D97-AF65-F5344CB8AC3E}">
+        <p14:creationId xmlns:p14="http://schemas.microsoft.com/office/powerpoint/2010/main" val="1024086991"/>
+      </p:ext>
+    </p:extLst>
+  </p:cSld>
+  <p:clrMapOvr>
+    <a:masterClrMapping/>
+  </p:clrMapOvr>
+</p:notes>
+</file>
+
+<file path=ppt/notesSlides/notesSlide25.xml><?xml version="1.0" encoding="utf-8"?>
+<p:notes xmlns:a="http://schemas.openxmlformats.org/drawingml/2006/main" xmlns:r="http://schemas.openxmlformats.org/officeDocument/2006/relationships" xmlns:p="http://schemas.openxmlformats.org/presentationml/2006/main">
+  <p:cSld>
+    <p:spTree>
+      <p:nvGrpSpPr>
+        <p:cNvPr id="1" name=""/>
+        <p:cNvGrpSpPr/>
+        <p:nvPr/>
+      </p:nvGrpSpPr>
+      <p:grpSpPr>
+        <a:xfrm>
+          <a:off x="0" y="0"/>
+          <a:ext cx="0" cy="0"/>
+          <a:chOff x="0" y="0"/>
+          <a:chExt cx="0" cy="0"/>
+        </a:xfrm>
+      </p:grpSpPr>
+      <p:sp>
+        <p:nvSpPr>
+          <p:cNvPr id="2" name="Slide Image Placeholder 1"/>
+          <p:cNvSpPr>
+            <a:spLocks noGrp="1" noRot="1" noChangeAspect="1"/>
+          </p:cNvSpPr>
+          <p:nvPr>
+            <p:ph type="sldImg"/>
+          </p:nvPr>
+        </p:nvSpPr>
+        <p:spPr/>
+      </p:sp>
+      <p:sp>
+        <p:nvSpPr>
+          <p:cNvPr id="3" name="Notes Placeholder 2"/>
+          <p:cNvSpPr>
+            <a:spLocks noGrp="1"/>
+          </p:cNvSpPr>
+          <p:nvPr>
+            <p:ph type="body" idx="1"/>
+          </p:nvPr>
+        </p:nvSpPr>
+        <p:spPr/>
+        <p:txBody>
+          <a:bodyPr/>
+          <a:lstStyle/>
+          <a:p>
+            <a:r>
+              <a:rPr lang="en-US" dirty="0"/>
+              <a:t/>
+            </a:r>
+            <a:endParaRPr lang="en-US" dirty="0"/>
+          </a:p>
+        </p:txBody>
+      </p:sp>
+      <p:sp>
+        <p:nvSpPr>
+          <p:cNvPr id="4" name="Slide Number Placeholder 3"/>
+          <p:cNvSpPr>
+            <a:spLocks noGrp="1"/>
+          </p:cNvSpPr>
+          <p:nvPr>
+            <p:ph type="sldNum" sz="quarter" idx="10"/>
+          </p:nvPr>
+        </p:nvSpPr>
+        <p:spPr/>
+        <p:txBody>
+          <a:bodyPr/>
+          <a:lstStyle/>
+          <a:p>
+            <a:fld id="{F7021451-1387-4CA6-816F-3879F97B5CBC}" type="slidenum">
+              <a:rPr lang="en-US"/>
+              <a:t>25</a:t>
             </a:fld>
             <a:endParaRPr lang="en-US"/>
           </a:p>
@@ -2765,7 +3210,7 @@
                 <a:ea typeface="Calibri" pitchFamily="34" charset="-122"/>
                 <a:cs typeface="Calibri" pitchFamily="34" charset="-120"/>
               </a:rPr>
-              <a:t>Blood Cultures, Sepsis &amp; Infection-Control Pearls</a:t>
+              <a:t>Blood Cultures, Sepsis &amp; Infection Control</a:t>
             </a:r>
             <a:endParaRPr lang="en-US" sz="4600" dirty="0"/>
           </a:p>
@@ -2804,7 +3249,7 @@
                 <a:ea typeface="Calibri" pitchFamily="34" charset="-122"/>
                 <a:cs typeface="Calibri" pitchFamily="34" charset="-120"/>
               </a:rPr>
-              <a:t>Contaminant or Pathogen? Volume, Sets, and Time-to-Positivity</a:t>
+              <a:t>Volume, Contamination, Time-to-Positivity, and the Laboratory’s Role in Safety</a:t>
             </a:r>
             <a:endParaRPr lang="en-US" sz="1900" dirty="0"/>
           </a:p>
@@ -2996,7 +3441,7 @@
                 <a:ea typeface="Calibri" pitchFamily="34" charset="-122"/>
                 <a:cs typeface="Calibri" pitchFamily="34" charset="-120"/>
               </a:rPr>
-              <a:t>MICROBIOLOGY   ·   INTERFACE</a:t>
+              <a:t>MICROBIOLOGY   ·   TIME-TO-POSITIVITY</a:t>
             </a:r>
             <a:endParaRPr lang="en-US" sz="1100" dirty="0"/>
           </a:p>
@@ -3035,7 +3480,7 @@
                 <a:ea typeface="Calibri" pitchFamily="34" charset="-122"/>
                 <a:cs typeface="Calibri" pitchFamily="34" charset="-120"/>
               </a:rPr>
-              <a:t>Sepsis Bundles &amp; Infection Control</a:t>
+              <a:t>Reading the Clock</a:t>
             </a:r>
             <a:endParaRPr lang="en-US" sz="3000" dirty="0"/>
           </a:p>
@@ -3103,7 +3548,7 @@
                 <a:ea typeface="Calibri" pitchFamily="34" charset="-122"/>
                 <a:cs typeface="Calibri" pitchFamily="34" charset="-120"/>
               </a:rPr>
-              <a:t>LABORATORY IN SEPSIS CARE</a:t>
+              <a:t>TIME-TO-POSITIVITY (TTP)</a:t>
             </a:r>
             <a:endParaRPr lang="en-US" sz="1200" dirty="0"/>
           </a:p>
@@ -3146,7 +3591,7 @@
                 <a:ea typeface="Calibri" pitchFamily="34" charset="-122"/>
                 <a:cs typeface="Calibri" pitchFamily="34" charset="-120"/>
               </a:rPr>
-              <a:t>Rapid Gram stain, ID, and resistance markers from positive bottles speed appropriate therapy.</a:t>
+              <a:t>Shorter TTP generally reflects higher organism burden / more virulent pathogens.</a:t>
             </a:r>
             <a:endParaRPr lang="en-US" sz="1250" dirty="0"/>
           </a:p>
@@ -3167,7 +3612,7 @@
                 <a:ea typeface="Calibri" pitchFamily="34" charset="-122"/>
                 <a:cs typeface="Calibri" pitchFamily="34" charset="-120"/>
               </a:rPr>
-              <a:t>Communicate critical positives immediately.</a:t>
+              <a:t>Very short TTP for S. aureus or GNR suggests significant bacteremia.</a:t>
             </a:r>
             <a:endParaRPr lang="en-US" sz="1250" dirty="0"/>
           </a:p>
@@ -3188,7 +3633,7 @@
                 <a:ea typeface="Calibri" pitchFamily="34" charset="-122"/>
                 <a:cs typeface="Calibri" pitchFamily="34" charset="-120"/>
               </a:rPr>
-              <a:t>Support source identification and de-escalation.</a:t>
+              <a:t>Late TTP with skin flora suggests contamination.</a:t>
             </a:r>
             <a:endParaRPr lang="en-US" sz="1250" dirty="0"/>
           </a:p>
@@ -3209,7 +3654,7 @@
                 <a:ea typeface="Calibri" pitchFamily="34" charset="-122"/>
                 <a:cs typeface="Calibri" pitchFamily="34" charset="-120"/>
               </a:rPr>
-              <a:t>Turnaround directly affects outcomes.</a:t>
+              <a:t>TTP complements, not replaces, clinical judgment.</a:t>
             </a:r>
             <a:endParaRPr lang="en-US" sz="1250" dirty="0"/>
           </a:p>
@@ -3232,7 +3677,7 @@
             </a:avLst>
           </a:prstGeom>
           <a:solidFill>
-            <a:srgbClr val="E8F2E9"/>
+            <a:srgbClr val="E9F3EA"/>
           </a:solidFill>
           <a:ln/>
           <a:effectLst>
@@ -3277,7 +3722,7 @@
                 <a:ea typeface="Calibri" pitchFamily="34" charset="-122"/>
                 <a:cs typeface="Calibri" pitchFamily="34" charset="-120"/>
               </a:rPr>
-              <a:t>EPIDEMIOLOGY &amp; PREVENTION</a:t>
+              <a:t>DIFFERENTIAL TTP (LINE INFECTION)</a:t>
             </a:r>
             <a:endParaRPr lang="en-US" sz="1200" dirty="0"/>
           </a:p>
@@ -3320,7 +3765,7 @@
                 <a:ea typeface="Calibri" pitchFamily="34" charset="-122"/>
                 <a:cs typeface="Calibri" pitchFamily="34" charset="-120"/>
               </a:rPr>
-              <a:t>Surveillance detects clusters and outbreaks (e.g., resistant organisms).</a:t>
+              <a:t>A line-drawn culture turning positive markedly earlier than a peripheral one supports a catheter-related bloodstream infection.</a:t>
             </a:r>
             <a:endParaRPr lang="en-US" sz="1250" dirty="0"/>
           </a:p>
@@ -3341,7 +3786,7 @@
                 <a:ea typeface="Calibri" pitchFamily="34" charset="-122"/>
                 <a:cs typeface="Calibri" pitchFamily="34" charset="-120"/>
               </a:rPr>
-              <a:t>Track central-line-associated bloodstream infections and contamination rates.</a:t>
+              <a:t>Paired line + peripheral draws are required.</a:t>
             </a:r>
             <a:endParaRPr lang="en-US" sz="1250" dirty="0"/>
           </a:p>
@@ -3362,7 +3807,7 @@
                 <a:ea typeface="Calibri" pitchFamily="34" charset="-122"/>
                 <a:cs typeface="Calibri" pitchFamily="34" charset="-120"/>
               </a:rPr>
-              <a:t>Partner with infection prevention on isolation and reporting.</a:t>
+              <a:t>Supports line-removal decisions.</a:t>
             </a:r>
             <a:endParaRPr lang="en-US" sz="1250" dirty="0"/>
           </a:p>
@@ -3383,7 +3828,7 @@
                 <a:ea typeface="Calibri" pitchFamily="34" charset="-122"/>
                 <a:cs typeface="Calibri" pitchFamily="34" charset="-120"/>
               </a:rPr>
-              <a:t>Notifiable organisms trigger public-health reporting.</a:t>
+              <a:t>Interpret with the clinical team.</a:t>
             </a:r>
             <a:endParaRPr lang="en-US" sz="1250" dirty="0"/>
           </a:p>
@@ -3506,6 +3951,570 @@
 <file path=ppt/slides/slide11.xml><?xml version="1.0" encoding="utf-8"?>
 <p:sld xmlns:a="http://schemas.openxmlformats.org/drawingml/2006/main" xmlns:r="http://schemas.openxmlformats.org/officeDocument/2006/relationships" xmlns:p="http://schemas.openxmlformats.org/presentationml/2006/main">
   <p:cSld name="Slide 11">
+    <p:bg>
+      <p:bgPr>
+        <a:solidFill>
+          <a:srgbClr val="FFFFFF"/>
+        </a:solidFill>
+      </p:bgPr>
+    </p:bg>
+    <p:spTree>
+      <p:nvGrpSpPr>
+        <p:cNvPr id="1" name=""/>
+        <p:cNvGrpSpPr/>
+        <p:nvPr/>
+      </p:nvGrpSpPr>
+      <p:grpSpPr>
+        <a:xfrm>
+          <a:off x="0" y="0"/>
+          <a:ext cx="0" cy="0"/>
+          <a:chOff x="0" y="0"/>
+          <a:chExt cx="0" cy="0"/>
+        </a:xfrm>
+      </p:grpSpPr>
+      <p:sp>
+        <p:nvSpPr>
+          <p:cNvPr id="2" name="Text 0"/>
+          <p:cNvSpPr/>
+          <p:nvPr/>
+        </p:nvSpPr>
+        <p:spPr>
+          <a:xfrm>
+            <a:off x="566928" y="329184"/>
+            <a:ext cx="10515600" cy="310896"/>
+          </a:xfrm>
+          <a:prstGeom prst="rect">
+            <a:avLst/>
+          </a:prstGeom>
+          <a:noFill/>
+          <a:ln/>
+        </p:spPr>
+        <p:txBody>
+          <a:bodyPr wrap="square" lIns="0" tIns="0" rIns="0" bIns="0" rtlCol="0" anchor="ctr"/>
+          <a:lstStyle/>
+          <a:p>
+            <a:pPr algn="l" indent="0" marL="0">
+              <a:buNone/>
+            </a:pPr>
+            <a:r>
+              <a:rPr lang="en-US" sz="1100" b="1" spc="150" kern="0" dirty="0">
+                <a:solidFill>
+                  <a:srgbClr val="2E7D32"/>
+                </a:solidFill>
+                <a:latin typeface="Calibri" pitchFamily="34" charset="0"/>
+                <a:ea typeface="Calibri" pitchFamily="34" charset="-122"/>
+                <a:cs typeface="Calibri" pitchFamily="34" charset="-120"/>
+              </a:rPr>
+              <a:t>MICROBIOLOGY   ·   RAPID ID</a:t>
+            </a:r>
+            <a:endParaRPr lang="en-US" sz="1100" dirty="0"/>
+          </a:p>
+        </p:txBody>
+      </p:sp>
+      <p:sp>
+        <p:nvSpPr>
+          <p:cNvPr id="3" name="Text 1"/>
+          <p:cNvSpPr/>
+          <p:nvPr/>
+        </p:nvSpPr>
+        <p:spPr>
+          <a:xfrm>
+            <a:off x="566928" y="713232"/>
+            <a:ext cx="11064240" cy="749808"/>
+          </a:xfrm>
+          <a:prstGeom prst="rect">
+            <a:avLst/>
+          </a:prstGeom>
+          <a:noFill/>
+          <a:ln/>
+        </p:spPr>
+        <p:txBody>
+          <a:bodyPr wrap="square" lIns="0" tIns="0" rIns="0" bIns="0" rtlCol="0" anchor="ctr"/>
+          <a:lstStyle/>
+          <a:p>
+            <a:pPr algn="l" indent="0" marL="0">
+              <a:buNone/>
+            </a:pPr>
+            <a:r>
+              <a:rPr lang="en-US" sz="3000" b="1" dirty="0">
+                <a:solidFill>
+                  <a:srgbClr val="0E3A5F"/>
+                </a:solidFill>
+                <a:latin typeface="Calibri" pitchFamily="34" charset="0"/>
+                <a:ea typeface="Calibri" pitchFamily="34" charset="-122"/>
+                <a:cs typeface="Calibri" pitchFamily="34" charset="-120"/>
+              </a:rPr>
+              <a:t>From Positive Bottle to Action</a:t>
+            </a:r>
+            <a:endParaRPr lang="en-US" sz="3000" dirty="0"/>
+          </a:p>
+        </p:txBody>
+      </p:sp>
+      <p:sp>
+        <p:nvSpPr>
+          <p:cNvPr id="4" name="Shape 2"/>
+          <p:cNvSpPr/>
+          <p:nvPr/>
+        </p:nvSpPr>
+        <p:spPr>
+          <a:xfrm>
+            <a:off x="566928" y="1517904"/>
+            <a:ext cx="5346040" cy="4114800"/>
+          </a:xfrm>
+          <a:prstGeom prst="roundRect">
+            <a:avLst>
+              <a:gd name="adj" fmla="val 2000"/>
+            </a:avLst>
+          </a:prstGeom>
+          <a:solidFill>
+            <a:srgbClr val="E8F2E9"/>
+          </a:solidFill>
+          <a:ln/>
+          <a:effectLst>
+            <a:outerShdw sx="100000" sy="100000" kx="0" ky="0" algn="bl" rotWithShape="0" blurRad="88900" dist="25400" dir="5400000">
+              <a:srgbClr val="22303C">
+                <a:alpha val="12000"/>
+              </a:srgbClr>
+            </a:outerShdw>
+          </a:effectLst>
+        </p:spPr>
+      </p:sp>
+      <p:sp>
+        <p:nvSpPr>
+          <p:cNvPr id="5" name="Text 3"/>
+          <p:cNvSpPr/>
+          <p:nvPr/>
+        </p:nvSpPr>
+        <p:spPr>
+          <a:xfrm>
+            <a:off x="804672" y="1682496"/>
+            <a:ext cx="4888840" cy="274320"/>
+          </a:xfrm>
+          <a:prstGeom prst="rect">
+            <a:avLst/>
+          </a:prstGeom>
+          <a:noFill/>
+          <a:ln/>
+        </p:spPr>
+        <p:txBody>
+          <a:bodyPr wrap="square" lIns="0" tIns="0" rIns="0" bIns="0" rtlCol="0" anchor="ctr"/>
+          <a:lstStyle/>
+          <a:p>
+            <a:pPr indent="0" marL="0">
+              <a:buNone/>
+            </a:pPr>
+            <a:r>
+              <a:rPr lang="en-US" sz="1200" b="1" spc="100" kern="0" dirty="0">
+                <a:solidFill>
+                  <a:srgbClr val="1F5722"/>
+                </a:solidFill>
+                <a:latin typeface="Calibri" pitchFamily="34" charset="0"/>
+                <a:ea typeface="Calibri" pitchFamily="34" charset="-122"/>
+                <a:cs typeface="Calibri" pitchFamily="34" charset="-120"/>
+              </a:rPr>
+              <a:t>RAPID IDENTIFICATION</a:t>
+            </a:r>
+            <a:endParaRPr lang="en-US" sz="1200" dirty="0"/>
+          </a:p>
+        </p:txBody>
+      </p:sp>
+      <p:sp>
+        <p:nvSpPr>
+          <p:cNvPr id="6" name="Text 4"/>
+          <p:cNvSpPr/>
+          <p:nvPr/>
+        </p:nvSpPr>
+        <p:spPr>
+          <a:xfrm>
+            <a:off x="804672" y="2029968"/>
+            <a:ext cx="4870552" cy="3474720"/>
+          </a:xfrm>
+          <a:prstGeom prst="rect">
+            <a:avLst/>
+          </a:prstGeom>
+          <a:noFill/>
+          <a:ln/>
+        </p:spPr>
+        <p:txBody>
+          <a:bodyPr wrap="square" lIns="0" tIns="0" rIns="0" bIns="0" rtlCol="0" anchor="t"/>
+          <a:lstStyle/>
+          <a:p>
+            <a:pPr algn="l" marL="177800" indent="-177800">
+              <a:spcAft>
+                <a:spcPts val="900"/>
+              </a:spcAft>
+              <a:buSzPct val="100000"/>
+              <a:buChar char="•"/>
+            </a:pPr>
+            <a:r>
+              <a:rPr lang="en-US" sz="1250" b="1" dirty="0">
+                <a:solidFill>
+                  <a:srgbClr val="1B2A38"/>
+                </a:solidFill>
+                <a:latin typeface="Calibri" pitchFamily="34" charset="0"/>
+                <a:ea typeface="Calibri" pitchFamily="34" charset="-122"/>
+                <a:cs typeface="Calibri" pitchFamily="34" charset="-120"/>
+              </a:rPr>
+              <a:t>Gram stain from the positive bottle gives an immediate, callable result.</a:t>
+            </a:r>
+            <a:endParaRPr lang="en-US" sz="1250" dirty="0"/>
+          </a:p>
+          <a:p>
+            <a:pPr algn="l" marL="177800" indent="-177800">
+              <a:spcAft>
+                <a:spcPts val="900"/>
+              </a:spcAft>
+              <a:buSzPct val="100000"/>
+              <a:buChar char="•"/>
+            </a:pPr>
+            <a:r>
+              <a:rPr lang="en-US" sz="1250" dirty="0">
+                <a:solidFill>
+                  <a:srgbClr val="33444F"/>
+                </a:solidFill>
+                <a:latin typeface="Calibri" pitchFamily="34" charset="0"/>
+                <a:ea typeface="Calibri" pitchFamily="34" charset="-122"/>
+                <a:cs typeface="Calibri" pitchFamily="34" charset="-120"/>
+              </a:rPr>
+              <a:t>Rapid molecular/MALDI panels report organism + key resistance genes quickly.</a:t>
+            </a:r>
+            <a:endParaRPr lang="en-US" sz="1250" dirty="0"/>
+          </a:p>
+          <a:p>
+            <a:pPr algn="l" marL="177800" indent="-177800">
+              <a:spcAft>
+                <a:spcPts val="900"/>
+              </a:spcAft>
+              <a:buSzPct val="100000"/>
+              <a:buChar char="•"/>
+            </a:pPr>
+            <a:r>
+              <a:rPr lang="en-US" sz="1250" dirty="0">
+                <a:solidFill>
+                  <a:srgbClr val="33444F"/>
+                </a:solidFill>
+                <a:latin typeface="Calibri" pitchFamily="34" charset="0"/>
+                <a:ea typeface="Calibri" pitchFamily="34" charset="-122"/>
+                <a:cs typeface="Calibri" pitchFamily="34" charset="-120"/>
+              </a:rPr>
+              <a:t>Early ID enables prompt targeted therapy.</a:t>
+            </a:r>
+            <a:endParaRPr lang="en-US" sz="1250" dirty="0"/>
+          </a:p>
+          <a:p>
+            <a:pPr algn="l" marL="177800" indent="-177800">
+              <a:spcAft>
+                <a:spcPts val="900"/>
+              </a:spcAft>
+              <a:buSzPct val="100000"/>
+              <a:buChar char="•"/>
+            </a:pPr>
+            <a:r>
+              <a:rPr lang="en-US" sz="1250" dirty="0">
+                <a:solidFill>
+                  <a:srgbClr val="33444F"/>
+                </a:solidFill>
+                <a:latin typeface="Calibri" pitchFamily="34" charset="0"/>
+                <a:ea typeface="Calibri" pitchFamily="34" charset="-122"/>
+                <a:cs typeface="Calibri" pitchFamily="34" charset="-120"/>
+              </a:rPr>
+              <a:t>Communicate critical results urgently.</a:t>
+            </a:r>
+            <a:endParaRPr lang="en-US" sz="1250" dirty="0"/>
+          </a:p>
+        </p:txBody>
+      </p:sp>
+      <p:sp>
+        <p:nvSpPr>
+          <p:cNvPr id="7" name="Shape 5"/>
+          <p:cNvSpPr/>
+          <p:nvPr/>
+        </p:nvSpPr>
+        <p:spPr>
+          <a:xfrm>
+            <a:off x="6278728" y="1517904"/>
+            <a:ext cx="5346040" cy="4114800"/>
+          </a:xfrm>
+          <a:prstGeom prst="roundRect">
+            <a:avLst>
+              <a:gd name="adj" fmla="val 2000"/>
+            </a:avLst>
+          </a:prstGeom>
+          <a:solidFill>
+            <a:srgbClr val="E9F3EA"/>
+          </a:solidFill>
+          <a:ln/>
+          <a:effectLst>
+            <a:outerShdw sx="100000" sy="100000" kx="0" ky="0" algn="bl" rotWithShape="0" blurRad="88900" dist="25400" dir="5400000">
+              <a:srgbClr val="22303C">
+                <a:alpha val="12000"/>
+              </a:srgbClr>
+            </a:outerShdw>
+          </a:effectLst>
+        </p:spPr>
+      </p:sp>
+      <p:sp>
+        <p:nvSpPr>
+          <p:cNvPr id="8" name="Text 6"/>
+          <p:cNvSpPr/>
+          <p:nvPr/>
+        </p:nvSpPr>
+        <p:spPr>
+          <a:xfrm>
+            <a:off x="6516472" y="1682496"/>
+            <a:ext cx="4888840" cy="274320"/>
+          </a:xfrm>
+          <a:prstGeom prst="rect">
+            <a:avLst/>
+          </a:prstGeom>
+          <a:noFill/>
+          <a:ln/>
+        </p:spPr>
+        <p:txBody>
+          <a:bodyPr wrap="square" lIns="0" tIns="0" rIns="0" bIns="0" rtlCol="0" anchor="ctr"/>
+          <a:lstStyle/>
+          <a:p>
+            <a:pPr indent="0" marL="0">
+              <a:buNone/>
+            </a:pPr>
+            <a:r>
+              <a:rPr lang="en-US" sz="1200" b="1" spc="100" kern="0" dirty="0">
+                <a:solidFill>
+                  <a:srgbClr val="1F5722"/>
+                </a:solidFill>
+                <a:latin typeface="Calibri" pitchFamily="34" charset="0"/>
+                <a:ea typeface="Calibri" pitchFamily="34" charset="-122"/>
+                <a:cs typeface="Calibri" pitchFamily="34" charset="-120"/>
+              </a:rPr>
+              <a:t>THEN CONFIRM</a:t>
+            </a:r>
+            <a:endParaRPr lang="en-US" sz="1200" dirty="0"/>
+          </a:p>
+        </p:txBody>
+      </p:sp>
+      <p:sp>
+        <p:nvSpPr>
+          <p:cNvPr id="9" name="Text 7"/>
+          <p:cNvSpPr/>
+          <p:nvPr/>
+        </p:nvSpPr>
+        <p:spPr>
+          <a:xfrm>
+            <a:off x="6516472" y="2029968"/>
+            <a:ext cx="4870552" cy="3474720"/>
+          </a:xfrm>
+          <a:prstGeom prst="rect">
+            <a:avLst/>
+          </a:prstGeom>
+          <a:noFill/>
+          <a:ln/>
+        </p:spPr>
+        <p:txBody>
+          <a:bodyPr wrap="square" lIns="0" tIns="0" rIns="0" bIns="0" rtlCol="0" anchor="t"/>
+          <a:lstStyle/>
+          <a:p>
+            <a:pPr algn="l" marL="177800" indent="-177800">
+              <a:spcAft>
+                <a:spcPts val="900"/>
+              </a:spcAft>
+              <a:buSzPct val="100000"/>
+              <a:buChar char="•"/>
+            </a:pPr>
+            <a:r>
+              <a:rPr lang="en-US" sz="1250" b="1" dirty="0">
+                <a:solidFill>
+                  <a:srgbClr val="1B2A38"/>
+                </a:solidFill>
+                <a:latin typeface="Calibri" pitchFamily="34" charset="0"/>
+                <a:ea typeface="Calibri" pitchFamily="34" charset="-122"/>
+                <a:cs typeface="Calibri" pitchFamily="34" charset="-120"/>
+              </a:rPr>
+              <a:t>Subculture and AST confirm identity and full susceptibility.</a:t>
+            </a:r>
+            <a:endParaRPr lang="en-US" sz="1250" dirty="0"/>
+          </a:p>
+          <a:p>
+            <a:pPr algn="l" marL="177800" indent="-177800">
+              <a:spcAft>
+                <a:spcPts val="900"/>
+              </a:spcAft>
+              <a:buSzPct val="100000"/>
+              <a:buChar char="•"/>
+            </a:pPr>
+            <a:r>
+              <a:rPr lang="en-US" sz="1250" dirty="0">
+                <a:solidFill>
+                  <a:srgbClr val="33444F"/>
+                </a:solidFill>
+                <a:latin typeface="Calibri" pitchFamily="34" charset="0"/>
+                <a:ea typeface="Calibri" pitchFamily="34" charset="-122"/>
+                <a:cs typeface="Calibri" pitchFamily="34" charset="-120"/>
+              </a:rPr>
+              <a:t>Genotypic markers may not capture all resistance.</a:t>
+            </a:r>
+            <a:endParaRPr lang="en-US" sz="1250" dirty="0"/>
+          </a:p>
+          <a:p>
+            <a:pPr algn="l" marL="177800" indent="-177800">
+              <a:spcAft>
+                <a:spcPts val="900"/>
+              </a:spcAft>
+              <a:buSzPct val="100000"/>
+              <a:buChar char="•"/>
+            </a:pPr>
+            <a:r>
+              <a:rPr lang="en-US" sz="1250" dirty="0">
+                <a:solidFill>
+                  <a:srgbClr val="33444F"/>
+                </a:solidFill>
+                <a:latin typeface="Calibri" pitchFamily="34" charset="0"/>
+                <a:ea typeface="Calibri" pitchFamily="34" charset="-122"/>
+                <a:cs typeface="Calibri" pitchFamily="34" charset="-120"/>
+              </a:rPr>
+              <a:t>Document and integrate with stewardship.</a:t>
+            </a:r>
+            <a:endParaRPr lang="en-US" sz="1250" dirty="0"/>
+          </a:p>
+          <a:p>
+            <a:pPr algn="l" marL="177800" indent="-177800">
+              <a:spcAft>
+                <a:spcPts val="900"/>
+              </a:spcAft>
+              <a:buSzPct val="100000"/>
+              <a:buChar char="•"/>
+            </a:pPr>
+            <a:r>
+              <a:rPr lang="en-US" sz="1250" dirty="0">
+                <a:solidFill>
+                  <a:srgbClr val="33444F"/>
+                </a:solidFill>
+                <a:latin typeface="Calibri" pitchFamily="34" charset="0"/>
+                <a:ea typeface="Calibri" pitchFamily="34" charset="-122"/>
+                <a:cs typeface="Calibri" pitchFamily="34" charset="-120"/>
+              </a:rPr>
+              <a:t>Follow-up cultures confirm clearance for S. aureus/Candida.</a:t>
+            </a:r>
+            <a:endParaRPr lang="en-US" sz="1250" dirty="0"/>
+          </a:p>
+        </p:txBody>
+      </p:sp>
+      <p:sp>
+        <p:nvSpPr>
+          <p:cNvPr id="10" name="Text 8"/>
+          <p:cNvSpPr/>
+          <p:nvPr/>
+        </p:nvSpPr>
+        <p:spPr>
+          <a:xfrm>
+            <a:off x="566928" y="6473952"/>
+            <a:ext cx="7772400" cy="274320"/>
+          </a:xfrm>
+          <a:prstGeom prst="rect">
+            <a:avLst/>
+          </a:prstGeom>
+          <a:noFill/>
+          <a:ln/>
+        </p:spPr>
+        <p:txBody>
+          <a:bodyPr wrap="square" lIns="0" tIns="0" rIns="0" bIns="0" rtlCol="0" anchor="ctr"/>
+          <a:lstStyle/>
+          <a:p>
+            <a:pPr algn="l" indent="0" marL="0">
+              <a:buNone/>
+            </a:pPr>
+            <a:r>
+              <a:rPr lang="en-US" sz="850" dirty="0">
+                <a:solidFill>
+                  <a:srgbClr val="9AA8B4"/>
+                </a:solidFill>
+                <a:latin typeface="Calibri" pitchFamily="34" charset="0"/>
+                <a:ea typeface="Calibri" pitchFamily="34" charset="-122"/>
+                <a:cs typeface="Calibri" pitchFamily="34" charset="-120"/>
+              </a:rPr>
+              <a:t>Makassed General Hospital  ·  Department of Laboratory Medicine</a:t>
+            </a:r>
+            <a:endParaRPr lang="en-US" sz="850" dirty="0"/>
+          </a:p>
+        </p:txBody>
+      </p:sp>
+      <p:sp>
+        <p:nvSpPr>
+          <p:cNvPr id="11" name="Text 9"/>
+          <p:cNvSpPr/>
+          <p:nvPr/>
+        </p:nvSpPr>
+        <p:spPr>
+          <a:xfrm>
+            <a:off x="9814255" y="6473952"/>
+            <a:ext cx="1828800" cy="274320"/>
+          </a:xfrm>
+          <a:prstGeom prst="rect">
+            <a:avLst/>
+          </a:prstGeom>
+          <a:noFill/>
+          <a:ln/>
+        </p:spPr>
+        <p:txBody>
+          <a:bodyPr wrap="square" lIns="0" tIns="0" rIns="0" bIns="0" rtlCol="0" anchor="ctr"/>
+          <a:lstStyle/>
+          <a:p>
+            <a:pPr algn="r" indent="0" marL="0">
+              <a:buNone/>
+            </a:pPr>
+            <a:r>
+              <a:rPr lang="en-US" sz="850" dirty="0">
+                <a:solidFill>
+                  <a:srgbClr val="9AA8B4"/>
+                </a:solidFill>
+                <a:latin typeface="Calibri" pitchFamily="34" charset="0"/>
+                <a:ea typeface="Calibri" pitchFamily="34" charset="-122"/>
+                <a:cs typeface="Calibri" pitchFamily="34" charset="-120"/>
+              </a:rPr>
+              <a:t>CP Lecture Series</a:t>
+            </a:r>
+            <a:pPr algn="r" indent="0" marL="0">
+              <a:buNone/>
+            </a:pPr>
+            <a:r>
+              <a:rPr lang="en-US" sz="850" dirty="0">
+                <a:solidFill>
+                  <a:srgbClr val="DCE4EC"/>
+                </a:solidFill>
+                <a:latin typeface="Calibri" pitchFamily="34" charset="0"/>
+                <a:ea typeface="Calibri" pitchFamily="34" charset="-122"/>
+                <a:cs typeface="Calibri" pitchFamily="34" charset="-120"/>
+              </a:rPr>
+              <a:t>   ·   </a:t>
+            </a:r>
+            <a:pPr algn="r" indent="0" marL="0">
+              <a:buNone/>
+            </a:pPr>
+            <a:r>
+              <a:rPr lang="en-US" sz="850" b="1" dirty="0">
+                <a:solidFill>
+                  <a:srgbClr val="2E7D32"/>
+                </a:solidFill>
+                <a:latin typeface="Calibri" pitchFamily="34" charset="0"/>
+                <a:ea typeface="Calibri" pitchFamily="34" charset="-122"/>
+                <a:cs typeface="Calibri" pitchFamily="34" charset="-120"/>
+              </a:rPr>
+              <a:t>9</a:t>
+            </a:r>
+            <a:endParaRPr lang="en-US" sz="850" dirty="0"/>
+          </a:p>
+        </p:txBody>
+      </p:sp>
+    </p:spTree>
+  </p:cSld>
+  <p:clrMapOvr>
+    <a:masterClrMapping/>
+  </p:clrMapOvr>
+</p:sld>
+</file>
+
+<file path=ppt/slides/slide12.xml><?xml version="1.0" encoding="utf-8"?>
+<p:sld xmlns:a="http://schemas.openxmlformats.org/drawingml/2006/main" xmlns:r="http://schemas.openxmlformats.org/officeDocument/2006/relationships" xmlns:p="http://schemas.openxmlformats.org/presentationml/2006/main">
+  <p:cSld name="Slide 12">
     <p:bg>
       <p:bgPr>
         <a:solidFill>
@@ -3682,442 +4691,9 @@
                 <a:ea typeface="Calibri" pitchFamily="34" charset="-122"/>
                 <a:cs typeface="Calibri" pitchFamily="34" charset="-120"/>
               </a:rPr>
-              <a:t>Cases &amp; Board Review</a:t>
+              <a:t>Infection Control, Cases &amp; Board</a:t>
             </a:r>
             <a:endParaRPr lang="en-US" sz="3800" dirty="0"/>
-          </a:p>
-        </p:txBody>
-      </p:sp>
-    </p:spTree>
-  </p:cSld>
-  <p:clrMapOvr>
-    <a:masterClrMapping/>
-  </p:clrMapOvr>
-</p:sld>
-</file>
-
-<file path=ppt/slides/slide12.xml><?xml version="1.0" encoding="utf-8"?>
-<p:sld xmlns:a="http://schemas.openxmlformats.org/drawingml/2006/main" xmlns:r="http://schemas.openxmlformats.org/officeDocument/2006/relationships" xmlns:p="http://schemas.openxmlformats.org/presentationml/2006/main">
-  <p:cSld name="Slide 12">
-    <p:bg>
-      <p:bgPr>
-        <a:solidFill>
-          <a:srgbClr val="FFFFFF"/>
-        </a:solidFill>
-      </p:bgPr>
-    </p:bg>
-    <p:spTree>
-      <p:nvGrpSpPr>
-        <p:cNvPr id="1" name=""/>
-        <p:cNvGrpSpPr/>
-        <p:nvPr/>
-      </p:nvGrpSpPr>
-      <p:grpSpPr>
-        <a:xfrm>
-          <a:off x="0" y="0"/>
-          <a:ext cx="0" cy="0"/>
-          <a:chOff x="0" y="0"/>
-          <a:chExt cx="0" cy="0"/>
-        </a:xfrm>
-      </p:grpSpPr>
-      <p:sp>
-        <p:nvSpPr>
-          <p:cNvPr id="2" name="Text 0"/>
-          <p:cNvSpPr/>
-          <p:nvPr/>
-        </p:nvSpPr>
-        <p:spPr>
-          <a:xfrm>
-            <a:off x="566928" y="329184"/>
-            <a:ext cx="10515600" cy="310896"/>
-          </a:xfrm>
-          <a:prstGeom prst="rect">
-            <a:avLst/>
-          </a:prstGeom>
-          <a:noFill/>
-          <a:ln/>
-        </p:spPr>
-        <p:txBody>
-          <a:bodyPr wrap="square" lIns="0" tIns="0" rIns="0" bIns="0" rtlCol="0" anchor="ctr"/>
-          <a:lstStyle/>
-          <a:p>
-            <a:pPr algn="l" indent="0" marL="0">
-              <a:buNone/>
-            </a:pPr>
-            <a:r>
-              <a:rPr lang="en-US" sz="1100" b="1" spc="150" kern="0" dirty="0">
-                <a:solidFill>
-                  <a:srgbClr val="2E7D32"/>
-                </a:solidFill>
-                <a:latin typeface="Calibri" pitchFamily="34" charset="0"/>
-                <a:ea typeface="Calibri" pitchFamily="34" charset="-122"/>
-                <a:cs typeface="Calibri" pitchFamily="34" charset="-120"/>
-              </a:rPr>
-              <a:t>MICROBIOLOGY   ·   CASE 1</a:t>
-            </a:r>
-            <a:endParaRPr lang="en-US" sz="1100" dirty="0"/>
-          </a:p>
-        </p:txBody>
-      </p:sp>
-      <p:sp>
-        <p:nvSpPr>
-          <p:cNvPr id="3" name="Text 1"/>
-          <p:cNvSpPr/>
-          <p:nvPr/>
-        </p:nvSpPr>
-        <p:spPr>
-          <a:xfrm>
-            <a:off x="566928" y="713232"/>
-            <a:ext cx="11064240" cy="749808"/>
-          </a:xfrm>
-          <a:prstGeom prst="rect">
-            <a:avLst/>
-          </a:prstGeom>
-          <a:noFill/>
-          <a:ln/>
-        </p:spPr>
-        <p:txBody>
-          <a:bodyPr wrap="square" lIns="0" tIns="0" rIns="0" bIns="0" rtlCol="0" anchor="ctr"/>
-          <a:lstStyle/>
-          <a:p>
-            <a:pPr algn="l" indent="0" marL="0">
-              <a:buNone/>
-            </a:pPr>
-            <a:r>
-              <a:rPr lang="en-US" sz="3000" b="1" dirty="0">
-                <a:solidFill>
-                  <a:srgbClr val="0E3A5F"/>
-                </a:solidFill>
-                <a:latin typeface="Calibri" pitchFamily="34" charset="0"/>
-                <a:ea typeface="Calibri" pitchFamily="34" charset="-122"/>
-                <a:cs typeface="Calibri" pitchFamily="34" charset="-120"/>
-              </a:rPr>
-              <a:t>Case 1</a:t>
-            </a:r>
-            <a:endParaRPr lang="en-US" sz="3000" dirty="0"/>
-          </a:p>
-        </p:txBody>
-      </p:sp>
-      <p:sp>
-        <p:nvSpPr>
-          <p:cNvPr id="4" name="Shape 2"/>
-          <p:cNvSpPr/>
-          <p:nvPr/>
-        </p:nvSpPr>
-        <p:spPr>
-          <a:xfrm>
-            <a:off x="566928" y="1517904"/>
-            <a:ext cx="11057839" cy="2788920"/>
-          </a:xfrm>
-          <a:prstGeom prst="roundRect">
-            <a:avLst>
-              <a:gd name="adj" fmla="val 2951"/>
-            </a:avLst>
-          </a:prstGeom>
-          <a:solidFill>
-            <a:srgbClr val="E8F2E9"/>
-          </a:solidFill>
-          <a:ln/>
-          <a:effectLst>
-            <a:outerShdw sx="100000" sy="100000" kx="0" ky="0" algn="bl" rotWithShape="0" blurRad="88900" dist="25400" dir="5400000">
-              <a:srgbClr val="22303C">
-                <a:alpha val="12000"/>
-              </a:srgbClr>
-            </a:outerShdw>
-          </a:effectLst>
-        </p:spPr>
-      </p:sp>
-      <p:sp>
-        <p:nvSpPr>
-          <p:cNvPr id="5" name="Text 3"/>
-          <p:cNvSpPr/>
-          <p:nvPr/>
-        </p:nvSpPr>
-        <p:spPr>
-          <a:xfrm>
-            <a:off x="841248" y="1700784"/>
-            <a:ext cx="5486400" cy="292608"/>
-          </a:xfrm>
-          <a:prstGeom prst="rect">
-            <a:avLst/>
-          </a:prstGeom>
-          <a:noFill/>
-          <a:ln/>
-        </p:spPr>
-        <p:txBody>
-          <a:bodyPr wrap="square" lIns="0" tIns="0" rIns="0" bIns="0" rtlCol="0" anchor="ctr"/>
-          <a:lstStyle/>
-          <a:p>
-            <a:pPr indent="0" marL="0">
-              <a:buNone/>
-            </a:pPr>
-            <a:r>
-              <a:rPr lang="en-US" sz="1100" b="1" spc="150" kern="0" dirty="0">
-                <a:solidFill>
-                  <a:srgbClr val="2E7D32"/>
-                </a:solidFill>
-                <a:latin typeface="Calibri" pitchFamily="34" charset="0"/>
-                <a:ea typeface="Calibri" pitchFamily="34" charset="-122"/>
-                <a:cs typeface="Calibri" pitchFamily="34" charset="-120"/>
-              </a:rPr>
-              <a:t>CLINICAL VIGNETTE</a:t>
-            </a:r>
-            <a:endParaRPr lang="en-US" sz="1100" dirty="0"/>
-          </a:p>
-        </p:txBody>
-      </p:sp>
-      <p:sp>
-        <p:nvSpPr>
-          <p:cNvPr id="6" name="Text 4"/>
-          <p:cNvSpPr/>
-          <p:nvPr/>
-        </p:nvSpPr>
-        <p:spPr>
-          <a:xfrm>
-            <a:off x="841248" y="2029968"/>
-            <a:ext cx="10509199" cy="2148840"/>
-          </a:xfrm>
-          <a:prstGeom prst="rect">
-            <a:avLst/>
-          </a:prstGeom>
-          <a:noFill/>
-          <a:ln/>
-        </p:spPr>
-        <p:txBody>
-          <a:bodyPr wrap="square" lIns="0" tIns="0" rIns="0" bIns="0" rtlCol="0" anchor="t"/>
-          <a:lstStyle/>
-          <a:p>
-            <a:pPr algn="l" indent="0" marL="0">
-              <a:lnSpc>
-                <a:spcPct val="108000"/>
-              </a:lnSpc>
-              <a:buNone/>
-            </a:pPr>
-            <a:r>
-              <a:rPr lang="en-US" sz="1450" dirty="0">
-                <a:solidFill>
-                  <a:srgbClr val="33444F"/>
-                </a:solidFill>
-                <a:latin typeface="Calibri" pitchFamily="34" charset="0"/>
-                <a:ea typeface="Calibri" pitchFamily="34" charset="-122"/>
-                <a:cs typeface="Calibri" pitchFamily="34" charset="-120"/>
-              </a:rPr>
-              <a:t>One of four blood-culture bottles (a single bottle from one set) grows coagulase-negative staphylococcus after 4 days, in a well patient with no central line.</a:t>
-            </a:r>
-            <a:endParaRPr lang="en-US" sz="1450" dirty="0"/>
-          </a:p>
-        </p:txBody>
-      </p:sp>
-      <p:sp>
-        <p:nvSpPr>
-          <p:cNvPr id="7" name="Shape 5"/>
-          <p:cNvSpPr/>
-          <p:nvPr/>
-        </p:nvSpPr>
-        <p:spPr>
-          <a:xfrm>
-            <a:off x="566928" y="4553712"/>
-            <a:ext cx="11057839" cy="1325880"/>
-          </a:xfrm>
-          <a:prstGeom prst="roundRect">
-            <a:avLst>
-              <a:gd name="adj" fmla="val 6207"/>
-            </a:avLst>
-          </a:prstGeom>
-          <a:solidFill>
-            <a:srgbClr val="0E3A5F"/>
-          </a:solidFill>
-          <a:ln/>
-          <a:effectLst>
-            <a:outerShdw sx="100000" sy="100000" kx="0" ky="0" algn="bl" rotWithShape="0" blurRad="88900" dist="25400" dir="5400000">
-              <a:srgbClr val="22303C">
-                <a:alpha val="12000"/>
-              </a:srgbClr>
-            </a:outerShdw>
-          </a:effectLst>
-        </p:spPr>
-      </p:sp>
-      <p:sp>
-        <p:nvSpPr>
-          <p:cNvPr id="8" name="Text 6"/>
-          <p:cNvSpPr/>
-          <p:nvPr/>
-        </p:nvSpPr>
-        <p:spPr>
-          <a:xfrm>
-            <a:off x="822960" y="4681728"/>
-            <a:ext cx="640080" cy="960120"/>
-          </a:xfrm>
-          <a:prstGeom prst="rect">
-            <a:avLst/>
-          </a:prstGeom>
-          <a:noFill/>
-          <a:ln/>
-        </p:spPr>
-        <p:txBody>
-          <a:bodyPr wrap="square" lIns="0" tIns="0" rIns="0" bIns="0" rtlCol="0" anchor="ctr"/>
-          <a:lstStyle/>
-          <a:p>
-            <a:pPr algn="ctr" indent="0" marL="0">
-              <a:buNone/>
-            </a:pPr>
-            <a:r>
-              <a:rPr lang="en-US" sz="4000" b="1" dirty="0">
-                <a:solidFill>
-                  <a:srgbClr val="2E7D32"/>
-                </a:solidFill>
-                <a:latin typeface="Calibri" pitchFamily="34" charset="0"/>
-                <a:ea typeface="Calibri" pitchFamily="34" charset="-122"/>
-                <a:cs typeface="Calibri" pitchFamily="34" charset="-120"/>
-              </a:rPr>
-              <a:t>?</a:t>
-            </a:r>
-            <a:endParaRPr lang="en-US" sz="4000" dirty="0"/>
-          </a:p>
-        </p:txBody>
-      </p:sp>
-      <p:sp>
-        <p:nvSpPr>
-          <p:cNvPr id="9" name="Text 7"/>
-          <p:cNvSpPr/>
-          <p:nvPr/>
-        </p:nvSpPr>
-        <p:spPr>
-          <a:xfrm>
-            <a:off x="1618488" y="4553712"/>
-            <a:ext cx="9686239" cy="1325880"/>
-          </a:xfrm>
-          <a:prstGeom prst="rect">
-            <a:avLst/>
-          </a:prstGeom>
-          <a:noFill/>
-          <a:ln/>
-        </p:spPr>
-        <p:txBody>
-          <a:bodyPr wrap="square" lIns="0" tIns="0" rIns="0" bIns="0" rtlCol="0" anchor="ctr"/>
-          <a:lstStyle/>
-          <a:p>
-            <a:pPr algn="l" indent="0" marL="0">
-              <a:buNone/>
-            </a:pPr>
-            <a:r>
-              <a:rPr lang="en-US" sz="1500" b="1" dirty="0">
-                <a:solidFill>
-                  <a:srgbClr val="FFFFFF"/>
-                </a:solidFill>
-                <a:latin typeface="Calibri" pitchFamily="34" charset="0"/>
-                <a:ea typeface="Calibri" pitchFamily="34" charset="-122"/>
-                <a:cs typeface="Calibri" pitchFamily="34" charset="-120"/>
-              </a:rPr>
-              <a:t>Pathogen or contaminant? What features guide you?</a:t>
-            </a:r>
-            <a:endParaRPr lang="en-US" sz="1500" dirty="0"/>
-          </a:p>
-        </p:txBody>
-      </p:sp>
-      <p:sp>
-        <p:nvSpPr>
-          <p:cNvPr id="10" name="Text 8"/>
-          <p:cNvSpPr/>
-          <p:nvPr/>
-        </p:nvSpPr>
-        <p:spPr>
-          <a:xfrm>
-            <a:off x="566928" y="6473952"/>
-            <a:ext cx="7772400" cy="274320"/>
-          </a:xfrm>
-          <a:prstGeom prst="rect">
-            <a:avLst/>
-          </a:prstGeom>
-          <a:noFill/>
-          <a:ln/>
-        </p:spPr>
-        <p:txBody>
-          <a:bodyPr wrap="square" lIns="0" tIns="0" rIns="0" bIns="0" rtlCol="0" anchor="ctr"/>
-          <a:lstStyle/>
-          <a:p>
-            <a:pPr algn="l" indent="0" marL="0">
-              <a:buNone/>
-            </a:pPr>
-            <a:r>
-              <a:rPr lang="en-US" sz="850" dirty="0">
-                <a:solidFill>
-                  <a:srgbClr val="9AA8B4"/>
-                </a:solidFill>
-                <a:latin typeface="Calibri" pitchFamily="34" charset="0"/>
-                <a:ea typeface="Calibri" pitchFamily="34" charset="-122"/>
-                <a:cs typeface="Calibri" pitchFamily="34" charset="-120"/>
-              </a:rPr>
-              <a:t>Makassed General Hospital  ·  Department of Laboratory Medicine</a:t>
-            </a:r>
-            <a:endParaRPr lang="en-US" sz="850" dirty="0"/>
-          </a:p>
-        </p:txBody>
-      </p:sp>
-      <p:sp>
-        <p:nvSpPr>
-          <p:cNvPr id="11" name="Text 9"/>
-          <p:cNvSpPr/>
-          <p:nvPr/>
-        </p:nvSpPr>
-        <p:spPr>
-          <a:xfrm>
-            <a:off x="9814255" y="6473952"/>
-            <a:ext cx="1828800" cy="274320"/>
-          </a:xfrm>
-          <a:prstGeom prst="rect">
-            <a:avLst/>
-          </a:prstGeom>
-          <a:noFill/>
-          <a:ln/>
-        </p:spPr>
-        <p:txBody>
-          <a:bodyPr wrap="square" lIns="0" tIns="0" rIns="0" bIns="0" rtlCol="0" anchor="ctr"/>
-          <a:lstStyle/>
-          <a:p>
-            <a:pPr algn="r" indent="0" marL="0">
-              <a:buNone/>
-            </a:pPr>
-            <a:r>
-              <a:rPr lang="en-US" sz="850" dirty="0">
-                <a:solidFill>
-                  <a:srgbClr val="9AA8B4"/>
-                </a:solidFill>
-                <a:latin typeface="Calibri" pitchFamily="34" charset="0"/>
-                <a:ea typeface="Calibri" pitchFamily="34" charset="-122"/>
-                <a:cs typeface="Calibri" pitchFamily="34" charset="-120"/>
-              </a:rPr>
-              <a:t>CP Lecture Series</a:t>
-            </a:r>
-            <a:pPr algn="r" indent="0" marL="0">
-              <a:buNone/>
-            </a:pPr>
-            <a:r>
-              <a:rPr lang="en-US" sz="850" dirty="0">
-                <a:solidFill>
-                  <a:srgbClr val="DCE4EC"/>
-                </a:solidFill>
-                <a:latin typeface="Calibri" pitchFamily="34" charset="0"/>
-                <a:ea typeface="Calibri" pitchFamily="34" charset="-122"/>
-                <a:cs typeface="Calibri" pitchFamily="34" charset="-120"/>
-              </a:rPr>
-              <a:t>   ·   </a:t>
-            </a:r>
-            <a:pPr algn="r" indent="0" marL="0">
-              <a:buNone/>
-            </a:pPr>
-            <a:r>
-              <a:rPr lang="en-US" sz="850" b="1" dirty="0">
-                <a:solidFill>
-                  <a:srgbClr val="2E7D32"/>
-                </a:solidFill>
-                <a:latin typeface="Calibri" pitchFamily="34" charset="0"/>
-                <a:ea typeface="Calibri" pitchFamily="34" charset="-122"/>
-                <a:cs typeface="Calibri" pitchFamily="34" charset="-120"/>
-              </a:rPr>
-              <a:t>9</a:t>
-            </a:r>
-            <a:endParaRPr lang="en-US" sz="850" dirty="0"/>
           </a:p>
         </p:txBody>
       </p:sp>
@@ -4186,7 +4762,7 @@
                 <a:ea typeface="Calibri" pitchFamily="34" charset="-122"/>
                 <a:cs typeface="Calibri" pitchFamily="34" charset="-120"/>
               </a:rPr>
-              <a:t>MICROBIOLOGY   ·   CASE 1  ·  RESOLUTION</a:t>
+              <a:t>MICROBIOLOGY   ·   INFECTION CONTROL</a:t>
             </a:r>
             <a:endParaRPr lang="en-US" sz="1100" dirty="0"/>
           </a:p>
@@ -4225,7 +4801,7 @@
                 <a:ea typeface="Calibri" pitchFamily="34" charset="-122"/>
                 <a:cs typeface="Calibri" pitchFamily="34" charset="-120"/>
               </a:rPr>
-              <a:t>Case 1: Likely Contaminant</a:t>
+              <a:t>The Laboratory as a Safety Sensor</a:t>
             </a:r>
             <a:endParaRPr lang="en-US" sz="3000" dirty="0"/>
           </a:p>
@@ -4233,124 +4809,18 @@
       </p:sp>
       <p:sp>
         <p:nvSpPr>
-          <p:cNvPr id="4" name="Text 2"/>
-          <p:cNvSpPr/>
-          <p:nvPr/>
-        </p:nvSpPr>
-        <p:spPr>
-          <a:xfrm>
-            <a:off x="566928" y="1554480"/>
-            <a:ext cx="6413547" cy="4023360"/>
-          </a:xfrm>
-          <a:prstGeom prst="rect">
-            <a:avLst/>
-          </a:prstGeom>
-          <a:noFill/>
-          <a:ln/>
-        </p:spPr>
-        <p:txBody>
-          <a:bodyPr wrap="square" lIns="0" tIns="0" rIns="0" bIns="0" rtlCol="0" anchor="t"/>
-          <a:lstStyle/>
-          <a:p>
-            <a:pPr algn="l" marL="177800" indent="-177800">
-              <a:spcAft>
-                <a:spcPts val="900"/>
-              </a:spcAft>
-              <a:buSzPct val="100000"/>
-              <a:buChar char="•"/>
-            </a:pPr>
-            <a:r>
-              <a:rPr lang="en-US" sz="1400" b="1" dirty="0">
-                <a:solidFill>
-                  <a:srgbClr val="1B2A38"/>
-                </a:solidFill>
-                <a:latin typeface="Calibri" pitchFamily="34" charset="0"/>
-                <a:ea typeface="Calibri" pitchFamily="34" charset="-122"/>
-                <a:cs typeface="Calibri" pitchFamily="34" charset="-120"/>
-              </a:rPr>
-              <a:t>A single positive bottle of several, with skin flora (CoNS), long time-to-positivity, and no clinical sepsis, favors contamination.</a:t>
-            </a:r>
-            <a:endParaRPr lang="en-US" sz="1400" dirty="0"/>
-          </a:p>
-          <a:p>
-            <a:pPr algn="l" marL="177800" indent="-177800">
-              <a:spcAft>
-                <a:spcPts val="900"/>
-              </a:spcAft>
-              <a:buSzPct val="100000"/>
-              <a:buChar char="•"/>
-            </a:pPr>
-            <a:r>
-              <a:rPr lang="en-US" sz="1400" dirty="0">
-                <a:solidFill>
-                  <a:srgbClr val="33444F"/>
-                </a:solidFill>
-                <a:latin typeface="Calibri" pitchFamily="34" charset="0"/>
-                <a:ea typeface="Calibri" pitchFamily="34" charset="-122"/>
-                <a:cs typeface="Calibri" pitchFamily="34" charset="-120"/>
-              </a:rPr>
-              <a:t>Coagulase-negative staphylococci are common skin contaminants.</a:t>
-            </a:r>
-            <a:endParaRPr lang="en-US" sz="1400" dirty="0"/>
-          </a:p>
-          <a:p>
-            <a:pPr algn="l" marL="177800" indent="-177800">
-              <a:spcAft>
-                <a:spcPts val="900"/>
-              </a:spcAft>
-              <a:buSzPct val="100000"/>
-              <a:buChar char="•"/>
-            </a:pPr>
-            <a:r>
-              <a:rPr lang="en-US" sz="1400" dirty="0">
-                <a:solidFill>
-                  <a:srgbClr val="33444F"/>
-                </a:solidFill>
-                <a:latin typeface="Calibri" pitchFamily="34" charset="0"/>
-                <a:ea typeface="Calibri" pitchFamily="34" charset="-122"/>
-                <a:cs typeface="Calibri" pitchFamily="34" charset="-120"/>
-              </a:rPr>
-              <a:t>No central line reduces the prior probability of true CoNS bacteremia.</a:t>
-            </a:r>
-            <a:endParaRPr lang="en-US" sz="1400" dirty="0"/>
-          </a:p>
-          <a:p>
-            <a:pPr algn="l" marL="177800" indent="-177800">
-              <a:spcAft>
-                <a:spcPts val="900"/>
-              </a:spcAft>
-              <a:buSzPct val="100000"/>
-              <a:buChar char="•"/>
-            </a:pPr>
-            <a:r>
-              <a:rPr lang="en-US" sz="1400" dirty="0">
-                <a:solidFill>
-                  <a:srgbClr val="33444F"/>
-                </a:solidFill>
-                <a:latin typeface="Calibri" pitchFamily="34" charset="0"/>
-                <a:ea typeface="Calibri" pitchFamily="34" charset="-122"/>
-                <a:cs typeface="Calibri" pitchFamily="34" charset="-120"/>
-              </a:rPr>
-              <a:t>Avoid unnecessary vancomycin; correlate clinically and consider a repeat set if doubt.</a:t>
-            </a:r>
-            <a:endParaRPr lang="en-US" sz="1400" dirty="0"/>
-          </a:p>
-        </p:txBody>
-      </p:sp>
-      <p:sp>
-        <p:nvSpPr>
-          <p:cNvPr id="5" name="Shape 3"/>
-          <p:cNvSpPr/>
-          <p:nvPr/>
-        </p:nvSpPr>
-        <p:spPr>
-          <a:xfrm>
-            <a:off x="7422788" y="1554480"/>
-            <a:ext cx="4201979" cy="3977640"/>
+          <p:cNvPr id="4" name="Shape 2"/>
+          <p:cNvSpPr/>
+          <p:nvPr/>
+        </p:nvSpPr>
+        <p:spPr>
+          <a:xfrm>
+            <a:off x="566928" y="1517904"/>
+            <a:ext cx="5346040" cy="4114800"/>
           </a:xfrm>
           <a:prstGeom prst="roundRect">
             <a:avLst>
-              <a:gd name="adj" fmla="val 2069"/>
+              <a:gd name="adj" fmla="val 2000"/>
             </a:avLst>
           </a:prstGeom>
           <a:solidFill>
@@ -4368,14 +4838,188 @@
       </p:sp>
       <p:sp>
         <p:nvSpPr>
+          <p:cNvPr id="5" name="Text 3"/>
+          <p:cNvSpPr/>
+          <p:nvPr/>
+        </p:nvSpPr>
+        <p:spPr>
+          <a:xfrm>
+            <a:off x="804672" y="1682496"/>
+            <a:ext cx="4888840" cy="274320"/>
+          </a:xfrm>
+          <a:prstGeom prst="rect">
+            <a:avLst/>
+          </a:prstGeom>
+          <a:noFill/>
+          <a:ln/>
+        </p:spPr>
+        <p:txBody>
+          <a:bodyPr wrap="square" lIns="0" tIns="0" rIns="0" bIns="0" rtlCol="0" anchor="ctr"/>
+          <a:lstStyle/>
+          <a:p>
+            <a:pPr indent="0" marL="0">
+              <a:buNone/>
+            </a:pPr>
+            <a:r>
+              <a:rPr lang="en-US" sz="1200" b="1" spc="100" kern="0" dirty="0">
+                <a:solidFill>
+                  <a:srgbClr val="1F5722"/>
+                </a:solidFill>
+                <a:latin typeface="Calibri" pitchFamily="34" charset="0"/>
+                <a:ea typeface="Calibri" pitchFamily="34" charset="-122"/>
+                <a:cs typeface="Calibri" pitchFamily="34" charset="-120"/>
+              </a:rPr>
+              <a:t>OUTBREAK DETECTION</a:t>
+            </a:r>
+            <a:endParaRPr lang="en-US" sz="1200" dirty="0"/>
+          </a:p>
+        </p:txBody>
+      </p:sp>
+      <p:sp>
+        <p:nvSpPr>
           <p:cNvPr id="6" name="Text 4"/>
           <p:cNvSpPr/>
           <p:nvPr/>
         </p:nvSpPr>
         <p:spPr>
           <a:xfrm>
-            <a:off x="7660532" y="1755648"/>
-            <a:ext cx="3744779" cy="310896"/>
+            <a:off x="804672" y="2029968"/>
+            <a:ext cx="4870552" cy="3474720"/>
+          </a:xfrm>
+          <a:prstGeom prst="rect">
+            <a:avLst/>
+          </a:prstGeom>
+          <a:noFill/>
+          <a:ln/>
+        </p:spPr>
+        <p:txBody>
+          <a:bodyPr wrap="square" lIns="0" tIns="0" rIns="0" bIns="0" rtlCol="0" anchor="t"/>
+          <a:lstStyle/>
+          <a:p>
+            <a:pPr algn="l" marL="177800" indent="-177800">
+              <a:spcAft>
+                <a:spcPts val="900"/>
+              </a:spcAft>
+              <a:buSzPct val="100000"/>
+              <a:buChar char="•"/>
+            </a:pPr>
+            <a:r>
+              <a:rPr lang="en-US" sz="1250" b="1" dirty="0">
+                <a:solidFill>
+                  <a:srgbClr val="1B2A38"/>
+                </a:solidFill>
+                <a:latin typeface="Calibri" pitchFamily="34" charset="0"/>
+                <a:ea typeface="Calibri" pitchFamily="34" charset="-122"/>
+                <a:cs typeface="Calibri" pitchFamily="34" charset="-120"/>
+              </a:rPr>
+              <a:t>Clustering of organisms or resistance patterns can be the first sign of an outbreak.</a:t>
+            </a:r>
+            <a:endParaRPr lang="en-US" sz="1250" dirty="0"/>
+          </a:p>
+          <a:p>
+            <a:pPr algn="l" marL="177800" indent="-177800">
+              <a:spcAft>
+                <a:spcPts val="900"/>
+              </a:spcAft>
+              <a:buSzPct val="100000"/>
+              <a:buChar char="•"/>
+            </a:pPr>
+            <a:r>
+              <a:rPr lang="en-US" sz="1250" dirty="0">
+                <a:solidFill>
+                  <a:srgbClr val="33444F"/>
+                </a:solidFill>
+                <a:latin typeface="Calibri" pitchFamily="34" charset="0"/>
+                <a:ea typeface="Calibri" pitchFamily="34" charset="-122"/>
+                <a:cs typeface="Calibri" pitchFamily="34" charset="-120"/>
+              </a:rPr>
+              <a:t>Report reportable/notifiable organisms promptly.</a:t>
+            </a:r>
+            <a:endParaRPr lang="en-US" sz="1250" dirty="0"/>
+          </a:p>
+          <a:p>
+            <a:pPr algn="l" marL="177800" indent="-177800">
+              <a:spcAft>
+                <a:spcPts val="900"/>
+              </a:spcAft>
+              <a:buSzPct val="100000"/>
+              <a:buChar char="•"/>
+            </a:pPr>
+            <a:r>
+              <a:rPr lang="en-US" sz="1250" dirty="0">
+                <a:solidFill>
+                  <a:srgbClr val="33444F"/>
+                </a:solidFill>
+                <a:latin typeface="Calibri" pitchFamily="34" charset="0"/>
+                <a:ea typeface="Calibri" pitchFamily="34" charset="-122"/>
+                <a:cs typeface="Calibri" pitchFamily="34" charset="-120"/>
+              </a:rPr>
+              <a:t>Alert on epidemiologically important resistance (CRE, VRE, MRSA).</a:t>
+            </a:r>
+            <a:endParaRPr lang="en-US" sz="1250" dirty="0"/>
+          </a:p>
+          <a:p>
+            <a:pPr algn="l" marL="177800" indent="-177800">
+              <a:spcAft>
+                <a:spcPts val="900"/>
+              </a:spcAft>
+              <a:buSzPct val="100000"/>
+              <a:buChar char="•"/>
+            </a:pPr>
+            <a:r>
+              <a:rPr lang="en-US" sz="1250" dirty="0">
+                <a:solidFill>
+                  <a:srgbClr val="33444F"/>
+                </a:solidFill>
+                <a:latin typeface="Calibri" pitchFamily="34" charset="0"/>
+                <a:ea typeface="Calibri" pitchFamily="34" charset="-122"/>
+                <a:cs typeface="Calibri" pitchFamily="34" charset="-120"/>
+              </a:rPr>
+              <a:t>Support typing/epidemiology when needed.</a:t>
+            </a:r>
+            <a:endParaRPr lang="en-US" sz="1250" dirty="0"/>
+          </a:p>
+        </p:txBody>
+      </p:sp>
+      <p:sp>
+        <p:nvSpPr>
+          <p:cNvPr id="7" name="Shape 5"/>
+          <p:cNvSpPr/>
+          <p:nvPr/>
+        </p:nvSpPr>
+        <p:spPr>
+          <a:xfrm>
+            <a:off x="6278728" y="1517904"/>
+            <a:ext cx="5346040" cy="4114800"/>
+          </a:xfrm>
+          <a:prstGeom prst="roundRect">
+            <a:avLst>
+              <a:gd name="adj" fmla="val 2000"/>
+            </a:avLst>
+          </a:prstGeom>
+          <a:solidFill>
+            <a:srgbClr val="E9F3EA"/>
+          </a:solidFill>
+          <a:ln/>
+          <a:effectLst>
+            <a:outerShdw sx="100000" sy="100000" kx="0" ky="0" algn="bl" rotWithShape="0" blurRad="88900" dist="25400" dir="5400000">
+              <a:srgbClr val="22303C">
+                <a:alpha val="12000"/>
+              </a:srgbClr>
+            </a:outerShdw>
+          </a:effectLst>
+        </p:spPr>
+      </p:sp>
+      <p:sp>
+        <p:nvSpPr>
+          <p:cNvPr id="8" name="Text 6"/>
+          <p:cNvSpPr/>
+          <p:nvPr/>
+        </p:nvSpPr>
+        <p:spPr>
+          <a:xfrm>
+            <a:off x="6516472" y="1682496"/>
+            <a:ext cx="4888840" cy="274320"/>
           </a:xfrm>
           <a:prstGeom prst="rect">
             <a:avLst/>
@@ -4391,30 +5035,30 @@
               <a:buNone/>
             </a:pPr>
             <a:r>
-              <a:rPr lang="en-US" sz="1100" b="1" spc="140" kern="0" dirty="0">
-                <a:solidFill>
-                  <a:srgbClr val="2E7D32"/>
-                </a:solidFill>
-                <a:latin typeface="Calibri" pitchFamily="34" charset="0"/>
-                <a:ea typeface="Calibri" pitchFamily="34" charset="-122"/>
-                <a:cs typeface="Calibri" pitchFamily="34" charset="-120"/>
-              </a:rPr>
-              <a:t>TEACHING POINT</a:t>
-            </a:r>
-            <a:endParaRPr lang="en-US" sz="1100" dirty="0"/>
-          </a:p>
-        </p:txBody>
-      </p:sp>
-      <p:sp>
-        <p:nvSpPr>
-          <p:cNvPr id="7" name="Text 5"/>
-          <p:cNvSpPr/>
-          <p:nvPr/>
-        </p:nvSpPr>
-        <p:spPr>
-          <a:xfrm>
-            <a:off x="7660532" y="2121408"/>
-            <a:ext cx="3726491" cy="3291840"/>
+              <a:rPr lang="en-US" sz="1200" b="1" spc="100" kern="0" dirty="0">
+                <a:solidFill>
+                  <a:srgbClr val="1F5722"/>
+                </a:solidFill>
+                <a:latin typeface="Calibri" pitchFamily="34" charset="0"/>
+                <a:ea typeface="Calibri" pitchFamily="34" charset="-122"/>
+                <a:cs typeface="Calibri" pitchFamily="34" charset="-120"/>
+              </a:rPr>
+              <a:t>COMMUNICATION &amp; POLICY</a:t>
+            </a:r>
+            <a:endParaRPr lang="en-US" sz="1200" dirty="0"/>
+          </a:p>
+        </p:txBody>
+      </p:sp>
+      <p:sp>
+        <p:nvSpPr>
+          <p:cNvPr id="9" name="Text 7"/>
+          <p:cNvSpPr/>
+          <p:nvPr/>
+        </p:nvSpPr>
+        <p:spPr>
+          <a:xfrm>
+            <a:off x="6516472" y="2029968"/>
+            <a:ext cx="4870552" cy="3474720"/>
           </a:xfrm>
           <a:prstGeom prst="rect">
             <a:avLst/>
@@ -4426,14 +5070,36 @@
           <a:bodyPr wrap="square" lIns="0" tIns="0" rIns="0" bIns="0" rtlCol="0" anchor="t"/>
           <a:lstStyle/>
           <a:p>
-            <a:pPr algn="l" indent="0" marL="0">
-              <a:lnSpc>
-                <a:spcPct val="110000"/>
-              </a:lnSpc>
-              <a:buNone/>
-            </a:pPr>
-            <a:r>
-              <a:rPr lang="en-US" sz="1350" dirty="0">
+            <a:pPr algn="l" marL="177800" indent="-177800">
+              <a:spcAft>
+                <a:spcPts val="900"/>
+              </a:spcAft>
+              <a:buSzPct val="100000"/>
+              <a:buChar char="•"/>
+            </a:pPr>
+            <a:r>
+              <a:rPr lang="en-US" sz="1250" b="1" dirty="0">
+                <a:solidFill>
+                  <a:srgbClr val="1B2A38"/>
+                </a:solidFill>
+                <a:latin typeface="Calibri" pitchFamily="34" charset="0"/>
+                <a:ea typeface="Calibri" pitchFamily="34" charset="-122"/>
+                <a:cs typeface="Calibri" pitchFamily="34" charset="-120"/>
+              </a:rPr>
+              <a:t>Critical results (positive blood cultures, alert organisms) require documented, timely notification.</a:t>
+            </a:r>
+            <a:endParaRPr lang="en-US" sz="1250" dirty="0"/>
+          </a:p>
+          <a:p>
+            <a:pPr algn="l" marL="177800" indent="-177800">
+              <a:spcAft>
+                <a:spcPts val="900"/>
+              </a:spcAft>
+              <a:buSzPct val="100000"/>
+              <a:buChar char="•"/>
+            </a:pPr>
+            <a:r>
+              <a:rPr lang="en-US" sz="1250" dirty="0">
                 <a:solidFill>
                   <a:srgbClr val="33444F"/>
                 </a:solidFill>
@@ -4441,15 +5107,57 @@
                 <a:ea typeface="Calibri" pitchFamily="34" charset="-122"/>
                 <a:cs typeface="Calibri" pitchFamily="34" charset="-120"/>
               </a:rPr>
-              <a:t>Single-bottle CoNS in a well patient without a line is usually contamination — integrate set positivity, organism, time-to-positivity, and clinical picture.</a:t>
-            </a:r>
-            <a:endParaRPr lang="en-US" sz="1350" dirty="0"/>
-          </a:p>
-        </p:txBody>
-      </p:sp>
-      <p:sp>
-        <p:nvSpPr>
-          <p:cNvPr id="8" name="Text 6"/>
+              <a:t>Partner with infection prevention on isolation decisions.</a:t>
+            </a:r>
+            <a:endParaRPr lang="en-US" sz="1250" dirty="0"/>
+          </a:p>
+          <a:p>
+            <a:pPr algn="l" marL="177800" indent="-177800">
+              <a:spcAft>
+                <a:spcPts val="900"/>
+              </a:spcAft>
+              <a:buSzPct val="100000"/>
+              <a:buChar char="•"/>
+            </a:pPr>
+            <a:r>
+              <a:rPr lang="en-US" sz="1250" dirty="0">
+                <a:solidFill>
+                  <a:srgbClr val="33444F"/>
+                </a:solidFill>
+                <a:latin typeface="Calibri" pitchFamily="34" charset="0"/>
+                <a:ea typeface="Calibri" pitchFamily="34" charset="-122"/>
+                <a:cs typeface="Calibri" pitchFamily="34" charset="-120"/>
+              </a:rPr>
+              <a:t>Track and feed back contamination rates.</a:t>
+            </a:r>
+            <a:endParaRPr lang="en-US" sz="1250" dirty="0"/>
+          </a:p>
+          <a:p>
+            <a:pPr algn="l" marL="177800" indent="-177800">
+              <a:spcAft>
+                <a:spcPts val="900"/>
+              </a:spcAft>
+              <a:buSzPct val="100000"/>
+              <a:buChar char="•"/>
+            </a:pPr>
+            <a:r>
+              <a:rPr lang="en-US" sz="1250" dirty="0">
+                <a:solidFill>
+                  <a:srgbClr val="33444F"/>
+                </a:solidFill>
+                <a:latin typeface="Calibri" pitchFamily="34" charset="0"/>
+                <a:ea typeface="Calibri" pitchFamily="34" charset="-122"/>
+                <a:cs typeface="Calibri" pitchFamily="34" charset="-120"/>
+              </a:rPr>
+              <a:t>Contribute to the antibiogram and stewardship.</a:t>
+            </a:r>
+            <a:endParaRPr lang="en-US" sz="1250" dirty="0"/>
+          </a:p>
+        </p:txBody>
+      </p:sp>
+      <p:sp>
+        <p:nvSpPr>
+          <p:cNvPr id="10" name="Text 8"/>
           <p:cNvSpPr/>
           <p:nvPr/>
         </p:nvSpPr>
@@ -4488,7 +5196,7 @@
       </p:sp>
       <p:sp>
         <p:nvSpPr>
-          <p:cNvPr id="9" name="Text 7"/>
+          <p:cNvPr id="11" name="Text 9"/>
           <p:cNvSpPr/>
           <p:nvPr/>
         </p:nvSpPr>
@@ -4618,7 +5326,7 @@
                 <a:ea typeface="Calibri" pitchFamily="34" charset="-122"/>
                 <a:cs typeface="Calibri" pitchFamily="34" charset="-120"/>
               </a:rPr>
-              <a:t>MICROBIOLOGY   ·   CASE 2</a:t>
+              <a:t>MICROBIOLOGY   ·   CASE 1</a:t>
             </a:r>
             <a:endParaRPr lang="en-US" sz="1100" dirty="0"/>
           </a:p>
@@ -4657,7 +5365,7 @@
                 <a:ea typeface="Calibri" pitchFamily="34" charset="-122"/>
                 <a:cs typeface="Calibri" pitchFamily="34" charset="-120"/>
               </a:rPr>
-              <a:t>Case 2</a:t>
+              <a:t>Case 1</a:t>
             </a:r>
             <a:endParaRPr lang="en-US" sz="3000" dirty="0"/>
           </a:p>
@@ -4767,7 +5475,7 @@
                 <a:ea typeface="Calibri" pitchFamily="34" charset="-122"/>
                 <a:cs typeface="Calibri" pitchFamily="34" charset="-120"/>
               </a:rPr>
-              <a:t>Both sets grow Staphylococcus aureus with a short time-to-positivity in a febrile patient. Rapid molecular testing detects mecA.</a:t>
+              <a:t>S. aureus grows in all four bottles (two sets) within 12 hours in a febrile patient.</a:t>
             </a:r>
             <a:endParaRPr lang="en-US" sz="1450" dirty="0"/>
           </a:p>
@@ -4874,7 +5582,7 @@
                 <a:ea typeface="Calibri" pitchFamily="34" charset="-122"/>
                 <a:cs typeface="Calibri" pitchFamily="34" charset="-120"/>
               </a:rPr>
-              <a:t>How do you interpret and act on this?</a:t>
+              <a:t>How do you interpret this, and what are the next steps?</a:t>
             </a:r>
             <a:endParaRPr lang="en-US" sz="1500" dirty="0"/>
           </a:p>
@@ -5051,7 +5759,7 @@
                 <a:ea typeface="Calibri" pitchFamily="34" charset="-122"/>
                 <a:cs typeface="Calibri" pitchFamily="34" charset="-120"/>
               </a:rPr>
-              <a:t>MICROBIOLOGY   ·   CASE 2  ·  RESOLUTION</a:t>
+              <a:t>MICROBIOLOGY   ·   CASE 1  ·  RESOLUTION</a:t>
             </a:r>
             <a:endParaRPr lang="en-US" sz="1100" dirty="0"/>
           </a:p>
@@ -5090,7 +5798,7 @@
                 <a:ea typeface="Calibri" pitchFamily="34" charset="-122"/>
                 <a:cs typeface="Calibri" pitchFamily="34" charset="-120"/>
               </a:rPr>
-              <a:t>Case 2: True S. aureus Bacteremia (MRSA)</a:t>
+              <a:t>Case 1: S. aureus Bacteremia</a:t>
             </a:r>
             <a:endParaRPr lang="en-US" sz="3000" dirty="0"/>
           </a:p>
@@ -5133,7 +5841,7 @@
                 <a:ea typeface="Calibri" pitchFamily="34" charset="-122"/>
                 <a:cs typeface="Calibri" pitchFamily="34" charset="-120"/>
               </a:rPr>
-              <a:t>S. aureus in multiple sets with short time-to-positivity is true bacteremia — never dismissed as contaminant.</a:t>
+              <a:t>S. aureus in multiple sets with short time-to-positivity indicates true, significant bacteremia.</a:t>
             </a:r>
             <a:endParaRPr lang="en-US" sz="1400" dirty="0"/>
           </a:p>
@@ -5154,7 +5862,7 @@
                 <a:ea typeface="Calibri" pitchFamily="34" charset="-122"/>
                 <a:cs typeface="Calibri" pitchFamily="34" charset="-120"/>
               </a:rPr>
-              <a:t>mecA detection indicates MRSA → start appropriate anti-MRSA therapy promptly.</a:t>
+              <a:t>S. aureus in blood is never dismissed as a contaminant.</a:t>
             </a:r>
             <a:endParaRPr lang="en-US" sz="1400" dirty="0"/>
           </a:p>
@@ -5175,7 +5883,7 @@
                 <a:ea typeface="Calibri" pitchFamily="34" charset="-122"/>
                 <a:cs typeface="Calibri" pitchFamily="34" charset="-120"/>
               </a:rPr>
-              <a:t>S. aureus bacteremia mandates source evaluation (e.g., endocarditis, line) and follow-up cultures.</a:t>
+              <a:t>Rapid ID/resistance (e.g., MRSA marker) guides therapy.</a:t>
             </a:r>
             <a:endParaRPr lang="en-US" sz="1400" dirty="0"/>
           </a:p>
@@ -5196,7 +5904,7 @@
                 <a:ea typeface="Calibri" pitchFamily="34" charset="-122"/>
                 <a:cs typeface="Calibri" pitchFamily="34" charset="-120"/>
               </a:rPr>
-              <a:t>Confirm with full AST.</a:t>
+              <a:t>Source evaluation and follow-up cultures to document clearance are warranted.</a:t>
             </a:r>
             <a:endParaRPr lang="en-US" sz="1400" dirty="0"/>
           </a:p>
@@ -5306,7 +6014,7 @@
                 <a:ea typeface="Calibri" pitchFamily="34" charset="-122"/>
                 <a:cs typeface="Calibri" pitchFamily="34" charset="-120"/>
               </a:rPr>
-              <a:t>S. aureus in blood is always significant; rapid mecA detection enables early correct therapy while AST confirms the profile.</a:t>
+              <a:t>S. aureus bacteremia is always significant — it mandates source workup, appropriate therapy, and documented clearance cultures.</a:t>
             </a:r>
             <a:endParaRPr lang="en-US" sz="1350" dirty="0"/>
           </a:p>
@@ -5483,7 +6191,7 @@
                 <a:ea typeface="Calibri" pitchFamily="34" charset="-122"/>
                 <a:cs typeface="Calibri" pitchFamily="34" charset="-120"/>
               </a:rPr>
-              <a:t>MICROBIOLOGY   ·   BOARD REVIEW  ·  Q1</a:t>
+              <a:t>MICROBIOLOGY   ·   CASE 2</a:t>
             </a:r>
             <a:endParaRPr lang="en-US" sz="1100" dirty="0"/>
           </a:p>
@@ -5514,7 +6222,7 @@
               <a:buNone/>
             </a:pPr>
             <a:r>
-              <a:rPr lang="en-US" sz="2600" b="1" dirty="0">
+              <a:rPr lang="en-US" sz="3000" b="1" dirty="0">
                 <a:solidFill>
                   <a:srgbClr val="0E3A5F"/>
                 </a:solidFill>
@@ -5522,190 +6230,26 @@
                 <a:ea typeface="Calibri" pitchFamily="34" charset="-122"/>
                 <a:cs typeface="Calibri" pitchFamily="34" charset="-120"/>
               </a:rPr>
-              <a:t>Board-Style Review</a:t>
-            </a:r>
-            <a:endParaRPr lang="en-US" sz="2600" dirty="0"/>
-          </a:p>
-        </p:txBody>
-      </p:sp>
-      <p:sp>
-        <p:nvSpPr>
-          <p:cNvPr id="4" name="Text 2"/>
-          <p:cNvSpPr/>
-          <p:nvPr/>
-        </p:nvSpPr>
-        <p:spPr>
-          <a:xfrm>
-            <a:off x="566928" y="1417320"/>
-            <a:ext cx="11057839" cy="914400"/>
-          </a:xfrm>
-          <a:prstGeom prst="rect">
-            <a:avLst/>
-          </a:prstGeom>
-          <a:noFill/>
-          <a:ln/>
-        </p:spPr>
-        <p:txBody>
-          <a:bodyPr wrap="square" lIns="0" tIns="0" rIns="0" bIns="0" rtlCol="0" anchor="t"/>
-          <a:lstStyle/>
-          <a:p>
-            <a:pPr algn="l" indent="0" marL="0">
-              <a:lnSpc>
-                <a:spcPct val="105000"/>
-              </a:lnSpc>
-              <a:buNone/>
-            </a:pPr>
-            <a:r>
-              <a:rPr lang="en-US" sz="1450" b="1" dirty="0">
-                <a:solidFill>
-                  <a:srgbClr val="1B2A38"/>
-                </a:solidFill>
-                <a:latin typeface="Calibri" pitchFamily="34" charset="0"/>
-                <a:ea typeface="Calibri" pitchFamily="34" charset="-122"/>
-                <a:cs typeface="Calibri" pitchFamily="34" charset="-120"/>
-              </a:rPr>
-              <a:t>The single most important factor for blood-culture sensitivity is:</a:t>
-            </a:r>
-            <a:endParaRPr lang="en-US" sz="1450" dirty="0"/>
-          </a:p>
-        </p:txBody>
-      </p:sp>
-      <p:sp>
-        <p:nvSpPr>
-          <p:cNvPr id="5" name="Text 3"/>
-          <p:cNvSpPr/>
-          <p:nvPr/>
-        </p:nvSpPr>
-        <p:spPr>
-          <a:xfrm>
-            <a:off x="658368" y="2395728"/>
-            <a:ext cx="6192390" cy="3017520"/>
-          </a:xfrm>
-          <a:prstGeom prst="rect">
-            <a:avLst/>
-          </a:prstGeom>
-          <a:noFill/>
-          <a:ln/>
-        </p:spPr>
-        <p:txBody>
-          <a:bodyPr wrap="square" lIns="0" tIns="0" rIns="0" bIns="0" rtlCol="0" anchor="t"/>
-          <a:lstStyle/>
-          <a:p>
-            <a:pPr algn="l" indent="0" marL="0">
-              <a:spcAft>
-                <a:spcPts val="600"/>
-              </a:spcAft>
-              <a:buNone/>
-            </a:pPr>
-            <a:r>
-              <a:rPr lang="en-US" sz="1350" dirty="0">
-                <a:solidFill>
-                  <a:srgbClr val="33444F"/>
-                </a:solidFill>
-                <a:latin typeface="Calibri" pitchFamily="34" charset="0"/>
-                <a:ea typeface="Calibri" pitchFamily="34" charset="-122"/>
-                <a:cs typeface="Calibri" pitchFamily="34" charset="-120"/>
-              </a:rPr>
-              <a:t>A. Bottle brand</a:t>
-            </a:r>
-            <a:endParaRPr lang="en-US" sz="1350" dirty="0"/>
-          </a:p>
-          <a:p>
-            <a:pPr algn="l" indent="0" marL="0">
-              <a:spcAft>
-                <a:spcPts val="600"/>
-              </a:spcAft>
-              <a:buNone/>
-            </a:pPr>
-            <a:r>
-              <a:rPr lang="en-US" sz="1350" b="1" dirty="0">
-                <a:solidFill>
-                  <a:srgbClr val="1F5722"/>
-                </a:solidFill>
-                <a:latin typeface="Calibri" pitchFamily="34" charset="0"/>
-                <a:ea typeface="Calibri" pitchFamily="34" charset="-122"/>
-                <a:cs typeface="Calibri" pitchFamily="34" charset="-120"/>
-              </a:rPr>
-              <a:t>B. Blood volume collected</a:t>
-            </a:r>
-            <a:endParaRPr lang="en-US" sz="1350" dirty="0"/>
-          </a:p>
-          <a:p>
-            <a:pPr algn="l" indent="0" marL="0">
-              <a:spcAft>
-                <a:spcPts val="600"/>
-              </a:spcAft>
-              <a:buNone/>
-            </a:pPr>
-            <a:r>
-              <a:rPr lang="en-US" sz="1350" dirty="0">
-                <a:solidFill>
-                  <a:srgbClr val="33444F"/>
-                </a:solidFill>
-                <a:latin typeface="Calibri" pitchFamily="34" charset="0"/>
-                <a:ea typeface="Calibri" pitchFamily="34" charset="-122"/>
-                <a:cs typeface="Calibri" pitchFamily="34" charset="-120"/>
-              </a:rPr>
-              <a:t>C. Time of day</a:t>
-            </a:r>
-            <a:endParaRPr lang="en-US" sz="1350" dirty="0"/>
-          </a:p>
-          <a:p>
-            <a:pPr algn="l" indent="0" marL="0">
-              <a:spcAft>
-                <a:spcPts val="600"/>
-              </a:spcAft>
-              <a:buNone/>
-            </a:pPr>
-            <a:r>
-              <a:rPr lang="en-US" sz="1350" dirty="0">
-                <a:solidFill>
-                  <a:srgbClr val="33444F"/>
-                </a:solidFill>
-                <a:latin typeface="Calibri" pitchFamily="34" charset="0"/>
-                <a:ea typeface="Calibri" pitchFamily="34" charset="-122"/>
-                <a:cs typeface="Calibri" pitchFamily="34" charset="-120"/>
-              </a:rPr>
-              <a:t>D. Patient age</a:t>
-            </a:r>
-            <a:endParaRPr lang="en-US" sz="1350" dirty="0"/>
-          </a:p>
-          <a:p>
-            <a:pPr algn="l" indent="0" marL="0">
-              <a:spcAft>
-                <a:spcPts val="600"/>
-              </a:spcAft>
-              <a:buNone/>
-            </a:pPr>
-            <a:r>
-              <a:rPr lang="en-US" sz="1350" dirty="0">
-                <a:solidFill>
-                  <a:srgbClr val="33444F"/>
-                </a:solidFill>
-                <a:latin typeface="Calibri" pitchFamily="34" charset="0"/>
-                <a:ea typeface="Calibri" pitchFamily="34" charset="-122"/>
-                <a:cs typeface="Calibri" pitchFamily="34" charset="-120"/>
-              </a:rPr>
-              <a:t>E. Needle gauge</a:t>
-            </a:r>
-            <a:endParaRPr lang="en-US" sz="1350" dirty="0"/>
-          </a:p>
-        </p:txBody>
-      </p:sp>
-      <p:sp>
-        <p:nvSpPr>
-          <p:cNvPr id="6" name="Shape 4"/>
-          <p:cNvSpPr/>
-          <p:nvPr/>
-        </p:nvSpPr>
-        <p:spPr>
-          <a:xfrm>
-            <a:off x="7201632" y="2395728"/>
-            <a:ext cx="4423136" cy="3246120"/>
+              <a:t>Case 2</a:t>
+            </a:r>
+            <a:endParaRPr lang="en-US" sz="3000" dirty="0"/>
+          </a:p>
+        </p:txBody>
+      </p:sp>
+      <p:sp>
+        <p:nvSpPr>
+          <p:cNvPr id="4" name="Shape 2"/>
+          <p:cNvSpPr/>
+          <p:nvPr/>
+        </p:nvSpPr>
+        <p:spPr>
+          <a:xfrm>
+            <a:off x="566928" y="1517904"/>
+            <a:ext cx="11057839" cy="2788920"/>
           </a:xfrm>
           <a:prstGeom prst="roundRect">
             <a:avLst>
-              <a:gd name="adj" fmla="val 2535"/>
+              <a:gd name="adj" fmla="val 2951"/>
             </a:avLst>
           </a:prstGeom>
           <a:solidFill>
@@ -5723,14 +6267,14 @@
       </p:sp>
       <p:sp>
         <p:nvSpPr>
-          <p:cNvPr id="7" name="Text 5"/>
-          <p:cNvSpPr/>
-          <p:nvPr/>
-        </p:nvSpPr>
-        <p:spPr>
-          <a:xfrm>
-            <a:off x="7439376" y="2578608"/>
-            <a:ext cx="3965936" cy="457200"/>
+          <p:cNvPr id="5" name="Text 3"/>
+          <p:cNvSpPr/>
+          <p:nvPr/>
+        </p:nvSpPr>
+        <p:spPr>
+          <a:xfrm>
+            <a:off x="841248" y="1700784"/>
+            <a:ext cx="5486400" cy="292608"/>
           </a:xfrm>
           <a:prstGeom prst="rect">
             <a:avLst/>
@@ -5746,7 +6290,7 @@
               <a:buNone/>
             </a:pPr>
             <a:r>
-              <a:rPr lang="en-US" sz="1500" b="1" dirty="0">
+              <a:rPr lang="en-US" sz="1100" b="1" spc="150" kern="0" dirty="0">
                 <a:solidFill>
                   <a:srgbClr val="2E7D32"/>
                 </a:solidFill>
@@ -5754,36 +6298,22 @@
                 <a:ea typeface="Calibri" pitchFamily="34" charset="-122"/>
                 <a:cs typeface="Calibri" pitchFamily="34" charset="-120"/>
               </a:rPr>
-              <a:t>ANSWER  </a:t>
-            </a:r>
-            <a:pPr indent="0" marL="0">
-              <a:buNone/>
-            </a:pPr>
-            <a:r>
-              <a:rPr lang="en-US" sz="1500" b="1" dirty="0">
-                <a:solidFill>
-                  <a:srgbClr val="1B2A38"/>
-                </a:solidFill>
-                <a:latin typeface="Calibri" pitchFamily="34" charset="0"/>
-                <a:ea typeface="Calibri" pitchFamily="34" charset="-122"/>
-                <a:cs typeface="Calibri" pitchFamily="34" charset="-120"/>
-              </a:rPr>
-              <a:t>B — Blood volume</a:t>
-            </a:r>
-            <a:endParaRPr lang="en-US" sz="1500" dirty="0"/>
-          </a:p>
-        </p:txBody>
-      </p:sp>
-      <p:sp>
-        <p:nvSpPr>
-          <p:cNvPr id="8" name="Text 6"/>
-          <p:cNvSpPr/>
-          <p:nvPr/>
-        </p:nvSpPr>
-        <p:spPr>
-          <a:xfrm>
-            <a:off x="7439376" y="3127248"/>
-            <a:ext cx="3947648" cy="2377440"/>
+              <a:t>CLINICAL VIGNETTE</a:t>
+            </a:r>
+            <a:endParaRPr lang="en-US" sz="1100" dirty="0"/>
+          </a:p>
+        </p:txBody>
+      </p:sp>
+      <p:sp>
+        <p:nvSpPr>
+          <p:cNvPr id="6" name="Text 4"/>
+          <p:cNvSpPr/>
+          <p:nvPr/>
+        </p:nvSpPr>
+        <p:spPr>
+          <a:xfrm>
+            <a:off x="841248" y="2029968"/>
+            <a:ext cx="10509199" cy="2148840"/>
           </a:xfrm>
           <a:prstGeom prst="rect">
             <a:avLst/>
@@ -5802,7 +6332,7 @@
               <a:buNone/>
             </a:pPr>
             <a:r>
-              <a:rPr lang="en-US" sz="1250" dirty="0">
+              <a:rPr lang="en-US" sz="1450" dirty="0">
                 <a:solidFill>
                   <a:srgbClr val="33444F"/>
                 </a:solidFill>
@@ -5810,15 +6340,122 @@
                 <a:ea typeface="Calibri" pitchFamily="34" charset="-122"/>
                 <a:cs typeface="Calibri" pitchFamily="34" charset="-120"/>
               </a:rPr>
-              <a:t>Yield rises with the volume of blood cultured; under-filling bottles is a leading cause of false-negative cultures.</a:t>
-            </a:r>
-            <a:endParaRPr lang="en-US" sz="1250" dirty="0"/>
+              <a:t>One bottle of one set grows coagulase-negative staphylococci at 4 days in an asymptomatic outpatient.</a:t>
+            </a:r>
+            <a:endParaRPr lang="en-US" sz="1450" dirty="0"/>
+          </a:p>
+        </p:txBody>
+      </p:sp>
+      <p:sp>
+        <p:nvSpPr>
+          <p:cNvPr id="7" name="Shape 5"/>
+          <p:cNvSpPr/>
+          <p:nvPr/>
+        </p:nvSpPr>
+        <p:spPr>
+          <a:xfrm>
+            <a:off x="566928" y="4553712"/>
+            <a:ext cx="11057839" cy="1325880"/>
+          </a:xfrm>
+          <a:prstGeom prst="roundRect">
+            <a:avLst>
+              <a:gd name="adj" fmla="val 6207"/>
+            </a:avLst>
+          </a:prstGeom>
+          <a:solidFill>
+            <a:srgbClr val="0E3A5F"/>
+          </a:solidFill>
+          <a:ln/>
+          <a:effectLst>
+            <a:outerShdw sx="100000" sy="100000" kx="0" ky="0" algn="bl" rotWithShape="0" blurRad="88900" dist="25400" dir="5400000">
+              <a:srgbClr val="22303C">
+                <a:alpha val="12000"/>
+              </a:srgbClr>
+            </a:outerShdw>
+          </a:effectLst>
+        </p:spPr>
+      </p:sp>
+      <p:sp>
+        <p:nvSpPr>
+          <p:cNvPr id="8" name="Text 6"/>
+          <p:cNvSpPr/>
+          <p:nvPr/>
+        </p:nvSpPr>
+        <p:spPr>
+          <a:xfrm>
+            <a:off x="822960" y="4681728"/>
+            <a:ext cx="640080" cy="960120"/>
+          </a:xfrm>
+          <a:prstGeom prst="rect">
+            <a:avLst/>
+          </a:prstGeom>
+          <a:noFill/>
+          <a:ln/>
+        </p:spPr>
+        <p:txBody>
+          <a:bodyPr wrap="square" lIns="0" tIns="0" rIns="0" bIns="0" rtlCol="0" anchor="ctr"/>
+          <a:lstStyle/>
+          <a:p>
+            <a:pPr algn="ctr" indent="0" marL="0">
+              <a:buNone/>
+            </a:pPr>
+            <a:r>
+              <a:rPr lang="en-US" sz="4000" b="1" dirty="0">
+                <a:solidFill>
+                  <a:srgbClr val="2E7D32"/>
+                </a:solidFill>
+                <a:latin typeface="Calibri" pitchFamily="34" charset="0"/>
+                <a:ea typeface="Calibri" pitchFamily="34" charset="-122"/>
+                <a:cs typeface="Calibri" pitchFamily="34" charset="-120"/>
+              </a:rPr>
+              <a:t>?</a:t>
+            </a:r>
+            <a:endParaRPr lang="en-US" sz="4000" dirty="0"/>
           </a:p>
         </p:txBody>
       </p:sp>
       <p:sp>
         <p:nvSpPr>
           <p:cNvPr id="9" name="Text 7"/>
+          <p:cNvSpPr/>
+          <p:nvPr/>
+        </p:nvSpPr>
+        <p:spPr>
+          <a:xfrm>
+            <a:off x="1618488" y="4553712"/>
+            <a:ext cx="9686239" cy="1325880"/>
+          </a:xfrm>
+          <a:prstGeom prst="rect">
+            <a:avLst/>
+          </a:prstGeom>
+          <a:noFill/>
+          <a:ln/>
+        </p:spPr>
+        <p:txBody>
+          <a:bodyPr wrap="square" lIns="0" tIns="0" rIns="0" bIns="0" rtlCol="0" anchor="ctr"/>
+          <a:lstStyle/>
+          <a:p>
+            <a:pPr algn="l" indent="0" marL="0">
+              <a:buNone/>
+            </a:pPr>
+            <a:r>
+              <a:rPr lang="en-US" sz="1500" b="1" dirty="0">
+                <a:solidFill>
+                  <a:srgbClr val="FFFFFF"/>
+                </a:solidFill>
+                <a:latin typeface="Calibri" pitchFamily="34" charset="0"/>
+                <a:ea typeface="Calibri" pitchFamily="34" charset="-122"/>
+                <a:cs typeface="Calibri" pitchFamily="34" charset="-120"/>
+              </a:rPr>
+              <a:t>True infection or contamination?</a:t>
+            </a:r>
+            <a:endParaRPr lang="en-US" sz="1500" dirty="0"/>
+          </a:p>
+        </p:txBody>
+      </p:sp>
+      <p:sp>
+        <p:nvSpPr>
+          <p:cNvPr id="10" name="Text 8"/>
           <p:cNvSpPr/>
           <p:nvPr/>
         </p:nvSpPr>
@@ -5857,7 +6494,7 @@
       </p:sp>
       <p:sp>
         <p:nvSpPr>
-          <p:cNvPr id="10" name="Text 8"/>
+          <p:cNvPr id="11" name="Text 9"/>
           <p:cNvSpPr/>
           <p:nvPr/>
         </p:nvSpPr>
@@ -5987,7 +6624,7 @@
                 <a:ea typeface="Calibri" pitchFamily="34" charset="-122"/>
                 <a:cs typeface="Calibri" pitchFamily="34" charset="-120"/>
               </a:rPr>
-              <a:t>MICROBIOLOGY   ·   BOARD REVIEW  ·  Q2</a:t>
+              <a:t>MICROBIOLOGY   ·   CASE 2  ·  RESOLUTION</a:t>
             </a:r>
             <a:endParaRPr lang="en-US" sz="1100" dirty="0"/>
           </a:p>
@@ -6018,7 +6655,7 @@
               <a:buNone/>
             </a:pPr>
             <a:r>
-              <a:rPr lang="en-US" sz="2600" b="1" dirty="0">
+              <a:rPr lang="en-US" sz="3000" b="1" dirty="0">
                 <a:solidFill>
                   <a:srgbClr val="0E3A5F"/>
                 </a:solidFill>
@@ -6026,9 +6663,9 @@
                 <a:ea typeface="Calibri" pitchFamily="34" charset="-122"/>
                 <a:cs typeface="Calibri" pitchFamily="34" charset="-120"/>
               </a:rPr>
-              <a:t>Board-Style Review</a:t>
-            </a:r>
-            <a:endParaRPr lang="en-US" sz="2600" dirty="0"/>
+              <a:t>Case 2: Single-Bottle CoNS</a:t>
+            </a:r>
+            <a:endParaRPr lang="en-US" sz="3000" dirty="0"/>
           </a:p>
         </p:txBody>
       </p:sp>
@@ -6040,8 +6677,8 @@
         </p:nvSpPr>
         <p:spPr>
           <a:xfrm>
-            <a:off x="566928" y="1417320"/>
-            <a:ext cx="11057839" cy="914400"/>
+            <a:off x="566928" y="1554480"/>
+            <a:ext cx="6413547" cy="4023360"/>
           </a:xfrm>
           <a:prstGeom prst="rect">
             <a:avLst/>
@@ -6053,14 +6690,15 @@
           <a:bodyPr wrap="square" lIns="0" tIns="0" rIns="0" bIns="0" rtlCol="0" anchor="t"/>
           <a:lstStyle/>
           <a:p>
-            <a:pPr algn="l" indent="0" marL="0">
-              <a:lnSpc>
-                <a:spcPct val="105000"/>
-              </a:lnSpc>
-              <a:buNone/>
-            </a:pPr>
-            <a:r>
-              <a:rPr lang="en-US" sz="1450" b="1" dirty="0">
+            <a:pPr algn="l" marL="177800" indent="-177800">
+              <a:spcAft>
+                <a:spcPts val="900"/>
+              </a:spcAft>
+              <a:buSzPct val="100000"/>
+              <a:buChar char="•"/>
+            </a:pPr>
+            <a:r>
+              <a:rPr lang="en-US" sz="1400" b="1" dirty="0">
                 <a:solidFill>
                   <a:srgbClr val="1B2A38"/>
                 </a:solidFill>
@@ -6068,41 +6706,20 @@
                 <a:ea typeface="Calibri" pitchFamily="34" charset="-122"/>
                 <a:cs typeface="Calibri" pitchFamily="34" charset="-120"/>
               </a:rPr>
-              <a:t>Which scenario most strongly suggests a true pathogen rather than contamination?</a:t>
-            </a:r>
-            <a:endParaRPr lang="en-US" sz="1450" dirty="0"/>
-          </a:p>
-        </p:txBody>
-      </p:sp>
-      <p:sp>
-        <p:nvSpPr>
-          <p:cNvPr id="5" name="Text 3"/>
-          <p:cNvSpPr/>
-          <p:nvPr/>
-        </p:nvSpPr>
-        <p:spPr>
-          <a:xfrm>
-            <a:off x="658368" y="2395728"/>
-            <a:ext cx="6192390" cy="3017520"/>
-          </a:xfrm>
-          <a:prstGeom prst="rect">
-            <a:avLst/>
-          </a:prstGeom>
-          <a:noFill/>
-          <a:ln/>
-        </p:spPr>
-        <p:txBody>
-          <a:bodyPr wrap="square" lIns="0" tIns="0" rIns="0" bIns="0" rtlCol="0" anchor="t"/>
-          <a:lstStyle/>
-          <a:p>
-            <a:pPr algn="l" indent="0" marL="0">
+              <a:t>A single late-positive bottle of skin flora in a well patient most likely represents contamination.</a:t>
+            </a:r>
+            <a:endParaRPr lang="en-US" sz="1400" dirty="0"/>
+          </a:p>
+          <a:p>
+            <a:pPr algn="l" marL="177800" indent="-177800">
               <a:spcAft>
-                <a:spcPts val="600"/>
+                <a:spcPts val="900"/>
               </a:spcAft>
-              <a:buNone/>
-            </a:pPr>
-            <a:r>
-              <a:rPr lang="en-US" sz="1350" dirty="0">
+              <a:buSzPct val="100000"/>
+              <a:buChar char="•"/>
+            </a:pPr>
+            <a:r>
+              <a:rPr lang="en-US" sz="1400" dirty="0">
                 <a:solidFill>
                   <a:srgbClr val="33444F"/>
                 </a:solidFill>
@@ -6110,39 +6727,41 @@
                 <a:ea typeface="Calibri" pitchFamily="34" charset="-122"/>
                 <a:cs typeface="Calibri" pitchFamily="34" charset="-120"/>
               </a:rPr>
-              <a:t>A. Single bottle positive for coagulase-negative staph</a:t>
-            </a:r>
-            <a:endParaRPr lang="en-US" sz="1350" dirty="0"/>
-          </a:p>
-          <a:p>
-            <a:pPr algn="l" indent="0" marL="0">
+              <a:t>True CoNS bacteremia usually shows multiple positive sets and a risk factor (e.g., a line).</a:t>
+            </a:r>
+            <a:endParaRPr lang="en-US" sz="1400" dirty="0"/>
+          </a:p>
+          <a:p>
+            <a:pPr algn="l" marL="177800" indent="-177800">
               <a:spcAft>
-                <a:spcPts val="600"/>
+                <a:spcPts val="900"/>
               </a:spcAft>
-              <a:buNone/>
-            </a:pPr>
-            <a:r>
-              <a:rPr lang="en-US" sz="1350" b="1" dirty="0">
-                <a:solidFill>
-                  <a:srgbClr val="1F5722"/>
-                </a:solidFill>
-                <a:latin typeface="Calibri" pitchFamily="34" charset="0"/>
-                <a:ea typeface="Calibri" pitchFamily="34" charset="-122"/>
-                <a:cs typeface="Calibri" pitchFamily="34" charset="-120"/>
-              </a:rPr>
-              <a:t>B. Same Gram-negative rod in multiple sets with short time-to-positivity</a:t>
-            </a:r>
-            <a:endParaRPr lang="en-US" sz="1350" dirty="0"/>
-          </a:p>
-          <a:p>
-            <a:pPr algn="l" indent="0" marL="0">
+              <a:buSzPct val="100000"/>
+              <a:buChar char="•"/>
+            </a:pPr>
+            <a:r>
+              <a:rPr lang="en-US" sz="1400" dirty="0">
+                <a:solidFill>
+                  <a:srgbClr val="33444F"/>
+                </a:solidFill>
+                <a:latin typeface="Calibri" pitchFamily="34" charset="0"/>
+                <a:ea typeface="Calibri" pitchFamily="34" charset="-122"/>
+                <a:cs typeface="Calibri" pitchFamily="34" charset="-120"/>
+              </a:rPr>
+              <a:t>Repeat cultures and clinical correlation resolve ambiguity.</a:t>
+            </a:r>
+            <a:endParaRPr lang="en-US" sz="1400" dirty="0"/>
+          </a:p>
+          <a:p>
+            <a:pPr algn="l" marL="177800" indent="-177800">
               <a:spcAft>
-                <a:spcPts val="600"/>
+                <a:spcPts val="900"/>
               </a:spcAft>
-              <a:buNone/>
-            </a:pPr>
-            <a:r>
-              <a:rPr lang="en-US" sz="1350" dirty="0">
+              <a:buSzPct val="100000"/>
+              <a:buChar char="•"/>
+            </a:pPr>
+            <a:r>
+              <a:rPr lang="en-US" sz="1400" dirty="0">
                 <a:solidFill>
                   <a:srgbClr val="33444F"/>
                 </a:solidFill>
@@ -6150,66 +6769,26 @@
                 <a:ea typeface="Calibri" pitchFamily="34" charset="-122"/>
                 <a:cs typeface="Calibri" pitchFamily="34" charset="-120"/>
               </a:rPr>
-              <a:t>C. Different organisms in each set</a:t>
-            </a:r>
-            <a:endParaRPr lang="en-US" sz="1350" dirty="0"/>
-          </a:p>
-          <a:p>
-            <a:pPr algn="l" indent="0" marL="0">
-              <a:spcAft>
-                <a:spcPts val="600"/>
-              </a:spcAft>
-              <a:buNone/>
-            </a:pPr>
-            <a:r>
-              <a:rPr lang="en-US" sz="1350" dirty="0">
-                <a:solidFill>
-                  <a:srgbClr val="33444F"/>
-                </a:solidFill>
-                <a:latin typeface="Calibri" pitchFamily="34" charset="0"/>
-                <a:ea typeface="Calibri" pitchFamily="34" charset="-122"/>
-                <a:cs typeface="Calibri" pitchFamily="34" charset="-120"/>
-              </a:rPr>
-              <a:t>D. Cutibacterium after 5 days in one bottle</a:t>
-            </a:r>
-            <a:endParaRPr lang="en-US" sz="1350" dirty="0"/>
-          </a:p>
-          <a:p>
-            <a:pPr algn="l" indent="0" marL="0">
-              <a:spcAft>
-                <a:spcPts val="600"/>
-              </a:spcAft>
-              <a:buNone/>
-            </a:pPr>
-            <a:r>
-              <a:rPr lang="en-US" sz="1350" dirty="0">
-                <a:solidFill>
-                  <a:srgbClr val="33444F"/>
-                </a:solidFill>
-                <a:latin typeface="Calibri" pitchFamily="34" charset="0"/>
-                <a:ea typeface="Calibri" pitchFamily="34" charset="-122"/>
-                <a:cs typeface="Calibri" pitchFamily="34" charset="-120"/>
-              </a:rPr>
-              <a:t>E. Diphtheroids in one bottle</a:t>
-            </a:r>
-            <a:endParaRPr lang="en-US" sz="1350" dirty="0"/>
-          </a:p>
-        </p:txBody>
-      </p:sp>
-      <p:sp>
-        <p:nvSpPr>
-          <p:cNvPr id="6" name="Shape 4"/>
-          <p:cNvSpPr/>
-          <p:nvPr/>
-        </p:nvSpPr>
-        <p:spPr>
-          <a:xfrm>
-            <a:off x="7201632" y="2395728"/>
-            <a:ext cx="4423136" cy="3246120"/>
+              <a:t>Treating contamination causes harm and cost.</a:t>
+            </a:r>
+            <a:endParaRPr lang="en-US" sz="1400" dirty="0"/>
+          </a:p>
+        </p:txBody>
+      </p:sp>
+      <p:sp>
+        <p:nvSpPr>
+          <p:cNvPr id="5" name="Shape 3"/>
+          <p:cNvSpPr/>
+          <p:nvPr/>
+        </p:nvSpPr>
+        <p:spPr>
+          <a:xfrm>
+            <a:off x="7422788" y="1554480"/>
+            <a:ext cx="4201979" cy="3977640"/>
           </a:xfrm>
           <a:prstGeom prst="roundRect">
             <a:avLst>
-              <a:gd name="adj" fmla="val 2535"/>
+              <a:gd name="adj" fmla="val 2069"/>
             </a:avLst>
           </a:prstGeom>
           <a:solidFill>
@@ -6227,67 +6806,53 @@
       </p:sp>
       <p:sp>
         <p:nvSpPr>
+          <p:cNvPr id="6" name="Text 4"/>
+          <p:cNvSpPr/>
+          <p:nvPr/>
+        </p:nvSpPr>
+        <p:spPr>
+          <a:xfrm>
+            <a:off x="7660532" y="1755648"/>
+            <a:ext cx="3744779" cy="310896"/>
+          </a:xfrm>
+          <a:prstGeom prst="rect">
+            <a:avLst/>
+          </a:prstGeom>
+          <a:noFill/>
+          <a:ln/>
+        </p:spPr>
+        <p:txBody>
+          <a:bodyPr wrap="square" lIns="0" tIns="0" rIns="0" bIns="0" rtlCol="0" anchor="ctr"/>
+          <a:lstStyle/>
+          <a:p>
+            <a:pPr indent="0" marL="0">
+              <a:buNone/>
+            </a:pPr>
+            <a:r>
+              <a:rPr lang="en-US" sz="1100" b="1" spc="140" kern="0" dirty="0">
+                <a:solidFill>
+                  <a:srgbClr val="2E7D32"/>
+                </a:solidFill>
+                <a:latin typeface="Calibri" pitchFamily="34" charset="0"/>
+                <a:ea typeface="Calibri" pitchFamily="34" charset="-122"/>
+                <a:cs typeface="Calibri" pitchFamily="34" charset="-120"/>
+              </a:rPr>
+              <a:t>TEACHING POINT</a:t>
+            </a:r>
+            <a:endParaRPr lang="en-US" sz="1100" dirty="0"/>
+          </a:p>
+        </p:txBody>
+      </p:sp>
+      <p:sp>
+        <p:nvSpPr>
           <p:cNvPr id="7" name="Text 5"/>
           <p:cNvSpPr/>
           <p:nvPr/>
         </p:nvSpPr>
         <p:spPr>
           <a:xfrm>
-            <a:off x="7439376" y="2578608"/>
-            <a:ext cx="3965936" cy="457200"/>
-          </a:xfrm>
-          <a:prstGeom prst="rect">
-            <a:avLst/>
-          </a:prstGeom>
-          <a:noFill/>
-          <a:ln/>
-        </p:spPr>
-        <p:txBody>
-          <a:bodyPr wrap="square" lIns="0" tIns="0" rIns="0" bIns="0" rtlCol="0" anchor="ctr"/>
-          <a:lstStyle/>
-          <a:p>
-            <a:pPr indent="0" marL="0">
-              <a:buNone/>
-            </a:pPr>
-            <a:r>
-              <a:rPr lang="en-US" sz="1500" b="1" dirty="0">
-                <a:solidFill>
-                  <a:srgbClr val="2E7D32"/>
-                </a:solidFill>
-                <a:latin typeface="Calibri" pitchFamily="34" charset="0"/>
-                <a:ea typeface="Calibri" pitchFamily="34" charset="-122"/>
-                <a:cs typeface="Calibri" pitchFamily="34" charset="-120"/>
-              </a:rPr>
-              <a:t>ANSWER  </a:t>
-            </a:r>
-            <a:pPr indent="0" marL="0">
-              <a:buNone/>
-            </a:pPr>
-            <a:r>
-              <a:rPr lang="en-US" sz="1500" b="1" dirty="0">
-                <a:solidFill>
-                  <a:srgbClr val="1B2A38"/>
-                </a:solidFill>
-                <a:latin typeface="Calibri" pitchFamily="34" charset="0"/>
-                <a:ea typeface="Calibri" pitchFamily="34" charset="-122"/>
-                <a:cs typeface="Calibri" pitchFamily="34" charset="-120"/>
-              </a:rPr>
-              <a:t>B — Same GNR in multiple sets, short TTP</a:t>
-            </a:r>
-            <a:endParaRPr lang="en-US" sz="1500" dirty="0"/>
-          </a:p>
-        </p:txBody>
-      </p:sp>
-      <p:sp>
-        <p:nvSpPr>
-          <p:cNvPr id="8" name="Text 6"/>
-          <p:cNvSpPr/>
-          <p:nvPr/>
-        </p:nvSpPr>
-        <p:spPr>
-          <a:xfrm>
-            <a:off x="7439376" y="3127248"/>
-            <a:ext cx="3947648" cy="2377440"/>
+            <a:off x="7660532" y="2121408"/>
+            <a:ext cx="3726491" cy="3291840"/>
           </a:xfrm>
           <a:prstGeom prst="rect">
             <a:avLst/>
@@ -6301,12 +6866,12 @@
           <a:p>
             <a:pPr algn="l" indent="0" marL="0">
               <a:lnSpc>
-                <a:spcPct val="108000"/>
+                <a:spcPct val="110000"/>
               </a:lnSpc>
               <a:buNone/>
             </a:pPr>
             <a:r>
-              <a:rPr lang="en-US" sz="1250" dirty="0">
+              <a:rPr lang="en-US" sz="1350" dirty="0">
                 <a:solidFill>
                   <a:srgbClr val="33444F"/>
                 </a:solidFill>
@@ -6314,15 +6879,15 @@
                 <a:ea typeface="Calibri" pitchFamily="34" charset="-122"/>
                 <a:cs typeface="Calibri" pitchFamily="34" charset="-120"/>
               </a:rPr>
-              <a:t>Concordant growth across sets, a typical pathogen (GNR), and short time-to-positivity all favor true bacteremia.</a:t>
-            </a:r>
-            <a:endParaRPr lang="en-US" sz="1250" dirty="0"/>
-          </a:p>
-        </p:txBody>
-      </p:sp>
-      <p:sp>
-        <p:nvSpPr>
-          <p:cNvPr id="9" name="Text 7"/>
+              <a:t>Interpret CoNS by number of positive sets, time-to-positivity, and patient context — a lone late bottle is usually a contaminant.</a:t>
+            </a:r>
+            <a:endParaRPr lang="en-US" sz="1350" dirty="0"/>
+          </a:p>
+        </p:txBody>
+      </p:sp>
+      <p:sp>
+        <p:nvSpPr>
+          <p:cNvPr id="8" name="Text 6"/>
           <p:cNvSpPr/>
           <p:nvPr/>
         </p:nvSpPr>
@@ -6361,7 +6926,7 @@
       </p:sp>
       <p:sp>
         <p:nvSpPr>
-          <p:cNvPr id="10" name="Text 8"/>
+          <p:cNvPr id="9" name="Text 7"/>
           <p:cNvSpPr/>
           <p:nvPr/>
         </p:nvSpPr>
@@ -6491,7 +7056,7 @@
                 <a:ea typeface="Calibri" pitchFamily="34" charset="-122"/>
                 <a:cs typeface="Calibri" pitchFamily="34" charset="-120"/>
               </a:rPr>
-              <a:t>MICROBIOLOGY   ·   BOARD REVIEW  ·  Q3</a:t>
+              <a:t>MICROBIOLOGY   ·   CASE 3</a:t>
             </a:r>
             <a:endParaRPr lang="en-US" sz="1100" dirty="0"/>
           </a:p>
@@ -6522,7 +7087,7 @@
               <a:buNone/>
             </a:pPr>
             <a:r>
-              <a:rPr lang="en-US" sz="2600" b="1" dirty="0">
+              <a:rPr lang="en-US" sz="3000" b="1" dirty="0">
                 <a:solidFill>
                   <a:srgbClr val="0E3A5F"/>
                 </a:solidFill>
@@ -6530,190 +7095,26 @@
                 <a:ea typeface="Calibri" pitchFamily="34" charset="-122"/>
                 <a:cs typeface="Calibri" pitchFamily="34" charset="-120"/>
               </a:rPr>
-              <a:t>Board-Style Review</a:t>
-            </a:r>
-            <a:endParaRPr lang="en-US" sz="2600" dirty="0"/>
-          </a:p>
-        </p:txBody>
-      </p:sp>
-      <p:sp>
-        <p:nvSpPr>
-          <p:cNvPr id="4" name="Text 2"/>
-          <p:cNvSpPr/>
-          <p:nvPr/>
-        </p:nvSpPr>
-        <p:spPr>
-          <a:xfrm>
-            <a:off x="566928" y="1417320"/>
-            <a:ext cx="11057839" cy="914400"/>
-          </a:xfrm>
-          <a:prstGeom prst="rect">
-            <a:avLst/>
-          </a:prstGeom>
-          <a:noFill/>
-          <a:ln/>
-        </p:spPr>
-        <p:txBody>
-          <a:bodyPr wrap="square" lIns="0" tIns="0" rIns="0" bIns="0" rtlCol="0" anchor="t"/>
-          <a:lstStyle/>
-          <a:p>
-            <a:pPr algn="l" indent="0" marL="0">
-              <a:lnSpc>
-                <a:spcPct val="105000"/>
-              </a:lnSpc>
-              <a:buNone/>
-            </a:pPr>
-            <a:r>
-              <a:rPr lang="en-US" sz="1450" b="1" dirty="0">
-                <a:solidFill>
-                  <a:srgbClr val="1B2A38"/>
-                </a:solidFill>
-                <a:latin typeface="Calibri" pitchFamily="34" charset="0"/>
-                <a:ea typeface="Calibri" pitchFamily="34" charset="-122"/>
-                <a:cs typeface="Calibri" pitchFamily="34" charset="-120"/>
-              </a:rPr>
-              <a:t>Growth of Staphylococcus aureus in blood cultures should be regarded as:</a:t>
-            </a:r>
-            <a:endParaRPr lang="en-US" sz="1450" dirty="0"/>
-          </a:p>
-        </p:txBody>
-      </p:sp>
-      <p:sp>
-        <p:nvSpPr>
-          <p:cNvPr id="5" name="Text 3"/>
-          <p:cNvSpPr/>
-          <p:nvPr/>
-        </p:nvSpPr>
-        <p:spPr>
-          <a:xfrm>
-            <a:off x="658368" y="2395728"/>
-            <a:ext cx="6192390" cy="3017520"/>
-          </a:xfrm>
-          <a:prstGeom prst="rect">
-            <a:avLst/>
-          </a:prstGeom>
-          <a:noFill/>
-          <a:ln/>
-        </p:spPr>
-        <p:txBody>
-          <a:bodyPr wrap="square" lIns="0" tIns="0" rIns="0" bIns="0" rtlCol="0" anchor="t"/>
-          <a:lstStyle/>
-          <a:p>
-            <a:pPr algn="l" indent="0" marL="0">
-              <a:spcAft>
-                <a:spcPts val="600"/>
-              </a:spcAft>
-              <a:buNone/>
-            </a:pPr>
-            <a:r>
-              <a:rPr lang="en-US" sz="1350" dirty="0">
-                <a:solidFill>
-                  <a:srgbClr val="33444F"/>
-                </a:solidFill>
-                <a:latin typeface="Calibri" pitchFamily="34" charset="0"/>
-                <a:ea typeface="Calibri" pitchFamily="34" charset="-122"/>
-                <a:cs typeface="Calibri" pitchFamily="34" charset="-120"/>
-              </a:rPr>
-              <a:t>A. Usually a contaminant</a:t>
-            </a:r>
-            <a:endParaRPr lang="en-US" sz="1350" dirty="0"/>
-          </a:p>
-          <a:p>
-            <a:pPr algn="l" indent="0" marL="0">
-              <a:spcAft>
-                <a:spcPts val="600"/>
-              </a:spcAft>
-              <a:buNone/>
-            </a:pPr>
-            <a:r>
-              <a:rPr lang="en-US" sz="1350" b="1" dirty="0">
-                <a:solidFill>
-                  <a:srgbClr val="1F5722"/>
-                </a:solidFill>
-                <a:latin typeface="Calibri" pitchFamily="34" charset="0"/>
-                <a:ea typeface="Calibri" pitchFamily="34" charset="-122"/>
-                <a:cs typeface="Calibri" pitchFamily="34" charset="-120"/>
-              </a:rPr>
-              <a:t>B. Clinically significant, requiring treatment and source evaluation</a:t>
-            </a:r>
-            <a:endParaRPr lang="en-US" sz="1350" dirty="0"/>
-          </a:p>
-          <a:p>
-            <a:pPr algn="l" indent="0" marL="0">
-              <a:spcAft>
-                <a:spcPts val="600"/>
-              </a:spcAft>
-              <a:buNone/>
-            </a:pPr>
-            <a:r>
-              <a:rPr lang="en-US" sz="1350" dirty="0">
-                <a:solidFill>
-                  <a:srgbClr val="33444F"/>
-                </a:solidFill>
-                <a:latin typeface="Calibri" pitchFamily="34" charset="0"/>
-                <a:ea typeface="Calibri" pitchFamily="34" charset="-122"/>
-                <a:cs typeface="Calibri" pitchFamily="34" charset="-120"/>
-              </a:rPr>
-              <a:t>C. Ignored if the patient is afebrile</a:t>
-            </a:r>
-            <a:endParaRPr lang="en-US" sz="1350" dirty="0"/>
-          </a:p>
-          <a:p>
-            <a:pPr algn="l" indent="0" marL="0">
-              <a:spcAft>
-                <a:spcPts val="600"/>
-              </a:spcAft>
-              <a:buNone/>
-            </a:pPr>
-            <a:r>
-              <a:rPr lang="en-US" sz="1350" dirty="0">
-                <a:solidFill>
-                  <a:srgbClr val="33444F"/>
-                </a:solidFill>
-                <a:latin typeface="Calibri" pitchFamily="34" charset="0"/>
-                <a:ea typeface="Calibri" pitchFamily="34" charset="-122"/>
-                <a:cs typeface="Calibri" pitchFamily="34" charset="-120"/>
-              </a:rPr>
-              <a:t>D. Significant only with a central line</a:t>
-            </a:r>
-            <a:endParaRPr lang="en-US" sz="1350" dirty="0"/>
-          </a:p>
-          <a:p>
-            <a:pPr algn="l" indent="0" marL="0">
-              <a:spcAft>
-                <a:spcPts val="600"/>
-              </a:spcAft>
-              <a:buNone/>
-            </a:pPr>
-            <a:r>
-              <a:rPr lang="en-US" sz="1350" dirty="0">
-                <a:solidFill>
-                  <a:srgbClr val="33444F"/>
-                </a:solidFill>
-                <a:latin typeface="Calibri" pitchFamily="34" charset="0"/>
-                <a:ea typeface="Calibri" pitchFamily="34" charset="-122"/>
-                <a:cs typeface="Calibri" pitchFamily="34" charset="-120"/>
-              </a:rPr>
-              <a:t>E. A reason to stop antibiotics</a:t>
-            </a:r>
-            <a:endParaRPr lang="en-US" sz="1350" dirty="0"/>
-          </a:p>
-        </p:txBody>
-      </p:sp>
-      <p:sp>
-        <p:nvSpPr>
-          <p:cNvPr id="6" name="Shape 4"/>
-          <p:cNvSpPr/>
-          <p:nvPr/>
-        </p:nvSpPr>
-        <p:spPr>
-          <a:xfrm>
-            <a:off x="7201632" y="2395728"/>
-            <a:ext cx="4423136" cy="3246120"/>
+              <a:t>Case 3</a:t>
+            </a:r>
+            <a:endParaRPr lang="en-US" sz="3000" dirty="0"/>
+          </a:p>
+        </p:txBody>
+      </p:sp>
+      <p:sp>
+        <p:nvSpPr>
+          <p:cNvPr id="4" name="Shape 2"/>
+          <p:cNvSpPr/>
+          <p:nvPr/>
+        </p:nvSpPr>
+        <p:spPr>
+          <a:xfrm>
+            <a:off x="566928" y="1517904"/>
+            <a:ext cx="11057839" cy="2788920"/>
           </a:xfrm>
           <a:prstGeom prst="roundRect">
             <a:avLst>
-              <a:gd name="adj" fmla="val 2535"/>
+              <a:gd name="adj" fmla="val 2951"/>
             </a:avLst>
           </a:prstGeom>
           <a:solidFill>
@@ -6731,14 +7132,14 @@
       </p:sp>
       <p:sp>
         <p:nvSpPr>
-          <p:cNvPr id="7" name="Text 5"/>
-          <p:cNvSpPr/>
-          <p:nvPr/>
-        </p:nvSpPr>
-        <p:spPr>
-          <a:xfrm>
-            <a:off x="7439376" y="2578608"/>
-            <a:ext cx="3965936" cy="457200"/>
+          <p:cNvPr id="5" name="Text 3"/>
+          <p:cNvSpPr/>
+          <p:nvPr/>
+        </p:nvSpPr>
+        <p:spPr>
+          <a:xfrm>
+            <a:off x="841248" y="1700784"/>
+            <a:ext cx="5486400" cy="292608"/>
           </a:xfrm>
           <a:prstGeom prst="rect">
             <a:avLst/>
@@ -6754,7 +7155,7 @@
               <a:buNone/>
             </a:pPr>
             <a:r>
-              <a:rPr lang="en-US" sz="1500" b="1" dirty="0">
+              <a:rPr lang="en-US" sz="1100" b="1" spc="150" kern="0" dirty="0">
                 <a:solidFill>
                   <a:srgbClr val="2E7D32"/>
                 </a:solidFill>
@@ -6762,36 +7163,22 @@
                 <a:ea typeface="Calibri" pitchFamily="34" charset="-122"/>
                 <a:cs typeface="Calibri" pitchFamily="34" charset="-120"/>
               </a:rPr>
-              <a:t>ANSWER  </a:t>
-            </a:r>
-            <a:pPr indent="0" marL="0">
-              <a:buNone/>
-            </a:pPr>
-            <a:r>
-              <a:rPr lang="en-US" sz="1500" b="1" dirty="0">
-                <a:solidFill>
-                  <a:srgbClr val="1B2A38"/>
-                </a:solidFill>
-                <a:latin typeface="Calibri" pitchFamily="34" charset="0"/>
-                <a:ea typeface="Calibri" pitchFamily="34" charset="-122"/>
-                <a:cs typeface="Calibri" pitchFamily="34" charset="-120"/>
-              </a:rPr>
-              <a:t>B — Clinically significant</a:t>
-            </a:r>
-            <a:endParaRPr lang="en-US" sz="1500" dirty="0"/>
-          </a:p>
-        </p:txBody>
-      </p:sp>
-      <p:sp>
-        <p:nvSpPr>
-          <p:cNvPr id="8" name="Text 6"/>
-          <p:cNvSpPr/>
-          <p:nvPr/>
-        </p:nvSpPr>
-        <p:spPr>
-          <a:xfrm>
-            <a:off x="7439376" y="3127248"/>
-            <a:ext cx="3947648" cy="2377440"/>
+              <a:t>CLINICAL VIGNETTE</a:t>
+            </a:r>
+            <a:endParaRPr lang="en-US" sz="1100" dirty="0"/>
+          </a:p>
+        </p:txBody>
+      </p:sp>
+      <p:sp>
+        <p:nvSpPr>
+          <p:cNvPr id="6" name="Text 4"/>
+          <p:cNvSpPr/>
+          <p:nvPr/>
+        </p:nvSpPr>
+        <p:spPr>
+          <a:xfrm>
+            <a:off x="841248" y="2029968"/>
+            <a:ext cx="10509199" cy="2148840"/>
           </a:xfrm>
           <a:prstGeom prst="rect">
             <a:avLst/>
@@ -6810,7 +7197,7 @@
               <a:buNone/>
             </a:pPr>
             <a:r>
-              <a:rPr lang="en-US" sz="1250" dirty="0">
+              <a:rPr lang="en-US" sz="1450" dirty="0">
                 <a:solidFill>
                   <a:srgbClr val="33444F"/>
                 </a:solidFill>
@@ -6818,15 +7205,122 @@
                 <a:ea typeface="Calibri" pitchFamily="34" charset="-122"/>
                 <a:cs typeface="Calibri" pitchFamily="34" charset="-120"/>
               </a:rPr>
-              <a:t>S. aureus bacteremia is essentially never a contaminant; it requires therapy, source evaluation (e.g., endocarditis), and follow-up cultures.</a:t>
-            </a:r>
-            <a:endParaRPr lang="en-US" sz="1250" dirty="0"/>
+              <a:t>A line-drawn culture flags positive 3 hours before the simultaneously drawn peripheral culture in a patient with a central line.</a:t>
+            </a:r>
+            <a:endParaRPr lang="en-US" sz="1450" dirty="0"/>
+          </a:p>
+        </p:txBody>
+      </p:sp>
+      <p:sp>
+        <p:nvSpPr>
+          <p:cNvPr id="7" name="Shape 5"/>
+          <p:cNvSpPr/>
+          <p:nvPr/>
+        </p:nvSpPr>
+        <p:spPr>
+          <a:xfrm>
+            <a:off x="566928" y="4553712"/>
+            <a:ext cx="11057839" cy="1325880"/>
+          </a:xfrm>
+          <a:prstGeom prst="roundRect">
+            <a:avLst>
+              <a:gd name="adj" fmla="val 6207"/>
+            </a:avLst>
+          </a:prstGeom>
+          <a:solidFill>
+            <a:srgbClr val="0E3A5F"/>
+          </a:solidFill>
+          <a:ln/>
+          <a:effectLst>
+            <a:outerShdw sx="100000" sy="100000" kx="0" ky="0" algn="bl" rotWithShape="0" blurRad="88900" dist="25400" dir="5400000">
+              <a:srgbClr val="22303C">
+                <a:alpha val="12000"/>
+              </a:srgbClr>
+            </a:outerShdw>
+          </a:effectLst>
+        </p:spPr>
+      </p:sp>
+      <p:sp>
+        <p:nvSpPr>
+          <p:cNvPr id="8" name="Text 6"/>
+          <p:cNvSpPr/>
+          <p:nvPr/>
+        </p:nvSpPr>
+        <p:spPr>
+          <a:xfrm>
+            <a:off x="822960" y="4681728"/>
+            <a:ext cx="640080" cy="960120"/>
+          </a:xfrm>
+          <a:prstGeom prst="rect">
+            <a:avLst/>
+          </a:prstGeom>
+          <a:noFill/>
+          <a:ln/>
+        </p:spPr>
+        <p:txBody>
+          <a:bodyPr wrap="square" lIns="0" tIns="0" rIns="0" bIns="0" rtlCol="0" anchor="ctr"/>
+          <a:lstStyle/>
+          <a:p>
+            <a:pPr algn="ctr" indent="0" marL="0">
+              <a:buNone/>
+            </a:pPr>
+            <a:r>
+              <a:rPr lang="en-US" sz="4000" b="1" dirty="0">
+                <a:solidFill>
+                  <a:srgbClr val="2E7D32"/>
+                </a:solidFill>
+                <a:latin typeface="Calibri" pitchFamily="34" charset="0"/>
+                <a:ea typeface="Calibri" pitchFamily="34" charset="-122"/>
+                <a:cs typeface="Calibri" pitchFamily="34" charset="-120"/>
+              </a:rPr>
+              <a:t>?</a:t>
+            </a:r>
+            <a:endParaRPr lang="en-US" sz="4000" dirty="0"/>
           </a:p>
         </p:txBody>
       </p:sp>
       <p:sp>
         <p:nvSpPr>
           <p:cNvPr id="9" name="Text 7"/>
+          <p:cNvSpPr/>
+          <p:nvPr/>
+        </p:nvSpPr>
+        <p:spPr>
+          <a:xfrm>
+            <a:off x="1618488" y="4553712"/>
+            <a:ext cx="9686239" cy="1325880"/>
+          </a:xfrm>
+          <a:prstGeom prst="rect">
+            <a:avLst/>
+          </a:prstGeom>
+          <a:noFill/>
+          <a:ln/>
+        </p:spPr>
+        <p:txBody>
+          <a:bodyPr wrap="square" lIns="0" tIns="0" rIns="0" bIns="0" rtlCol="0" anchor="ctr"/>
+          <a:lstStyle/>
+          <a:p>
+            <a:pPr algn="l" indent="0" marL="0">
+              <a:buNone/>
+            </a:pPr>
+            <a:r>
+              <a:rPr lang="en-US" sz="1500" b="1" dirty="0">
+                <a:solidFill>
+                  <a:srgbClr val="FFFFFF"/>
+                </a:solidFill>
+                <a:latin typeface="Calibri" pitchFamily="34" charset="0"/>
+                <a:ea typeface="Calibri" pitchFamily="34" charset="-122"/>
+                <a:cs typeface="Calibri" pitchFamily="34" charset="-120"/>
+              </a:rPr>
+              <a:t>What does the differential time-to-positivity suggest?</a:t>
+            </a:r>
+            <a:endParaRPr lang="en-US" sz="1500" dirty="0"/>
+          </a:p>
+        </p:txBody>
+      </p:sp>
+      <p:sp>
+        <p:nvSpPr>
+          <p:cNvPr id="10" name="Text 8"/>
           <p:cNvSpPr/>
           <p:nvPr/>
         </p:nvSpPr>
@@ -6865,7 +7359,7 @@
       </p:sp>
       <p:sp>
         <p:nvSpPr>
-          <p:cNvPr id="10" name="Text 8"/>
+          <p:cNvPr id="11" name="Text 9"/>
           <p:cNvSpPr/>
           <p:nvPr/>
         </p:nvSpPr>
@@ -6944,7 +7438,7 @@
     <p:bg>
       <p:bgPr>
         <a:solidFill>
-          <a:srgbClr val="0A2A45"/>
+          <a:srgbClr val="FFFFFF"/>
         </a:solidFill>
       </p:bgPr>
     </p:bg>
@@ -6971,7 +7465,7 @@
         <p:spPr>
           <a:xfrm>
             <a:off x="566928" y="329184"/>
-            <a:ext cx="10058400" cy="310896"/>
+            <a:ext cx="10515600" cy="310896"/>
           </a:xfrm>
           <a:prstGeom prst="rect">
             <a:avLst/>
@@ -6983,7 +7477,7 @@
           <a:bodyPr wrap="square" lIns="0" tIns="0" rIns="0" bIns="0" rtlCol="0" anchor="ctr"/>
           <a:lstStyle/>
           <a:p>
-            <a:pPr indent="0" marL="0">
+            <a:pPr algn="l" indent="0" marL="0">
               <a:buNone/>
             </a:pPr>
             <a:r>
@@ -6995,7 +7489,7 @@
                 <a:ea typeface="Calibri" pitchFamily="34" charset="-122"/>
                 <a:cs typeface="Calibri" pitchFamily="34" charset="-120"/>
               </a:rPr>
-              <a:t>MICROBIOLOGY</a:t>
+              <a:t>MICROBIOLOGY   ·   CASE 3  ·  RESOLUTION</a:t>
             </a:r>
             <a:endParaRPr lang="en-US" sz="1100" dirty="0"/>
           </a:p>
@@ -7009,8 +7503,8 @@
         </p:nvSpPr>
         <p:spPr>
           <a:xfrm>
-            <a:off x="566928" y="676656"/>
-            <a:ext cx="10972800" cy="749808"/>
+            <a:off x="566928" y="713232"/>
+            <a:ext cx="11064240" cy="749808"/>
           </a:xfrm>
           <a:prstGeom prst="rect">
             <a:avLst/>
@@ -7022,19 +7516,19 @@
           <a:bodyPr wrap="square" lIns="0" tIns="0" rIns="0" bIns="0" rtlCol="0" anchor="ctr"/>
           <a:lstStyle/>
           <a:p>
-            <a:pPr indent="0" marL="0">
+            <a:pPr algn="l" indent="0" marL="0">
               <a:buNone/>
             </a:pPr>
             <a:r>
               <a:rPr lang="en-US" sz="3000" b="1" dirty="0">
                 <a:solidFill>
-                  <a:srgbClr val="FFFFFF"/>
-                </a:solidFill>
-                <a:latin typeface="Calibri" pitchFamily="34" charset="0"/>
-                <a:ea typeface="Calibri" pitchFamily="34" charset="-122"/>
-                <a:cs typeface="Calibri" pitchFamily="34" charset="-120"/>
-              </a:rPr>
-              <a:t>Key Take-Home Points</a:t>
+                  <a:srgbClr val="0E3A5F"/>
+                </a:solidFill>
+                <a:latin typeface="Calibri" pitchFamily="34" charset="0"/>
+                <a:ea typeface="Calibri" pitchFamily="34" charset="-122"/>
+                <a:cs typeface="Calibri" pitchFamily="34" charset="-120"/>
+              </a:rPr>
+              <a:t>Case 3: Differential Time-to-Positivity</a:t>
             </a:r>
             <a:endParaRPr lang="en-US" sz="3000" dirty="0"/>
           </a:p>
@@ -7042,42 +7536,128 @@
       </p:sp>
       <p:sp>
         <p:nvSpPr>
-          <p:cNvPr id="4" name="Shape 2"/>
-          <p:cNvSpPr/>
-          <p:nvPr/>
-        </p:nvSpPr>
-        <p:spPr>
-          <a:xfrm>
-            <a:off x="566928" y="1517904"/>
-            <a:ext cx="11057839" cy="841248"/>
+          <p:cNvPr id="4" name="Text 2"/>
+          <p:cNvSpPr/>
+          <p:nvPr/>
+        </p:nvSpPr>
+        <p:spPr>
+          <a:xfrm>
+            <a:off x="566928" y="1554480"/>
+            <a:ext cx="6413547" cy="4023360"/>
+          </a:xfrm>
+          <a:prstGeom prst="rect">
+            <a:avLst/>
+          </a:prstGeom>
+          <a:noFill/>
+          <a:ln/>
+        </p:spPr>
+        <p:txBody>
+          <a:bodyPr wrap="square" lIns="0" tIns="0" rIns="0" bIns="0" rtlCol="0" anchor="t"/>
+          <a:lstStyle/>
+          <a:p>
+            <a:pPr algn="l" marL="177800" indent="-177800">
+              <a:spcAft>
+                <a:spcPts val="900"/>
+              </a:spcAft>
+              <a:buSzPct val="100000"/>
+              <a:buChar char="•"/>
+            </a:pPr>
+            <a:r>
+              <a:rPr lang="en-US" sz="1400" b="1" dirty="0">
+                <a:solidFill>
+                  <a:srgbClr val="1B2A38"/>
+                </a:solidFill>
+                <a:latin typeface="Calibri" pitchFamily="34" charset="0"/>
+                <a:ea typeface="Calibri" pitchFamily="34" charset="-122"/>
+                <a:cs typeface="Calibri" pitchFamily="34" charset="-120"/>
+              </a:rPr>
+              <a:t>Earlier positivity from the line vs peripheral draw supports a catheter-related bloodstream infection.</a:t>
+            </a:r>
+            <a:endParaRPr lang="en-US" sz="1400" dirty="0"/>
+          </a:p>
+          <a:p>
+            <a:pPr algn="l" marL="177800" indent="-177800">
+              <a:spcAft>
+                <a:spcPts val="900"/>
+              </a:spcAft>
+              <a:buSzPct val="100000"/>
+              <a:buChar char="•"/>
+            </a:pPr>
+            <a:r>
+              <a:rPr lang="en-US" sz="1400" dirty="0">
+                <a:solidFill>
+                  <a:srgbClr val="33444F"/>
+                </a:solidFill>
+                <a:latin typeface="Calibri" pitchFamily="34" charset="0"/>
+                <a:ea typeface="Calibri" pitchFamily="34" charset="-122"/>
+                <a:cs typeface="Calibri" pitchFamily="34" charset="-120"/>
+              </a:rPr>
+              <a:t>It reflects a higher organism burden at the catheter.</a:t>
+            </a:r>
+            <a:endParaRPr lang="en-US" sz="1400" dirty="0"/>
+          </a:p>
+          <a:p>
+            <a:pPr algn="l" marL="177800" indent="-177800">
+              <a:spcAft>
+                <a:spcPts val="900"/>
+              </a:spcAft>
+              <a:buSzPct val="100000"/>
+              <a:buChar char="•"/>
+            </a:pPr>
+            <a:r>
+              <a:rPr lang="en-US" sz="1400" dirty="0">
+                <a:solidFill>
+                  <a:srgbClr val="33444F"/>
+                </a:solidFill>
+                <a:latin typeface="Calibri" pitchFamily="34" charset="0"/>
+                <a:ea typeface="Calibri" pitchFamily="34" charset="-122"/>
+                <a:cs typeface="Calibri" pitchFamily="34" charset="-120"/>
+              </a:rPr>
+              <a:t>Supports line-removal and source-control decisions.</a:t>
+            </a:r>
+            <a:endParaRPr lang="en-US" sz="1400" dirty="0"/>
+          </a:p>
+          <a:p>
+            <a:pPr algn="l" marL="177800" indent="-177800">
+              <a:spcAft>
+                <a:spcPts val="900"/>
+              </a:spcAft>
+              <a:buSzPct val="100000"/>
+              <a:buChar char="•"/>
+            </a:pPr>
+            <a:r>
+              <a:rPr lang="en-US" sz="1400" dirty="0">
+                <a:solidFill>
+                  <a:srgbClr val="33444F"/>
+                </a:solidFill>
+                <a:latin typeface="Calibri" pitchFamily="34" charset="0"/>
+                <a:ea typeface="Calibri" pitchFamily="34" charset="-122"/>
+                <a:cs typeface="Calibri" pitchFamily="34" charset="-120"/>
+              </a:rPr>
+              <a:t>Requires properly paired, simultaneous draws.</a:t>
+            </a:r>
+            <a:endParaRPr lang="en-US" sz="1400" dirty="0"/>
+          </a:p>
+        </p:txBody>
+      </p:sp>
+      <p:sp>
+        <p:nvSpPr>
+          <p:cNvPr id="5" name="Shape 3"/>
+          <p:cNvSpPr/>
+          <p:nvPr/>
+        </p:nvSpPr>
+        <p:spPr>
+          <a:xfrm>
+            <a:off x="7422788" y="1554480"/>
+            <a:ext cx="4201979" cy="3977640"/>
           </a:xfrm>
           <a:prstGeom prst="roundRect">
             <a:avLst>
-              <a:gd name="adj" fmla="val 7609"/>
+              <a:gd name="adj" fmla="val 2069"/>
             </a:avLst>
           </a:prstGeom>
           <a:solidFill>
-            <a:srgbClr val="143651"/>
-          </a:solidFill>
-          <a:ln/>
-        </p:spPr>
-      </p:sp>
-      <p:sp>
-        <p:nvSpPr>
-          <p:cNvPr id="5" name="Shape 3"/>
-          <p:cNvSpPr/>
-          <p:nvPr/>
-        </p:nvSpPr>
-        <p:spPr>
-          <a:xfrm>
-            <a:off x="749808" y="1755648"/>
-            <a:ext cx="365760" cy="365760"/>
-          </a:xfrm>
-          <a:prstGeom prst="ellipse">
-            <a:avLst/>
-          </a:prstGeom>
-          <a:solidFill>
-            <a:srgbClr val="2E7D32"/>
+            <a:srgbClr val="E8F2E9"/>
           </a:solidFill>
           <a:ln/>
           <a:effectLst>
@@ -7097,8 +7677,8 @@
         </p:nvSpPr>
         <p:spPr>
           <a:xfrm>
-            <a:off x="749808" y="1755648"/>
-            <a:ext cx="365760" cy="365760"/>
+            <a:off x="7660532" y="1755648"/>
+            <a:ext cx="3744779" cy="310896"/>
           </a:xfrm>
           <a:prstGeom prst="rect">
             <a:avLst/>
@@ -7110,21 +7690,21 @@
           <a:bodyPr wrap="square" lIns="0" tIns="0" rIns="0" bIns="0" rtlCol="0" anchor="ctr"/>
           <a:lstStyle/>
           <a:p>
-            <a:pPr algn="ctr" indent="0" marL="0">
-              <a:buNone/>
-            </a:pPr>
-            <a:r>
-              <a:rPr lang="en-US" sz="1500" b="1" dirty="0">
-                <a:solidFill>
-                  <a:srgbClr val="FFFFFF"/>
-                </a:solidFill>
-                <a:latin typeface="Calibri" pitchFamily="34" charset="0"/>
-                <a:ea typeface="Calibri" pitchFamily="34" charset="-122"/>
-                <a:cs typeface="Calibri" pitchFamily="34" charset="-120"/>
-              </a:rPr>
-              <a:t>1</a:t>
-            </a:r>
-            <a:endParaRPr lang="en-US" sz="1500" dirty="0"/>
+            <a:pPr indent="0" marL="0">
+              <a:buNone/>
+            </a:pPr>
+            <a:r>
+              <a:rPr lang="en-US" sz="1100" b="1" spc="140" kern="0" dirty="0">
+                <a:solidFill>
+                  <a:srgbClr val="2E7D32"/>
+                </a:solidFill>
+                <a:latin typeface="Calibri" pitchFamily="34" charset="0"/>
+                <a:ea typeface="Calibri" pitchFamily="34" charset="-122"/>
+                <a:cs typeface="Calibri" pitchFamily="34" charset="-120"/>
+              </a:rPr>
+              <a:t>TEACHING POINT</a:t>
+            </a:r>
+            <a:endParaRPr lang="en-US" sz="1100" dirty="0"/>
           </a:p>
         </p:txBody>
       </p:sp>
@@ -7136,8 +7716,50 @@
         </p:nvSpPr>
         <p:spPr>
           <a:xfrm>
-            <a:off x="1280160" y="1517904"/>
-            <a:ext cx="10143439" cy="841248"/>
+            <a:off x="7660532" y="2121408"/>
+            <a:ext cx="3726491" cy="3291840"/>
+          </a:xfrm>
+          <a:prstGeom prst="rect">
+            <a:avLst/>
+          </a:prstGeom>
+          <a:noFill/>
+          <a:ln/>
+        </p:spPr>
+        <p:txBody>
+          <a:bodyPr wrap="square" lIns="0" tIns="0" rIns="0" bIns="0" rtlCol="0" anchor="t"/>
+          <a:lstStyle/>
+          <a:p>
+            <a:pPr algn="l" indent="0" marL="0">
+              <a:lnSpc>
+                <a:spcPct val="110000"/>
+              </a:lnSpc>
+              <a:buNone/>
+            </a:pPr>
+            <a:r>
+              <a:rPr lang="en-US" sz="1350" dirty="0">
+                <a:solidFill>
+                  <a:srgbClr val="33444F"/>
+                </a:solidFill>
+                <a:latin typeface="Calibri" pitchFamily="34" charset="0"/>
+                <a:ea typeface="Calibri" pitchFamily="34" charset="-122"/>
+                <a:cs typeface="Calibri" pitchFamily="34" charset="-120"/>
+              </a:rPr>
+              <a:t>A clinically meaningful lead time in line vs peripheral positivity (DTP) points to the catheter as the source of bacteremia.</a:t>
+            </a:r>
+            <a:endParaRPr lang="en-US" sz="1350" dirty="0"/>
+          </a:p>
+        </p:txBody>
+      </p:sp>
+      <p:sp>
+        <p:nvSpPr>
+          <p:cNvPr id="8" name="Text 6"/>
+          <p:cNvSpPr/>
+          <p:nvPr/>
+        </p:nvSpPr>
+        <p:spPr>
+          <a:xfrm>
+            <a:off x="566928" y="6473952"/>
+            <a:ext cx="7772400" cy="274320"/>
           </a:xfrm>
           <a:prstGeom prst="rect">
             <a:avLst/>
@@ -7153,79 +7775,30 @@
               <a:buNone/>
             </a:pPr>
             <a:r>
-              <a:rPr lang="en-US" sz="1350" dirty="0">
-                <a:solidFill>
-                  <a:srgbClr val="E7EEF4"/>
-                </a:solidFill>
-                <a:latin typeface="Calibri" pitchFamily="34" charset="0"/>
-                <a:ea typeface="Calibri" pitchFamily="34" charset="-122"/>
-                <a:cs typeface="Calibri" pitchFamily="34" charset="-120"/>
-              </a:rPr>
-              <a:t>Blood volume and multiple sets from separate sites are the foundations of reliable blood cultures.</a:t>
-            </a:r>
-            <a:endParaRPr lang="en-US" sz="1350" dirty="0"/>
-          </a:p>
-        </p:txBody>
-      </p:sp>
-      <p:sp>
-        <p:nvSpPr>
-          <p:cNvPr id="8" name="Shape 6"/>
-          <p:cNvSpPr/>
-          <p:nvPr/>
-        </p:nvSpPr>
-        <p:spPr>
-          <a:xfrm>
-            <a:off x="566928" y="2505456"/>
-            <a:ext cx="11057839" cy="841248"/>
-          </a:xfrm>
-          <a:prstGeom prst="roundRect">
-            <a:avLst>
-              <a:gd name="adj" fmla="val 7609"/>
-            </a:avLst>
-          </a:prstGeom>
-          <a:solidFill>
-            <a:srgbClr val="143651"/>
-          </a:solidFill>
-          <a:ln/>
-        </p:spPr>
-      </p:sp>
-      <p:sp>
-        <p:nvSpPr>
-          <p:cNvPr id="9" name="Shape 7"/>
-          <p:cNvSpPr/>
-          <p:nvPr/>
-        </p:nvSpPr>
-        <p:spPr>
-          <a:xfrm>
-            <a:off x="749808" y="2743200"/>
-            <a:ext cx="365760" cy="365760"/>
-          </a:xfrm>
-          <a:prstGeom prst="ellipse">
-            <a:avLst/>
-          </a:prstGeom>
-          <a:solidFill>
-            <a:srgbClr val="2E7D32"/>
-          </a:solidFill>
-          <a:ln/>
-          <a:effectLst>
-            <a:outerShdw sx="100000" sy="100000" kx="0" ky="0" algn="bl" rotWithShape="0" blurRad="88900" dist="25400" dir="5400000">
-              <a:srgbClr val="22303C">
-                <a:alpha val="12000"/>
-              </a:srgbClr>
-            </a:outerShdw>
-          </a:effectLst>
-        </p:spPr>
-      </p:sp>
-      <p:sp>
-        <p:nvSpPr>
-          <p:cNvPr id="10" name="Text 8"/>
-          <p:cNvSpPr/>
-          <p:nvPr/>
-        </p:nvSpPr>
-        <p:spPr>
-          <a:xfrm>
-            <a:off x="749808" y="2743200"/>
-            <a:ext cx="365760" cy="365760"/>
+              <a:rPr lang="en-US" sz="850" dirty="0">
+                <a:solidFill>
+                  <a:srgbClr val="9AA8B4"/>
+                </a:solidFill>
+                <a:latin typeface="Calibri" pitchFamily="34" charset="0"/>
+                <a:ea typeface="Calibri" pitchFamily="34" charset="-122"/>
+                <a:cs typeface="Calibri" pitchFamily="34" charset="-120"/>
+              </a:rPr>
+              <a:t>Makassed General Hospital  ·  Department of Laboratory Medicine</a:t>
+            </a:r>
+            <a:endParaRPr lang="en-US" sz="850" dirty="0"/>
+          </a:p>
+        </p:txBody>
+      </p:sp>
+      <p:sp>
+        <p:nvSpPr>
+          <p:cNvPr id="9" name="Text 7"/>
+          <p:cNvSpPr/>
+          <p:nvPr/>
+        </p:nvSpPr>
+        <p:spPr>
+          <a:xfrm>
+            <a:off x="9814255" y="6473952"/>
+            <a:ext cx="1828800" cy="274320"/>
           </a:xfrm>
           <a:prstGeom prst="rect">
             <a:avLst/>
@@ -7237,504 +7810,34 @@
           <a:bodyPr wrap="square" lIns="0" tIns="0" rIns="0" bIns="0" rtlCol="0" anchor="ctr"/>
           <a:lstStyle/>
           <a:p>
-            <a:pPr algn="ctr" indent="0" marL="0">
-              <a:buNone/>
-            </a:pPr>
-            <a:r>
-              <a:rPr lang="en-US" sz="1500" b="1" dirty="0">
-                <a:solidFill>
-                  <a:srgbClr val="FFFFFF"/>
-                </a:solidFill>
-                <a:latin typeface="Calibri" pitchFamily="34" charset="0"/>
-                <a:ea typeface="Calibri" pitchFamily="34" charset="-122"/>
-                <a:cs typeface="Calibri" pitchFamily="34" charset="-120"/>
-              </a:rPr>
-              <a:t>2</a:t>
-            </a:r>
-            <a:endParaRPr lang="en-US" sz="1500" dirty="0"/>
-          </a:p>
-        </p:txBody>
-      </p:sp>
-      <p:sp>
-        <p:nvSpPr>
-          <p:cNvPr id="11" name="Text 9"/>
-          <p:cNvSpPr/>
-          <p:nvPr/>
-        </p:nvSpPr>
-        <p:spPr>
-          <a:xfrm>
-            <a:off x="1280160" y="2505456"/>
-            <a:ext cx="10143439" cy="841248"/>
-          </a:xfrm>
-          <a:prstGeom prst="rect">
-            <a:avLst/>
-          </a:prstGeom>
-          <a:noFill/>
-          <a:ln/>
-        </p:spPr>
-        <p:txBody>
-          <a:bodyPr wrap="square" lIns="0" tIns="0" rIns="0" bIns="0" rtlCol="0" anchor="ctr"/>
-          <a:lstStyle/>
-          <a:p>
-            <a:pPr algn="l" indent="0" marL="0">
-              <a:buNone/>
-            </a:pPr>
-            <a:r>
-              <a:rPr lang="en-US" sz="1350" dirty="0">
-                <a:solidFill>
-                  <a:srgbClr val="E7EEF4"/>
-                </a:solidFill>
-                <a:latin typeface="Calibri" pitchFamily="34" charset="0"/>
-                <a:ea typeface="Calibri" pitchFamily="34" charset="-122"/>
-                <a:cs typeface="Calibri" pitchFamily="34" charset="-120"/>
-              </a:rPr>
-              <a:t>Integrate set positivity, organism identity, time-to-positivity, and clinical picture to call contaminant vs pathogen.</a:t>
-            </a:r>
-            <a:endParaRPr lang="en-US" sz="1350" dirty="0"/>
-          </a:p>
-        </p:txBody>
-      </p:sp>
-      <p:sp>
-        <p:nvSpPr>
-          <p:cNvPr id="12" name="Shape 10"/>
-          <p:cNvSpPr/>
-          <p:nvPr/>
-        </p:nvSpPr>
-        <p:spPr>
-          <a:xfrm>
-            <a:off x="566928" y="3493008"/>
-            <a:ext cx="11057839" cy="841248"/>
-          </a:xfrm>
-          <a:prstGeom prst="roundRect">
-            <a:avLst>
-              <a:gd name="adj" fmla="val 7609"/>
-            </a:avLst>
-          </a:prstGeom>
-          <a:solidFill>
-            <a:srgbClr val="143651"/>
-          </a:solidFill>
-          <a:ln/>
-        </p:spPr>
-      </p:sp>
-      <p:sp>
-        <p:nvSpPr>
-          <p:cNvPr id="13" name="Shape 11"/>
-          <p:cNvSpPr/>
-          <p:nvPr/>
-        </p:nvSpPr>
-        <p:spPr>
-          <a:xfrm>
-            <a:off x="749808" y="3730752"/>
-            <a:ext cx="365760" cy="365760"/>
-          </a:xfrm>
-          <a:prstGeom prst="ellipse">
-            <a:avLst/>
-          </a:prstGeom>
-          <a:solidFill>
-            <a:srgbClr val="2E7D32"/>
-          </a:solidFill>
-          <a:ln/>
-          <a:effectLst>
-            <a:outerShdw sx="100000" sy="100000" kx="0" ky="0" algn="bl" rotWithShape="0" blurRad="88900" dist="25400" dir="5400000">
-              <a:srgbClr val="22303C">
-                <a:alpha val="12000"/>
-              </a:srgbClr>
-            </a:outerShdw>
-          </a:effectLst>
-        </p:spPr>
-      </p:sp>
-      <p:sp>
-        <p:nvSpPr>
-          <p:cNvPr id="14" name="Text 12"/>
-          <p:cNvSpPr/>
-          <p:nvPr/>
-        </p:nvSpPr>
-        <p:spPr>
-          <a:xfrm>
-            <a:off x="749808" y="3730752"/>
-            <a:ext cx="365760" cy="365760"/>
-          </a:xfrm>
-          <a:prstGeom prst="rect">
-            <a:avLst/>
-          </a:prstGeom>
-          <a:noFill/>
-          <a:ln/>
-        </p:spPr>
-        <p:txBody>
-          <a:bodyPr wrap="square" lIns="0" tIns="0" rIns="0" bIns="0" rtlCol="0" anchor="ctr"/>
-          <a:lstStyle/>
-          <a:p>
-            <a:pPr algn="ctr" indent="0" marL="0">
-              <a:buNone/>
-            </a:pPr>
-            <a:r>
-              <a:rPr lang="en-US" sz="1500" b="1" dirty="0">
-                <a:solidFill>
-                  <a:srgbClr val="FFFFFF"/>
-                </a:solidFill>
-                <a:latin typeface="Calibri" pitchFamily="34" charset="0"/>
-                <a:ea typeface="Calibri" pitchFamily="34" charset="-122"/>
-                <a:cs typeface="Calibri" pitchFamily="34" charset="-120"/>
-              </a:rPr>
-              <a:t>3</a:t>
-            </a:r>
-            <a:endParaRPr lang="en-US" sz="1500" dirty="0"/>
-          </a:p>
-        </p:txBody>
-      </p:sp>
-      <p:sp>
-        <p:nvSpPr>
-          <p:cNvPr id="15" name="Text 13"/>
-          <p:cNvSpPr/>
-          <p:nvPr/>
-        </p:nvSpPr>
-        <p:spPr>
-          <a:xfrm>
-            <a:off x="1280160" y="3493008"/>
-            <a:ext cx="10143439" cy="841248"/>
-          </a:xfrm>
-          <a:prstGeom prst="rect">
-            <a:avLst/>
-          </a:prstGeom>
-          <a:noFill/>
-          <a:ln/>
-        </p:spPr>
-        <p:txBody>
-          <a:bodyPr wrap="square" lIns="0" tIns="0" rIns="0" bIns="0" rtlCol="0" anchor="ctr"/>
-          <a:lstStyle/>
-          <a:p>
-            <a:pPr algn="l" indent="0" marL="0">
-              <a:buNone/>
-            </a:pPr>
-            <a:r>
-              <a:rPr lang="en-US" sz="1350" dirty="0">
-                <a:solidFill>
-                  <a:srgbClr val="E7EEF4"/>
-                </a:solidFill>
-                <a:latin typeface="Calibri" pitchFamily="34" charset="0"/>
-                <a:ea typeface="Calibri" pitchFamily="34" charset="-122"/>
-                <a:cs typeface="Calibri" pitchFamily="34" charset="-120"/>
-              </a:rPr>
-              <a:t>Single-bottle skin flora (CoNS) in a well patient is usually contamination; S. aureus in blood is always significant.</a:t>
-            </a:r>
-            <a:endParaRPr lang="en-US" sz="1350" dirty="0"/>
-          </a:p>
-        </p:txBody>
-      </p:sp>
-      <p:sp>
-        <p:nvSpPr>
-          <p:cNvPr id="16" name="Shape 14"/>
-          <p:cNvSpPr/>
-          <p:nvPr/>
-        </p:nvSpPr>
-        <p:spPr>
-          <a:xfrm>
-            <a:off x="566928" y="4480560"/>
-            <a:ext cx="11057839" cy="841248"/>
-          </a:xfrm>
-          <a:prstGeom prst="roundRect">
-            <a:avLst>
-              <a:gd name="adj" fmla="val 7609"/>
-            </a:avLst>
-          </a:prstGeom>
-          <a:solidFill>
-            <a:srgbClr val="143651"/>
-          </a:solidFill>
-          <a:ln/>
-        </p:spPr>
-      </p:sp>
-      <p:sp>
-        <p:nvSpPr>
-          <p:cNvPr id="17" name="Shape 15"/>
-          <p:cNvSpPr/>
-          <p:nvPr/>
-        </p:nvSpPr>
-        <p:spPr>
-          <a:xfrm>
-            <a:off x="749808" y="4718304"/>
-            <a:ext cx="365760" cy="365760"/>
-          </a:xfrm>
-          <a:prstGeom prst="ellipse">
-            <a:avLst/>
-          </a:prstGeom>
-          <a:solidFill>
-            <a:srgbClr val="2E7D32"/>
-          </a:solidFill>
-          <a:ln/>
-          <a:effectLst>
-            <a:outerShdw sx="100000" sy="100000" kx="0" ky="0" algn="bl" rotWithShape="0" blurRad="88900" dist="25400" dir="5400000">
-              <a:srgbClr val="22303C">
-                <a:alpha val="12000"/>
-              </a:srgbClr>
-            </a:outerShdw>
-          </a:effectLst>
-        </p:spPr>
-      </p:sp>
-      <p:sp>
-        <p:nvSpPr>
-          <p:cNvPr id="18" name="Text 16"/>
-          <p:cNvSpPr/>
-          <p:nvPr/>
-        </p:nvSpPr>
-        <p:spPr>
-          <a:xfrm>
-            <a:off x="749808" y="4718304"/>
-            <a:ext cx="365760" cy="365760"/>
-          </a:xfrm>
-          <a:prstGeom prst="rect">
-            <a:avLst/>
-          </a:prstGeom>
-          <a:noFill/>
-          <a:ln/>
-        </p:spPr>
-        <p:txBody>
-          <a:bodyPr wrap="square" lIns="0" tIns="0" rIns="0" bIns="0" rtlCol="0" anchor="ctr"/>
-          <a:lstStyle/>
-          <a:p>
-            <a:pPr algn="ctr" indent="0" marL="0">
-              <a:buNone/>
-            </a:pPr>
-            <a:r>
-              <a:rPr lang="en-US" sz="1500" b="1" dirty="0">
-                <a:solidFill>
-                  <a:srgbClr val="FFFFFF"/>
-                </a:solidFill>
-                <a:latin typeface="Calibri" pitchFamily="34" charset="0"/>
-                <a:ea typeface="Calibri" pitchFamily="34" charset="-122"/>
-                <a:cs typeface="Calibri" pitchFamily="34" charset="-120"/>
-              </a:rPr>
-              <a:t>4</a:t>
-            </a:r>
-            <a:endParaRPr lang="en-US" sz="1500" dirty="0"/>
-          </a:p>
-        </p:txBody>
-      </p:sp>
-      <p:sp>
-        <p:nvSpPr>
-          <p:cNvPr id="19" name="Text 17"/>
-          <p:cNvSpPr/>
-          <p:nvPr/>
-        </p:nvSpPr>
-        <p:spPr>
-          <a:xfrm>
-            <a:off x="1280160" y="4480560"/>
-            <a:ext cx="10143439" cy="841248"/>
-          </a:xfrm>
-          <a:prstGeom prst="rect">
-            <a:avLst/>
-          </a:prstGeom>
-          <a:noFill/>
-          <a:ln/>
-        </p:spPr>
-        <p:txBody>
-          <a:bodyPr wrap="square" lIns="0" tIns="0" rIns="0" bIns="0" rtlCol="0" anchor="ctr"/>
-          <a:lstStyle/>
-          <a:p>
-            <a:pPr algn="l" indent="0" marL="0">
-              <a:buNone/>
-            </a:pPr>
-            <a:r>
-              <a:rPr lang="en-US" sz="1350" dirty="0">
-                <a:solidFill>
-                  <a:srgbClr val="E7EEF4"/>
-                </a:solidFill>
-                <a:latin typeface="Calibri" pitchFamily="34" charset="0"/>
-                <a:ea typeface="Calibri" pitchFamily="34" charset="-122"/>
-                <a:cs typeface="Calibri" pitchFamily="34" charset="-120"/>
-              </a:rPr>
-              <a:t>Rapid Gram stain/ID/resistance markers from positive bottles accelerate appropriate sepsis therapy.</a:t>
-            </a:r>
-            <a:endParaRPr lang="en-US" sz="1350" dirty="0"/>
-          </a:p>
-        </p:txBody>
-      </p:sp>
-      <p:sp>
-        <p:nvSpPr>
-          <p:cNvPr id="20" name="Shape 18"/>
-          <p:cNvSpPr/>
-          <p:nvPr/>
-        </p:nvSpPr>
-        <p:spPr>
-          <a:xfrm>
-            <a:off x="566928" y="5468112"/>
-            <a:ext cx="11057839" cy="841248"/>
-          </a:xfrm>
-          <a:prstGeom prst="roundRect">
-            <a:avLst>
-              <a:gd name="adj" fmla="val 7609"/>
-            </a:avLst>
-          </a:prstGeom>
-          <a:solidFill>
-            <a:srgbClr val="143651"/>
-          </a:solidFill>
-          <a:ln/>
-        </p:spPr>
-      </p:sp>
-      <p:sp>
-        <p:nvSpPr>
-          <p:cNvPr id="21" name="Shape 19"/>
-          <p:cNvSpPr/>
-          <p:nvPr/>
-        </p:nvSpPr>
-        <p:spPr>
-          <a:xfrm>
-            <a:off x="749808" y="5705856"/>
-            <a:ext cx="365760" cy="365760"/>
-          </a:xfrm>
-          <a:prstGeom prst="ellipse">
-            <a:avLst/>
-          </a:prstGeom>
-          <a:solidFill>
-            <a:srgbClr val="2E7D32"/>
-          </a:solidFill>
-          <a:ln/>
-          <a:effectLst>
-            <a:outerShdw sx="100000" sy="100000" kx="0" ky="0" algn="bl" rotWithShape="0" blurRad="88900" dist="25400" dir="5400000">
-              <a:srgbClr val="22303C">
-                <a:alpha val="12000"/>
-              </a:srgbClr>
-            </a:outerShdw>
-          </a:effectLst>
-        </p:spPr>
-      </p:sp>
-      <p:sp>
-        <p:nvSpPr>
-          <p:cNvPr id="22" name="Text 20"/>
-          <p:cNvSpPr/>
-          <p:nvPr/>
-        </p:nvSpPr>
-        <p:spPr>
-          <a:xfrm>
-            <a:off x="749808" y="5705856"/>
-            <a:ext cx="365760" cy="365760"/>
-          </a:xfrm>
-          <a:prstGeom prst="rect">
-            <a:avLst/>
-          </a:prstGeom>
-          <a:noFill/>
-          <a:ln/>
-        </p:spPr>
-        <p:txBody>
-          <a:bodyPr wrap="square" lIns="0" tIns="0" rIns="0" bIns="0" rtlCol="0" anchor="ctr"/>
-          <a:lstStyle/>
-          <a:p>
-            <a:pPr algn="ctr" indent="0" marL="0">
-              <a:buNone/>
-            </a:pPr>
-            <a:r>
-              <a:rPr lang="en-US" sz="1500" b="1" dirty="0">
-                <a:solidFill>
-                  <a:srgbClr val="FFFFFF"/>
-                </a:solidFill>
-                <a:latin typeface="Calibri" pitchFamily="34" charset="0"/>
-                <a:ea typeface="Calibri" pitchFamily="34" charset="-122"/>
-                <a:cs typeface="Calibri" pitchFamily="34" charset="-120"/>
-              </a:rPr>
-              <a:t>5</a:t>
-            </a:r>
-            <a:endParaRPr lang="en-US" sz="1500" dirty="0"/>
-          </a:p>
-        </p:txBody>
-      </p:sp>
-      <p:sp>
-        <p:nvSpPr>
-          <p:cNvPr id="23" name="Text 21"/>
-          <p:cNvSpPr/>
-          <p:nvPr/>
-        </p:nvSpPr>
-        <p:spPr>
-          <a:xfrm>
-            <a:off x="1280160" y="5468112"/>
-            <a:ext cx="10143439" cy="841248"/>
-          </a:xfrm>
-          <a:prstGeom prst="rect">
-            <a:avLst/>
-          </a:prstGeom>
-          <a:noFill/>
-          <a:ln/>
-        </p:spPr>
-        <p:txBody>
-          <a:bodyPr wrap="square" lIns="0" tIns="0" rIns="0" bIns="0" rtlCol="0" anchor="ctr"/>
-          <a:lstStyle/>
-          <a:p>
-            <a:pPr algn="l" indent="0" marL="0">
-              <a:buNone/>
-            </a:pPr>
-            <a:r>
-              <a:rPr lang="en-US" sz="1350" dirty="0">
-                <a:solidFill>
-                  <a:srgbClr val="E7EEF4"/>
-                </a:solidFill>
-                <a:latin typeface="Calibri" pitchFamily="34" charset="0"/>
-                <a:ea typeface="Calibri" pitchFamily="34" charset="-122"/>
-                <a:cs typeface="Calibri" pitchFamily="34" charset="-120"/>
-              </a:rPr>
-              <a:t>The laboratory partners with infection prevention on surveillance, contamination rates, and notifiable organisms.</a:t>
-            </a:r>
-            <a:endParaRPr lang="en-US" sz="1350" dirty="0"/>
-          </a:p>
-        </p:txBody>
-      </p:sp>
-      <p:sp>
-        <p:nvSpPr>
-          <p:cNvPr id="24" name="Text 22"/>
-          <p:cNvSpPr/>
-          <p:nvPr/>
-        </p:nvSpPr>
-        <p:spPr>
-          <a:xfrm>
-            <a:off x="566928" y="6473952"/>
-            <a:ext cx="8229600" cy="274320"/>
-          </a:xfrm>
-          <a:prstGeom prst="rect">
-            <a:avLst/>
-          </a:prstGeom>
-          <a:noFill/>
-          <a:ln/>
-        </p:spPr>
-        <p:txBody>
-          <a:bodyPr wrap="square" lIns="0" tIns="0" rIns="0" bIns="0" rtlCol="0" anchor="ctr"/>
-          <a:lstStyle/>
-          <a:p>
-            <a:pPr indent="0" marL="0">
+            <a:pPr algn="r" indent="0" marL="0">
               <a:buNone/>
             </a:pPr>
             <a:r>
               <a:rPr lang="en-US" sz="850" dirty="0">
                 <a:solidFill>
-                  <a:srgbClr val="5E7488"/>
-                </a:solidFill>
-                <a:latin typeface="Calibri" pitchFamily="34" charset="0"/>
-                <a:ea typeface="Calibri" pitchFamily="34" charset="-122"/>
-                <a:cs typeface="Calibri" pitchFamily="34" charset="-120"/>
-              </a:rPr>
-              <a:t>Makassed General Hospital  ·  Department of Laboratory Medicine</a:t>
-            </a:r>
-            <a:endParaRPr lang="en-US" sz="850" dirty="0"/>
-          </a:p>
-        </p:txBody>
-      </p:sp>
-      <p:sp>
-        <p:nvSpPr>
-          <p:cNvPr id="25" name="Text 23"/>
-          <p:cNvSpPr/>
-          <p:nvPr/>
-        </p:nvSpPr>
-        <p:spPr>
-          <a:xfrm>
-            <a:off x="11002975" y="6473952"/>
-            <a:ext cx="640080" cy="274320"/>
-          </a:xfrm>
-          <a:prstGeom prst="rect">
-            <a:avLst/>
-          </a:prstGeom>
-          <a:noFill/>
-          <a:ln/>
-        </p:spPr>
-        <p:txBody>
-          <a:bodyPr wrap="square" lIns="0" tIns="0" rIns="0" bIns="0" rtlCol="0" anchor="ctr"/>
-          <a:lstStyle/>
-          <a:p>
+                  <a:srgbClr val="9AA8B4"/>
+                </a:solidFill>
+                <a:latin typeface="Calibri" pitchFamily="34" charset="0"/>
+                <a:ea typeface="Calibri" pitchFamily="34" charset="-122"/>
+                <a:cs typeface="Calibri" pitchFamily="34" charset="-120"/>
+              </a:rPr>
+              <a:t>CP Lecture Series</a:t>
+            </a:r>
+            <a:pPr algn="r" indent="0" marL="0">
+              <a:buNone/>
+            </a:pPr>
+            <a:r>
+              <a:rPr lang="en-US" sz="850" dirty="0">
+                <a:solidFill>
+                  <a:srgbClr val="DCE4EC"/>
+                </a:solidFill>
+                <a:latin typeface="Calibri" pitchFamily="34" charset="0"/>
+                <a:ea typeface="Calibri" pitchFamily="34" charset="-122"/>
+                <a:cs typeface="Calibri" pitchFamily="34" charset="-120"/>
+              </a:rPr>
+              <a:t>   ·   </a:t>
+            </a:r>
             <a:pPr algn="r" indent="0" marL="0">
               <a:buNone/>
             </a:pPr>
@@ -7964,7 +8067,7 @@
                 <a:ea typeface="Calibri" pitchFamily="34" charset="-122"/>
                 <a:cs typeface="Calibri" pitchFamily="34" charset="-120"/>
               </a:rPr>
-              <a:t>Blood volume is the single biggest driver of culture yield</a:t>
+              <a:t>The single biggest driver of blood-culture yield</a:t>
             </a:r>
             <a:endParaRPr lang="en-US" sz="1150" dirty="0"/>
           </a:p>
@@ -8071,7 +8174,7 @@
                 <a:ea typeface="Calibri" pitchFamily="34" charset="-122"/>
                 <a:cs typeface="Calibri" pitchFamily="34" charset="-120"/>
               </a:rPr>
-              <a:t>Multiple sets from separate sites separate truth from contamination</a:t>
+              <a:t>Multiple sets distinguish true bacteremia from contaminants</a:t>
             </a:r>
             <a:endParaRPr lang="en-US" sz="1150" dirty="0"/>
           </a:p>
@@ -8139,7 +8242,7 @@
                 <a:ea typeface="Calibri" pitchFamily="34" charset="-122"/>
                 <a:cs typeface="Calibri" pitchFamily="34" charset="-120"/>
               </a:rPr>
-              <a:t>TTP</a:t>
+              <a:t>Alert</a:t>
             </a:r>
             <a:endParaRPr lang="en-US" sz="3600" dirty="0"/>
           </a:p>
@@ -8178,7 +8281,7 @@
                 <a:ea typeface="Calibri" pitchFamily="34" charset="-122"/>
                 <a:cs typeface="Calibri" pitchFamily="34" charset="-120"/>
               </a:rPr>
-              <a:t>Time-to-positivity helps flag true bacteremia</a:t>
+              <a:t>The lab is a frontline sensor for outbreaks</a:t>
             </a:r>
             <a:endParaRPr lang="en-US" sz="1150" dirty="0"/>
           </a:p>
@@ -8249,7 +8352,7 @@
                 <a:ea typeface="Calibri" pitchFamily="34" charset="-122"/>
                 <a:cs typeface="Calibri" pitchFamily="34" charset="-120"/>
               </a:rPr>
-              <a:t>Blood cultures are the highest-stakes routine micro test. Optimizing collection and interpreting positives — true bacteremia versus skin contaminant — directly affects sepsis care and antibiotic use.</a:t>
+              <a:t>Blood cultures are the highest-impact bacteriology test and a frequent source of error. The laboratory’s handling — volume, sets, time-to-positivity — and its infection-control role determine outcomes well beyond a single result.</a:t>
             </a:r>
             <a:endParaRPr lang="en-US" sz="1450" dirty="0"/>
           </a:p>
@@ -8292,7 +8395,7 @@
                 <a:ea typeface="Calibri" pitchFamily="34" charset="-122"/>
                 <a:cs typeface="Calibri" pitchFamily="34" charset="-120"/>
               </a:rPr>
-              <a:t>The commonest blood-culture errors are too little blood and too few sets — both degrade interpretation.</a:t>
+              <a:t>Collect enough blood, in enough sets, before antibiotics — then read positives by sets, organism, and time-to-positivity.</a:t>
             </a:r>
             <a:endParaRPr lang="en-US" sz="1300" dirty="0"/>
           </a:p>
@@ -8469,6 +8572,2845 @@
                 <a:ea typeface="Calibri" pitchFamily="34" charset="-122"/>
                 <a:cs typeface="Calibri" pitchFamily="34" charset="-120"/>
               </a:rPr>
+              <a:t>MICROBIOLOGY   ·   BOARD REVIEW  ·  Q1</a:t>
+            </a:r>
+            <a:endParaRPr lang="en-US" sz="1100" dirty="0"/>
+          </a:p>
+        </p:txBody>
+      </p:sp>
+      <p:sp>
+        <p:nvSpPr>
+          <p:cNvPr id="3" name="Text 1"/>
+          <p:cNvSpPr/>
+          <p:nvPr/>
+        </p:nvSpPr>
+        <p:spPr>
+          <a:xfrm>
+            <a:off x="566928" y="713232"/>
+            <a:ext cx="11064240" cy="749808"/>
+          </a:xfrm>
+          <a:prstGeom prst="rect">
+            <a:avLst/>
+          </a:prstGeom>
+          <a:noFill/>
+          <a:ln/>
+        </p:spPr>
+        <p:txBody>
+          <a:bodyPr wrap="square" lIns="0" tIns="0" rIns="0" bIns="0" rtlCol="0" anchor="ctr"/>
+          <a:lstStyle/>
+          <a:p>
+            <a:pPr algn="l" indent="0" marL="0">
+              <a:buNone/>
+            </a:pPr>
+            <a:r>
+              <a:rPr lang="en-US" sz="2600" b="1" dirty="0">
+                <a:solidFill>
+                  <a:srgbClr val="0E3A5F"/>
+                </a:solidFill>
+                <a:latin typeface="Calibri" pitchFamily="34" charset="0"/>
+                <a:ea typeface="Calibri" pitchFamily="34" charset="-122"/>
+                <a:cs typeface="Calibri" pitchFamily="34" charset="-120"/>
+              </a:rPr>
+              <a:t>Board-Style Review</a:t>
+            </a:r>
+            <a:endParaRPr lang="en-US" sz="2600" dirty="0"/>
+          </a:p>
+        </p:txBody>
+      </p:sp>
+      <p:sp>
+        <p:nvSpPr>
+          <p:cNvPr id="4" name="Text 2"/>
+          <p:cNvSpPr/>
+          <p:nvPr/>
+        </p:nvSpPr>
+        <p:spPr>
+          <a:xfrm>
+            <a:off x="566928" y="1417320"/>
+            <a:ext cx="11057839" cy="914400"/>
+          </a:xfrm>
+          <a:prstGeom prst="rect">
+            <a:avLst/>
+          </a:prstGeom>
+          <a:noFill/>
+          <a:ln/>
+        </p:spPr>
+        <p:txBody>
+          <a:bodyPr wrap="square" lIns="0" tIns="0" rIns="0" bIns="0" rtlCol="0" anchor="t"/>
+          <a:lstStyle/>
+          <a:p>
+            <a:pPr algn="l" indent="0" marL="0">
+              <a:lnSpc>
+                <a:spcPct val="105000"/>
+              </a:lnSpc>
+              <a:buNone/>
+            </a:pPr>
+            <a:r>
+              <a:rPr lang="en-US" sz="1450" b="1" dirty="0">
+                <a:solidFill>
+                  <a:srgbClr val="1B2A38"/>
+                </a:solidFill>
+                <a:latin typeface="Calibri" pitchFamily="34" charset="0"/>
+                <a:ea typeface="Calibri" pitchFamily="34" charset="-122"/>
+                <a:cs typeface="Calibri" pitchFamily="34" charset="-120"/>
+              </a:rPr>
+              <a:t>The most important determinant of blood-culture sensitivity is:</a:t>
+            </a:r>
+            <a:endParaRPr lang="en-US" sz="1450" dirty="0"/>
+          </a:p>
+        </p:txBody>
+      </p:sp>
+      <p:sp>
+        <p:nvSpPr>
+          <p:cNvPr id="5" name="Text 3"/>
+          <p:cNvSpPr/>
+          <p:nvPr/>
+        </p:nvSpPr>
+        <p:spPr>
+          <a:xfrm>
+            <a:off x="658368" y="2395728"/>
+            <a:ext cx="6192390" cy="3017520"/>
+          </a:xfrm>
+          <a:prstGeom prst="rect">
+            <a:avLst/>
+          </a:prstGeom>
+          <a:noFill/>
+          <a:ln/>
+        </p:spPr>
+        <p:txBody>
+          <a:bodyPr wrap="square" lIns="0" tIns="0" rIns="0" bIns="0" rtlCol="0" anchor="t"/>
+          <a:lstStyle/>
+          <a:p>
+            <a:pPr algn="l" indent="0" marL="0">
+              <a:spcAft>
+                <a:spcPts val="600"/>
+              </a:spcAft>
+              <a:buNone/>
+            </a:pPr>
+            <a:r>
+              <a:rPr lang="en-US" sz="1350" dirty="0">
+                <a:solidFill>
+                  <a:srgbClr val="33444F"/>
+                </a:solidFill>
+                <a:latin typeface="Calibri" pitchFamily="34" charset="0"/>
+                <a:ea typeface="Calibri" pitchFamily="34" charset="-122"/>
+                <a:cs typeface="Calibri" pitchFamily="34" charset="-120"/>
+              </a:rPr>
+              <a:t>A. Skin antiseptic choice</a:t>
+            </a:r>
+            <a:endParaRPr lang="en-US" sz="1350" dirty="0"/>
+          </a:p>
+          <a:p>
+            <a:pPr algn="l" indent="0" marL="0">
+              <a:spcAft>
+                <a:spcPts val="600"/>
+              </a:spcAft>
+              <a:buNone/>
+            </a:pPr>
+            <a:r>
+              <a:rPr lang="en-US" sz="1350" b="1" dirty="0">
+                <a:solidFill>
+                  <a:srgbClr val="1F5722"/>
+                </a:solidFill>
+                <a:latin typeface="Calibri" pitchFamily="34" charset="0"/>
+                <a:ea typeface="Calibri" pitchFamily="34" charset="-122"/>
+                <a:cs typeface="Calibri" pitchFamily="34" charset="-120"/>
+              </a:rPr>
+              <a:t>B. Total blood volume cultured</a:t>
+            </a:r>
+            <a:endParaRPr lang="en-US" sz="1350" dirty="0"/>
+          </a:p>
+          <a:p>
+            <a:pPr algn="l" indent="0" marL="0">
+              <a:spcAft>
+                <a:spcPts val="600"/>
+              </a:spcAft>
+              <a:buNone/>
+            </a:pPr>
+            <a:r>
+              <a:rPr lang="en-US" sz="1350" dirty="0">
+                <a:solidFill>
+                  <a:srgbClr val="33444F"/>
+                </a:solidFill>
+                <a:latin typeface="Calibri" pitchFamily="34" charset="0"/>
+                <a:ea typeface="Calibri" pitchFamily="34" charset="-122"/>
+                <a:cs typeface="Calibri" pitchFamily="34" charset="-120"/>
+              </a:rPr>
+              <a:t>C. Incubation temperature</a:t>
+            </a:r>
+            <a:endParaRPr lang="en-US" sz="1350" dirty="0"/>
+          </a:p>
+          <a:p>
+            <a:pPr algn="l" indent="0" marL="0">
+              <a:spcAft>
+                <a:spcPts val="600"/>
+              </a:spcAft>
+              <a:buNone/>
+            </a:pPr>
+            <a:r>
+              <a:rPr lang="en-US" sz="1350" dirty="0">
+                <a:solidFill>
+                  <a:srgbClr val="33444F"/>
+                </a:solidFill>
+                <a:latin typeface="Calibri" pitchFamily="34" charset="0"/>
+                <a:ea typeface="Calibri" pitchFamily="34" charset="-122"/>
+                <a:cs typeface="Calibri" pitchFamily="34" charset="-120"/>
+              </a:rPr>
+              <a:t>D. Bottle manufacturer</a:t>
+            </a:r>
+            <a:endParaRPr lang="en-US" sz="1350" dirty="0"/>
+          </a:p>
+          <a:p>
+            <a:pPr algn="l" indent="0" marL="0">
+              <a:spcAft>
+                <a:spcPts val="600"/>
+              </a:spcAft>
+              <a:buNone/>
+            </a:pPr>
+            <a:r>
+              <a:rPr lang="en-US" sz="1350" dirty="0">
+                <a:solidFill>
+                  <a:srgbClr val="33444F"/>
+                </a:solidFill>
+                <a:latin typeface="Calibri" pitchFamily="34" charset="0"/>
+                <a:ea typeface="Calibri" pitchFamily="34" charset="-122"/>
+                <a:cs typeface="Calibri" pitchFamily="34" charset="-120"/>
+              </a:rPr>
+              <a:t>E. Time of day</a:t>
+            </a:r>
+            <a:endParaRPr lang="en-US" sz="1350" dirty="0"/>
+          </a:p>
+        </p:txBody>
+      </p:sp>
+      <p:sp>
+        <p:nvSpPr>
+          <p:cNvPr id="6" name="Shape 4"/>
+          <p:cNvSpPr/>
+          <p:nvPr/>
+        </p:nvSpPr>
+        <p:spPr>
+          <a:xfrm>
+            <a:off x="7201632" y="2395728"/>
+            <a:ext cx="4423136" cy="3246120"/>
+          </a:xfrm>
+          <a:prstGeom prst="roundRect">
+            <a:avLst>
+              <a:gd name="adj" fmla="val 2535"/>
+            </a:avLst>
+          </a:prstGeom>
+          <a:solidFill>
+            <a:srgbClr val="E8F2E9"/>
+          </a:solidFill>
+          <a:ln/>
+          <a:effectLst>
+            <a:outerShdw sx="100000" sy="100000" kx="0" ky="0" algn="bl" rotWithShape="0" blurRad="88900" dist="25400" dir="5400000">
+              <a:srgbClr val="22303C">
+                <a:alpha val="12000"/>
+              </a:srgbClr>
+            </a:outerShdw>
+          </a:effectLst>
+        </p:spPr>
+      </p:sp>
+      <p:sp>
+        <p:nvSpPr>
+          <p:cNvPr id="7" name="Text 5"/>
+          <p:cNvSpPr/>
+          <p:nvPr/>
+        </p:nvSpPr>
+        <p:spPr>
+          <a:xfrm>
+            <a:off x="7439376" y="2578608"/>
+            <a:ext cx="3965936" cy="457200"/>
+          </a:xfrm>
+          <a:prstGeom prst="rect">
+            <a:avLst/>
+          </a:prstGeom>
+          <a:noFill/>
+          <a:ln/>
+        </p:spPr>
+        <p:txBody>
+          <a:bodyPr wrap="square" lIns="0" tIns="0" rIns="0" bIns="0" rtlCol="0" anchor="ctr"/>
+          <a:lstStyle/>
+          <a:p>
+            <a:pPr indent="0" marL="0">
+              <a:buNone/>
+            </a:pPr>
+            <a:r>
+              <a:rPr lang="en-US" sz="1500" b="1" dirty="0">
+                <a:solidFill>
+                  <a:srgbClr val="2E7D32"/>
+                </a:solidFill>
+                <a:latin typeface="Calibri" pitchFamily="34" charset="0"/>
+                <a:ea typeface="Calibri" pitchFamily="34" charset="-122"/>
+                <a:cs typeface="Calibri" pitchFamily="34" charset="-120"/>
+              </a:rPr>
+              <a:t>ANSWER  </a:t>
+            </a:r>
+            <a:pPr indent="0" marL="0">
+              <a:buNone/>
+            </a:pPr>
+            <a:r>
+              <a:rPr lang="en-US" sz="1500" b="1" dirty="0">
+                <a:solidFill>
+                  <a:srgbClr val="1B2A38"/>
+                </a:solidFill>
+                <a:latin typeface="Calibri" pitchFamily="34" charset="0"/>
+                <a:ea typeface="Calibri" pitchFamily="34" charset="-122"/>
+                <a:cs typeface="Calibri" pitchFamily="34" charset="-120"/>
+              </a:rPr>
+              <a:t>B — Total blood volume cultured</a:t>
+            </a:r>
+            <a:endParaRPr lang="en-US" sz="1500" dirty="0"/>
+          </a:p>
+        </p:txBody>
+      </p:sp>
+      <p:sp>
+        <p:nvSpPr>
+          <p:cNvPr id="8" name="Text 6"/>
+          <p:cNvSpPr/>
+          <p:nvPr/>
+        </p:nvSpPr>
+        <p:spPr>
+          <a:xfrm>
+            <a:off x="7439376" y="3127248"/>
+            <a:ext cx="3947648" cy="2377440"/>
+          </a:xfrm>
+          <a:prstGeom prst="rect">
+            <a:avLst/>
+          </a:prstGeom>
+          <a:noFill/>
+          <a:ln/>
+        </p:spPr>
+        <p:txBody>
+          <a:bodyPr wrap="square" lIns="0" tIns="0" rIns="0" bIns="0" rtlCol="0" anchor="t"/>
+          <a:lstStyle/>
+          <a:p>
+            <a:pPr algn="l" indent="0" marL="0">
+              <a:lnSpc>
+                <a:spcPct val="108000"/>
+              </a:lnSpc>
+              <a:buNone/>
+            </a:pPr>
+            <a:r>
+              <a:rPr lang="en-US" sz="1250" dirty="0">
+                <a:solidFill>
+                  <a:srgbClr val="33444F"/>
+                </a:solidFill>
+                <a:latin typeface="Calibri" pitchFamily="34" charset="0"/>
+                <a:ea typeface="Calibri" pitchFamily="34" charset="-122"/>
+                <a:cs typeface="Calibri" pitchFamily="34" charset="-120"/>
+              </a:rPr>
+              <a:t>Yield is directly related to inoculated volume; under-filling bottles is a leading preventable cause of false negatives.</a:t>
+            </a:r>
+            <a:endParaRPr lang="en-US" sz="1250" dirty="0"/>
+          </a:p>
+        </p:txBody>
+      </p:sp>
+      <p:sp>
+        <p:nvSpPr>
+          <p:cNvPr id="9" name="Text 7"/>
+          <p:cNvSpPr/>
+          <p:nvPr/>
+        </p:nvSpPr>
+        <p:spPr>
+          <a:xfrm>
+            <a:off x="566928" y="6473952"/>
+            <a:ext cx="7772400" cy="274320"/>
+          </a:xfrm>
+          <a:prstGeom prst="rect">
+            <a:avLst/>
+          </a:prstGeom>
+          <a:noFill/>
+          <a:ln/>
+        </p:spPr>
+        <p:txBody>
+          <a:bodyPr wrap="square" lIns="0" tIns="0" rIns="0" bIns="0" rtlCol="0" anchor="ctr"/>
+          <a:lstStyle/>
+          <a:p>
+            <a:pPr algn="l" indent="0" marL="0">
+              <a:buNone/>
+            </a:pPr>
+            <a:r>
+              <a:rPr lang="en-US" sz="850" dirty="0">
+                <a:solidFill>
+                  <a:srgbClr val="9AA8B4"/>
+                </a:solidFill>
+                <a:latin typeface="Calibri" pitchFamily="34" charset="0"/>
+                <a:ea typeface="Calibri" pitchFamily="34" charset="-122"/>
+                <a:cs typeface="Calibri" pitchFamily="34" charset="-120"/>
+              </a:rPr>
+              <a:t>Makassed General Hospital  ·  Department of Laboratory Medicine</a:t>
+            </a:r>
+            <a:endParaRPr lang="en-US" sz="850" dirty="0"/>
+          </a:p>
+        </p:txBody>
+      </p:sp>
+      <p:sp>
+        <p:nvSpPr>
+          <p:cNvPr id="10" name="Text 8"/>
+          <p:cNvSpPr/>
+          <p:nvPr/>
+        </p:nvSpPr>
+        <p:spPr>
+          <a:xfrm>
+            <a:off x="9814255" y="6473952"/>
+            <a:ext cx="1828800" cy="274320"/>
+          </a:xfrm>
+          <a:prstGeom prst="rect">
+            <a:avLst/>
+          </a:prstGeom>
+          <a:noFill/>
+          <a:ln/>
+        </p:spPr>
+        <p:txBody>
+          <a:bodyPr wrap="square" lIns="0" tIns="0" rIns="0" bIns="0" rtlCol="0" anchor="ctr"/>
+          <a:lstStyle/>
+          <a:p>
+            <a:pPr algn="r" indent="0" marL="0">
+              <a:buNone/>
+            </a:pPr>
+            <a:r>
+              <a:rPr lang="en-US" sz="850" dirty="0">
+                <a:solidFill>
+                  <a:srgbClr val="9AA8B4"/>
+                </a:solidFill>
+                <a:latin typeface="Calibri" pitchFamily="34" charset="0"/>
+                <a:ea typeface="Calibri" pitchFamily="34" charset="-122"/>
+                <a:cs typeface="Calibri" pitchFamily="34" charset="-120"/>
+              </a:rPr>
+              <a:t>CP Lecture Series</a:t>
+            </a:r>
+            <a:pPr algn="r" indent="0" marL="0">
+              <a:buNone/>
+            </a:pPr>
+            <a:r>
+              <a:rPr lang="en-US" sz="850" dirty="0">
+                <a:solidFill>
+                  <a:srgbClr val="DCE4EC"/>
+                </a:solidFill>
+                <a:latin typeface="Calibri" pitchFamily="34" charset="0"/>
+                <a:ea typeface="Calibri" pitchFamily="34" charset="-122"/>
+                <a:cs typeface="Calibri" pitchFamily="34" charset="-120"/>
+              </a:rPr>
+              <a:t>   ·   </a:t>
+            </a:r>
+            <a:pPr algn="r" indent="0" marL="0">
+              <a:buNone/>
+            </a:pPr>
+            <a:r>
+              <a:rPr lang="en-US" sz="850" b="1" dirty="0">
+                <a:solidFill>
+                  <a:srgbClr val="2E7D32"/>
+                </a:solidFill>
+                <a:latin typeface="Calibri" pitchFamily="34" charset="0"/>
+                <a:ea typeface="Calibri" pitchFamily="34" charset="-122"/>
+                <a:cs typeface="Calibri" pitchFamily="34" charset="-120"/>
+              </a:rPr>
+              <a:t>17</a:t>
+            </a:r>
+            <a:endParaRPr lang="en-US" sz="850" dirty="0"/>
+          </a:p>
+        </p:txBody>
+      </p:sp>
+    </p:spTree>
+  </p:cSld>
+  <p:clrMapOvr>
+    <a:masterClrMapping/>
+  </p:clrMapOvr>
+</p:sld>
+</file>
+
+<file path=ppt/slides/slide21.xml><?xml version="1.0" encoding="utf-8"?>
+<p:sld xmlns:a="http://schemas.openxmlformats.org/drawingml/2006/main" xmlns:r="http://schemas.openxmlformats.org/officeDocument/2006/relationships" xmlns:p="http://schemas.openxmlformats.org/presentationml/2006/main">
+  <p:cSld name="Slide 21">
+    <p:bg>
+      <p:bgPr>
+        <a:solidFill>
+          <a:srgbClr val="FFFFFF"/>
+        </a:solidFill>
+      </p:bgPr>
+    </p:bg>
+    <p:spTree>
+      <p:nvGrpSpPr>
+        <p:cNvPr id="1" name=""/>
+        <p:cNvGrpSpPr/>
+        <p:nvPr/>
+      </p:nvGrpSpPr>
+      <p:grpSpPr>
+        <a:xfrm>
+          <a:off x="0" y="0"/>
+          <a:ext cx="0" cy="0"/>
+          <a:chOff x="0" y="0"/>
+          <a:chExt cx="0" cy="0"/>
+        </a:xfrm>
+      </p:grpSpPr>
+      <p:sp>
+        <p:nvSpPr>
+          <p:cNvPr id="2" name="Text 0"/>
+          <p:cNvSpPr/>
+          <p:nvPr/>
+        </p:nvSpPr>
+        <p:spPr>
+          <a:xfrm>
+            <a:off x="566928" y="329184"/>
+            <a:ext cx="10515600" cy="310896"/>
+          </a:xfrm>
+          <a:prstGeom prst="rect">
+            <a:avLst/>
+          </a:prstGeom>
+          <a:noFill/>
+          <a:ln/>
+        </p:spPr>
+        <p:txBody>
+          <a:bodyPr wrap="square" lIns="0" tIns="0" rIns="0" bIns="0" rtlCol="0" anchor="ctr"/>
+          <a:lstStyle/>
+          <a:p>
+            <a:pPr algn="l" indent="0" marL="0">
+              <a:buNone/>
+            </a:pPr>
+            <a:r>
+              <a:rPr lang="en-US" sz="1100" b="1" spc="150" kern="0" dirty="0">
+                <a:solidFill>
+                  <a:srgbClr val="2E7D32"/>
+                </a:solidFill>
+                <a:latin typeface="Calibri" pitchFamily="34" charset="0"/>
+                <a:ea typeface="Calibri" pitchFamily="34" charset="-122"/>
+                <a:cs typeface="Calibri" pitchFamily="34" charset="-120"/>
+              </a:rPr>
+              <a:t>MICROBIOLOGY   ·   BOARD REVIEW  ·  Q2</a:t>
+            </a:r>
+            <a:endParaRPr lang="en-US" sz="1100" dirty="0"/>
+          </a:p>
+        </p:txBody>
+      </p:sp>
+      <p:sp>
+        <p:nvSpPr>
+          <p:cNvPr id="3" name="Text 1"/>
+          <p:cNvSpPr/>
+          <p:nvPr/>
+        </p:nvSpPr>
+        <p:spPr>
+          <a:xfrm>
+            <a:off x="566928" y="713232"/>
+            <a:ext cx="11064240" cy="749808"/>
+          </a:xfrm>
+          <a:prstGeom prst="rect">
+            <a:avLst/>
+          </a:prstGeom>
+          <a:noFill/>
+          <a:ln/>
+        </p:spPr>
+        <p:txBody>
+          <a:bodyPr wrap="square" lIns="0" tIns="0" rIns="0" bIns="0" rtlCol="0" anchor="ctr"/>
+          <a:lstStyle/>
+          <a:p>
+            <a:pPr algn="l" indent="0" marL="0">
+              <a:buNone/>
+            </a:pPr>
+            <a:r>
+              <a:rPr lang="en-US" sz="2600" b="1" dirty="0">
+                <a:solidFill>
+                  <a:srgbClr val="0E3A5F"/>
+                </a:solidFill>
+                <a:latin typeface="Calibri" pitchFamily="34" charset="0"/>
+                <a:ea typeface="Calibri" pitchFamily="34" charset="-122"/>
+                <a:cs typeface="Calibri" pitchFamily="34" charset="-120"/>
+              </a:rPr>
+              <a:t>Board-Style Review</a:t>
+            </a:r>
+            <a:endParaRPr lang="en-US" sz="2600" dirty="0"/>
+          </a:p>
+        </p:txBody>
+      </p:sp>
+      <p:sp>
+        <p:nvSpPr>
+          <p:cNvPr id="4" name="Text 2"/>
+          <p:cNvSpPr/>
+          <p:nvPr/>
+        </p:nvSpPr>
+        <p:spPr>
+          <a:xfrm>
+            <a:off x="566928" y="1417320"/>
+            <a:ext cx="11057839" cy="914400"/>
+          </a:xfrm>
+          <a:prstGeom prst="rect">
+            <a:avLst/>
+          </a:prstGeom>
+          <a:noFill/>
+          <a:ln/>
+        </p:spPr>
+        <p:txBody>
+          <a:bodyPr wrap="square" lIns="0" tIns="0" rIns="0" bIns="0" rtlCol="0" anchor="t"/>
+          <a:lstStyle/>
+          <a:p>
+            <a:pPr algn="l" indent="0" marL="0">
+              <a:lnSpc>
+                <a:spcPct val="105000"/>
+              </a:lnSpc>
+              <a:buNone/>
+            </a:pPr>
+            <a:r>
+              <a:rPr lang="en-US" sz="1450" b="1" dirty="0">
+                <a:solidFill>
+                  <a:srgbClr val="1B2A38"/>
+                </a:solidFill>
+                <a:latin typeface="Calibri" pitchFamily="34" charset="0"/>
+                <a:ea typeface="Calibri" pitchFamily="34" charset="-122"/>
+                <a:cs typeface="Calibri" pitchFamily="34" charset="-120"/>
+              </a:rPr>
+              <a:t>Which finding most strongly indicates true bacteremia rather than contamination?</a:t>
+            </a:r>
+            <a:endParaRPr lang="en-US" sz="1450" dirty="0"/>
+          </a:p>
+        </p:txBody>
+      </p:sp>
+      <p:sp>
+        <p:nvSpPr>
+          <p:cNvPr id="5" name="Text 3"/>
+          <p:cNvSpPr/>
+          <p:nvPr/>
+        </p:nvSpPr>
+        <p:spPr>
+          <a:xfrm>
+            <a:off x="658368" y="2395728"/>
+            <a:ext cx="6192390" cy="3017520"/>
+          </a:xfrm>
+          <a:prstGeom prst="rect">
+            <a:avLst/>
+          </a:prstGeom>
+          <a:noFill/>
+          <a:ln/>
+        </p:spPr>
+        <p:txBody>
+          <a:bodyPr wrap="square" lIns="0" tIns="0" rIns="0" bIns="0" rtlCol="0" anchor="t"/>
+          <a:lstStyle/>
+          <a:p>
+            <a:pPr algn="l" indent="0" marL="0">
+              <a:spcAft>
+                <a:spcPts val="600"/>
+              </a:spcAft>
+              <a:buNone/>
+            </a:pPr>
+            <a:r>
+              <a:rPr lang="en-US" sz="1350" dirty="0">
+                <a:solidFill>
+                  <a:srgbClr val="33444F"/>
+                </a:solidFill>
+                <a:latin typeface="Calibri" pitchFamily="34" charset="0"/>
+                <a:ea typeface="Calibri" pitchFamily="34" charset="-122"/>
+                <a:cs typeface="Calibri" pitchFamily="34" charset="-120"/>
+              </a:rPr>
+              <a:t>A. Single bottle growing CoNS at day 4</a:t>
+            </a:r>
+            <a:endParaRPr lang="en-US" sz="1350" dirty="0"/>
+          </a:p>
+          <a:p>
+            <a:pPr algn="l" indent="0" marL="0">
+              <a:spcAft>
+                <a:spcPts val="600"/>
+              </a:spcAft>
+              <a:buNone/>
+            </a:pPr>
+            <a:r>
+              <a:rPr lang="en-US" sz="1350" b="1" dirty="0">
+                <a:solidFill>
+                  <a:srgbClr val="1F5722"/>
+                </a:solidFill>
+                <a:latin typeface="Calibri" pitchFamily="34" charset="0"/>
+                <a:ea typeface="Calibri" pitchFamily="34" charset="-122"/>
+                <a:cs typeface="Calibri" pitchFamily="34" charset="-120"/>
+              </a:rPr>
+              <a:t>B. Same virulent organism in multiple sets</a:t>
+            </a:r>
+            <a:endParaRPr lang="en-US" sz="1350" dirty="0"/>
+          </a:p>
+          <a:p>
+            <a:pPr algn="l" indent="0" marL="0">
+              <a:spcAft>
+                <a:spcPts val="600"/>
+              </a:spcAft>
+              <a:buNone/>
+            </a:pPr>
+            <a:r>
+              <a:rPr lang="en-US" sz="1350" dirty="0">
+                <a:solidFill>
+                  <a:srgbClr val="33444F"/>
+                </a:solidFill>
+                <a:latin typeface="Calibri" pitchFamily="34" charset="0"/>
+                <a:ea typeface="Calibri" pitchFamily="34" charset="-122"/>
+                <a:cs typeface="Calibri" pitchFamily="34" charset="-120"/>
+              </a:rPr>
+              <a:t>C. Multiple different skin organisms</a:t>
+            </a:r>
+            <a:endParaRPr lang="en-US" sz="1350" dirty="0"/>
+          </a:p>
+          <a:p>
+            <a:pPr algn="l" indent="0" marL="0">
+              <a:spcAft>
+                <a:spcPts val="600"/>
+              </a:spcAft>
+              <a:buNone/>
+            </a:pPr>
+            <a:r>
+              <a:rPr lang="en-US" sz="1350" dirty="0">
+                <a:solidFill>
+                  <a:srgbClr val="33444F"/>
+                </a:solidFill>
+                <a:latin typeface="Calibri" pitchFamily="34" charset="0"/>
+                <a:ea typeface="Calibri" pitchFamily="34" charset="-122"/>
+                <a:cs typeface="Calibri" pitchFamily="34" charset="-120"/>
+              </a:rPr>
+              <a:t>D. Late single-bottle positivity</a:t>
+            </a:r>
+            <a:endParaRPr lang="en-US" sz="1350" dirty="0"/>
+          </a:p>
+          <a:p>
+            <a:pPr algn="l" indent="0" marL="0">
+              <a:spcAft>
+                <a:spcPts val="600"/>
+              </a:spcAft>
+              <a:buNone/>
+            </a:pPr>
+            <a:r>
+              <a:rPr lang="en-US" sz="1350" dirty="0">
+                <a:solidFill>
+                  <a:srgbClr val="33444F"/>
+                </a:solidFill>
+                <a:latin typeface="Calibri" pitchFamily="34" charset="0"/>
+                <a:ea typeface="Calibri" pitchFamily="34" charset="-122"/>
+                <a:cs typeface="Calibri" pitchFamily="34" charset="-120"/>
+              </a:rPr>
+              <a:t>E. Growth only after subculture</a:t>
+            </a:r>
+            <a:endParaRPr lang="en-US" sz="1350" dirty="0"/>
+          </a:p>
+        </p:txBody>
+      </p:sp>
+      <p:sp>
+        <p:nvSpPr>
+          <p:cNvPr id="6" name="Shape 4"/>
+          <p:cNvSpPr/>
+          <p:nvPr/>
+        </p:nvSpPr>
+        <p:spPr>
+          <a:xfrm>
+            <a:off x="7201632" y="2395728"/>
+            <a:ext cx="4423136" cy="3246120"/>
+          </a:xfrm>
+          <a:prstGeom prst="roundRect">
+            <a:avLst>
+              <a:gd name="adj" fmla="val 2535"/>
+            </a:avLst>
+          </a:prstGeom>
+          <a:solidFill>
+            <a:srgbClr val="E8F2E9"/>
+          </a:solidFill>
+          <a:ln/>
+          <a:effectLst>
+            <a:outerShdw sx="100000" sy="100000" kx="0" ky="0" algn="bl" rotWithShape="0" blurRad="88900" dist="25400" dir="5400000">
+              <a:srgbClr val="22303C">
+                <a:alpha val="12000"/>
+              </a:srgbClr>
+            </a:outerShdw>
+          </a:effectLst>
+        </p:spPr>
+      </p:sp>
+      <p:sp>
+        <p:nvSpPr>
+          <p:cNvPr id="7" name="Text 5"/>
+          <p:cNvSpPr/>
+          <p:nvPr/>
+        </p:nvSpPr>
+        <p:spPr>
+          <a:xfrm>
+            <a:off x="7439376" y="2578608"/>
+            <a:ext cx="3965936" cy="457200"/>
+          </a:xfrm>
+          <a:prstGeom prst="rect">
+            <a:avLst/>
+          </a:prstGeom>
+          <a:noFill/>
+          <a:ln/>
+        </p:spPr>
+        <p:txBody>
+          <a:bodyPr wrap="square" lIns="0" tIns="0" rIns="0" bIns="0" rtlCol="0" anchor="ctr"/>
+          <a:lstStyle/>
+          <a:p>
+            <a:pPr indent="0" marL="0">
+              <a:buNone/>
+            </a:pPr>
+            <a:r>
+              <a:rPr lang="en-US" sz="1500" b="1" dirty="0">
+                <a:solidFill>
+                  <a:srgbClr val="2E7D32"/>
+                </a:solidFill>
+                <a:latin typeface="Calibri" pitchFamily="34" charset="0"/>
+                <a:ea typeface="Calibri" pitchFamily="34" charset="-122"/>
+                <a:cs typeface="Calibri" pitchFamily="34" charset="-120"/>
+              </a:rPr>
+              <a:t>ANSWER  </a:t>
+            </a:r>
+            <a:pPr indent="0" marL="0">
+              <a:buNone/>
+            </a:pPr>
+            <a:r>
+              <a:rPr lang="en-US" sz="1500" b="1" dirty="0">
+                <a:solidFill>
+                  <a:srgbClr val="1B2A38"/>
+                </a:solidFill>
+                <a:latin typeface="Calibri" pitchFamily="34" charset="0"/>
+                <a:ea typeface="Calibri" pitchFamily="34" charset="-122"/>
+                <a:cs typeface="Calibri" pitchFamily="34" charset="-120"/>
+              </a:rPr>
+              <a:t>B — Same organism in multiple sets</a:t>
+            </a:r>
+            <a:endParaRPr lang="en-US" sz="1500" dirty="0"/>
+          </a:p>
+        </p:txBody>
+      </p:sp>
+      <p:sp>
+        <p:nvSpPr>
+          <p:cNvPr id="8" name="Text 6"/>
+          <p:cNvSpPr/>
+          <p:nvPr/>
+        </p:nvSpPr>
+        <p:spPr>
+          <a:xfrm>
+            <a:off x="7439376" y="3127248"/>
+            <a:ext cx="3947648" cy="2377440"/>
+          </a:xfrm>
+          <a:prstGeom prst="rect">
+            <a:avLst/>
+          </a:prstGeom>
+          <a:noFill/>
+          <a:ln/>
+        </p:spPr>
+        <p:txBody>
+          <a:bodyPr wrap="square" lIns="0" tIns="0" rIns="0" bIns="0" rtlCol="0" anchor="t"/>
+          <a:lstStyle/>
+          <a:p>
+            <a:pPr algn="l" indent="0" marL="0">
+              <a:lnSpc>
+                <a:spcPct val="108000"/>
+              </a:lnSpc>
+              <a:buNone/>
+            </a:pPr>
+            <a:r>
+              <a:rPr lang="en-US" sz="1250" dirty="0">
+                <a:solidFill>
+                  <a:srgbClr val="33444F"/>
+                </a:solidFill>
+                <a:latin typeface="Calibri" pitchFamily="34" charset="0"/>
+                <a:ea typeface="Calibri" pitchFamily="34" charset="-122"/>
+                <a:cs typeface="Calibri" pitchFamily="34" charset="-120"/>
+              </a:rPr>
+              <a:t>Concordant growth across sets, especially of virulent organisms, supports true bacteremia; isolated skin flora suggests contamination.</a:t>
+            </a:r>
+            <a:endParaRPr lang="en-US" sz="1250" dirty="0"/>
+          </a:p>
+        </p:txBody>
+      </p:sp>
+      <p:sp>
+        <p:nvSpPr>
+          <p:cNvPr id="9" name="Text 7"/>
+          <p:cNvSpPr/>
+          <p:nvPr/>
+        </p:nvSpPr>
+        <p:spPr>
+          <a:xfrm>
+            <a:off x="566928" y="6473952"/>
+            <a:ext cx="7772400" cy="274320"/>
+          </a:xfrm>
+          <a:prstGeom prst="rect">
+            <a:avLst/>
+          </a:prstGeom>
+          <a:noFill/>
+          <a:ln/>
+        </p:spPr>
+        <p:txBody>
+          <a:bodyPr wrap="square" lIns="0" tIns="0" rIns="0" bIns="0" rtlCol="0" anchor="ctr"/>
+          <a:lstStyle/>
+          <a:p>
+            <a:pPr algn="l" indent="0" marL="0">
+              <a:buNone/>
+            </a:pPr>
+            <a:r>
+              <a:rPr lang="en-US" sz="850" dirty="0">
+                <a:solidFill>
+                  <a:srgbClr val="9AA8B4"/>
+                </a:solidFill>
+                <a:latin typeface="Calibri" pitchFamily="34" charset="0"/>
+                <a:ea typeface="Calibri" pitchFamily="34" charset="-122"/>
+                <a:cs typeface="Calibri" pitchFamily="34" charset="-120"/>
+              </a:rPr>
+              <a:t>Makassed General Hospital  ·  Department of Laboratory Medicine</a:t>
+            </a:r>
+            <a:endParaRPr lang="en-US" sz="850" dirty="0"/>
+          </a:p>
+        </p:txBody>
+      </p:sp>
+      <p:sp>
+        <p:nvSpPr>
+          <p:cNvPr id="10" name="Text 8"/>
+          <p:cNvSpPr/>
+          <p:nvPr/>
+        </p:nvSpPr>
+        <p:spPr>
+          <a:xfrm>
+            <a:off x="9814255" y="6473952"/>
+            <a:ext cx="1828800" cy="274320"/>
+          </a:xfrm>
+          <a:prstGeom prst="rect">
+            <a:avLst/>
+          </a:prstGeom>
+          <a:noFill/>
+          <a:ln/>
+        </p:spPr>
+        <p:txBody>
+          <a:bodyPr wrap="square" lIns="0" tIns="0" rIns="0" bIns="0" rtlCol="0" anchor="ctr"/>
+          <a:lstStyle/>
+          <a:p>
+            <a:pPr algn="r" indent="0" marL="0">
+              <a:buNone/>
+            </a:pPr>
+            <a:r>
+              <a:rPr lang="en-US" sz="850" dirty="0">
+                <a:solidFill>
+                  <a:srgbClr val="9AA8B4"/>
+                </a:solidFill>
+                <a:latin typeface="Calibri" pitchFamily="34" charset="0"/>
+                <a:ea typeface="Calibri" pitchFamily="34" charset="-122"/>
+                <a:cs typeface="Calibri" pitchFamily="34" charset="-120"/>
+              </a:rPr>
+              <a:t>CP Lecture Series</a:t>
+            </a:r>
+            <a:pPr algn="r" indent="0" marL="0">
+              <a:buNone/>
+            </a:pPr>
+            <a:r>
+              <a:rPr lang="en-US" sz="850" dirty="0">
+                <a:solidFill>
+                  <a:srgbClr val="DCE4EC"/>
+                </a:solidFill>
+                <a:latin typeface="Calibri" pitchFamily="34" charset="0"/>
+                <a:ea typeface="Calibri" pitchFamily="34" charset="-122"/>
+                <a:cs typeface="Calibri" pitchFamily="34" charset="-120"/>
+              </a:rPr>
+              <a:t>   ·   </a:t>
+            </a:r>
+            <a:pPr algn="r" indent="0" marL="0">
+              <a:buNone/>
+            </a:pPr>
+            <a:r>
+              <a:rPr lang="en-US" sz="850" b="1" dirty="0">
+                <a:solidFill>
+                  <a:srgbClr val="2E7D32"/>
+                </a:solidFill>
+                <a:latin typeface="Calibri" pitchFamily="34" charset="0"/>
+                <a:ea typeface="Calibri" pitchFamily="34" charset="-122"/>
+                <a:cs typeface="Calibri" pitchFamily="34" charset="-120"/>
+              </a:rPr>
+              <a:t>18</a:t>
+            </a:r>
+            <a:endParaRPr lang="en-US" sz="850" dirty="0"/>
+          </a:p>
+        </p:txBody>
+      </p:sp>
+    </p:spTree>
+  </p:cSld>
+  <p:clrMapOvr>
+    <a:masterClrMapping/>
+  </p:clrMapOvr>
+</p:sld>
+</file>
+
+<file path=ppt/slides/slide22.xml><?xml version="1.0" encoding="utf-8"?>
+<p:sld xmlns:a="http://schemas.openxmlformats.org/drawingml/2006/main" xmlns:r="http://schemas.openxmlformats.org/officeDocument/2006/relationships" xmlns:p="http://schemas.openxmlformats.org/presentationml/2006/main">
+  <p:cSld name="Slide 22">
+    <p:bg>
+      <p:bgPr>
+        <a:solidFill>
+          <a:srgbClr val="FFFFFF"/>
+        </a:solidFill>
+      </p:bgPr>
+    </p:bg>
+    <p:spTree>
+      <p:nvGrpSpPr>
+        <p:cNvPr id="1" name=""/>
+        <p:cNvGrpSpPr/>
+        <p:nvPr/>
+      </p:nvGrpSpPr>
+      <p:grpSpPr>
+        <a:xfrm>
+          <a:off x="0" y="0"/>
+          <a:ext cx="0" cy="0"/>
+          <a:chOff x="0" y="0"/>
+          <a:chExt cx="0" cy="0"/>
+        </a:xfrm>
+      </p:grpSpPr>
+      <p:sp>
+        <p:nvSpPr>
+          <p:cNvPr id="2" name="Text 0"/>
+          <p:cNvSpPr/>
+          <p:nvPr/>
+        </p:nvSpPr>
+        <p:spPr>
+          <a:xfrm>
+            <a:off x="566928" y="329184"/>
+            <a:ext cx="10515600" cy="310896"/>
+          </a:xfrm>
+          <a:prstGeom prst="rect">
+            <a:avLst/>
+          </a:prstGeom>
+          <a:noFill/>
+          <a:ln/>
+        </p:spPr>
+        <p:txBody>
+          <a:bodyPr wrap="square" lIns="0" tIns="0" rIns="0" bIns="0" rtlCol="0" anchor="ctr"/>
+          <a:lstStyle/>
+          <a:p>
+            <a:pPr algn="l" indent="0" marL="0">
+              <a:buNone/>
+            </a:pPr>
+            <a:r>
+              <a:rPr lang="en-US" sz="1100" b="1" spc="150" kern="0" dirty="0">
+                <a:solidFill>
+                  <a:srgbClr val="2E7D32"/>
+                </a:solidFill>
+                <a:latin typeface="Calibri" pitchFamily="34" charset="0"/>
+                <a:ea typeface="Calibri" pitchFamily="34" charset="-122"/>
+                <a:cs typeface="Calibri" pitchFamily="34" charset="-120"/>
+              </a:rPr>
+              <a:t>MICROBIOLOGY   ·   BOARD REVIEW  ·  Q3</a:t>
+            </a:r>
+            <a:endParaRPr lang="en-US" sz="1100" dirty="0"/>
+          </a:p>
+        </p:txBody>
+      </p:sp>
+      <p:sp>
+        <p:nvSpPr>
+          <p:cNvPr id="3" name="Text 1"/>
+          <p:cNvSpPr/>
+          <p:nvPr/>
+        </p:nvSpPr>
+        <p:spPr>
+          <a:xfrm>
+            <a:off x="566928" y="713232"/>
+            <a:ext cx="11064240" cy="749808"/>
+          </a:xfrm>
+          <a:prstGeom prst="rect">
+            <a:avLst/>
+          </a:prstGeom>
+          <a:noFill/>
+          <a:ln/>
+        </p:spPr>
+        <p:txBody>
+          <a:bodyPr wrap="square" lIns="0" tIns="0" rIns="0" bIns="0" rtlCol="0" anchor="ctr"/>
+          <a:lstStyle/>
+          <a:p>
+            <a:pPr algn="l" indent="0" marL="0">
+              <a:buNone/>
+            </a:pPr>
+            <a:r>
+              <a:rPr lang="en-US" sz="2600" b="1" dirty="0">
+                <a:solidFill>
+                  <a:srgbClr val="0E3A5F"/>
+                </a:solidFill>
+                <a:latin typeface="Calibri" pitchFamily="34" charset="0"/>
+                <a:ea typeface="Calibri" pitchFamily="34" charset="-122"/>
+                <a:cs typeface="Calibri" pitchFamily="34" charset="-120"/>
+              </a:rPr>
+              <a:t>Board-Style Review</a:t>
+            </a:r>
+            <a:endParaRPr lang="en-US" sz="2600" dirty="0"/>
+          </a:p>
+        </p:txBody>
+      </p:sp>
+      <p:sp>
+        <p:nvSpPr>
+          <p:cNvPr id="4" name="Text 2"/>
+          <p:cNvSpPr/>
+          <p:nvPr/>
+        </p:nvSpPr>
+        <p:spPr>
+          <a:xfrm>
+            <a:off x="566928" y="1417320"/>
+            <a:ext cx="11057839" cy="914400"/>
+          </a:xfrm>
+          <a:prstGeom prst="rect">
+            <a:avLst/>
+          </a:prstGeom>
+          <a:noFill/>
+          <a:ln/>
+        </p:spPr>
+        <p:txBody>
+          <a:bodyPr wrap="square" lIns="0" tIns="0" rIns="0" bIns="0" rtlCol="0" anchor="t"/>
+          <a:lstStyle/>
+          <a:p>
+            <a:pPr algn="l" indent="0" marL="0">
+              <a:lnSpc>
+                <a:spcPct val="105000"/>
+              </a:lnSpc>
+              <a:buNone/>
+            </a:pPr>
+            <a:r>
+              <a:rPr lang="en-US" sz="1450" b="1" dirty="0">
+                <a:solidFill>
+                  <a:srgbClr val="1B2A38"/>
+                </a:solidFill>
+                <a:latin typeface="Calibri" pitchFamily="34" charset="0"/>
+                <a:ea typeface="Calibri" pitchFamily="34" charset="-122"/>
+                <a:cs typeface="Calibri" pitchFamily="34" charset="-120"/>
+              </a:rPr>
+              <a:t>A positive blood culture for S. aureus should be regarded as:</a:t>
+            </a:r>
+            <a:endParaRPr lang="en-US" sz="1450" dirty="0"/>
+          </a:p>
+        </p:txBody>
+      </p:sp>
+      <p:sp>
+        <p:nvSpPr>
+          <p:cNvPr id="5" name="Text 3"/>
+          <p:cNvSpPr/>
+          <p:nvPr/>
+        </p:nvSpPr>
+        <p:spPr>
+          <a:xfrm>
+            <a:off x="658368" y="2395728"/>
+            <a:ext cx="6192390" cy="3017520"/>
+          </a:xfrm>
+          <a:prstGeom prst="rect">
+            <a:avLst/>
+          </a:prstGeom>
+          <a:noFill/>
+          <a:ln/>
+        </p:spPr>
+        <p:txBody>
+          <a:bodyPr wrap="square" lIns="0" tIns="0" rIns="0" bIns="0" rtlCol="0" anchor="t"/>
+          <a:lstStyle/>
+          <a:p>
+            <a:pPr algn="l" indent="0" marL="0">
+              <a:spcAft>
+                <a:spcPts val="600"/>
+              </a:spcAft>
+              <a:buNone/>
+            </a:pPr>
+            <a:r>
+              <a:rPr lang="en-US" sz="1350" dirty="0">
+                <a:solidFill>
+                  <a:srgbClr val="33444F"/>
+                </a:solidFill>
+                <a:latin typeface="Calibri" pitchFamily="34" charset="0"/>
+                <a:ea typeface="Calibri" pitchFamily="34" charset="-122"/>
+                <a:cs typeface="Calibri" pitchFamily="34" charset="-120"/>
+              </a:rPr>
+              <a:t>A. A likely contaminant</a:t>
+            </a:r>
+            <a:endParaRPr lang="en-US" sz="1350" dirty="0"/>
+          </a:p>
+          <a:p>
+            <a:pPr algn="l" indent="0" marL="0">
+              <a:spcAft>
+                <a:spcPts val="600"/>
+              </a:spcAft>
+              <a:buNone/>
+            </a:pPr>
+            <a:r>
+              <a:rPr lang="en-US" sz="1350" b="1" dirty="0">
+                <a:solidFill>
+                  <a:srgbClr val="1F5722"/>
+                </a:solidFill>
+                <a:latin typeface="Calibri" pitchFamily="34" charset="0"/>
+                <a:ea typeface="Calibri" pitchFamily="34" charset="-122"/>
+                <a:cs typeface="Calibri" pitchFamily="34" charset="-120"/>
+              </a:rPr>
+              <a:t>B. Always clinically significant, warranting workup</a:t>
+            </a:r>
+            <a:endParaRPr lang="en-US" sz="1350" dirty="0"/>
+          </a:p>
+          <a:p>
+            <a:pPr algn="l" indent="0" marL="0">
+              <a:spcAft>
+                <a:spcPts val="600"/>
+              </a:spcAft>
+              <a:buNone/>
+            </a:pPr>
+            <a:r>
+              <a:rPr lang="en-US" sz="1350" dirty="0">
+                <a:solidFill>
+                  <a:srgbClr val="33444F"/>
+                </a:solidFill>
+                <a:latin typeface="Calibri" pitchFamily="34" charset="0"/>
+                <a:ea typeface="Calibri" pitchFamily="34" charset="-122"/>
+                <a:cs typeface="Calibri" pitchFamily="34" charset="-120"/>
+              </a:rPr>
+              <a:t>C. Ignorable if the patient is afebrile</a:t>
+            </a:r>
+            <a:endParaRPr lang="en-US" sz="1350" dirty="0"/>
+          </a:p>
+          <a:p>
+            <a:pPr algn="l" indent="0" marL="0">
+              <a:spcAft>
+                <a:spcPts val="600"/>
+              </a:spcAft>
+              <a:buNone/>
+            </a:pPr>
+            <a:r>
+              <a:rPr lang="en-US" sz="1350" dirty="0">
+                <a:solidFill>
+                  <a:srgbClr val="33444F"/>
+                </a:solidFill>
+                <a:latin typeface="Calibri" pitchFamily="34" charset="0"/>
+                <a:ea typeface="Calibri" pitchFamily="34" charset="-122"/>
+                <a:cs typeface="Calibri" pitchFamily="34" charset="-120"/>
+              </a:rPr>
+              <a:t>D. Significant only if 3 sets are positive</a:t>
+            </a:r>
+            <a:endParaRPr lang="en-US" sz="1350" dirty="0"/>
+          </a:p>
+          <a:p>
+            <a:pPr algn="l" indent="0" marL="0">
+              <a:spcAft>
+                <a:spcPts val="600"/>
+              </a:spcAft>
+              <a:buNone/>
+            </a:pPr>
+            <a:r>
+              <a:rPr lang="en-US" sz="1350" dirty="0">
+                <a:solidFill>
+                  <a:srgbClr val="33444F"/>
+                </a:solidFill>
+                <a:latin typeface="Calibri" pitchFamily="34" charset="0"/>
+                <a:ea typeface="Calibri" pitchFamily="34" charset="-122"/>
+                <a:cs typeface="Calibri" pitchFamily="34" charset="-120"/>
+              </a:rPr>
+              <a:t>E. A reason to stop antibiotics</a:t>
+            </a:r>
+            <a:endParaRPr lang="en-US" sz="1350" dirty="0"/>
+          </a:p>
+        </p:txBody>
+      </p:sp>
+      <p:sp>
+        <p:nvSpPr>
+          <p:cNvPr id="6" name="Shape 4"/>
+          <p:cNvSpPr/>
+          <p:nvPr/>
+        </p:nvSpPr>
+        <p:spPr>
+          <a:xfrm>
+            <a:off x="7201632" y="2395728"/>
+            <a:ext cx="4423136" cy="3246120"/>
+          </a:xfrm>
+          <a:prstGeom prst="roundRect">
+            <a:avLst>
+              <a:gd name="adj" fmla="val 2535"/>
+            </a:avLst>
+          </a:prstGeom>
+          <a:solidFill>
+            <a:srgbClr val="E8F2E9"/>
+          </a:solidFill>
+          <a:ln/>
+          <a:effectLst>
+            <a:outerShdw sx="100000" sy="100000" kx="0" ky="0" algn="bl" rotWithShape="0" blurRad="88900" dist="25400" dir="5400000">
+              <a:srgbClr val="22303C">
+                <a:alpha val="12000"/>
+              </a:srgbClr>
+            </a:outerShdw>
+          </a:effectLst>
+        </p:spPr>
+      </p:sp>
+      <p:sp>
+        <p:nvSpPr>
+          <p:cNvPr id="7" name="Text 5"/>
+          <p:cNvSpPr/>
+          <p:nvPr/>
+        </p:nvSpPr>
+        <p:spPr>
+          <a:xfrm>
+            <a:off x="7439376" y="2578608"/>
+            <a:ext cx="3965936" cy="457200"/>
+          </a:xfrm>
+          <a:prstGeom prst="rect">
+            <a:avLst/>
+          </a:prstGeom>
+          <a:noFill/>
+          <a:ln/>
+        </p:spPr>
+        <p:txBody>
+          <a:bodyPr wrap="square" lIns="0" tIns="0" rIns="0" bIns="0" rtlCol="0" anchor="ctr"/>
+          <a:lstStyle/>
+          <a:p>
+            <a:pPr indent="0" marL="0">
+              <a:buNone/>
+            </a:pPr>
+            <a:r>
+              <a:rPr lang="en-US" sz="1500" b="1" dirty="0">
+                <a:solidFill>
+                  <a:srgbClr val="2E7D32"/>
+                </a:solidFill>
+                <a:latin typeface="Calibri" pitchFamily="34" charset="0"/>
+                <a:ea typeface="Calibri" pitchFamily="34" charset="-122"/>
+                <a:cs typeface="Calibri" pitchFamily="34" charset="-120"/>
+              </a:rPr>
+              <a:t>ANSWER  </a:t>
+            </a:r>
+            <a:pPr indent="0" marL="0">
+              <a:buNone/>
+            </a:pPr>
+            <a:r>
+              <a:rPr lang="en-US" sz="1500" b="1" dirty="0">
+                <a:solidFill>
+                  <a:srgbClr val="1B2A38"/>
+                </a:solidFill>
+                <a:latin typeface="Calibri" pitchFamily="34" charset="0"/>
+                <a:ea typeface="Calibri" pitchFamily="34" charset="-122"/>
+                <a:cs typeface="Calibri" pitchFamily="34" charset="-120"/>
+              </a:rPr>
+              <a:t>B — Always significant</a:t>
+            </a:r>
+            <a:endParaRPr lang="en-US" sz="1500" dirty="0"/>
+          </a:p>
+        </p:txBody>
+      </p:sp>
+      <p:sp>
+        <p:nvSpPr>
+          <p:cNvPr id="8" name="Text 6"/>
+          <p:cNvSpPr/>
+          <p:nvPr/>
+        </p:nvSpPr>
+        <p:spPr>
+          <a:xfrm>
+            <a:off x="7439376" y="3127248"/>
+            <a:ext cx="3947648" cy="2377440"/>
+          </a:xfrm>
+          <a:prstGeom prst="rect">
+            <a:avLst/>
+          </a:prstGeom>
+          <a:noFill/>
+          <a:ln/>
+        </p:spPr>
+        <p:txBody>
+          <a:bodyPr wrap="square" lIns="0" tIns="0" rIns="0" bIns="0" rtlCol="0" anchor="t"/>
+          <a:lstStyle/>
+          <a:p>
+            <a:pPr algn="l" indent="0" marL="0">
+              <a:lnSpc>
+                <a:spcPct val="108000"/>
+              </a:lnSpc>
+              <a:buNone/>
+            </a:pPr>
+            <a:r>
+              <a:rPr lang="en-US" sz="1250" dirty="0">
+                <a:solidFill>
+                  <a:srgbClr val="33444F"/>
+                </a:solidFill>
+                <a:latin typeface="Calibri" pitchFamily="34" charset="0"/>
+                <a:ea typeface="Calibri" pitchFamily="34" charset="-122"/>
+                <a:cs typeface="Calibri" pitchFamily="34" charset="-120"/>
+              </a:rPr>
+              <a:t>S. aureus bacteremia is never treated as a contaminant; it requires source evaluation, therapy, and clearance cultures.</a:t>
+            </a:r>
+            <a:endParaRPr lang="en-US" sz="1250" dirty="0"/>
+          </a:p>
+        </p:txBody>
+      </p:sp>
+      <p:sp>
+        <p:nvSpPr>
+          <p:cNvPr id="9" name="Text 7"/>
+          <p:cNvSpPr/>
+          <p:nvPr/>
+        </p:nvSpPr>
+        <p:spPr>
+          <a:xfrm>
+            <a:off x="566928" y="6473952"/>
+            <a:ext cx="7772400" cy="274320"/>
+          </a:xfrm>
+          <a:prstGeom prst="rect">
+            <a:avLst/>
+          </a:prstGeom>
+          <a:noFill/>
+          <a:ln/>
+        </p:spPr>
+        <p:txBody>
+          <a:bodyPr wrap="square" lIns="0" tIns="0" rIns="0" bIns="0" rtlCol="0" anchor="ctr"/>
+          <a:lstStyle/>
+          <a:p>
+            <a:pPr algn="l" indent="0" marL="0">
+              <a:buNone/>
+            </a:pPr>
+            <a:r>
+              <a:rPr lang="en-US" sz="850" dirty="0">
+                <a:solidFill>
+                  <a:srgbClr val="9AA8B4"/>
+                </a:solidFill>
+                <a:latin typeface="Calibri" pitchFamily="34" charset="0"/>
+                <a:ea typeface="Calibri" pitchFamily="34" charset="-122"/>
+                <a:cs typeface="Calibri" pitchFamily="34" charset="-120"/>
+              </a:rPr>
+              <a:t>Makassed General Hospital  ·  Department of Laboratory Medicine</a:t>
+            </a:r>
+            <a:endParaRPr lang="en-US" sz="850" dirty="0"/>
+          </a:p>
+        </p:txBody>
+      </p:sp>
+      <p:sp>
+        <p:nvSpPr>
+          <p:cNvPr id="10" name="Text 8"/>
+          <p:cNvSpPr/>
+          <p:nvPr/>
+        </p:nvSpPr>
+        <p:spPr>
+          <a:xfrm>
+            <a:off x="9814255" y="6473952"/>
+            <a:ext cx="1828800" cy="274320"/>
+          </a:xfrm>
+          <a:prstGeom prst="rect">
+            <a:avLst/>
+          </a:prstGeom>
+          <a:noFill/>
+          <a:ln/>
+        </p:spPr>
+        <p:txBody>
+          <a:bodyPr wrap="square" lIns="0" tIns="0" rIns="0" bIns="0" rtlCol="0" anchor="ctr"/>
+          <a:lstStyle/>
+          <a:p>
+            <a:pPr algn="r" indent="0" marL="0">
+              <a:buNone/>
+            </a:pPr>
+            <a:r>
+              <a:rPr lang="en-US" sz="850" dirty="0">
+                <a:solidFill>
+                  <a:srgbClr val="9AA8B4"/>
+                </a:solidFill>
+                <a:latin typeface="Calibri" pitchFamily="34" charset="0"/>
+                <a:ea typeface="Calibri" pitchFamily="34" charset="-122"/>
+                <a:cs typeface="Calibri" pitchFamily="34" charset="-120"/>
+              </a:rPr>
+              <a:t>CP Lecture Series</a:t>
+            </a:r>
+            <a:pPr algn="r" indent="0" marL="0">
+              <a:buNone/>
+            </a:pPr>
+            <a:r>
+              <a:rPr lang="en-US" sz="850" dirty="0">
+                <a:solidFill>
+                  <a:srgbClr val="DCE4EC"/>
+                </a:solidFill>
+                <a:latin typeface="Calibri" pitchFamily="34" charset="0"/>
+                <a:ea typeface="Calibri" pitchFamily="34" charset="-122"/>
+                <a:cs typeface="Calibri" pitchFamily="34" charset="-120"/>
+              </a:rPr>
+              <a:t>   ·   </a:t>
+            </a:r>
+            <a:pPr algn="r" indent="0" marL="0">
+              <a:buNone/>
+            </a:pPr>
+            <a:r>
+              <a:rPr lang="en-US" sz="850" b="1" dirty="0">
+                <a:solidFill>
+                  <a:srgbClr val="2E7D32"/>
+                </a:solidFill>
+                <a:latin typeface="Calibri" pitchFamily="34" charset="0"/>
+                <a:ea typeface="Calibri" pitchFamily="34" charset="-122"/>
+                <a:cs typeface="Calibri" pitchFamily="34" charset="-120"/>
+              </a:rPr>
+              <a:t>19</a:t>
+            </a:r>
+            <a:endParaRPr lang="en-US" sz="850" dirty="0"/>
+          </a:p>
+        </p:txBody>
+      </p:sp>
+    </p:spTree>
+  </p:cSld>
+  <p:clrMapOvr>
+    <a:masterClrMapping/>
+  </p:clrMapOvr>
+</p:sld>
+</file>
+
+<file path=ppt/slides/slide23.xml><?xml version="1.0" encoding="utf-8"?>
+<p:sld xmlns:a="http://schemas.openxmlformats.org/drawingml/2006/main" xmlns:r="http://schemas.openxmlformats.org/officeDocument/2006/relationships" xmlns:p="http://schemas.openxmlformats.org/presentationml/2006/main">
+  <p:cSld name="Slide 23">
+    <p:bg>
+      <p:bgPr>
+        <a:solidFill>
+          <a:srgbClr val="FFFFFF"/>
+        </a:solidFill>
+      </p:bgPr>
+    </p:bg>
+    <p:spTree>
+      <p:nvGrpSpPr>
+        <p:cNvPr id="1" name=""/>
+        <p:cNvGrpSpPr/>
+        <p:nvPr/>
+      </p:nvGrpSpPr>
+      <p:grpSpPr>
+        <a:xfrm>
+          <a:off x="0" y="0"/>
+          <a:ext cx="0" cy="0"/>
+          <a:chOff x="0" y="0"/>
+          <a:chExt cx="0" cy="0"/>
+        </a:xfrm>
+      </p:grpSpPr>
+      <p:sp>
+        <p:nvSpPr>
+          <p:cNvPr id="2" name="Text 0"/>
+          <p:cNvSpPr/>
+          <p:nvPr/>
+        </p:nvSpPr>
+        <p:spPr>
+          <a:xfrm>
+            <a:off x="566928" y="329184"/>
+            <a:ext cx="10515600" cy="310896"/>
+          </a:xfrm>
+          <a:prstGeom prst="rect">
+            <a:avLst/>
+          </a:prstGeom>
+          <a:noFill/>
+          <a:ln/>
+        </p:spPr>
+        <p:txBody>
+          <a:bodyPr wrap="square" lIns="0" tIns="0" rIns="0" bIns="0" rtlCol="0" anchor="ctr"/>
+          <a:lstStyle/>
+          <a:p>
+            <a:pPr algn="l" indent="0" marL="0">
+              <a:buNone/>
+            </a:pPr>
+            <a:r>
+              <a:rPr lang="en-US" sz="1100" b="1" spc="150" kern="0" dirty="0">
+                <a:solidFill>
+                  <a:srgbClr val="2E7D32"/>
+                </a:solidFill>
+                <a:latin typeface="Calibri" pitchFamily="34" charset="0"/>
+                <a:ea typeface="Calibri" pitchFamily="34" charset="-122"/>
+                <a:cs typeface="Calibri" pitchFamily="34" charset="-120"/>
+              </a:rPr>
+              <a:t>MICROBIOLOGY   ·   BOARD REVIEW  ·  Q4</a:t>
+            </a:r>
+            <a:endParaRPr lang="en-US" sz="1100" dirty="0"/>
+          </a:p>
+        </p:txBody>
+      </p:sp>
+      <p:sp>
+        <p:nvSpPr>
+          <p:cNvPr id="3" name="Text 1"/>
+          <p:cNvSpPr/>
+          <p:nvPr/>
+        </p:nvSpPr>
+        <p:spPr>
+          <a:xfrm>
+            <a:off x="566928" y="713232"/>
+            <a:ext cx="11064240" cy="749808"/>
+          </a:xfrm>
+          <a:prstGeom prst="rect">
+            <a:avLst/>
+          </a:prstGeom>
+          <a:noFill/>
+          <a:ln/>
+        </p:spPr>
+        <p:txBody>
+          <a:bodyPr wrap="square" lIns="0" tIns="0" rIns="0" bIns="0" rtlCol="0" anchor="ctr"/>
+          <a:lstStyle/>
+          <a:p>
+            <a:pPr algn="l" indent="0" marL="0">
+              <a:buNone/>
+            </a:pPr>
+            <a:r>
+              <a:rPr lang="en-US" sz="2600" b="1" dirty="0">
+                <a:solidFill>
+                  <a:srgbClr val="0E3A5F"/>
+                </a:solidFill>
+                <a:latin typeface="Calibri" pitchFamily="34" charset="0"/>
+                <a:ea typeface="Calibri" pitchFamily="34" charset="-122"/>
+                <a:cs typeface="Calibri" pitchFamily="34" charset="-120"/>
+              </a:rPr>
+              <a:t>Board-Style Review</a:t>
+            </a:r>
+            <a:endParaRPr lang="en-US" sz="2600" dirty="0"/>
+          </a:p>
+        </p:txBody>
+      </p:sp>
+      <p:sp>
+        <p:nvSpPr>
+          <p:cNvPr id="4" name="Text 2"/>
+          <p:cNvSpPr/>
+          <p:nvPr/>
+        </p:nvSpPr>
+        <p:spPr>
+          <a:xfrm>
+            <a:off x="566928" y="1417320"/>
+            <a:ext cx="11057839" cy="914400"/>
+          </a:xfrm>
+          <a:prstGeom prst="rect">
+            <a:avLst/>
+          </a:prstGeom>
+          <a:noFill/>
+          <a:ln/>
+        </p:spPr>
+        <p:txBody>
+          <a:bodyPr wrap="square" lIns="0" tIns="0" rIns="0" bIns="0" rtlCol="0" anchor="t"/>
+          <a:lstStyle/>
+          <a:p>
+            <a:pPr algn="l" indent="0" marL="0">
+              <a:lnSpc>
+                <a:spcPct val="105000"/>
+              </a:lnSpc>
+              <a:buNone/>
+            </a:pPr>
+            <a:r>
+              <a:rPr lang="en-US" sz="1450" b="1" dirty="0">
+                <a:solidFill>
+                  <a:srgbClr val="1B2A38"/>
+                </a:solidFill>
+                <a:latin typeface="Calibri" pitchFamily="34" charset="0"/>
+                <a:ea typeface="Calibri" pitchFamily="34" charset="-122"/>
+                <a:cs typeface="Calibri" pitchFamily="34" charset="-120"/>
+              </a:rPr>
+              <a:t>Differential time-to-positivity (line vs peripheral) is used to assess:</a:t>
+            </a:r>
+            <a:endParaRPr lang="en-US" sz="1450" dirty="0"/>
+          </a:p>
+        </p:txBody>
+      </p:sp>
+      <p:sp>
+        <p:nvSpPr>
+          <p:cNvPr id="5" name="Text 3"/>
+          <p:cNvSpPr/>
+          <p:nvPr/>
+        </p:nvSpPr>
+        <p:spPr>
+          <a:xfrm>
+            <a:off x="658368" y="2395728"/>
+            <a:ext cx="6192390" cy="3017520"/>
+          </a:xfrm>
+          <a:prstGeom prst="rect">
+            <a:avLst/>
+          </a:prstGeom>
+          <a:noFill/>
+          <a:ln/>
+        </p:spPr>
+        <p:txBody>
+          <a:bodyPr wrap="square" lIns="0" tIns="0" rIns="0" bIns="0" rtlCol="0" anchor="t"/>
+          <a:lstStyle/>
+          <a:p>
+            <a:pPr algn="l" indent="0" marL="0">
+              <a:spcAft>
+                <a:spcPts val="600"/>
+              </a:spcAft>
+              <a:buNone/>
+            </a:pPr>
+            <a:r>
+              <a:rPr lang="en-US" sz="1350" dirty="0">
+                <a:solidFill>
+                  <a:srgbClr val="33444F"/>
+                </a:solidFill>
+                <a:latin typeface="Calibri" pitchFamily="34" charset="0"/>
+                <a:ea typeface="Calibri" pitchFamily="34" charset="-122"/>
+                <a:cs typeface="Calibri" pitchFamily="34" charset="-120"/>
+              </a:rPr>
+              <a:t>A. Antibiotic dosing</a:t>
+            </a:r>
+            <a:endParaRPr lang="en-US" sz="1350" dirty="0"/>
+          </a:p>
+          <a:p>
+            <a:pPr algn="l" indent="0" marL="0">
+              <a:spcAft>
+                <a:spcPts val="600"/>
+              </a:spcAft>
+              <a:buNone/>
+            </a:pPr>
+            <a:r>
+              <a:rPr lang="en-US" sz="1350" b="1" dirty="0">
+                <a:solidFill>
+                  <a:srgbClr val="1F5722"/>
+                </a:solidFill>
+                <a:latin typeface="Calibri" pitchFamily="34" charset="0"/>
+                <a:ea typeface="Calibri" pitchFamily="34" charset="-122"/>
+                <a:cs typeface="Calibri" pitchFamily="34" charset="-120"/>
+              </a:rPr>
+              <a:t>B. Catheter-related bloodstream infection</a:t>
+            </a:r>
+            <a:endParaRPr lang="en-US" sz="1350" dirty="0"/>
+          </a:p>
+          <a:p>
+            <a:pPr algn="l" indent="0" marL="0">
+              <a:spcAft>
+                <a:spcPts val="600"/>
+              </a:spcAft>
+              <a:buNone/>
+            </a:pPr>
+            <a:r>
+              <a:rPr lang="en-US" sz="1350" dirty="0">
+                <a:solidFill>
+                  <a:srgbClr val="33444F"/>
+                </a:solidFill>
+                <a:latin typeface="Calibri" pitchFamily="34" charset="0"/>
+                <a:ea typeface="Calibri" pitchFamily="34" charset="-122"/>
+                <a:cs typeface="Calibri" pitchFamily="34" charset="-120"/>
+              </a:rPr>
+              <a:t>C. Endocarditis duration</a:t>
+            </a:r>
+            <a:endParaRPr lang="en-US" sz="1350" dirty="0"/>
+          </a:p>
+          <a:p>
+            <a:pPr algn="l" indent="0" marL="0">
+              <a:spcAft>
+                <a:spcPts val="600"/>
+              </a:spcAft>
+              <a:buNone/>
+            </a:pPr>
+            <a:r>
+              <a:rPr lang="en-US" sz="1350" dirty="0">
+                <a:solidFill>
+                  <a:srgbClr val="33444F"/>
+                </a:solidFill>
+                <a:latin typeface="Calibri" pitchFamily="34" charset="0"/>
+                <a:ea typeface="Calibri" pitchFamily="34" charset="-122"/>
+                <a:cs typeface="Calibri" pitchFamily="34" charset="-120"/>
+              </a:rPr>
+              <a:t>D. Contamination rate</a:t>
+            </a:r>
+            <a:endParaRPr lang="en-US" sz="1350" dirty="0"/>
+          </a:p>
+          <a:p>
+            <a:pPr algn="l" indent="0" marL="0">
+              <a:spcAft>
+                <a:spcPts val="600"/>
+              </a:spcAft>
+              <a:buNone/>
+            </a:pPr>
+            <a:r>
+              <a:rPr lang="en-US" sz="1350" dirty="0">
+                <a:solidFill>
+                  <a:srgbClr val="33444F"/>
+                </a:solidFill>
+                <a:latin typeface="Calibri" pitchFamily="34" charset="0"/>
+                <a:ea typeface="Calibri" pitchFamily="34" charset="-122"/>
+                <a:cs typeface="Calibri" pitchFamily="34" charset="-120"/>
+              </a:rPr>
+              <a:t>E. The antibiogram</a:t>
+            </a:r>
+            <a:endParaRPr lang="en-US" sz="1350" dirty="0"/>
+          </a:p>
+        </p:txBody>
+      </p:sp>
+      <p:sp>
+        <p:nvSpPr>
+          <p:cNvPr id="6" name="Shape 4"/>
+          <p:cNvSpPr/>
+          <p:nvPr/>
+        </p:nvSpPr>
+        <p:spPr>
+          <a:xfrm>
+            <a:off x="7201632" y="2395728"/>
+            <a:ext cx="4423136" cy="3246120"/>
+          </a:xfrm>
+          <a:prstGeom prst="roundRect">
+            <a:avLst>
+              <a:gd name="adj" fmla="val 2535"/>
+            </a:avLst>
+          </a:prstGeom>
+          <a:solidFill>
+            <a:srgbClr val="E8F2E9"/>
+          </a:solidFill>
+          <a:ln/>
+          <a:effectLst>
+            <a:outerShdw sx="100000" sy="100000" kx="0" ky="0" algn="bl" rotWithShape="0" blurRad="88900" dist="25400" dir="5400000">
+              <a:srgbClr val="22303C">
+                <a:alpha val="12000"/>
+              </a:srgbClr>
+            </a:outerShdw>
+          </a:effectLst>
+        </p:spPr>
+      </p:sp>
+      <p:sp>
+        <p:nvSpPr>
+          <p:cNvPr id="7" name="Text 5"/>
+          <p:cNvSpPr/>
+          <p:nvPr/>
+        </p:nvSpPr>
+        <p:spPr>
+          <a:xfrm>
+            <a:off x="7439376" y="2578608"/>
+            <a:ext cx="3965936" cy="457200"/>
+          </a:xfrm>
+          <a:prstGeom prst="rect">
+            <a:avLst/>
+          </a:prstGeom>
+          <a:noFill/>
+          <a:ln/>
+        </p:spPr>
+        <p:txBody>
+          <a:bodyPr wrap="square" lIns="0" tIns="0" rIns="0" bIns="0" rtlCol="0" anchor="ctr"/>
+          <a:lstStyle/>
+          <a:p>
+            <a:pPr indent="0" marL="0">
+              <a:buNone/>
+            </a:pPr>
+            <a:r>
+              <a:rPr lang="en-US" sz="1500" b="1" dirty="0">
+                <a:solidFill>
+                  <a:srgbClr val="2E7D32"/>
+                </a:solidFill>
+                <a:latin typeface="Calibri" pitchFamily="34" charset="0"/>
+                <a:ea typeface="Calibri" pitchFamily="34" charset="-122"/>
+                <a:cs typeface="Calibri" pitchFamily="34" charset="-120"/>
+              </a:rPr>
+              <a:t>ANSWER  </a:t>
+            </a:r>
+            <a:pPr indent="0" marL="0">
+              <a:buNone/>
+            </a:pPr>
+            <a:r>
+              <a:rPr lang="en-US" sz="1500" b="1" dirty="0">
+                <a:solidFill>
+                  <a:srgbClr val="1B2A38"/>
+                </a:solidFill>
+                <a:latin typeface="Calibri" pitchFamily="34" charset="0"/>
+                <a:ea typeface="Calibri" pitchFamily="34" charset="-122"/>
+                <a:cs typeface="Calibri" pitchFamily="34" charset="-120"/>
+              </a:rPr>
+              <a:t>B — Catheter-related bloodstream infection</a:t>
+            </a:r>
+            <a:endParaRPr lang="en-US" sz="1500" dirty="0"/>
+          </a:p>
+        </p:txBody>
+      </p:sp>
+      <p:sp>
+        <p:nvSpPr>
+          <p:cNvPr id="8" name="Text 6"/>
+          <p:cNvSpPr/>
+          <p:nvPr/>
+        </p:nvSpPr>
+        <p:spPr>
+          <a:xfrm>
+            <a:off x="7439376" y="3127248"/>
+            <a:ext cx="3947648" cy="2377440"/>
+          </a:xfrm>
+          <a:prstGeom prst="rect">
+            <a:avLst/>
+          </a:prstGeom>
+          <a:noFill/>
+          <a:ln/>
+        </p:spPr>
+        <p:txBody>
+          <a:bodyPr wrap="square" lIns="0" tIns="0" rIns="0" bIns="0" rtlCol="0" anchor="t"/>
+          <a:lstStyle/>
+          <a:p>
+            <a:pPr algn="l" indent="0" marL="0">
+              <a:lnSpc>
+                <a:spcPct val="108000"/>
+              </a:lnSpc>
+              <a:buNone/>
+            </a:pPr>
+            <a:r>
+              <a:rPr lang="en-US" sz="1250" dirty="0">
+                <a:solidFill>
+                  <a:srgbClr val="33444F"/>
+                </a:solidFill>
+                <a:latin typeface="Calibri" pitchFamily="34" charset="0"/>
+                <a:ea typeface="Calibri" pitchFamily="34" charset="-122"/>
+                <a:cs typeface="Calibri" pitchFamily="34" charset="-120"/>
+              </a:rPr>
+              <a:t>Markedly earlier positivity from a line draw than a paired peripheral draw supports the catheter as the bacteremia source.</a:t>
+            </a:r>
+            <a:endParaRPr lang="en-US" sz="1250" dirty="0"/>
+          </a:p>
+        </p:txBody>
+      </p:sp>
+      <p:sp>
+        <p:nvSpPr>
+          <p:cNvPr id="9" name="Text 7"/>
+          <p:cNvSpPr/>
+          <p:nvPr/>
+        </p:nvSpPr>
+        <p:spPr>
+          <a:xfrm>
+            <a:off x="566928" y="6473952"/>
+            <a:ext cx="7772400" cy="274320"/>
+          </a:xfrm>
+          <a:prstGeom prst="rect">
+            <a:avLst/>
+          </a:prstGeom>
+          <a:noFill/>
+          <a:ln/>
+        </p:spPr>
+        <p:txBody>
+          <a:bodyPr wrap="square" lIns="0" tIns="0" rIns="0" bIns="0" rtlCol="0" anchor="ctr"/>
+          <a:lstStyle/>
+          <a:p>
+            <a:pPr algn="l" indent="0" marL="0">
+              <a:buNone/>
+            </a:pPr>
+            <a:r>
+              <a:rPr lang="en-US" sz="850" dirty="0">
+                <a:solidFill>
+                  <a:srgbClr val="9AA8B4"/>
+                </a:solidFill>
+                <a:latin typeface="Calibri" pitchFamily="34" charset="0"/>
+                <a:ea typeface="Calibri" pitchFamily="34" charset="-122"/>
+                <a:cs typeface="Calibri" pitchFamily="34" charset="-120"/>
+              </a:rPr>
+              <a:t>Makassed General Hospital  ·  Department of Laboratory Medicine</a:t>
+            </a:r>
+            <a:endParaRPr lang="en-US" sz="850" dirty="0"/>
+          </a:p>
+        </p:txBody>
+      </p:sp>
+      <p:sp>
+        <p:nvSpPr>
+          <p:cNvPr id="10" name="Text 8"/>
+          <p:cNvSpPr/>
+          <p:nvPr/>
+        </p:nvSpPr>
+        <p:spPr>
+          <a:xfrm>
+            <a:off x="9814255" y="6473952"/>
+            <a:ext cx="1828800" cy="274320"/>
+          </a:xfrm>
+          <a:prstGeom prst="rect">
+            <a:avLst/>
+          </a:prstGeom>
+          <a:noFill/>
+          <a:ln/>
+        </p:spPr>
+        <p:txBody>
+          <a:bodyPr wrap="square" lIns="0" tIns="0" rIns="0" bIns="0" rtlCol="0" anchor="ctr"/>
+          <a:lstStyle/>
+          <a:p>
+            <a:pPr algn="r" indent="0" marL="0">
+              <a:buNone/>
+            </a:pPr>
+            <a:r>
+              <a:rPr lang="en-US" sz="850" dirty="0">
+                <a:solidFill>
+                  <a:srgbClr val="9AA8B4"/>
+                </a:solidFill>
+                <a:latin typeface="Calibri" pitchFamily="34" charset="0"/>
+                <a:ea typeface="Calibri" pitchFamily="34" charset="-122"/>
+                <a:cs typeface="Calibri" pitchFamily="34" charset="-120"/>
+              </a:rPr>
+              <a:t>CP Lecture Series</a:t>
+            </a:r>
+            <a:pPr algn="r" indent="0" marL="0">
+              <a:buNone/>
+            </a:pPr>
+            <a:r>
+              <a:rPr lang="en-US" sz="850" dirty="0">
+                <a:solidFill>
+                  <a:srgbClr val="DCE4EC"/>
+                </a:solidFill>
+                <a:latin typeface="Calibri" pitchFamily="34" charset="0"/>
+                <a:ea typeface="Calibri" pitchFamily="34" charset="-122"/>
+                <a:cs typeface="Calibri" pitchFamily="34" charset="-120"/>
+              </a:rPr>
+              <a:t>   ·   </a:t>
+            </a:r>
+            <a:pPr algn="r" indent="0" marL="0">
+              <a:buNone/>
+            </a:pPr>
+            <a:r>
+              <a:rPr lang="en-US" sz="850" b="1" dirty="0">
+                <a:solidFill>
+                  <a:srgbClr val="2E7D32"/>
+                </a:solidFill>
+                <a:latin typeface="Calibri" pitchFamily="34" charset="0"/>
+                <a:ea typeface="Calibri" pitchFamily="34" charset="-122"/>
+                <a:cs typeface="Calibri" pitchFamily="34" charset="-120"/>
+              </a:rPr>
+              <a:t>20</a:t>
+            </a:r>
+            <a:endParaRPr lang="en-US" sz="850" dirty="0"/>
+          </a:p>
+        </p:txBody>
+      </p:sp>
+    </p:spTree>
+  </p:cSld>
+  <p:clrMapOvr>
+    <a:masterClrMapping/>
+  </p:clrMapOvr>
+</p:sld>
+</file>
+
+<file path=ppt/slides/slide24.xml><?xml version="1.0" encoding="utf-8"?>
+<p:sld xmlns:a="http://schemas.openxmlformats.org/drawingml/2006/main" xmlns:r="http://schemas.openxmlformats.org/officeDocument/2006/relationships" xmlns:p="http://schemas.openxmlformats.org/presentationml/2006/main">
+  <p:cSld name="Slide 24">
+    <p:bg>
+      <p:bgPr>
+        <a:solidFill>
+          <a:srgbClr val="0A2A45"/>
+        </a:solidFill>
+      </p:bgPr>
+    </p:bg>
+    <p:spTree>
+      <p:nvGrpSpPr>
+        <p:cNvPr id="1" name=""/>
+        <p:cNvGrpSpPr/>
+        <p:nvPr/>
+      </p:nvGrpSpPr>
+      <p:grpSpPr>
+        <a:xfrm>
+          <a:off x="0" y="0"/>
+          <a:ext cx="0" cy="0"/>
+          <a:chOff x="0" y="0"/>
+          <a:chExt cx="0" cy="0"/>
+        </a:xfrm>
+      </p:grpSpPr>
+      <p:sp>
+        <p:nvSpPr>
+          <p:cNvPr id="2" name="Text 0"/>
+          <p:cNvSpPr/>
+          <p:nvPr/>
+        </p:nvSpPr>
+        <p:spPr>
+          <a:xfrm>
+            <a:off x="566928" y="329184"/>
+            <a:ext cx="10058400" cy="310896"/>
+          </a:xfrm>
+          <a:prstGeom prst="rect">
+            <a:avLst/>
+          </a:prstGeom>
+          <a:noFill/>
+          <a:ln/>
+        </p:spPr>
+        <p:txBody>
+          <a:bodyPr wrap="square" lIns="0" tIns="0" rIns="0" bIns="0" rtlCol="0" anchor="ctr"/>
+          <a:lstStyle/>
+          <a:p>
+            <a:pPr indent="0" marL="0">
+              <a:buNone/>
+            </a:pPr>
+            <a:r>
+              <a:rPr lang="en-US" sz="1100" b="1" spc="150" kern="0" dirty="0">
+                <a:solidFill>
+                  <a:srgbClr val="2E7D32"/>
+                </a:solidFill>
+                <a:latin typeface="Calibri" pitchFamily="34" charset="0"/>
+                <a:ea typeface="Calibri" pitchFamily="34" charset="-122"/>
+                <a:cs typeface="Calibri" pitchFamily="34" charset="-120"/>
+              </a:rPr>
+              <a:t>MICROBIOLOGY</a:t>
+            </a:r>
+            <a:endParaRPr lang="en-US" sz="1100" dirty="0"/>
+          </a:p>
+        </p:txBody>
+      </p:sp>
+      <p:sp>
+        <p:nvSpPr>
+          <p:cNvPr id="3" name="Text 1"/>
+          <p:cNvSpPr/>
+          <p:nvPr/>
+        </p:nvSpPr>
+        <p:spPr>
+          <a:xfrm>
+            <a:off x="566928" y="676656"/>
+            <a:ext cx="10972800" cy="749808"/>
+          </a:xfrm>
+          <a:prstGeom prst="rect">
+            <a:avLst/>
+          </a:prstGeom>
+          <a:noFill/>
+          <a:ln/>
+        </p:spPr>
+        <p:txBody>
+          <a:bodyPr wrap="square" lIns="0" tIns="0" rIns="0" bIns="0" rtlCol="0" anchor="ctr"/>
+          <a:lstStyle/>
+          <a:p>
+            <a:pPr indent="0" marL="0">
+              <a:buNone/>
+            </a:pPr>
+            <a:r>
+              <a:rPr lang="en-US" sz="3000" b="1" dirty="0">
+                <a:solidFill>
+                  <a:srgbClr val="FFFFFF"/>
+                </a:solidFill>
+                <a:latin typeface="Calibri" pitchFamily="34" charset="0"/>
+                <a:ea typeface="Calibri" pitchFamily="34" charset="-122"/>
+                <a:cs typeface="Calibri" pitchFamily="34" charset="-120"/>
+              </a:rPr>
+              <a:t>Key Take-Home Points</a:t>
+            </a:r>
+            <a:endParaRPr lang="en-US" sz="3000" dirty="0"/>
+          </a:p>
+        </p:txBody>
+      </p:sp>
+      <p:sp>
+        <p:nvSpPr>
+          <p:cNvPr id="4" name="Shape 2"/>
+          <p:cNvSpPr/>
+          <p:nvPr/>
+        </p:nvSpPr>
+        <p:spPr>
+          <a:xfrm>
+            <a:off x="566928" y="1517904"/>
+            <a:ext cx="11057839" cy="841248"/>
+          </a:xfrm>
+          <a:prstGeom prst="roundRect">
+            <a:avLst>
+              <a:gd name="adj" fmla="val 7609"/>
+            </a:avLst>
+          </a:prstGeom>
+          <a:solidFill>
+            <a:srgbClr val="143651"/>
+          </a:solidFill>
+          <a:ln/>
+        </p:spPr>
+      </p:sp>
+      <p:sp>
+        <p:nvSpPr>
+          <p:cNvPr id="5" name="Shape 3"/>
+          <p:cNvSpPr/>
+          <p:nvPr/>
+        </p:nvSpPr>
+        <p:spPr>
+          <a:xfrm>
+            <a:off x="749808" y="1755648"/>
+            <a:ext cx="365760" cy="365760"/>
+          </a:xfrm>
+          <a:prstGeom prst="ellipse">
+            <a:avLst/>
+          </a:prstGeom>
+          <a:solidFill>
+            <a:srgbClr val="2E7D32"/>
+          </a:solidFill>
+          <a:ln/>
+          <a:effectLst>
+            <a:outerShdw sx="100000" sy="100000" kx="0" ky="0" algn="bl" rotWithShape="0" blurRad="88900" dist="25400" dir="5400000">
+              <a:srgbClr val="22303C">
+                <a:alpha val="12000"/>
+              </a:srgbClr>
+            </a:outerShdw>
+          </a:effectLst>
+        </p:spPr>
+      </p:sp>
+      <p:sp>
+        <p:nvSpPr>
+          <p:cNvPr id="6" name="Text 4"/>
+          <p:cNvSpPr/>
+          <p:nvPr/>
+        </p:nvSpPr>
+        <p:spPr>
+          <a:xfrm>
+            <a:off x="749808" y="1755648"/>
+            <a:ext cx="365760" cy="365760"/>
+          </a:xfrm>
+          <a:prstGeom prst="rect">
+            <a:avLst/>
+          </a:prstGeom>
+          <a:noFill/>
+          <a:ln/>
+        </p:spPr>
+        <p:txBody>
+          <a:bodyPr wrap="square" lIns="0" tIns="0" rIns="0" bIns="0" rtlCol="0" anchor="ctr"/>
+          <a:lstStyle/>
+          <a:p>
+            <a:pPr algn="ctr" indent="0" marL="0">
+              <a:buNone/>
+            </a:pPr>
+            <a:r>
+              <a:rPr lang="en-US" sz="1500" b="1" dirty="0">
+                <a:solidFill>
+                  <a:srgbClr val="FFFFFF"/>
+                </a:solidFill>
+                <a:latin typeface="Calibri" pitchFamily="34" charset="0"/>
+                <a:ea typeface="Calibri" pitchFamily="34" charset="-122"/>
+                <a:cs typeface="Calibri" pitchFamily="34" charset="-120"/>
+              </a:rPr>
+              <a:t>1</a:t>
+            </a:r>
+            <a:endParaRPr lang="en-US" sz="1500" dirty="0"/>
+          </a:p>
+        </p:txBody>
+      </p:sp>
+      <p:sp>
+        <p:nvSpPr>
+          <p:cNvPr id="7" name="Text 5"/>
+          <p:cNvSpPr/>
+          <p:nvPr/>
+        </p:nvSpPr>
+        <p:spPr>
+          <a:xfrm>
+            <a:off x="1280160" y="1517904"/>
+            <a:ext cx="10143439" cy="841248"/>
+          </a:xfrm>
+          <a:prstGeom prst="rect">
+            <a:avLst/>
+          </a:prstGeom>
+          <a:noFill/>
+          <a:ln/>
+        </p:spPr>
+        <p:txBody>
+          <a:bodyPr wrap="square" lIns="0" tIns="0" rIns="0" bIns="0" rtlCol="0" anchor="ctr"/>
+          <a:lstStyle/>
+          <a:p>
+            <a:pPr algn="l" indent="0" marL="0">
+              <a:buNone/>
+            </a:pPr>
+            <a:r>
+              <a:rPr lang="en-US" sz="1350" dirty="0">
+                <a:solidFill>
+                  <a:srgbClr val="E7EEF4"/>
+                </a:solidFill>
+                <a:latin typeface="Calibri" pitchFamily="34" charset="0"/>
+                <a:ea typeface="Calibri" pitchFamily="34" charset="-122"/>
+                <a:cs typeface="Calibri" pitchFamily="34" charset="-120"/>
+              </a:rPr>
+              <a:t>Blood-culture yield is volume-dependent; collect adequate volume in multiple sets before antibiotics.</a:t>
+            </a:r>
+            <a:endParaRPr lang="en-US" sz="1350" dirty="0"/>
+          </a:p>
+        </p:txBody>
+      </p:sp>
+      <p:sp>
+        <p:nvSpPr>
+          <p:cNvPr id="8" name="Shape 6"/>
+          <p:cNvSpPr/>
+          <p:nvPr/>
+        </p:nvSpPr>
+        <p:spPr>
+          <a:xfrm>
+            <a:off x="566928" y="2505456"/>
+            <a:ext cx="11057839" cy="841248"/>
+          </a:xfrm>
+          <a:prstGeom prst="roundRect">
+            <a:avLst>
+              <a:gd name="adj" fmla="val 7609"/>
+            </a:avLst>
+          </a:prstGeom>
+          <a:solidFill>
+            <a:srgbClr val="143651"/>
+          </a:solidFill>
+          <a:ln/>
+        </p:spPr>
+      </p:sp>
+      <p:sp>
+        <p:nvSpPr>
+          <p:cNvPr id="9" name="Shape 7"/>
+          <p:cNvSpPr/>
+          <p:nvPr/>
+        </p:nvSpPr>
+        <p:spPr>
+          <a:xfrm>
+            <a:off x="749808" y="2743200"/>
+            <a:ext cx="365760" cy="365760"/>
+          </a:xfrm>
+          <a:prstGeom prst="ellipse">
+            <a:avLst/>
+          </a:prstGeom>
+          <a:solidFill>
+            <a:srgbClr val="2E7D32"/>
+          </a:solidFill>
+          <a:ln/>
+          <a:effectLst>
+            <a:outerShdw sx="100000" sy="100000" kx="0" ky="0" algn="bl" rotWithShape="0" blurRad="88900" dist="25400" dir="5400000">
+              <a:srgbClr val="22303C">
+                <a:alpha val="12000"/>
+              </a:srgbClr>
+            </a:outerShdw>
+          </a:effectLst>
+        </p:spPr>
+      </p:sp>
+      <p:sp>
+        <p:nvSpPr>
+          <p:cNvPr id="10" name="Text 8"/>
+          <p:cNvSpPr/>
+          <p:nvPr/>
+        </p:nvSpPr>
+        <p:spPr>
+          <a:xfrm>
+            <a:off x="749808" y="2743200"/>
+            <a:ext cx="365760" cy="365760"/>
+          </a:xfrm>
+          <a:prstGeom prst="rect">
+            <a:avLst/>
+          </a:prstGeom>
+          <a:noFill/>
+          <a:ln/>
+        </p:spPr>
+        <p:txBody>
+          <a:bodyPr wrap="square" lIns="0" tIns="0" rIns="0" bIns="0" rtlCol="0" anchor="ctr"/>
+          <a:lstStyle/>
+          <a:p>
+            <a:pPr algn="ctr" indent="0" marL="0">
+              <a:buNone/>
+            </a:pPr>
+            <a:r>
+              <a:rPr lang="en-US" sz="1500" b="1" dirty="0">
+                <a:solidFill>
+                  <a:srgbClr val="FFFFFF"/>
+                </a:solidFill>
+                <a:latin typeface="Calibri" pitchFamily="34" charset="0"/>
+                <a:ea typeface="Calibri" pitchFamily="34" charset="-122"/>
+                <a:cs typeface="Calibri" pitchFamily="34" charset="-120"/>
+              </a:rPr>
+              <a:t>2</a:t>
+            </a:r>
+            <a:endParaRPr lang="en-US" sz="1500" dirty="0"/>
+          </a:p>
+        </p:txBody>
+      </p:sp>
+      <p:sp>
+        <p:nvSpPr>
+          <p:cNvPr id="11" name="Text 9"/>
+          <p:cNvSpPr/>
+          <p:nvPr/>
+        </p:nvSpPr>
+        <p:spPr>
+          <a:xfrm>
+            <a:off x="1280160" y="2505456"/>
+            <a:ext cx="10143439" cy="841248"/>
+          </a:xfrm>
+          <a:prstGeom prst="rect">
+            <a:avLst/>
+          </a:prstGeom>
+          <a:noFill/>
+          <a:ln/>
+        </p:spPr>
+        <p:txBody>
+          <a:bodyPr wrap="square" lIns="0" tIns="0" rIns="0" bIns="0" rtlCol="0" anchor="ctr"/>
+          <a:lstStyle/>
+          <a:p>
+            <a:pPr algn="l" indent="0" marL="0">
+              <a:buNone/>
+            </a:pPr>
+            <a:r>
+              <a:rPr lang="en-US" sz="1350" dirty="0">
+                <a:solidFill>
+                  <a:srgbClr val="E7EEF4"/>
+                </a:solidFill>
+                <a:latin typeface="Calibri" pitchFamily="34" charset="0"/>
+                <a:ea typeface="Calibri" pitchFamily="34" charset="-122"/>
+                <a:cs typeface="Calibri" pitchFamily="34" charset="-120"/>
+              </a:rPr>
+              <a:t>Interpret positives by number of sets, organism virulence, time-to-positivity, and clinical context.</a:t>
+            </a:r>
+            <a:endParaRPr lang="en-US" sz="1350" dirty="0"/>
+          </a:p>
+        </p:txBody>
+      </p:sp>
+      <p:sp>
+        <p:nvSpPr>
+          <p:cNvPr id="12" name="Shape 10"/>
+          <p:cNvSpPr/>
+          <p:nvPr/>
+        </p:nvSpPr>
+        <p:spPr>
+          <a:xfrm>
+            <a:off x="566928" y="3493008"/>
+            <a:ext cx="11057839" cy="841248"/>
+          </a:xfrm>
+          <a:prstGeom prst="roundRect">
+            <a:avLst>
+              <a:gd name="adj" fmla="val 7609"/>
+            </a:avLst>
+          </a:prstGeom>
+          <a:solidFill>
+            <a:srgbClr val="143651"/>
+          </a:solidFill>
+          <a:ln/>
+        </p:spPr>
+      </p:sp>
+      <p:sp>
+        <p:nvSpPr>
+          <p:cNvPr id="13" name="Shape 11"/>
+          <p:cNvSpPr/>
+          <p:nvPr/>
+        </p:nvSpPr>
+        <p:spPr>
+          <a:xfrm>
+            <a:off x="749808" y="3730752"/>
+            <a:ext cx="365760" cy="365760"/>
+          </a:xfrm>
+          <a:prstGeom prst="ellipse">
+            <a:avLst/>
+          </a:prstGeom>
+          <a:solidFill>
+            <a:srgbClr val="2E7D32"/>
+          </a:solidFill>
+          <a:ln/>
+          <a:effectLst>
+            <a:outerShdw sx="100000" sy="100000" kx="0" ky="0" algn="bl" rotWithShape="0" blurRad="88900" dist="25400" dir="5400000">
+              <a:srgbClr val="22303C">
+                <a:alpha val="12000"/>
+              </a:srgbClr>
+            </a:outerShdw>
+          </a:effectLst>
+        </p:spPr>
+      </p:sp>
+      <p:sp>
+        <p:nvSpPr>
+          <p:cNvPr id="14" name="Text 12"/>
+          <p:cNvSpPr/>
+          <p:nvPr/>
+        </p:nvSpPr>
+        <p:spPr>
+          <a:xfrm>
+            <a:off x="749808" y="3730752"/>
+            <a:ext cx="365760" cy="365760"/>
+          </a:xfrm>
+          <a:prstGeom prst="rect">
+            <a:avLst/>
+          </a:prstGeom>
+          <a:noFill/>
+          <a:ln/>
+        </p:spPr>
+        <p:txBody>
+          <a:bodyPr wrap="square" lIns="0" tIns="0" rIns="0" bIns="0" rtlCol="0" anchor="ctr"/>
+          <a:lstStyle/>
+          <a:p>
+            <a:pPr algn="ctr" indent="0" marL="0">
+              <a:buNone/>
+            </a:pPr>
+            <a:r>
+              <a:rPr lang="en-US" sz="1500" b="1" dirty="0">
+                <a:solidFill>
+                  <a:srgbClr val="FFFFFF"/>
+                </a:solidFill>
+                <a:latin typeface="Calibri" pitchFamily="34" charset="0"/>
+                <a:ea typeface="Calibri" pitchFamily="34" charset="-122"/>
+                <a:cs typeface="Calibri" pitchFamily="34" charset="-120"/>
+              </a:rPr>
+              <a:t>3</a:t>
+            </a:r>
+            <a:endParaRPr lang="en-US" sz="1500" dirty="0"/>
+          </a:p>
+        </p:txBody>
+      </p:sp>
+      <p:sp>
+        <p:nvSpPr>
+          <p:cNvPr id="15" name="Text 13"/>
+          <p:cNvSpPr/>
+          <p:nvPr/>
+        </p:nvSpPr>
+        <p:spPr>
+          <a:xfrm>
+            <a:off x="1280160" y="3493008"/>
+            <a:ext cx="10143439" cy="841248"/>
+          </a:xfrm>
+          <a:prstGeom prst="rect">
+            <a:avLst/>
+          </a:prstGeom>
+          <a:noFill/>
+          <a:ln/>
+        </p:spPr>
+        <p:txBody>
+          <a:bodyPr wrap="square" lIns="0" tIns="0" rIns="0" bIns="0" rtlCol="0" anchor="ctr"/>
+          <a:lstStyle/>
+          <a:p>
+            <a:pPr algn="l" indent="0" marL="0">
+              <a:buNone/>
+            </a:pPr>
+            <a:r>
+              <a:rPr lang="en-US" sz="1350" dirty="0">
+                <a:solidFill>
+                  <a:srgbClr val="E7EEF4"/>
+                </a:solidFill>
+                <a:latin typeface="Calibri" pitchFamily="34" charset="0"/>
+                <a:ea typeface="Calibri" pitchFamily="34" charset="-122"/>
+                <a:cs typeface="Calibri" pitchFamily="34" charset="-120"/>
+              </a:rPr>
+              <a:t>S. aureus, GNR, pneumococcus, and Candida in blood are significant; lone late skin flora suggests contamination.</a:t>
+            </a:r>
+            <a:endParaRPr lang="en-US" sz="1350" dirty="0"/>
+          </a:p>
+        </p:txBody>
+      </p:sp>
+      <p:sp>
+        <p:nvSpPr>
+          <p:cNvPr id="16" name="Shape 14"/>
+          <p:cNvSpPr/>
+          <p:nvPr/>
+        </p:nvSpPr>
+        <p:spPr>
+          <a:xfrm>
+            <a:off x="566928" y="4480560"/>
+            <a:ext cx="11057839" cy="841248"/>
+          </a:xfrm>
+          <a:prstGeom prst="roundRect">
+            <a:avLst>
+              <a:gd name="adj" fmla="val 7609"/>
+            </a:avLst>
+          </a:prstGeom>
+          <a:solidFill>
+            <a:srgbClr val="143651"/>
+          </a:solidFill>
+          <a:ln/>
+        </p:spPr>
+      </p:sp>
+      <p:sp>
+        <p:nvSpPr>
+          <p:cNvPr id="17" name="Shape 15"/>
+          <p:cNvSpPr/>
+          <p:nvPr/>
+        </p:nvSpPr>
+        <p:spPr>
+          <a:xfrm>
+            <a:off x="749808" y="4718304"/>
+            <a:ext cx="365760" cy="365760"/>
+          </a:xfrm>
+          <a:prstGeom prst="ellipse">
+            <a:avLst/>
+          </a:prstGeom>
+          <a:solidFill>
+            <a:srgbClr val="2E7D32"/>
+          </a:solidFill>
+          <a:ln/>
+          <a:effectLst>
+            <a:outerShdw sx="100000" sy="100000" kx="0" ky="0" algn="bl" rotWithShape="0" blurRad="88900" dist="25400" dir="5400000">
+              <a:srgbClr val="22303C">
+                <a:alpha val="12000"/>
+              </a:srgbClr>
+            </a:outerShdw>
+          </a:effectLst>
+        </p:spPr>
+      </p:sp>
+      <p:sp>
+        <p:nvSpPr>
+          <p:cNvPr id="18" name="Text 16"/>
+          <p:cNvSpPr/>
+          <p:nvPr/>
+        </p:nvSpPr>
+        <p:spPr>
+          <a:xfrm>
+            <a:off x="749808" y="4718304"/>
+            <a:ext cx="365760" cy="365760"/>
+          </a:xfrm>
+          <a:prstGeom prst="rect">
+            <a:avLst/>
+          </a:prstGeom>
+          <a:noFill/>
+          <a:ln/>
+        </p:spPr>
+        <p:txBody>
+          <a:bodyPr wrap="square" lIns="0" tIns="0" rIns="0" bIns="0" rtlCol="0" anchor="ctr"/>
+          <a:lstStyle/>
+          <a:p>
+            <a:pPr algn="ctr" indent="0" marL="0">
+              <a:buNone/>
+            </a:pPr>
+            <a:r>
+              <a:rPr lang="en-US" sz="1500" b="1" dirty="0">
+                <a:solidFill>
+                  <a:srgbClr val="FFFFFF"/>
+                </a:solidFill>
+                <a:latin typeface="Calibri" pitchFamily="34" charset="0"/>
+                <a:ea typeface="Calibri" pitchFamily="34" charset="-122"/>
+                <a:cs typeface="Calibri" pitchFamily="34" charset="-120"/>
+              </a:rPr>
+              <a:t>4</a:t>
+            </a:r>
+            <a:endParaRPr lang="en-US" sz="1500" dirty="0"/>
+          </a:p>
+        </p:txBody>
+      </p:sp>
+      <p:sp>
+        <p:nvSpPr>
+          <p:cNvPr id="19" name="Text 17"/>
+          <p:cNvSpPr/>
+          <p:nvPr/>
+        </p:nvSpPr>
+        <p:spPr>
+          <a:xfrm>
+            <a:off x="1280160" y="4480560"/>
+            <a:ext cx="10143439" cy="841248"/>
+          </a:xfrm>
+          <a:prstGeom prst="rect">
+            <a:avLst/>
+          </a:prstGeom>
+          <a:noFill/>
+          <a:ln/>
+        </p:spPr>
+        <p:txBody>
+          <a:bodyPr wrap="square" lIns="0" tIns="0" rIns="0" bIns="0" rtlCol="0" anchor="ctr"/>
+          <a:lstStyle/>
+          <a:p>
+            <a:pPr algn="l" indent="0" marL="0">
+              <a:buNone/>
+            </a:pPr>
+            <a:r>
+              <a:rPr lang="en-US" sz="1350" dirty="0">
+                <a:solidFill>
+                  <a:srgbClr val="E7EEF4"/>
+                </a:solidFill>
+                <a:latin typeface="Calibri" pitchFamily="34" charset="0"/>
+                <a:ea typeface="Calibri" pitchFamily="34" charset="-122"/>
+                <a:cs typeface="Calibri" pitchFamily="34" charset="-120"/>
+              </a:rPr>
+              <a:t>Differential time-to-positivity helps diagnose catheter-related bloodstream infection.</a:t>
+            </a:r>
+            <a:endParaRPr lang="en-US" sz="1350" dirty="0"/>
+          </a:p>
+        </p:txBody>
+      </p:sp>
+      <p:sp>
+        <p:nvSpPr>
+          <p:cNvPr id="20" name="Shape 18"/>
+          <p:cNvSpPr/>
+          <p:nvPr/>
+        </p:nvSpPr>
+        <p:spPr>
+          <a:xfrm>
+            <a:off x="566928" y="5468112"/>
+            <a:ext cx="11057839" cy="841248"/>
+          </a:xfrm>
+          <a:prstGeom prst="roundRect">
+            <a:avLst>
+              <a:gd name="adj" fmla="val 7609"/>
+            </a:avLst>
+          </a:prstGeom>
+          <a:solidFill>
+            <a:srgbClr val="143651"/>
+          </a:solidFill>
+          <a:ln/>
+        </p:spPr>
+      </p:sp>
+      <p:sp>
+        <p:nvSpPr>
+          <p:cNvPr id="21" name="Shape 19"/>
+          <p:cNvSpPr/>
+          <p:nvPr/>
+        </p:nvSpPr>
+        <p:spPr>
+          <a:xfrm>
+            <a:off x="749808" y="5705856"/>
+            <a:ext cx="365760" cy="365760"/>
+          </a:xfrm>
+          <a:prstGeom prst="ellipse">
+            <a:avLst/>
+          </a:prstGeom>
+          <a:solidFill>
+            <a:srgbClr val="2E7D32"/>
+          </a:solidFill>
+          <a:ln/>
+          <a:effectLst>
+            <a:outerShdw sx="100000" sy="100000" kx="0" ky="0" algn="bl" rotWithShape="0" blurRad="88900" dist="25400" dir="5400000">
+              <a:srgbClr val="22303C">
+                <a:alpha val="12000"/>
+              </a:srgbClr>
+            </a:outerShdw>
+          </a:effectLst>
+        </p:spPr>
+      </p:sp>
+      <p:sp>
+        <p:nvSpPr>
+          <p:cNvPr id="22" name="Text 20"/>
+          <p:cNvSpPr/>
+          <p:nvPr/>
+        </p:nvSpPr>
+        <p:spPr>
+          <a:xfrm>
+            <a:off x="749808" y="5705856"/>
+            <a:ext cx="365760" cy="365760"/>
+          </a:xfrm>
+          <a:prstGeom prst="rect">
+            <a:avLst/>
+          </a:prstGeom>
+          <a:noFill/>
+          <a:ln/>
+        </p:spPr>
+        <p:txBody>
+          <a:bodyPr wrap="square" lIns="0" tIns="0" rIns="0" bIns="0" rtlCol="0" anchor="ctr"/>
+          <a:lstStyle/>
+          <a:p>
+            <a:pPr algn="ctr" indent="0" marL="0">
+              <a:buNone/>
+            </a:pPr>
+            <a:r>
+              <a:rPr lang="en-US" sz="1500" b="1" dirty="0">
+                <a:solidFill>
+                  <a:srgbClr val="FFFFFF"/>
+                </a:solidFill>
+                <a:latin typeface="Calibri" pitchFamily="34" charset="0"/>
+                <a:ea typeface="Calibri" pitchFamily="34" charset="-122"/>
+                <a:cs typeface="Calibri" pitchFamily="34" charset="-120"/>
+              </a:rPr>
+              <a:t>5</a:t>
+            </a:r>
+            <a:endParaRPr lang="en-US" sz="1500" dirty="0"/>
+          </a:p>
+        </p:txBody>
+      </p:sp>
+      <p:sp>
+        <p:nvSpPr>
+          <p:cNvPr id="23" name="Text 21"/>
+          <p:cNvSpPr/>
+          <p:nvPr/>
+        </p:nvSpPr>
+        <p:spPr>
+          <a:xfrm>
+            <a:off x="1280160" y="5468112"/>
+            <a:ext cx="10143439" cy="841248"/>
+          </a:xfrm>
+          <a:prstGeom prst="rect">
+            <a:avLst/>
+          </a:prstGeom>
+          <a:noFill/>
+          <a:ln/>
+        </p:spPr>
+        <p:txBody>
+          <a:bodyPr wrap="square" lIns="0" tIns="0" rIns="0" bIns="0" rtlCol="0" anchor="ctr"/>
+          <a:lstStyle/>
+          <a:p>
+            <a:pPr algn="l" indent="0" marL="0">
+              <a:buNone/>
+            </a:pPr>
+            <a:r>
+              <a:rPr lang="en-US" sz="1350" dirty="0">
+                <a:solidFill>
+                  <a:srgbClr val="E7EEF4"/>
+                </a:solidFill>
+                <a:latin typeface="Calibri" pitchFamily="34" charset="0"/>
+                <a:ea typeface="Calibri" pitchFamily="34" charset="-122"/>
+                <a:cs typeface="Calibri" pitchFamily="34" charset="-120"/>
+              </a:rPr>
+              <a:t>The laboratory is a frontline infection-control sensor — alert on outbreaks and epidemiologically important resistance.</a:t>
+            </a:r>
+            <a:endParaRPr lang="en-US" sz="1350" dirty="0"/>
+          </a:p>
+        </p:txBody>
+      </p:sp>
+      <p:sp>
+        <p:nvSpPr>
+          <p:cNvPr id="24" name="Text 22"/>
+          <p:cNvSpPr/>
+          <p:nvPr/>
+        </p:nvSpPr>
+        <p:spPr>
+          <a:xfrm>
+            <a:off x="566928" y="6473952"/>
+            <a:ext cx="8229600" cy="274320"/>
+          </a:xfrm>
+          <a:prstGeom prst="rect">
+            <a:avLst/>
+          </a:prstGeom>
+          <a:noFill/>
+          <a:ln/>
+        </p:spPr>
+        <p:txBody>
+          <a:bodyPr wrap="square" lIns="0" tIns="0" rIns="0" bIns="0" rtlCol="0" anchor="ctr"/>
+          <a:lstStyle/>
+          <a:p>
+            <a:pPr indent="0" marL="0">
+              <a:buNone/>
+            </a:pPr>
+            <a:r>
+              <a:rPr lang="en-US" sz="850" dirty="0">
+                <a:solidFill>
+                  <a:srgbClr val="5E7488"/>
+                </a:solidFill>
+                <a:latin typeface="Calibri" pitchFamily="34" charset="0"/>
+                <a:ea typeface="Calibri" pitchFamily="34" charset="-122"/>
+                <a:cs typeface="Calibri" pitchFamily="34" charset="-120"/>
+              </a:rPr>
+              <a:t>Makassed General Hospital  ·  Department of Laboratory Medicine</a:t>
+            </a:r>
+            <a:endParaRPr lang="en-US" sz="850" dirty="0"/>
+          </a:p>
+        </p:txBody>
+      </p:sp>
+      <p:sp>
+        <p:nvSpPr>
+          <p:cNvPr id="25" name="Text 23"/>
+          <p:cNvSpPr/>
+          <p:nvPr/>
+        </p:nvSpPr>
+        <p:spPr>
+          <a:xfrm>
+            <a:off x="11002975" y="6473952"/>
+            <a:ext cx="640080" cy="274320"/>
+          </a:xfrm>
+          <a:prstGeom prst="rect">
+            <a:avLst/>
+          </a:prstGeom>
+          <a:noFill/>
+          <a:ln/>
+        </p:spPr>
+        <p:txBody>
+          <a:bodyPr wrap="square" lIns="0" tIns="0" rIns="0" bIns="0" rtlCol="0" anchor="ctr"/>
+          <a:lstStyle/>
+          <a:p>
+            <a:pPr algn="r" indent="0" marL="0">
+              <a:buNone/>
+            </a:pPr>
+            <a:r>
+              <a:rPr lang="en-US" sz="850" b="1" dirty="0">
+                <a:solidFill>
+                  <a:srgbClr val="2E7D32"/>
+                </a:solidFill>
+                <a:latin typeface="Calibri" pitchFamily="34" charset="0"/>
+                <a:ea typeface="Calibri" pitchFamily="34" charset="-122"/>
+                <a:cs typeface="Calibri" pitchFamily="34" charset="-120"/>
+              </a:rPr>
+              <a:t>21</a:t>
+            </a:r>
+            <a:endParaRPr lang="en-US" sz="850" dirty="0"/>
+          </a:p>
+        </p:txBody>
+      </p:sp>
+    </p:spTree>
+  </p:cSld>
+  <p:clrMapOvr>
+    <a:masterClrMapping/>
+  </p:clrMapOvr>
+</p:sld>
+</file>
+
+<file path=ppt/slides/slide25.xml><?xml version="1.0" encoding="utf-8"?>
+<p:sld xmlns:a="http://schemas.openxmlformats.org/drawingml/2006/main" xmlns:r="http://schemas.openxmlformats.org/officeDocument/2006/relationships" xmlns:p="http://schemas.openxmlformats.org/presentationml/2006/main">
+  <p:cSld name="Slide 25">
+    <p:bg>
+      <p:bgPr>
+        <a:solidFill>
+          <a:srgbClr val="FFFFFF"/>
+        </a:solidFill>
+      </p:bgPr>
+    </p:bg>
+    <p:spTree>
+      <p:nvGrpSpPr>
+        <p:cNvPr id="1" name=""/>
+        <p:cNvGrpSpPr/>
+        <p:nvPr/>
+      </p:nvGrpSpPr>
+      <p:grpSpPr>
+        <a:xfrm>
+          <a:off x="0" y="0"/>
+          <a:ext cx="0" cy="0"/>
+          <a:chOff x="0" y="0"/>
+          <a:chExt cx="0" cy="0"/>
+        </a:xfrm>
+      </p:grpSpPr>
+      <p:sp>
+        <p:nvSpPr>
+          <p:cNvPr id="2" name="Text 0"/>
+          <p:cNvSpPr/>
+          <p:nvPr/>
+        </p:nvSpPr>
+        <p:spPr>
+          <a:xfrm>
+            <a:off x="566928" y="329184"/>
+            <a:ext cx="10515600" cy="310896"/>
+          </a:xfrm>
+          <a:prstGeom prst="rect">
+            <a:avLst/>
+          </a:prstGeom>
+          <a:noFill/>
+          <a:ln/>
+        </p:spPr>
+        <p:txBody>
+          <a:bodyPr wrap="square" lIns="0" tIns="0" rIns="0" bIns="0" rtlCol="0" anchor="ctr"/>
+          <a:lstStyle/>
+          <a:p>
+            <a:pPr algn="l" indent="0" marL="0">
+              <a:buNone/>
+            </a:pPr>
+            <a:r>
+              <a:rPr lang="en-US" sz="1100" b="1" spc="150" kern="0" dirty="0">
+                <a:solidFill>
+                  <a:srgbClr val="2E7D32"/>
+                </a:solidFill>
+                <a:latin typeface="Calibri" pitchFamily="34" charset="0"/>
+                <a:ea typeface="Calibri" pitchFamily="34" charset="-122"/>
+                <a:cs typeface="Calibri" pitchFamily="34" charset="-120"/>
+              </a:rPr>
               <a:t>MICROBIOLOGY   ·   REFERENCES &amp; FURTHER READING</a:t>
             </a:r>
             <a:endParaRPr lang="en-US" sz="1100" dirty="0"/>
@@ -8550,7 +11492,7 @@
                 <a:ea typeface="Calibri" pitchFamily="34" charset="-122"/>
                 <a:cs typeface="Calibri" pitchFamily="34" charset="-120"/>
               </a:rPr>
-              <a:t>1.   Carroll KC, et al. Manual of Clinical Microbiology, 12th ed. ASM Press, 2019.</a:t>
+              <a:t>1.   Clinical and Laboratory Standards Institute: blood-culture guidance.</a:t>
             </a:r>
             <a:endParaRPr lang="en-US" sz="1150" dirty="0"/>
           </a:p>
@@ -8570,7 +11512,7 @@
                 <a:ea typeface="Calibri" pitchFamily="34" charset="-122"/>
                 <a:cs typeface="Calibri" pitchFamily="34" charset="-120"/>
               </a:rPr>
-              <a:t>2.   CLSI M47: Principles and Procedures for Blood Cultures.</a:t>
+              <a:t>2.   Carroll KC, et al. Manual of Clinical Microbiology, 12th ed. ASM Press.</a:t>
             </a:r>
             <a:endParaRPr lang="en-US" sz="1150" dirty="0"/>
           </a:p>
@@ -8590,7 +11532,7 @@
                 <a:ea typeface="Calibri" pitchFamily="34" charset="-122"/>
                 <a:cs typeface="Calibri" pitchFamily="34" charset="-120"/>
               </a:rPr>
-              <a:t>3.   Lamy B, et al. How to optimize the use of blood cultures. Front Microbiol. 2016.</a:t>
+              <a:t>3.   IDSA guidelines on intravascular catheter-related infection.</a:t>
             </a:r>
             <a:endParaRPr lang="en-US" sz="1150" dirty="0"/>
           </a:p>
@@ -8610,7 +11552,7 @@
                 <a:ea typeface="Calibri" pitchFamily="34" charset="-122"/>
                 <a:cs typeface="Calibri" pitchFamily="34" charset="-120"/>
               </a:rPr>
-              <a:t>4.   IDSA/ASM Guide to Utilization of the Microbiology Laboratory.</a:t>
+              <a:t>4.   Lamy B, et al. Blood culture best practices. Clin Microbiol Rev.</a:t>
             </a:r>
             <a:endParaRPr lang="en-US" sz="1150" dirty="0"/>
           </a:p>
@@ -8716,7 +11658,7 @@
                 <a:ea typeface="Calibri" pitchFamily="34" charset="-122"/>
                 <a:cs typeface="Calibri" pitchFamily="34" charset="-120"/>
               </a:rPr>
-              <a:t>17</a:t>
+              <a:t>22</a:t>
             </a:r>
             <a:endParaRPr lang="en-US" sz="850" dirty="0"/>
           </a:p>
@@ -8960,7 +11902,7 @@
                 <a:ea typeface="Calibri" pitchFamily="34" charset="-122"/>
                 <a:cs typeface="Calibri" pitchFamily="34" charset="-120"/>
               </a:rPr>
-              <a:t>Optimize blood-culture collection (volume, sets, timing, antisepsis).</a:t>
+              <a:t>State blood-culture volume and set requirements and why they matter.</a:t>
             </a:r>
             <a:endParaRPr lang="en-US" sz="1350" dirty="0"/>
           </a:p>
@@ -9094,7 +12036,7 @@
                 <a:ea typeface="Calibri" pitchFamily="34" charset="-122"/>
                 <a:cs typeface="Calibri" pitchFamily="34" charset="-120"/>
               </a:rPr>
-              <a:t>Distinguish contamination from true bacteremia.</a:t>
+              <a:t>Distinguish true bacteremia from contamination.</a:t>
             </a:r>
             <a:endParaRPr lang="en-US" sz="1350" dirty="0"/>
           </a:p>
@@ -9228,7 +12170,7 @@
                 <a:ea typeface="Calibri" pitchFamily="34" charset="-122"/>
                 <a:cs typeface="Calibri" pitchFamily="34" charset="-120"/>
               </a:rPr>
-              <a:t>Use time-to-positivity and organism identity in interpretation.</a:t>
+              <a:t>Interpret time-to-positivity and differential time-to-positivity.</a:t>
             </a:r>
             <a:endParaRPr lang="en-US" sz="1350" dirty="0"/>
           </a:p>
@@ -9362,7 +12304,7 @@
                 <a:ea typeface="Calibri" pitchFamily="34" charset="-122"/>
                 <a:cs typeface="Calibri" pitchFamily="34" charset="-120"/>
               </a:rPr>
-              <a:t>Connect the laboratory to sepsis bundles.</a:t>
+              <a:t>Outline rapid identification from positive blood cultures.</a:t>
             </a:r>
             <a:endParaRPr lang="en-US" sz="1350" dirty="0"/>
           </a:p>
@@ -9496,7 +12438,7 @@
                 <a:ea typeface="Calibri" pitchFamily="34" charset="-122"/>
                 <a:cs typeface="Calibri" pitchFamily="34" charset="-120"/>
               </a:rPr>
-              <a:t>Apply rapid identification from positive bottles.</a:t>
+              <a:t>Describe the laboratory’s infection-control and outbreak-detection role.</a:t>
             </a:r>
             <a:endParaRPr lang="en-US" sz="1350" dirty="0"/>
           </a:p>
@@ -9630,7 +12572,7 @@
                 <a:ea typeface="Calibri" pitchFamily="34" charset="-122"/>
                 <a:cs typeface="Calibri" pitchFamily="34" charset="-120"/>
               </a:rPr>
-              <a:t>Describe the infection-control / epidemiology interface.</a:t>
+              <a:t>Apply stewardship to blood-culture results.</a:t>
             </a:r>
             <a:endParaRPr lang="en-US" sz="1350" dirty="0"/>
           </a:p>
@@ -9980,7 +12922,7 @@
                 <a:ea typeface="Calibri" pitchFamily="34" charset="-122"/>
                 <a:cs typeface="Calibri" pitchFamily="34" charset="-120"/>
               </a:rPr>
-              <a:t>Optimizing collection</a:t>
+              <a:t>Collection</a:t>
             </a:r>
             <a:pPr algn="l" indent="0" marL="0">
               <a:buNone/>
@@ -10121,7 +13063,7 @@
                 <a:ea typeface="Calibri" pitchFamily="34" charset="-122"/>
                 <a:cs typeface="Calibri" pitchFamily="34" charset="-120"/>
               </a:rPr>
-              <a:t>Contaminant vs pathogen</a:t>
+              <a:t>Contamination vs truth</a:t>
             </a:r>
             <a:pPr algn="l" indent="0" marL="0">
               <a:buNone/>
@@ -10135,7 +13077,7 @@
                 <a:ea typeface="Calibri" pitchFamily="34" charset="-122"/>
                 <a:cs typeface="Calibri" pitchFamily="34" charset="-120"/>
               </a:rPr>
-              <a:t>   —  the interpretation framework</a:t>
+              <a:t>   —  interpreting positives</a:t>
             </a:r>
             <a:endParaRPr lang="en-US" sz="1400" dirty="0"/>
           </a:p>
@@ -10269,7 +13211,7 @@
                 <a:ea typeface="Calibri" pitchFamily="34" charset="-122"/>
                 <a:cs typeface="Calibri" pitchFamily="34" charset="-120"/>
               </a:rPr>
-              <a:t>Sepsis interface</a:t>
+              <a:t>Time-to-positivity</a:t>
             </a:r>
             <a:pPr algn="l" indent="0" marL="0">
               <a:buNone/>
@@ -10283,7 +13225,7 @@
                 <a:ea typeface="Calibri" pitchFamily="34" charset="-122"/>
                 <a:cs typeface="Calibri" pitchFamily="34" charset="-120"/>
               </a:rPr>
-              <a:t>   —  turnaround and bundles</a:t>
+              <a:t>   —  DTP and source clues</a:t>
             </a:r>
             <a:endParaRPr lang="en-US" sz="1400" dirty="0"/>
           </a:p>
@@ -10424,7 +13366,7 @@
                 <a:ea typeface="Calibri" pitchFamily="34" charset="-122"/>
                 <a:cs typeface="Calibri" pitchFamily="34" charset="-120"/>
               </a:rPr>
-              <a:t>   —  outbreaks and prevention</a:t>
+              <a:t>   —  the lab as a sensor</a:t>
             </a:r>
             <a:endParaRPr lang="en-US" sz="1400" dirty="0"/>
           </a:p>
@@ -10558,7 +13500,7 @@
                 <a:ea typeface="Calibri" pitchFamily="34" charset="-122"/>
                 <a:cs typeface="Calibri" pitchFamily="34" charset="-120"/>
               </a:rPr>
-              <a:t>Cases &amp; board</a:t>
+              <a:t>Cases &amp; board review</a:t>
             </a:r>
             <a:endParaRPr lang="en-US" sz="1400" dirty="0"/>
           </a:p>
@@ -10857,7 +13799,7 @@
                 <a:ea typeface="Calibri" pitchFamily="34" charset="-122"/>
                 <a:cs typeface="Calibri" pitchFamily="34" charset="-120"/>
               </a:rPr>
-              <a:t>Collection &amp; Interpretation</a:t>
+              <a:t>Collecting Blood Cultures</a:t>
             </a:r>
             <a:endParaRPr lang="en-US" sz="3800" dirty="0"/>
           </a:p>
@@ -10967,7 +13909,7 @@
                 <a:ea typeface="Calibri" pitchFamily="34" charset="-122"/>
                 <a:cs typeface="Calibri" pitchFamily="34" charset="-120"/>
               </a:rPr>
-              <a:t>True Bacteremia vs Contaminant</a:t>
+              <a:t>Sets, Volume &amp; the Path to Identification</a:t>
             </a:r>
             <a:endParaRPr lang="en-US" sz="3000" dirty="0"/>
           </a:p>
@@ -10981,12 +13923,12 @@
         </p:nvSpPr>
         <p:spPr>
           <a:xfrm>
-            <a:off x="1066648" y="1481328"/>
-            <a:ext cx="10058400" cy="4160520"/>
+            <a:off x="883768" y="1481328"/>
+            <a:ext cx="10424160" cy="4297680"/>
           </a:xfrm>
           <a:prstGeom prst="roundRect">
             <a:avLst>
-              <a:gd name="adj" fmla="val 1978"/>
+              <a:gd name="adj" fmla="val 1915"/>
             </a:avLst>
           </a:prstGeom>
           <a:solidFill>
@@ -11023,8 +13965,8 @@
         </p:blipFill>
         <p:spPr>
           <a:xfrm>
-            <a:off x="1194664" y="1609344"/>
-            <a:ext cx="9802368" cy="3904488"/>
+            <a:off x="1011784" y="1609344"/>
+            <a:ext cx="10168128" cy="4041648"/>
           </a:xfrm>
           <a:prstGeom prst="rect">
             <a:avLst/>
@@ -11039,7 +13981,7 @@
         </p:nvSpPr>
         <p:spPr>
           <a:xfrm>
-            <a:off x="566928" y="5715000"/>
+            <a:off x="566928" y="5852160"/>
             <a:ext cx="11057839" cy="365760"/>
           </a:xfrm>
           <a:prstGeom prst="rect">
@@ -11064,7 +14006,7 @@
                 <a:ea typeface="Calibri" pitchFamily="34" charset="-122"/>
                 <a:cs typeface="Calibri" pitchFamily="34" charset="-120"/>
               </a:rPr>
-              <a:t>Original schematic. Multiple positive sets, short time-to-positivity, and a typical pathogen favor true infection.</a:t>
+              <a:t>Original schematic. Adequate volume and multiple sets, drawn before antibiotics, drive yield and interpretation.</a:t>
             </a:r>
             <a:endParaRPr lang="en-US" sz="1150" dirty="0"/>
           </a:p>
@@ -11280,7 +14222,7 @@
                 <a:ea typeface="Calibri" pitchFamily="34" charset="-122"/>
                 <a:cs typeface="Calibri" pitchFamily="34" charset="-120"/>
               </a:rPr>
-              <a:t>Getting the Sample Right</a:t>
+              <a:t>Volume, Sets &amp; Antisepsis</a:t>
             </a:r>
             <a:endParaRPr lang="en-US" sz="3000" dirty="0"/>
           </a:p>
@@ -11348,7 +14290,7 @@
                 <a:ea typeface="Calibri" pitchFamily="34" charset="-122"/>
                 <a:cs typeface="Calibri" pitchFamily="34" charset="-120"/>
               </a:rPr>
-              <a:t>VOLUME AND SETS DRIVE YIELD</a:t>
+              <a:t>VOLUME AND SETS</a:t>
             </a:r>
             <a:endParaRPr lang="en-US" sz="1200" dirty="0"/>
           </a:p>
@@ -11391,7 +14333,7 @@
                 <a:ea typeface="Calibri" pitchFamily="34" charset="-122"/>
                 <a:cs typeface="Calibri" pitchFamily="34" charset="-120"/>
               </a:rPr>
-              <a:t>Blood VOLUME is the strongest determinant of sensitivity — fill bottles to the recommended volume.</a:t>
+              <a:t>Yield is volume-dependent — fill bottles to the recommended volume.</a:t>
             </a:r>
             <a:endParaRPr lang="en-US" sz="1250" dirty="0"/>
           </a:p>
@@ -11412,7 +14354,7 @@
                 <a:ea typeface="Calibri" pitchFamily="34" charset="-122"/>
                 <a:cs typeface="Calibri" pitchFamily="34" charset="-120"/>
               </a:rPr>
-              <a:t>Collect multiple sets (usually 2–3) from separate venipuncture sites before antibiotics when possible.</a:t>
+              <a:t>Collect 2–3 sets from separate venipunctures for suspected bacteremia/endocarditis.</a:t>
             </a:r>
             <a:endParaRPr lang="en-US" sz="1250" dirty="0"/>
           </a:p>
@@ -11433,7 +14375,7 @@
                 <a:ea typeface="Calibri" pitchFamily="34" charset="-122"/>
                 <a:cs typeface="Calibri" pitchFamily="34" charset="-120"/>
               </a:rPr>
-              <a:t>Each set = aerobic + anaerobic bottle.</a:t>
+              <a:t>Draw before starting antimicrobials whenever possible.</a:t>
             </a:r>
             <a:endParaRPr lang="en-US" sz="1250" dirty="0"/>
           </a:p>
@@ -11454,7 +14396,7 @@
                 <a:ea typeface="Calibri" pitchFamily="34" charset="-122"/>
                 <a:cs typeface="Calibri" pitchFamily="34" charset="-120"/>
               </a:rPr>
-              <a:t>Avoid drawing from lines unless evaluating a line infection (paired cultures).</a:t>
+              <a:t>Each set = aerobic + anaerobic bottle.</a:t>
             </a:r>
             <a:endParaRPr lang="en-US" sz="1250" dirty="0"/>
           </a:p>
@@ -11477,7 +14419,7 @@
             </a:avLst>
           </a:prstGeom>
           <a:solidFill>
-            <a:srgbClr val="E8F2E9"/>
+            <a:srgbClr val="E9F3EA"/>
           </a:solidFill>
           <a:ln/>
           <a:effectLst>
@@ -11522,7 +14464,7 @@
                 <a:ea typeface="Calibri" pitchFamily="34" charset="-122"/>
                 <a:cs typeface="Calibri" pitchFamily="34" charset="-120"/>
               </a:rPr>
-              <a:t>ANTISEPSIS &amp; TIMING</a:t>
+              <a:t>ANTISEPSIS</a:t>
             </a:r>
             <a:endParaRPr lang="en-US" sz="1200" dirty="0"/>
           </a:p>
@@ -11565,7 +14507,7 @@
                 <a:ea typeface="Calibri" pitchFamily="34" charset="-122"/>
                 <a:cs typeface="Calibri" pitchFamily="34" charset="-120"/>
               </a:rPr>
-              <a:t>Rigorous skin antisepsis minimizes skin-flora contamination.</a:t>
+              <a:t>Rigorous skin antisepsis minimizes contamination by skin flora.</a:t>
             </a:r>
             <a:endParaRPr lang="en-US" sz="1250" dirty="0"/>
           </a:p>
@@ -11586,7 +14528,7 @@
                 <a:ea typeface="Calibri" pitchFamily="34" charset="-122"/>
                 <a:cs typeface="Calibri" pitchFamily="34" charset="-120"/>
               </a:rPr>
-              <a:t>Draw before antibiotics if feasible; do not delay therapy in severe sepsis.</a:t>
+              <a:t>Avoid drawing through existing lines unless evaluating a line infection (paired peripheral + line).</a:t>
             </a:r>
             <a:endParaRPr lang="en-US" sz="1250" dirty="0"/>
           </a:p>
@@ -11607,7 +14549,7 @@
                 <a:ea typeface="Calibri" pitchFamily="34" charset="-122"/>
                 <a:cs typeface="Calibri" pitchFamily="34" charset="-120"/>
               </a:rPr>
-              <a:t>Label set/site to support interpretation.</a:t>
+              <a:t>Label and time each set.</a:t>
             </a:r>
             <a:endParaRPr lang="en-US" sz="1250" dirty="0"/>
           </a:p>
@@ -11628,7 +14570,7 @@
                 <a:ea typeface="Calibri" pitchFamily="34" charset="-122"/>
                 <a:cs typeface="Calibri" pitchFamily="34" charset="-120"/>
               </a:rPr>
-              <a:t>Adequate, well-collected sets reduce both false negatives and false positives.</a:t>
+              <a:t>Technique directly controls the contamination rate.</a:t>
             </a:r>
             <a:endParaRPr lang="en-US" sz="1250" dirty="0"/>
           </a:p>
@@ -11927,7 +14869,7 @@
                 <a:ea typeface="Calibri" pitchFamily="34" charset="-122"/>
                 <a:cs typeface="Calibri" pitchFamily="34" charset="-120"/>
               </a:rPr>
-              <a:t>Sepsis &amp; Infection Control</a:t>
+              <a:t>Interpreting Positives</a:t>
             </a:r>
             <a:endParaRPr lang="en-US" sz="3800" dirty="0"/>
           </a:p>
@@ -12037,7 +14979,7 @@
                 <a:ea typeface="Calibri" pitchFamily="34" charset="-122"/>
                 <a:cs typeface="Calibri" pitchFamily="34" charset="-120"/>
               </a:rPr>
-              <a:t>Reading a Positive Bottle</a:t>
+              <a:t>True Bacteremia vs Contamination</a:t>
             </a:r>
             <a:endParaRPr lang="en-US" sz="3000" dirty="0"/>
           </a:p>
@@ -12105,7 +15047,7 @@
                 <a:ea typeface="Calibri" pitchFamily="34" charset="-122"/>
                 <a:cs typeface="Calibri" pitchFamily="34" charset="-120"/>
               </a:rPr>
-              <a:t>FAVORS TRUE INFECTION</a:t>
+              <a:t>FAVORS TRUE BACTEREMIA</a:t>
             </a:r>
             <a:endParaRPr lang="en-US" sz="1200" dirty="0"/>
           </a:p>
@@ -12148,7 +15090,7 @@
                 <a:ea typeface="Calibri" pitchFamily="34" charset="-122"/>
                 <a:cs typeface="Calibri" pitchFamily="34" charset="-120"/>
               </a:rPr>
-              <a:t>Same organism in multiple sets/bottles; short time-to-positivity.</a:t>
+              <a:t>Multiple positive sets with the same organism.</a:t>
             </a:r>
             <a:endParaRPr lang="en-US" sz="1250" dirty="0"/>
           </a:p>
@@ -12169,7 +15111,7 @@
                 <a:ea typeface="Calibri" pitchFamily="34" charset="-122"/>
                 <a:cs typeface="Calibri" pitchFamily="34" charset="-120"/>
               </a:rPr>
-              <a:t>Organisms typical of bacteremia: S. aureus, Gram-negative rods, S. pneumoniae, Candida.</a:t>
+              <a:t>Virulent organisms (S. aureus, GNR, pneumococcus, Candida) in any set.</a:t>
             </a:r>
             <a:endParaRPr lang="en-US" sz="1250" dirty="0"/>
           </a:p>
@@ -12190,7 +15132,7 @@
                 <a:ea typeface="Calibri" pitchFamily="34" charset="-122"/>
                 <a:cs typeface="Calibri" pitchFamily="34" charset="-120"/>
               </a:rPr>
-              <a:t>Compatible clinical sepsis and source.</a:t>
+              <a:t>Compatible clinical picture and source.</a:t>
             </a:r>
             <a:endParaRPr lang="en-US" sz="1250" dirty="0"/>
           </a:p>
@@ -12211,7 +15153,7 @@
                 <a:ea typeface="Calibri" pitchFamily="34" charset="-122"/>
                 <a:cs typeface="Calibri" pitchFamily="34" charset="-120"/>
               </a:rPr>
-              <a:t>Persistence across draws.</a:t>
+              <a:t>Short time-to-positivity for pathogens.</a:t>
             </a:r>
             <a:endParaRPr lang="en-US" sz="1250" dirty="0"/>
           </a:p>
@@ -12234,7 +15176,7 @@
             </a:avLst>
           </a:prstGeom>
           <a:solidFill>
-            <a:srgbClr val="E8F2E9"/>
+            <a:srgbClr val="E9F3EA"/>
           </a:solidFill>
           <a:ln/>
           <a:effectLst>
@@ -12279,7 +15221,7 @@
                 <a:ea typeface="Calibri" pitchFamily="34" charset="-122"/>
                 <a:cs typeface="Calibri" pitchFamily="34" charset="-120"/>
               </a:rPr>
-              <a:t>FAVORS CONTAMINANT</a:t>
+              <a:t>FAVORS CONTAMINATION</a:t>
             </a:r>
             <a:endParaRPr lang="en-US" sz="1200" dirty="0"/>
           </a:p>
@@ -12322,7 +15264,7 @@
                 <a:ea typeface="Calibri" pitchFamily="34" charset="-122"/>
                 <a:cs typeface="Calibri" pitchFamily="34" charset="-120"/>
               </a:rPr>
-              <a:t>Single bottle of several positive; long time-to-positivity.</a:t>
+              <a:t>A single set growing skin flora (CoNS, Cutibacterium, diphtheroids) in a well patient.</a:t>
             </a:r>
             <a:endParaRPr lang="en-US" sz="1250" dirty="0"/>
           </a:p>
@@ -12343,7 +15285,7 @@
                 <a:ea typeface="Calibri" pitchFamily="34" charset="-122"/>
                 <a:cs typeface="Calibri" pitchFamily="34" charset="-120"/>
               </a:rPr>
-              <a:t>Common skin flora (coagulase-negative staph, Cutibacterium, diphtheroids).</a:t>
+              <a:t>Late, single-bottle positivity.</a:t>
             </a:r>
             <a:endParaRPr lang="en-US" sz="1250" dirty="0"/>
           </a:p>
@@ -12364,7 +15306,7 @@
                 <a:ea typeface="Calibri" pitchFamily="34" charset="-122"/>
                 <a:cs typeface="Calibri" pitchFamily="34" charset="-120"/>
               </a:rPr>
-              <a:t>No clinical sepsis; different organisms each draw.</a:t>
+              <a:t>Multiple different organisms without a source.</a:t>
             </a:r>
             <a:endParaRPr lang="en-US" sz="1250" dirty="0"/>
           </a:p>
@@ -12385,7 +15327,7 @@
                 <a:ea typeface="Calibri" pitchFamily="34" charset="-122"/>
                 <a:cs typeface="Calibri" pitchFamily="34" charset="-120"/>
               </a:rPr>
-              <a:t>Interpretation is probabilistic — integrate all features.</a:t>
+              <a:t>High institutional contamination rate signals a process problem.</a:t>
             </a:r>
             <a:endParaRPr lang="en-US" sz="1250" dirty="0"/>
           </a:p>

--- a/decks/Micro_05_Blood-Cultures-Sepsis-Infection-Control.pptx
+++ b/decks/Micro_05_Blood-Cultures-Sepsis-Infection-Control.pptx
@@ -25,9 +25,13 @@
     <p:sldId id="273" r:id="rId19"/>
     <p:sldId id="274" r:id="rId20"/>
     <p:sldId id="275" r:id="rId21"/>
+    <p:sldId id="284" r:id="rId35"/>
     <p:sldId id="276" r:id="rId22"/>
+    <p:sldId id="283" r:id="rId34"/>
     <p:sldId id="277" r:id="rId23"/>
+    <p:sldId id="282" r:id="rId33"/>
     <p:sldId id="278" r:id="rId24"/>
+    <p:sldId id="281" r:id="rId32"/>
     <p:sldId id="279" r:id="rId25"/>
     <p:sldId id="280" r:id="rId26"/>
   </p:sldIdLst>
@@ -3032,6 +3036,10 @@
           </a:solidFill>
           <a:ln/>
         </p:spPr>
+        <p:txBody>
+          <a:bodyPr/>
+          <a:p/>
+        </p:txBody>
       </p:sp>
       <p:sp>
         <p:nvSpPr>
@@ -3054,6 +3062,10 @@
           </a:solidFill>
           <a:ln/>
         </p:spPr>
+        <p:txBody>
+          <a:bodyPr/>
+          <a:p/>
+        </p:txBody>
       </p:sp>
       <p:sp>
         <p:nvSpPr>
@@ -3076,6 +3088,10 @@
           </a:solidFill>
           <a:ln/>
         </p:spPr>
+        <p:txBody>
+          <a:bodyPr/>
+          <a:p/>
+        </p:txBody>
       </p:sp>
       <p:sp>
         <p:nvSpPr>
@@ -3098,6 +3114,10 @@
           </a:solidFill>
           <a:ln/>
         </p:spPr>
+        <p:txBody>
+          <a:bodyPr/>
+          <a:p/>
+        </p:txBody>
       </p:sp>
       <p:sp>
         <p:nvSpPr>
@@ -3514,6 +3534,10 @@
             </a:outerShdw>
           </a:effectLst>
         </p:spPr>
+        <p:txBody>
+          <a:bodyPr/>
+          <a:p/>
+        </p:txBody>
       </p:sp>
       <p:sp>
         <p:nvSpPr>
@@ -3688,6 +3712,10 @@
             </a:outerShdw>
           </a:effectLst>
         </p:spPr>
+        <p:txBody>
+          <a:bodyPr/>
+          <a:p/>
+        </p:txBody>
       </p:sp>
       <p:sp>
         <p:nvSpPr>
@@ -4078,6 +4106,10 @@
             </a:outerShdw>
           </a:effectLst>
         </p:spPr>
+        <p:txBody>
+          <a:bodyPr/>
+          <a:p/>
+        </p:txBody>
       </p:sp>
       <p:sp>
         <p:nvSpPr>
@@ -4252,6 +4284,10 @@
             </a:outerShdw>
           </a:effectLst>
         </p:spPr>
+        <p:txBody>
+          <a:bodyPr/>
+          <a:p/>
+        </p:txBody>
       </p:sp>
       <p:sp>
         <p:nvSpPr>
@@ -4557,6 +4593,10 @@
           </a:solidFill>
           <a:ln/>
         </p:spPr>
+        <p:txBody>
+          <a:bodyPr/>
+          <a:p/>
+        </p:txBody>
       </p:sp>
       <p:sp>
         <p:nvSpPr>
@@ -4579,6 +4619,10 @@
           </a:solidFill>
           <a:ln/>
         </p:spPr>
+        <p:txBody>
+          <a:bodyPr/>
+          <a:p/>
+        </p:txBody>
       </p:sp>
       <p:sp>
         <p:nvSpPr>
@@ -4835,6 +4879,10 @@
             </a:outerShdw>
           </a:effectLst>
         </p:spPr>
+        <p:txBody>
+          <a:bodyPr/>
+          <a:p/>
+        </p:txBody>
       </p:sp>
       <p:sp>
         <p:nvSpPr>
@@ -5009,6 +5057,10 @@
             </a:outerShdw>
           </a:effectLst>
         </p:spPr>
+        <p:txBody>
+          <a:bodyPr/>
+          <a:p/>
+        </p:txBody>
       </p:sp>
       <p:sp>
         <p:nvSpPr>
@@ -5399,6 +5451,10 @@
             </a:outerShdw>
           </a:effectLst>
         </p:spPr>
+        <p:txBody>
+          <a:bodyPr/>
+          <a:p/>
+        </p:txBody>
       </p:sp>
       <p:sp>
         <p:nvSpPr>
@@ -5509,6 +5565,10 @@
             </a:outerShdw>
           </a:effectLst>
         </p:spPr>
+        <p:txBody>
+          <a:bodyPr/>
+          <a:p/>
+        </p:txBody>
       </p:sp>
       <p:sp>
         <p:nvSpPr>
@@ -5938,6 +5998,10 @@
             </a:outerShdw>
           </a:effectLst>
         </p:spPr>
+        <p:txBody>
+          <a:bodyPr/>
+          <a:p/>
+        </p:txBody>
       </p:sp>
       <p:sp>
         <p:nvSpPr>
@@ -6264,6 +6328,10 @@
             </a:outerShdw>
           </a:effectLst>
         </p:spPr>
+        <p:txBody>
+          <a:bodyPr/>
+          <a:p/>
+        </p:txBody>
       </p:sp>
       <p:sp>
         <p:nvSpPr>
@@ -6374,6 +6442,10 @@
             </a:outerShdw>
           </a:effectLst>
         </p:spPr>
+        <p:txBody>
+          <a:bodyPr/>
+          <a:p/>
+        </p:txBody>
       </p:sp>
       <p:sp>
         <p:nvSpPr>
@@ -6803,6 +6875,10 @@
             </a:outerShdw>
           </a:effectLst>
         </p:spPr>
+        <p:txBody>
+          <a:bodyPr/>
+          <a:p/>
+        </p:txBody>
       </p:sp>
       <p:sp>
         <p:nvSpPr>
@@ -7129,6 +7205,10 @@
             </a:outerShdw>
           </a:effectLst>
         </p:spPr>
+        <p:txBody>
+          <a:bodyPr/>
+          <a:p/>
+        </p:txBody>
       </p:sp>
       <p:sp>
         <p:nvSpPr>
@@ -7239,6 +7319,10 @@
             </a:outerShdw>
           </a:effectLst>
         </p:spPr>
+        <p:txBody>
+          <a:bodyPr/>
+          <a:p/>
+        </p:txBody>
       </p:sp>
       <p:sp>
         <p:nvSpPr>
@@ -7668,6 +7752,10 @@
             </a:outerShdw>
           </a:effectLst>
         </p:spPr>
+        <p:txBody>
+          <a:bodyPr/>
+          <a:p/>
+        </p:txBody>
       </p:sp>
       <p:sp>
         <p:nvSpPr>
@@ -7994,6 +8082,10 @@
             </a:outerShdw>
           </a:effectLst>
         </p:spPr>
+        <p:txBody>
+          <a:bodyPr/>
+          <a:p/>
+        </p:txBody>
       </p:sp>
       <p:sp>
         <p:nvSpPr>
@@ -8101,6 +8193,10 @@
             </a:outerShdw>
           </a:effectLst>
         </p:spPr>
+        <p:txBody>
+          <a:bodyPr/>
+          <a:p/>
+        </p:txBody>
       </p:sp>
       <p:sp>
         <p:nvSpPr>
@@ -8208,6 +8304,10 @@
             </a:outerShdw>
           </a:effectLst>
         </p:spPr>
+        <p:txBody>
+          <a:bodyPr/>
+          <a:p/>
+        </p:txBody>
       </p:sp>
       <p:sp>
         <p:nvSpPr>
@@ -8315,6 +8415,10 @@
             </a:outerShdw>
           </a:effectLst>
         </p:spPr>
+        <p:txBody>
+          <a:bodyPr/>
+          <a:p/>
+        </p:txBody>
       </p:sp>
       <p:sp>
         <p:nvSpPr>
@@ -8707,9 +8811,9 @@
               <a:buNone/>
             </a:pPr>
             <a:r>
-              <a:rPr lang="en-US" sz="1350" b="1" dirty="0">
-                <a:solidFill>
-                  <a:srgbClr val="1F5722"/>
+              <a:rPr lang="en-US" sz="1350" b="0" dirty="0">
+                <a:solidFill>
+                  <a:srgbClr val="33444F"/>
                 </a:solidFill>
                 <a:latin typeface="Calibri" pitchFamily="34" charset="0"/>
                 <a:ea typeface="Calibri" pitchFamily="34" charset="-122"/>
@@ -8778,130 +8882,6 @@
               <a:t>E. Time of day</a:t>
             </a:r>
             <a:endParaRPr lang="en-US" sz="1350" dirty="0"/>
-          </a:p>
-        </p:txBody>
-      </p:sp>
-      <p:sp>
-        <p:nvSpPr>
-          <p:cNvPr id="6" name="Shape 4"/>
-          <p:cNvSpPr/>
-          <p:nvPr/>
-        </p:nvSpPr>
-        <p:spPr>
-          <a:xfrm>
-            <a:off x="7201632" y="2395728"/>
-            <a:ext cx="4423136" cy="3246120"/>
-          </a:xfrm>
-          <a:prstGeom prst="roundRect">
-            <a:avLst>
-              <a:gd name="adj" fmla="val 2535"/>
-            </a:avLst>
-          </a:prstGeom>
-          <a:solidFill>
-            <a:srgbClr val="E8F2E9"/>
-          </a:solidFill>
-          <a:ln/>
-          <a:effectLst>
-            <a:outerShdw sx="100000" sy="100000" kx="0" ky="0" algn="bl" rotWithShape="0" blurRad="88900" dist="25400" dir="5400000">
-              <a:srgbClr val="22303C">
-                <a:alpha val="12000"/>
-              </a:srgbClr>
-            </a:outerShdw>
-          </a:effectLst>
-        </p:spPr>
-      </p:sp>
-      <p:sp>
-        <p:nvSpPr>
-          <p:cNvPr id="7" name="Text 5"/>
-          <p:cNvSpPr/>
-          <p:nvPr/>
-        </p:nvSpPr>
-        <p:spPr>
-          <a:xfrm>
-            <a:off x="7439376" y="2578608"/>
-            <a:ext cx="3965936" cy="457200"/>
-          </a:xfrm>
-          <a:prstGeom prst="rect">
-            <a:avLst/>
-          </a:prstGeom>
-          <a:noFill/>
-          <a:ln/>
-        </p:spPr>
-        <p:txBody>
-          <a:bodyPr wrap="square" lIns="0" tIns="0" rIns="0" bIns="0" rtlCol="0" anchor="ctr"/>
-          <a:lstStyle/>
-          <a:p>
-            <a:pPr indent="0" marL="0">
-              <a:buNone/>
-            </a:pPr>
-            <a:r>
-              <a:rPr lang="en-US" sz="1500" b="1" dirty="0">
-                <a:solidFill>
-                  <a:srgbClr val="2E7D32"/>
-                </a:solidFill>
-                <a:latin typeface="Calibri" pitchFamily="34" charset="0"/>
-                <a:ea typeface="Calibri" pitchFamily="34" charset="-122"/>
-                <a:cs typeface="Calibri" pitchFamily="34" charset="-120"/>
-              </a:rPr>
-              <a:t>ANSWER  </a:t>
-            </a:r>
-            <a:pPr indent="0" marL="0">
-              <a:buNone/>
-            </a:pPr>
-            <a:r>
-              <a:rPr lang="en-US" sz="1500" b="1" dirty="0">
-                <a:solidFill>
-                  <a:srgbClr val="1B2A38"/>
-                </a:solidFill>
-                <a:latin typeface="Calibri" pitchFamily="34" charset="0"/>
-                <a:ea typeface="Calibri" pitchFamily="34" charset="-122"/>
-                <a:cs typeface="Calibri" pitchFamily="34" charset="-120"/>
-              </a:rPr>
-              <a:t>B — Total blood volume cultured</a:t>
-            </a:r>
-            <a:endParaRPr lang="en-US" sz="1500" dirty="0"/>
-          </a:p>
-        </p:txBody>
-      </p:sp>
-      <p:sp>
-        <p:nvSpPr>
-          <p:cNvPr id="8" name="Text 6"/>
-          <p:cNvSpPr/>
-          <p:nvPr/>
-        </p:nvSpPr>
-        <p:spPr>
-          <a:xfrm>
-            <a:off x="7439376" y="3127248"/>
-            <a:ext cx="3947648" cy="2377440"/>
-          </a:xfrm>
-          <a:prstGeom prst="rect">
-            <a:avLst/>
-          </a:prstGeom>
-          <a:noFill/>
-          <a:ln/>
-        </p:spPr>
-        <p:txBody>
-          <a:bodyPr wrap="square" lIns="0" tIns="0" rIns="0" bIns="0" rtlCol="0" anchor="t"/>
-          <a:lstStyle/>
-          <a:p>
-            <a:pPr algn="l" indent="0" marL="0">
-              <a:lnSpc>
-                <a:spcPct val="108000"/>
-              </a:lnSpc>
-              <a:buNone/>
-            </a:pPr>
-            <a:r>
-              <a:rPr lang="en-US" sz="1250" dirty="0">
-                <a:solidFill>
-                  <a:srgbClr val="33444F"/>
-                </a:solidFill>
-                <a:latin typeface="Calibri" pitchFamily="34" charset="0"/>
-                <a:ea typeface="Calibri" pitchFamily="34" charset="-122"/>
-                <a:cs typeface="Calibri" pitchFamily="34" charset="-120"/>
-              </a:rPr>
-              <a:t>Yield is directly related to inoculated volume; under-filling bottles is a leading preventable cause of false negatives.</a:t>
-            </a:r>
-            <a:endParaRPr lang="en-US" sz="1250" dirty="0"/>
           </a:p>
         </p:txBody>
       </p:sp>
@@ -9211,9 +9191,9 @@
               <a:buNone/>
             </a:pPr>
             <a:r>
-              <a:rPr lang="en-US" sz="1350" b="1" dirty="0">
-                <a:solidFill>
-                  <a:srgbClr val="1F5722"/>
+              <a:rPr lang="en-US" sz="1350" b="0" dirty="0">
+                <a:solidFill>
+                  <a:srgbClr val="33444F"/>
                 </a:solidFill>
                 <a:latin typeface="Calibri" pitchFamily="34" charset="0"/>
                 <a:ea typeface="Calibri" pitchFamily="34" charset="-122"/>
@@ -9282,130 +9262,6 @@
               <a:t>E. Growth only after subculture</a:t>
             </a:r>
             <a:endParaRPr lang="en-US" sz="1350" dirty="0"/>
-          </a:p>
-        </p:txBody>
-      </p:sp>
-      <p:sp>
-        <p:nvSpPr>
-          <p:cNvPr id="6" name="Shape 4"/>
-          <p:cNvSpPr/>
-          <p:nvPr/>
-        </p:nvSpPr>
-        <p:spPr>
-          <a:xfrm>
-            <a:off x="7201632" y="2395728"/>
-            <a:ext cx="4423136" cy="3246120"/>
-          </a:xfrm>
-          <a:prstGeom prst="roundRect">
-            <a:avLst>
-              <a:gd name="adj" fmla="val 2535"/>
-            </a:avLst>
-          </a:prstGeom>
-          <a:solidFill>
-            <a:srgbClr val="E8F2E9"/>
-          </a:solidFill>
-          <a:ln/>
-          <a:effectLst>
-            <a:outerShdw sx="100000" sy="100000" kx="0" ky="0" algn="bl" rotWithShape="0" blurRad="88900" dist="25400" dir="5400000">
-              <a:srgbClr val="22303C">
-                <a:alpha val="12000"/>
-              </a:srgbClr>
-            </a:outerShdw>
-          </a:effectLst>
-        </p:spPr>
-      </p:sp>
-      <p:sp>
-        <p:nvSpPr>
-          <p:cNvPr id="7" name="Text 5"/>
-          <p:cNvSpPr/>
-          <p:nvPr/>
-        </p:nvSpPr>
-        <p:spPr>
-          <a:xfrm>
-            <a:off x="7439376" y="2578608"/>
-            <a:ext cx="3965936" cy="457200"/>
-          </a:xfrm>
-          <a:prstGeom prst="rect">
-            <a:avLst/>
-          </a:prstGeom>
-          <a:noFill/>
-          <a:ln/>
-        </p:spPr>
-        <p:txBody>
-          <a:bodyPr wrap="square" lIns="0" tIns="0" rIns="0" bIns="0" rtlCol="0" anchor="ctr"/>
-          <a:lstStyle/>
-          <a:p>
-            <a:pPr indent="0" marL="0">
-              <a:buNone/>
-            </a:pPr>
-            <a:r>
-              <a:rPr lang="en-US" sz="1500" b="1" dirty="0">
-                <a:solidFill>
-                  <a:srgbClr val="2E7D32"/>
-                </a:solidFill>
-                <a:latin typeface="Calibri" pitchFamily="34" charset="0"/>
-                <a:ea typeface="Calibri" pitchFamily="34" charset="-122"/>
-                <a:cs typeface="Calibri" pitchFamily="34" charset="-120"/>
-              </a:rPr>
-              <a:t>ANSWER  </a:t>
-            </a:r>
-            <a:pPr indent="0" marL="0">
-              <a:buNone/>
-            </a:pPr>
-            <a:r>
-              <a:rPr lang="en-US" sz="1500" b="1" dirty="0">
-                <a:solidFill>
-                  <a:srgbClr val="1B2A38"/>
-                </a:solidFill>
-                <a:latin typeface="Calibri" pitchFamily="34" charset="0"/>
-                <a:ea typeface="Calibri" pitchFamily="34" charset="-122"/>
-                <a:cs typeface="Calibri" pitchFamily="34" charset="-120"/>
-              </a:rPr>
-              <a:t>B — Same organism in multiple sets</a:t>
-            </a:r>
-            <a:endParaRPr lang="en-US" sz="1500" dirty="0"/>
-          </a:p>
-        </p:txBody>
-      </p:sp>
-      <p:sp>
-        <p:nvSpPr>
-          <p:cNvPr id="8" name="Text 6"/>
-          <p:cNvSpPr/>
-          <p:nvPr/>
-        </p:nvSpPr>
-        <p:spPr>
-          <a:xfrm>
-            <a:off x="7439376" y="3127248"/>
-            <a:ext cx="3947648" cy="2377440"/>
-          </a:xfrm>
-          <a:prstGeom prst="rect">
-            <a:avLst/>
-          </a:prstGeom>
-          <a:noFill/>
-          <a:ln/>
-        </p:spPr>
-        <p:txBody>
-          <a:bodyPr wrap="square" lIns="0" tIns="0" rIns="0" bIns="0" rtlCol="0" anchor="t"/>
-          <a:lstStyle/>
-          <a:p>
-            <a:pPr algn="l" indent="0" marL="0">
-              <a:lnSpc>
-                <a:spcPct val="108000"/>
-              </a:lnSpc>
-              <a:buNone/>
-            </a:pPr>
-            <a:r>
-              <a:rPr lang="en-US" sz="1250" dirty="0">
-                <a:solidFill>
-                  <a:srgbClr val="33444F"/>
-                </a:solidFill>
-                <a:latin typeface="Calibri" pitchFamily="34" charset="0"/>
-                <a:ea typeface="Calibri" pitchFamily="34" charset="-122"/>
-                <a:cs typeface="Calibri" pitchFamily="34" charset="-120"/>
-              </a:rPr>
-              <a:t>Concordant growth across sets, especially of virulent organisms, supports true bacteremia; isolated skin flora suggests contamination.</a:t>
-            </a:r>
-            <a:endParaRPr lang="en-US" sz="1250" dirty="0"/>
           </a:p>
         </p:txBody>
       </p:sp>
@@ -9715,9 +9571,9 @@
               <a:buNone/>
             </a:pPr>
             <a:r>
-              <a:rPr lang="en-US" sz="1350" b="1" dirty="0">
-                <a:solidFill>
-                  <a:srgbClr val="1F5722"/>
+              <a:rPr lang="en-US" sz="1350" b="0" dirty="0">
+                <a:solidFill>
+                  <a:srgbClr val="33444F"/>
                 </a:solidFill>
                 <a:latin typeface="Calibri" pitchFamily="34" charset="0"/>
                 <a:ea typeface="Calibri" pitchFamily="34" charset="-122"/>
@@ -9786,130 +9642,6 @@
               <a:t>E. A reason to stop antibiotics</a:t>
             </a:r>
             <a:endParaRPr lang="en-US" sz="1350" dirty="0"/>
-          </a:p>
-        </p:txBody>
-      </p:sp>
-      <p:sp>
-        <p:nvSpPr>
-          <p:cNvPr id="6" name="Shape 4"/>
-          <p:cNvSpPr/>
-          <p:nvPr/>
-        </p:nvSpPr>
-        <p:spPr>
-          <a:xfrm>
-            <a:off x="7201632" y="2395728"/>
-            <a:ext cx="4423136" cy="3246120"/>
-          </a:xfrm>
-          <a:prstGeom prst="roundRect">
-            <a:avLst>
-              <a:gd name="adj" fmla="val 2535"/>
-            </a:avLst>
-          </a:prstGeom>
-          <a:solidFill>
-            <a:srgbClr val="E8F2E9"/>
-          </a:solidFill>
-          <a:ln/>
-          <a:effectLst>
-            <a:outerShdw sx="100000" sy="100000" kx="0" ky="0" algn="bl" rotWithShape="0" blurRad="88900" dist="25400" dir="5400000">
-              <a:srgbClr val="22303C">
-                <a:alpha val="12000"/>
-              </a:srgbClr>
-            </a:outerShdw>
-          </a:effectLst>
-        </p:spPr>
-      </p:sp>
-      <p:sp>
-        <p:nvSpPr>
-          <p:cNvPr id="7" name="Text 5"/>
-          <p:cNvSpPr/>
-          <p:nvPr/>
-        </p:nvSpPr>
-        <p:spPr>
-          <a:xfrm>
-            <a:off x="7439376" y="2578608"/>
-            <a:ext cx="3965936" cy="457200"/>
-          </a:xfrm>
-          <a:prstGeom prst="rect">
-            <a:avLst/>
-          </a:prstGeom>
-          <a:noFill/>
-          <a:ln/>
-        </p:spPr>
-        <p:txBody>
-          <a:bodyPr wrap="square" lIns="0" tIns="0" rIns="0" bIns="0" rtlCol="0" anchor="ctr"/>
-          <a:lstStyle/>
-          <a:p>
-            <a:pPr indent="0" marL="0">
-              <a:buNone/>
-            </a:pPr>
-            <a:r>
-              <a:rPr lang="en-US" sz="1500" b="1" dirty="0">
-                <a:solidFill>
-                  <a:srgbClr val="2E7D32"/>
-                </a:solidFill>
-                <a:latin typeface="Calibri" pitchFamily="34" charset="0"/>
-                <a:ea typeface="Calibri" pitchFamily="34" charset="-122"/>
-                <a:cs typeface="Calibri" pitchFamily="34" charset="-120"/>
-              </a:rPr>
-              <a:t>ANSWER  </a:t>
-            </a:r>
-            <a:pPr indent="0" marL="0">
-              <a:buNone/>
-            </a:pPr>
-            <a:r>
-              <a:rPr lang="en-US" sz="1500" b="1" dirty="0">
-                <a:solidFill>
-                  <a:srgbClr val="1B2A38"/>
-                </a:solidFill>
-                <a:latin typeface="Calibri" pitchFamily="34" charset="0"/>
-                <a:ea typeface="Calibri" pitchFamily="34" charset="-122"/>
-                <a:cs typeface="Calibri" pitchFamily="34" charset="-120"/>
-              </a:rPr>
-              <a:t>B — Always significant</a:t>
-            </a:r>
-            <a:endParaRPr lang="en-US" sz="1500" dirty="0"/>
-          </a:p>
-        </p:txBody>
-      </p:sp>
-      <p:sp>
-        <p:nvSpPr>
-          <p:cNvPr id="8" name="Text 6"/>
-          <p:cNvSpPr/>
-          <p:nvPr/>
-        </p:nvSpPr>
-        <p:spPr>
-          <a:xfrm>
-            <a:off x="7439376" y="3127248"/>
-            <a:ext cx="3947648" cy="2377440"/>
-          </a:xfrm>
-          <a:prstGeom prst="rect">
-            <a:avLst/>
-          </a:prstGeom>
-          <a:noFill/>
-          <a:ln/>
-        </p:spPr>
-        <p:txBody>
-          <a:bodyPr wrap="square" lIns="0" tIns="0" rIns="0" bIns="0" rtlCol="0" anchor="t"/>
-          <a:lstStyle/>
-          <a:p>
-            <a:pPr algn="l" indent="0" marL="0">
-              <a:lnSpc>
-                <a:spcPct val="108000"/>
-              </a:lnSpc>
-              <a:buNone/>
-            </a:pPr>
-            <a:r>
-              <a:rPr lang="en-US" sz="1250" dirty="0">
-                <a:solidFill>
-                  <a:srgbClr val="33444F"/>
-                </a:solidFill>
-                <a:latin typeface="Calibri" pitchFamily="34" charset="0"/>
-                <a:ea typeface="Calibri" pitchFamily="34" charset="-122"/>
-                <a:cs typeface="Calibri" pitchFamily="34" charset="-120"/>
-              </a:rPr>
-              <a:t>S. aureus bacteremia is never treated as a contaminant; it requires source evaluation, therapy, and clearance cultures.</a:t>
-            </a:r>
-            <a:endParaRPr lang="en-US" sz="1250" dirty="0"/>
           </a:p>
         </p:txBody>
       </p:sp>
@@ -10219,9 +9951,9 @@
               <a:buNone/>
             </a:pPr>
             <a:r>
-              <a:rPr lang="en-US" sz="1350" b="1" dirty="0">
-                <a:solidFill>
-                  <a:srgbClr val="1F5722"/>
+              <a:rPr lang="en-US" sz="1350" b="0" dirty="0">
+                <a:solidFill>
+                  <a:srgbClr val="33444F"/>
                 </a:solidFill>
                 <a:latin typeface="Calibri" pitchFamily="34" charset="0"/>
                 <a:ea typeface="Calibri" pitchFamily="34" charset="-122"/>
@@ -10290,130 +10022,6 @@
               <a:t>E. The antibiogram</a:t>
             </a:r>
             <a:endParaRPr lang="en-US" sz="1350" dirty="0"/>
-          </a:p>
-        </p:txBody>
-      </p:sp>
-      <p:sp>
-        <p:nvSpPr>
-          <p:cNvPr id="6" name="Shape 4"/>
-          <p:cNvSpPr/>
-          <p:nvPr/>
-        </p:nvSpPr>
-        <p:spPr>
-          <a:xfrm>
-            <a:off x="7201632" y="2395728"/>
-            <a:ext cx="4423136" cy="3246120"/>
-          </a:xfrm>
-          <a:prstGeom prst="roundRect">
-            <a:avLst>
-              <a:gd name="adj" fmla="val 2535"/>
-            </a:avLst>
-          </a:prstGeom>
-          <a:solidFill>
-            <a:srgbClr val="E8F2E9"/>
-          </a:solidFill>
-          <a:ln/>
-          <a:effectLst>
-            <a:outerShdw sx="100000" sy="100000" kx="0" ky="0" algn="bl" rotWithShape="0" blurRad="88900" dist="25400" dir="5400000">
-              <a:srgbClr val="22303C">
-                <a:alpha val="12000"/>
-              </a:srgbClr>
-            </a:outerShdw>
-          </a:effectLst>
-        </p:spPr>
-      </p:sp>
-      <p:sp>
-        <p:nvSpPr>
-          <p:cNvPr id="7" name="Text 5"/>
-          <p:cNvSpPr/>
-          <p:nvPr/>
-        </p:nvSpPr>
-        <p:spPr>
-          <a:xfrm>
-            <a:off x="7439376" y="2578608"/>
-            <a:ext cx="3965936" cy="457200"/>
-          </a:xfrm>
-          <a:prstGeom prst="rect">
-            <a:avLst/>
-          </a:prstGeom>
-          <a:noFill/>
-          <a:ln/>
-        </p:spPr>
-        <p:txBody>
-          <a:bodyPr wrap="square" lIns="0" tIns="0" rIns="0" bIns="0" rtlCol="0" anchor="ctr"/>
-          <a:lstStyle/>
-          <a:p>
-            <a:pPr indent="0" marL="0">
-              <a:buNone/>
-            </a:pPr>
-            <a:r>
-              <a:rPr lang="en-US" sz="1500" b="1" dirty="0">
-                <a:solidFill>
-                  <a:srgbClr val="2E7D32"/>
-                </a:solidFill>
-                <a:latin typeface="Calibri" pitchFamily="34" charset="0"/>
-                <a:ea typeface="Calibri" pitchFamily="34" charset="-122"/>
-                <a:cs typeface="Calibri" pitchFamily="34" charset="-120"/>
-              </a:rPr>
-              <a:t>ANSWER  </a:t>
-            </a:r>
-            <a:pPr indent="0" marL="0">
-              <a:buNone/>
-            </a:pPr>
-            <a:r>
-              <a:rPr lang="en-US" sz="1500" b="1" dirty="0">
-                <a:solidFill>
-                  <a:srgbClr val="1B2A38"/>
-                </a:solidFill>
-                <a:latin typeface="Calibri" pitchFamily="34" charset="0"/>
-                <a:ea typeface="Calibri" pitchFamily="34" charset="-122"/>
-                <a:cs typeface="Calibri" pitchFamily="34" charset="-120"/>
-              </a:rPr>
-              <a:t>B — Catheter-related bloodstream infection</a:t>
-            </a:r>
-            <a:endParaRPr lang="en-US" sz="1500" dirty="0"/>
-          </a:p>
-        </p:txBody>
-      </p:sp>
-      <p:sp>
-        <p:nvSpPr>
-          <p:cNvPr id="8" name="Text 6"/>
-          <p:cNvSpPr/>
-          <p:nvPr/>
-        </p:nvSpPr>
-        <p:spPr>
-          <a:xfrm>
-            <a:off x="7439376" y="3127248"/>
-            <a:ext cx="3947648" cy="2377440"/>
-          </a:xfrm>
-          <a:prstGeom prst="rect">
-            <a:avLst/>
-          </a:prstGeom>
-          <a:noFill/>
-          <a:ln/>
-        </p:spPr>
-        <p:txBody>
-          <a:bodyPr wrap="square" lIns="0" tIns="0" rIns="0" bIns="0" rtlCol="0" anchor="t"/>
-          <a:lstStyle/>
-          <a:p>
-            <a:pPr algn="l" indent="0" marL="0">
-              <a:lnSpc>
-                <a:spcPct val="108000"/>
-              </a:lnSpc>
-              <a:buNone/>
-            </a:pPr>
-            <a:r>
-              <a:rPr lang="en-US" sz="1250" dirty="0">
-                <a:solidFill>
-                  <a:srgbClr val="33444F"/>
-                </a:solidFill>
-                <a:latin typeface="Calibri" pitchFamily="34" charset="0"/>
-                <a:ea typeface="Calibri" pitchFamily="34" charset="-122"/>
-                <a:cs typeface="Calibri" pitchFamily="34" charset="-120"/>
-              </a:rPr>
-              <a:t>Markedly earlier positivity from a line draw than a paired peripheral draw supports the catheter as the bacteremia source.</a:t>
-            </a:r>
-            <a:endParaRPr lang="en-US" sz="1250" dirty="0"/>
           </a:p>
         </p:txBody>
       </p:sp>
@@ -10654,6 +10262,10 @@
           </a:solidFill>
           <a:ln/>
         </p:spPr>
+        <p:txBody>
+          <a:bodyPr/>
+          <a:p/>
+        </p:txBody>
       </p:sp>
       <p:sp>
         <p:nvSpPr>
@@ -10681,6 +10293,10 @@
             </a:outerShdw>
           </a:effectLst>
         </p:spPr>
+        <p:txBody>
+          <a:bodyPr/>
+          <a:p/>
+        </p:txBody>
       </p:sp>
       <p:sp>
         <p:nvSpPr>
@@ -10781,6 +10397,10 @@
           </a:solidFill>
           <a:ln/>
         </p:spPr>
+        <p:txBody>
+          <a:bodyPr/>
+          <a:p/>
+        </p:txBody>
       </p:sp>
       <p:sp>
         <p:nvSpPr>
@@ -10808,6 +10428,10 @@
             </a:outerShdw>
           </a:effectLst>
         </p:spPr>
+        <p:txBody>
+          <a:bodyPr/>
+          <a:p/>
+        </p:txBody>
       </p:sp>
       <p:sp>
         <p:nvSpPr>
@@ -10908,6 +10532,10 @@
           </a:solidFill>
           <a:ln/>
         </p:spPr>
+        <p:txBody>
+          <a:bodyPr/>
+          <a:p/>
+        </p:txBody>
       </p:sp>
       <p:sp>
         <p:nvSpPr>
@@ -10935,6 +10563,10 @@
             </a:outerShdw>
           </a:effectLst>
         </p:spPr>
+        <p:txBody>
+          <a:bodyPr/>
+          <a:p/>
+        </p:txBody>
       </p:sp>
       <p:sp>
         <p:nvSpPr>
@@ -11035,6 +10667,10 @@
           </a:solidFill>
           <a:ln/>
         </p:spPr>
+        <p:txBody>
+          <a:bodyPr/>
+          <a:p/>
+        </p:txBody>
       </p:sp>
       <p:sp>
         <p:nvSpPr>
@@ -11062,6 +10698,10 @@
             </a:outerShdw>
           </a:effectLst>
         </p:spPr>
+        <p:txBody>
+          <a:bodyPr/>
+          <a:p/>
+        </p:txBody>
       </p:sp>
       <p:sp>
         <p:nvSpPr>
@@ -11162,6 +10802,10 @@
           </a:solidFill>
           <a:ln/>
         </p:spPr>
+        <p:txBody>
+          <a:bodyPr/>
+          <a:p/>
+        </p:txBody>
       </p:sp>
       <p:sp>
         <p:nvSpPr>
@@ -11189,6 +10833,10 @@
             </a:outerShdw>
           </a:effectLst>
         </p:spPr>
+        <p:txBody>
+          <a:bodyPr/>
+          <a:p/>
+        </p:txBody>
       </p:sp>
       <p:sp>
         <p:nvSpPr>
@@ -11672,6 +11320,1982 @@
 </p:sld>
 </file>
 
+<file path=ppt/slides/slide26.xml><?xml version="1.0" encoding="utf-8"?>
+<p:sld xmlns:a="http://schemas.openxmlformats.org/drawingml/2006/main" xmlns:p="http://schemas.openxmlformats.org/presentationml/2006/main" xmlns:r="http://schemas.openxmlformats.org/officeDocument/2006/relationships">
+  <p:cSld>
+    <p:spTree>
+      <p:nvGrpSpPr>
+        <p:cNvPr id="1" name=""/>
+        <p:cNvGrpSpPr/>
+        <p:nvPr/>
+      </p:nvGrpSpPr>
+      <p:grpSpPr/>
+      <p:sp>
+        <p:nvSpPr>
+          <p:cNvPr id="2" name="Text 0"/>
+          <p:cNvSpPr/>
+          <p:nvPr/>
+        </p:nvSpPr>
+        <p:spPr>
+          <a:xfrm>
+            <a:off x="566928" y="329184"/>
+            <a:ext cx="10515600" cy="310896"/>
+          </a:xfrm>
+          <a:prstGeom prst="rect">
+            <a:avLst/>
+          </a:prstGeom>
+          <a:noFill/>
+          <a:ln/>
+        </p:spPr>
+        <p:txBody>
+          <a:bodyPr wrap="square" lIns="0" tIns="0" rIns="0" bIns="0" rtlCol="0" anchor="ctr"/>
+          <a:lstStyle/>
+          <a:p>
+            <a:pPr algn="l" indent="0" marL="0">
+              <a:buNone/>
+            </a:pPr>
+            <a:r>
+              <a:rPr lang="en-US" sz="1100" b="1" spc="150" kern="0" dirty="0">
+                <a:solidFill>
+                  <a:srgbClr val="2E7D32"/>
+                </a:solidFill>
+                <a:latin typeface="Calibri" pitchFamily="34" charset="0"/>
+                <a:ea typeface="Calibri" pitchFamily="34" charset="-122"/>
+                <a:cs typeface="Calibri" pitchFamily="34" charset="-120"/>
+              </a:rPr>
+              <a:t>MICROBIOLOGY   ·   BOARD REVIEW  ·  Q4</a:t>
+            </a:r>
+            <a:endParaRPr lang="en-US" sz="1100" dirty="0"/>
+          </a:p>
+        </p:txBody>
+      </p:sp>
+      <p:sp>
+        <p:nvSpPr>
+          <p:cNvPr id="3" name="Text 1"/>
+          <p:cNvSpPr/>
+          <p:nvPr/>
+        </p:nvSpPr>
+        <p:spPr>
+          <a:xfrm>
+            <a:off x="566928" y="713232"/>
+            <a:ext cx="11064240" cy="749808"/>
+          </a:xfrm>
+          <a:prstGeom prst="rect">
+            <a:avLst/>
+          </a:prstGeom>
+          <a:noFill/>
+          <a:ln/>
+        </p:spPr>
+        <p:txBody>
+          <a:bodyPr wrap="square" lIns="0" tIns="0" rIns="0" bIns="0" rtlCol="0" anchor="ctr"/>
+          <a:lstStyle/>
+          <a:p>
+            <a:pPr algn="l" indent="0" marL="0">
+              <a:buNone/>
+            </a:pPr>
+            <a:r>
+              <a:rPr lang="en-US" sz="2600" b="1" dirty="0">
+                <a:solidFill>
+                  <a:srgbClr val="0E3A5F"/>
+                </a:solidFill>
+                <a:latin typeface="Calibri" pitchFamily="34" charset="0"/>
+                <a:ea typeface="Calibri" pitchFamily="34" charset="-122"/>
+                <a:cs typeface="Calibri" pitchFamily="34" charset="-120"/>
+              </a:rPr>
+              <a:t>Board-Style Review</a:t>
+            </a:r>
+            <a:endParaRPr lang="en-US" sz="2600" dirty="0"/>
+          </a:p>
+        </p:txBody>
+      </p:sp>
+      <p:sp>
+        <p:nvSpPr>
+          <p:cNvPr id="4" name="Text 2"/>
+          <p:cNvSpPr/>
+          <p:nvPr/>
+        </p:nvSpPr>
+        <p:spPr>
+          <a:xfrm>
+            <a:off x="566928" y="1417320"/>
+            <a:ext cx="11057839" cy="914400"/>
+          </a:xfrm>
+          <a:prstGeom prst="rect">
+            <a:avLst/>
+          </a:prstGeom>
+          <a:noFill/>
+          <a:ln/>
+        </p:spPr>
+        <p:txBody>
+          <a:bodyPr wrap="square" lIns="0" tIns="0" rIns="0" bIns="0" rtlCol="0" anchor="t"/>
+          <a:lstStyle/>
+          <a:p>
+            <a:pPr algn="l" indent="0" marL="0">
+              <a:lnSpc>
+                <a:spcPct val="105000"/>
+              </a:lnSpc>
+              <a:buNone/>
+            </a:pPr>
+            <a:r>
+              <a:rPr lang="en-US" sz="1450" b="1" dirty="0">
+                <a:solidFill>
+                  <a:srgbClr val="1B2A38"/>
+                </a:solidFill>
+                <a:latin typeface="Calibri" pitchFamily="34" charset="0"/>
+                <a:ea typeface="Calibri" pitchFamily="34" charset="-122"/>
+                <a:cs typeface="Calibri" pitchFamily="34" charset="-120"/>
+              </a:rPr>
+              <a:t>Differential time-to-positivity (line vs peripheral) is used to assess:</a:t>
+            </a:r>
+            <a:endParaRPr lang="en-US" sz="1450" dirty="0"/>
+          </a:p>
+        </p:txBody>
+      </p:sp>
+      <p:sp>
+        <p:nvSpPr>
+          <p:cNvPr id="5" name="Text 3"/>
+          <p:cNvSpPr/>
+          <p:nvPr/>
+        </p:nvSpPr>
+        <p:spPr>
+          <a:xfrm>
+            <a:off x="658368" y="2395728"/>
+            <a:ext cx="6192390" cy="3017520"/>
+          </a:xfrm>
+          <a:prstGeom prst="rect">
+            <a:avLst/>
+          </a:prstGeom>
+          <a:noFill/>
+          <a:ln/>
+        </p:spPr>
+        <p:txBody>
+          <a:bodyPr wrap="square" lIns="0" tIns="0" rIns="0" bIns="0" rtlCol="0" anchor="t"/>
+          <a:lstStyle/>
+          <a:p>
+            <a:pPr algn="l" indent="0" marL="0">
+              <a:spcAft>
+                <a:spcPts val="600"/>
+              </a:spcAft>
+              <a:buNone/>
+            </a:pPr>
+            <a:r>
+              <a:rPr lang="en-US" sz="1350" dirty="0">
+                <a:solidFill>
+                  <a:srgbClr val="33444F"/>
+                </a:solidFill>
+                <a:latin typeface="Calibri" pitchFamily="34" charset="0"/>
+                <a:ea typeface="Calibri" pitchFamily="34" charset="-122"/>
+                <a:cs typeface="Calibri" pitchFamily="34" charset="-120"/>
+              </a:rPr>
+              <a:t>A. Antibiotic dosing</a:t>
+            </a:r>
+            <a:endParaRPr lang="en-US" sz="1350" dirty="0"/>
+          </a:p>
+          <a:p>
+            <a:pPr algn="l" indent="0" marL="0">
+              <a:spcAft>
+                <a:spcPts val="600"/>
+              </a:spcAft>
+              <a:buNone/>
+            </a:pPr>
+            <a:r>
+              <a:rPr lang="en-US" sz="1350" b="1" dirty="0">
+                <a:solidFill>
+                  <a:srgbClr val="1F5722"/>
+                </a:solidFill>
+                <a:latin typeface="Calibri" pitchFamily="34" charset="0"/>
+                <a:ea typeface="Calibri" pitchFamily="34" charset="-122"/>
+                <a:cs typeface="Calibri" pitchFamily="34" charset="-120"/>
+              </a:rPr>
+              <a:t>B. Catheter-related bloodstream infection</a:t>
+            </a:r>
+            <a:endParaRPr lang="en-US" sz="1350" dirty="0"/>
+          </a:p>
+          <a:p>
+            <a:pPr algn="l" indent="0" marL="0">
+              <a:spcAft>
+                <a:spcPts val="600"/>
+              </a:spcAft>
+              <a:buNone/>
+            </a:pPr>
+            <a:r>
+              <a:rPr lang="en-US" sz="1350" dirty="0">
+                <a:solidFill>
+                  <a:srgbClr val="33444F"/>
+                </a:solidFill>
+                <a:latin typeface="Calibri" pitchFamily="34" charset="0"/>
+                <a:ea typeface="Calibri" pitchFamily="34" charset="-122"/>
+                <a:cs typeface="Calibri" pitchFamily="34" charset="-120"/>
+              </a:rPr>
+              <a:t>C. Endocarditis duration</a:t>
+            </a:r>
+            <a:endParaRPr lang="en-US" sz="1350" dirty="0"/>
+          </a:p>
+          <a:p>
+            <a:pPr algn="l" indent="0" marL="0">
+              <a:spcAft>
+                <a:spcPts val="600"/>
+              </a:spcAft>
+              <a:buNone/>
+            </a:pPr>
+            <a:r>
+              <a:rPr lang="en-US" sz="1350" dirty="0">
+                <a:solidFill>
+                  <a:srgbClr val="33444F"/>
+                </a:solidFill>
+                <a:latin typeface="Calibri" pitchFamily="34" charset="0"/>
+                <a:ea typeface="Calibri" pitchFamily="34" charset="-122"/>
+                <a:cs typeface="Calibri" pitchFamily="34" charset="-120"/>
+              </a:rPr>
+              <a:t>D. Contamination rate</a:t>
+            </a:r>
+            <a:endParaRPr lang="en-US" sz="1350" dirty="0"/>
+          </a:p>
+          <a:p>
+            <a:pPr algn="l" indent="0" marL="0">
+              <a:spcAft>
+                <a:spcPts val="600"/>
+              </a:spcAft>
+              <a:buNone/>
+            </a:pPr>
+            <a:r>
+              <a:rPr lang="en-US" sz="1350" dirty="0">
+                <a:solidFill>
+                  <a:srgbClr val="33444F"/>
+                </a:solidFill>
+                <a:latin typeface="Calibri" pitchFamily="34" charset="0"/>
+                <a:ea typeface="Calibri" pitchFamily="34" charset="-122"/>
+                <a:cs typeface="Calibri" pitchFamily="34" charset="-120"/>
+              </a:rPr>
+              <a:t>E. The antibiogram</a:t>
+            </a:r>
+            <a:endParaRPr lang="en-US" sz="1350" dirty="0"/>
+          </a:p>
+        </p:txBody>
+      </p:sp>
+      <p:sp>
+        <p:nvSpPr>
+          <p:cNvPr id="6" name="Shape 4"/>
+          <p:cNvSpPr/>
+          <p:nvPr/>
+        </p:nvSpPr>
+        <p:spPr>
+          <a:xfrm>
+            <a:off x="7201632" y="2395728"/>
+            <a:ext cx="4423136" cy="3246120"/>
+          </a:xfrm>
+          <a:prstGeom prst="roundRect">
+            <a:avLst>
+              <a:gd name="adj" fmla="val 2535"/>
+            </a:avLst>
+          </a:prstGeom>
+          <a:solidFill>
+            <a:srgbClr val="E8F2E9"/>
+          </a:solidFill>
+          <a:ln/>
+          <a:effectLst>
+            <a:outerShdw sx="100000" sy="100000" kx="0" ky="0" algn="bl" rotWithShape="0" blurRad="88900" dist="25400" dir="5400000">
+              <a:srgbClr val="22303C">
+                <a:alpha val="12000"/>
+              </a:srgbClr>
+            </a:outerShdw>
+          </a:effectLst>
+        </p:spPr>
+        <p:txBody>
+          <a:bodyPr/>
+          <a:p/>
+        </p:txBody>
+      </p:sp>
+      <p:sp>
+        <p:nvSpPr>
+          <p:cNvPr id="7" name="Text 5"/>
+          <p:cNvSpPr/>
+          <p:nvPr/>
+        </p:nvSpPr>
+        <p:spPr>
+          <a:xfrm>
+            <a:off x="7439376" y="2578608"/>
+            <a:ext cx="3965936" cy="457200"/>
+          </a:xfrm>
+          <a:prstGeom prst="rect">
+            <a:avLst/>
+          </a:prstGeom>
+          <a:noFill/>
+          <a:ln/>
+        </p:spPr>
+        <p:txBody>
+          <a:bodyPr wrap="square" lIns="0" tIns="0" rIns="0" bIns="0" rtlCol="0" anchor="ctr"/>
+          <a:lstStyle/>
+          <a:p>
+            <a:pPr indent="0" marL="0">
+              <a:buNone/>
+            </a:pPr>
+            <a:r>
+              <a:rPr lang="en-US" sz="1500" b="1" dirty="0">
+                <a:solidFill>
+                  <a:srgbClr val="2E7D32"/>
+                </a:solidFill>
+                <a:latin typeface="Calibri" pitchFamily="34" charset="0"/>
+                <a:ea typeface="Calibri" pitchFamily="34" charset="-122"/>
+                <a:cs typeface="Calibri" pitchFamily="34" charset="-120"/>
+              </a:rPr>
+              <a:t>ANSWER  </a:t>
+            </a:r>
+            <a:pPr indent="0" marL="0">
+              <a:buNone/>
+            </a:pPr>
+            <a:r>
+              <a:rPr lang="en-US" sz="1500" b="1" dirty="0">
+                <a:solidFill>
+                  <a:srgbClr val="1B2A38"/>
+                </a:solidFill>
+                <a:latin typeface="Calibri" pitchFamily="34" charset="0"/>
+                <a:ea typeface="Calibri" pitchFamily="34" charset="-122"/>
+                <a:cs typeface="Calibri" pitchFamily="34" charset="-120"/>
+              </a:rPr>
+              <a:t>B — Catheter-related bloodstream infection</a:t>
+            </a:r>
+            <a:endParaRPr lang="en-US" sz="1500" dirty="0"/>
+          </a:p>
+        </p:txBody>
+      </p:sp>
+      <p:sp>
+        <p:nvSpPr>
+          <p:cNvPr id="8" name="Text 6"/>
+          <p:cNvSpPr/>
+          <p:nvPr/>
+        </p:nvSpPr>
+        <p:spPr>
+          <a:xfrm>
+            <a:off x="7439376" y="3127248"/>
+            <a:ext cx="3947648" cy="2377440"/>
+          </a:xfrm>
+          <a:prstGeom prst="rect">
+            <a:avLst/>
+          </a:prstGeom>
+          <a:noFill/>
+          <a:ln/>
+        </p:spPr>
+        <p:txBody>
+          <a:bodyPr wrap="square" lIns="0" tIns="0" rIns="0" bIns="0" rtlCol="0" anchor="t"/>
+          <a:lstStyle/>
+          <a:p>
+            <a:pPr algn="l" indent="0" marL="0">
+              <a:lnSpc>
+                <a:spcPct val="108000"/>
+              </a:lnSpc>
+              <a:buNone/>
+            </a:pPr>
+            <a:r>
+              <a:rPr lang="en-US" sz="1250" dirty="0">
+                <a:solidFill>
+                  <a:srgbClr val="33444F"/>
+                </a:solidFill>
+                <a:latin typeface="Calibri" pitchFamily="34" charset="0"/>
+                <a:ea typeface="Calibri" pitchFamily="34" charset="-122"/>
+                <a:cs typeface="Calibri" pitchFamily="34" charset="-120"/>
+              </a:rPr>
+              <a:t>Markedly earlier positivity from a line draw than a paired peripheral draw supports the catheter as the bacteremia source.</a:t>
+            </a:r>
+            <a:endParaRPr lang="en-US" sz="1250" dirty="0"/>
+          </a:p>
+        </p:txBody>
+      </p:sp>
+      <p:sp>
+        <p:nvSpPr>
+          <p:cNvPr id="9" name="Text 7"/>
+          <p:cNvSpPr/>
+          <p:nvPr/>
+        </p:nvSpPr>
+        <p:spPr>
+          <a:xfrm>
+            <a:off x="566928" y="6473952"/>
+            <a:ext cx="7772400" cy="274320"/>
+          </a:xfrm>
+          <a:prstGeom prst="rect">
+            <a:avLst/>
+          </a:prstGeom>
+          <a:noFill/>
+          <a:ln/>
+        </p:spPr>
+        <p:txBody>
+          <a:bodyPr wrap="square" lIns="0" tIns="0" rIns="0" bIns="0" rtlCol="0" anchor="ctr"/>
+          <a:lstStyle/>
+          <a:p>
+            <a:pPr algn="l" indent="0" marL="0">
+              <a:buNone/>
+            </a:pPr>
+            <a:r>
+              <a:rPr lang="en-US" sz="850" dirty="0">
+                <a:solidFill>
+                  <a:srgbClr val="9AA8B4"/>
+                </a:solidFill>
+                <a:latin typeface="Calibri" pitchFamily="34" charset="0"/>
+                <a:ea typeface="Calibri" pitchFamily="34" charset="-122"/>
+                <a:cs typeface="Calibri" pitchFamily="34" charset="-120"/>
+              </a:rPr>
+              <a:t>Makassed General Hospital  ·  Department of Laboratory Medicine</a:t>
+            </a:r>
+            <a:endParaRPr lang="en-US" sz="850" dirty="0"/>
+          </a:p>
+        </p:txBody>
+      </p:sp>
+      <p:sp>
+        <p:nvSpPr>
+          <p:cNvPr id="10" name="Text 8"/>
+          <p:cNvSpPr/>
+          <p:nvPr/>
+        </p:nvSpPr>
+        <p:spPr>
+          <a:xfrm>
+            <a:off x="9814255" y="6473952"/>
+            <a:ext cx="1828800" cy="274320"/>
+          </a:xfrm>
+          <a:prstGeom prst="rect">
+            <a:avLst/>
+          </a:prstGeom>
+          <a:noFill/>
+          <a:ln/>
+        </p:spPr>
+        <p:txBody>
+          <a:bodyPr wrap="square" lIns="0" tIns="0" rIns="0" bIns="0" rtlCol="0" anchor="ctr"/>
+          <a:lstStyle/>
+          <a:p>
+            <a:pPr algn="r" indent="0" marL="0">
+              <a:buNone/>
+            </a:pPr>
+            <a:r>
+              <a:rPr lang="en-US" sz="850" dirty="0">
+                <a:solidFill>
+                  <a:srgbClr val="9AA8B4"/>
+                </a:solidFill>
+                <a:latin typeface="Calibri" pitchFamily="34" charset="0"/>
+                <a:ea typeface="Calibri" pitchFamily="34" charset="-122"/>
+                <a:cs typeface="Calibri" pitchFamily="34" charset="-120"/>
+              </a:rPr>
+              <a:t>CP Lecture Series</a:t>
+            </a:r>
+            <a:pPr algn="r" indent="0" marL="0">
+              <a:buNone/>
+            </a:pPr>
+            <a:r>
+              <a:rPr lang="en-US" sz="850" dirty="0">
+                <a:solidFill>
+                  <a:srgbClr val="DCE4EC"/>
+                </a:solidFill>
+                <a:latin typeface="Calibri" pitchFamily="34" charset="0"/>
+                <a:ea typeface="Calibri" pitchFamily="34" charset="-122"/>
+                <a:cs typeface="Calibri" pitchFamily="34" charset="-120"/>
+              </a:rPr>
+              <a:t>   ·   </a:t>
+            </a:r>
+            <a:pPr algn="r" indent="0" marL="0">
+              <a:buNone/>
+            </a:pPr>
+            <a:r>
+              <a:rPr lang="en-US" sz="850" b="1" dirty="0">
+                <a:solidFill>
+                  <a:srgbClr val="2E7D32"/>
+                </a:solidFill>
+                <a:latin typeface="Calibri" pitchFamily="34" charset="0"/>
+                <a:ea typeface="Calibri" pitchFamily="34" charset="-122"/>
+                <a:cs typeface="Calibri" pitchFamily="34" charset="-120"/>
+              </a:rPr>
+              <a:t>20</a:t>
+            </a:r>
+            <a:endParaRPr lang="en-US" sz="850" dirty="0"/>
+          </a:p>
+        </p:txBody>
+      </p:sp>
+    </p:spTree>
+  </p:cSld>
+  <p:clrMapOvr>
+    <a:masterClrMapping/>
+  </p:clrMapOvr>
+</p:sld>
+</file>
+
+<file path=ppt/slides/slide27.xml><?xml version="1.0" encoding="utf-8"?>
+<p:sld xmlns:a="http://schemas.openxmlformats.org/drawingml/2006/main" xmlns:p="http://schemas.openxmlformats.org/presentationml/2006/main" xmlns:r="http://schemas.openxmlformats.org/officeDocument/2006/relationships">
+  <p:cSld>
+    <p:spTree>
+      <p:nvGrpSpPr>
+        <p:cNvPr id="1" name=""/>
+        <p:cNvGrpSpPr/>
+        <p:nvPr/>
+      </p:nvGrpSpPr>
+      <p:grpSpPr/>
+      <p:sp>
+        <p:nvSpPr>
+          <p:cNvPr id="2" name="Text 0"/>
+          <p:cNvSpPr/>
+          <p:nvPr/>
+        </p:nvSpPr>
+        <p:spPr>
+          <a:xfrm>
+            <a:off x="566928" y="329184"/>
+            <a:ext cx="10515600" cy="310896"/>
+          </a:xfrm>
+          <a:prstGeom prst="rect">
+            <a:avLst/>
+          </a:prstGeom>
+          <a:noFill/>
+          <a:ln/>
+        </p:spPr>
+        <p:txBody>
+          <a:bodyPr wrap="square" lIns="0" tIns="0" rIns="0" bIns="0" rtlCol="0" anchor="ctr"/>
+          <a:lstStyle/>
+          <a:p>
+            <a:pPr algn="l" indent="0" marL="0">
+              <a:buNone/>
+            </a:pPr>
+            <a:r>
+              <a:rPr lang="en-US" sz="1100" b="1" spc="150" kern="0" dirty="0">
+                <a:solidFill>
+                  <a:srgbClr val="2E7D32"/>
+                </a:solidFill>
+                <a:latin typeface="Calibri" pitchFamily="34" charset="0"/>
+                <a:ea typeface="Calibri" pitchFamily="34" charset="-122"/>
+                <a:cs typeface="Calibri" pitchFamily="34" charset="-120"/>
+              </a:rPr>
+              <a:t>MICROBIOLOGY   ·   BOARD REVIEW  ·  Q3</a:t>
+            </a:r>
+            <a:endParaRPr lang="en-US" sz="1100" dirty="0"/>
+          </a:p>
+        </p:txBody>
+      </p:sp>
+      <p:sp>
+        <p:nvSpPr>
+          <p:cNvPr id="3" name="Text 1"/>
+          <p:cNvSpPr/>
+          <p:nvPr/>
+        </p:nvSpPr>
+        <p:spPr>
+          <a:xfrm>
+            <a:off x="566928" y="713232"/>
+            <a:ext cx="11064240" cy="749808"/>
+          </a:xfrm>
+          <a:prstGeom prst="rect">
+            <a:avLst/>
+          </a:prstGeom>
+          <a:noFill/>
+          <a:ln/>
+        </p:spPr>
+        <p:txBody>
+          <a:bodyPr wrap="square" lIns="0" tIns="0" rIns="0" bIns="0" rtlCol="0" anchor="ctr"/>
+          <a:lstStyle/>
+          <a:p>
+            <a:pPr algn="l" indent="0" marL="0">
+              <a:buNone/>
+            </a:pPr>
+            <a:r>
+              <a:rPr lang="en-US" sz="2600" b="1" dirty="0">
+                <a:solidFill>
+                  <a:srgbClr val="0E3A5F"/>
+                </a:solidFill>
+                <a:latin typeface="Calibri" pitchFamily="34" charset="0"/>
+                <a:ea typeface="Calibri" pitchFamily="34" charset="-122"/>
+                <a:cs typeface="Calibri" pitchFamily="34" charset="-120"/>
+              </a:rPr>
+              <a:t>Board-Style Review</a:t>
+            </a:r>
+            <a:endParaRPr lang="en-US" sz="2600" dirty="0"/>
+          </a:p>
+        </p:txBody>
+      </p:sp>
+      <p:sp>
+        <p:nvSpPr>
+          <p:cNvPr id="4" name="Text 2"/>
+          <p:cNvSpPr/>
+          <p:nvPr/>
+        </p:nvSpPr>
+        <p:spPr>
+          <a:xfrm>
+            <a:off x="566928" y="1417320"/>
+            <a:ext cx="11057839" cy="914400"/>
+          </a:xfrm>
+          <a:prstGeom prst="rect">
+            <a:avLst/>
+          </a:prstGeom>
+          <a:noFill/>
+          <a:ln/>
+        </p:spPr>
+        <p:txBody>
+          <a:bodyPr wrap="square" lIns="0" tIns="0" rIns="0" bIns="0" rtlCol="0" anchor="t"/>
+          <a:lstStyle/>
+          <a:p>
+            <a:pPr algn="l" indent="0" marL="0">
+              <a:lnSpc>
+                <a:spcPct val="105000"/>
+              </a:lnSpc>
+              <a:buNone/>
+            </a:pPr>
+            <a:r>
+              <a:rPr lang="en-US" sz="1450" b="1" dirty="0">
+                <a:solidFill>
+                  <a:srgbClr val="1B2A38"/>
+                </a:solidFill>
+                <a:latin typeface="Calibri" pitchFamily="34" charset="0"/>
+                <a:ea typeface="Calibri" pitchFamily="34" charset="-122"/>
+                <a:cs typeface="Calibri" pitchFamily="34" charset="-120"/>
+              </a:rPr>
+              <a:t>A positive blood culture for S. aureus should be regarded as:</a:t>
+            </a:r>
+            <a:endParaRPr lang="en-US" sz="1450" dirty="0"/>
+          </a:p>
+        </p:txBody>
+      </p:sp>
+      <p:sp>
+        <p:nvSpPr>
+          <p:cNvPr id="5" name="Text 3"/>
+          <p:cNvSpPr/>
+          <p:nvPr/>
+        </p:nvSpPr>
+        <p:spPr>
+          <a:xfrm>
+            <a:off x="658368" y="2395728"/>
+            <a:ext cx="6192390" cy="3017520"/>
+          </a:xfrm>
+          <a:prstGeom prst="rect">
+            <a:avLst/>
+          </a:prstGeom>
+          <a:noFill/>
+          <a:ln/>
+        </p:spPr>
+        <p:txBody>
+          <a:bodyPr wrap="square" lIns="0" tIns="0" rIns="0" bIns="0" rtlCol="0" anchor="t"/>
+          <a:lstStyle/>
+          <a:p>
+            <a:pPr algn="l" indent="0" marL="0">
+              <a:spcAft>
+                <a:spcPts val="600"/>
+              </a:spcAft>
+              <a:buNone/>
+            </a:pPr>
+            <a:r>
+              <a:rPr lang="en-US" sz="1350" dirty="0">
+                <a:solidFill>
+                  <a:srgbClr val="33444F"/>
+                </a:solidFill>
+                <a:latin typeface="Calibri" pitchFamily="34" charset="0"/>
+                <a:ea typeface="Calibri" pitchFamily="34" charset="-122"/>
+                <a:cs typeface="Calibri" pitchFamily="34" charset="-120"/>
+              </a:rPr>
+              <a:t>A. A likely contaminant</a:t>
+            </a:r>
+            <a:endParaRPr lang="en-US" sz="1350" dirty="0"/>
+          </a:p>
+          <a:p>
+            <a:pPr algn="l" indent="0" marL="0">
+              <a:spcAft>
+                <a:spcPts val="600"/>
+              </a:spcAft>
+              <a:buNone/>
+            </a:pPr>
+            <a:r>
+              <a:rPr lang="en-US" sz="1350" b="1" dirty="0">
+                <a:solidFill>
+                  <a:srgbClr val="1F5722"/>
+                </a:solidFill>
+                <a:latin typeface="Calibri" pitchFamily="34" charset="0"/>
+                <a:ea typeface="Calibri" pitchFamily="34" charset="-122"/>
+                <a:cs typeface="Calibri" pitchFamily="34" charset="-120"/>
+              </a:rPr>
+              <a:t>B. Always clinically significant, warranting workup</a:t>
+            </a:r>
+            <a:endParaRPr lang="en-US" sz="1350" dirty="0"/>
+          </a:p>
+          <a:p>
+            <a:pPr algn="l" indent="0" marL="0">
+              <a:spcAft>
+                <a:spcPts val="600"/>
+              </a:spcAft>
+              <a:buNone/>
+            </a:pPr>
+            <a:r>
+              <a:rPr lang="en-US" sz="1350" dirty="0">
+                <a:solidFill>
+                  <a:srgbClr val="33444F"/>
+                </a:solidFill>
+                <a:latin typeface="Calibri" pitchFamily="34" charset="0"/>
+                <a:ea typeface="Calibri" pitchFamily="34" charset="-122"/>
+                <a:cs typeface="Calibri" pitchFamily="34" charset="-120"/>
+              </a:rPr>
+              <a:t>C. Ignorable if the patient is afebrile</a:t>
+            </a:r>
+            <a:endParaRPr lang="en-US" sz="1350" dirty="0"/>
+          </a:p>
+          <a:p>
+            <a:pPr algn="l" indent="0" marL="0">
+              <a:spcAft>
+                <a:spcPts val="600"/>
+              </a:spcAft>
+              <a:buNone/>
+            </a:pPr>
+            <a:r>
+              <a:rPr lang="en-US" sz="1350" dirty="0">
+                <a:solidFill>
+                  <a:srgbClr val="33444F"/>
+                </a:solidFill>
+                <a:latin typeface="Calibri" pitchFamily="34" charset="0"/>
+                <a:ea typeface="Calibri" pitchFamily="34" charset="-122"/>
+                <a:cs typeface="Calibri" pitchFamily="34" charset="-120"/>
+              </a:rPr>
+              <a:t>D. Significant only if 3 sets are positive</a:t>
+            </a:r>
+            <a:endParaRPr lang="en-US" sz="1350" dirty="0"/>
+          </a:p>
+          <a:p>
+            <a:pPr algn="l" indent="0" marL="0">
+              <a:spcAft>
+                <a:spcPts val="600"/>
+              </a:spcAft>
+              <a:buNone/>
+            </a:pPr>
+            <a:r>
+              <a:rPr lang="en-US" sz="1350" dirty="0">
+                <a:solidFill>
+                  <a:srgbClr val="33444F"/>
+                </a:solidFill>
+                <a:latin typeface="Calibri" pitchFamily="34" charset="0"/>
+                <a:ea typeface="Calibri" pitchFamily="34" charset="-122"/>
+                <a:cs typeface="Calibri" pitchFamily="34" charset="-120"/>
+              </a:rPr>
+              <a:t>E. A reason to stop antibiotics</a:t>
+            </a:r>
+            <a:endParaRPr lang="en-US" sz="1350" dirty="0"/>
+          </a:p>
+        </p:txBody>
+      </p:sp>
+      <p:sp>
+        <p:nvSpPr>
+          <p:cNvPr id="6" name="Shape 4"/>
+          <p:cNvSpPr/>
+          <p:nvPr/>
+        </p:nvSpPr>
+        <p:spPr>
+          <a:xfrm>
+            <a:off x="7201632" y="2395728"/>
+            <a:ext cx="4423136" cy="3246120"/>
+          </a:xfrm>
+          <a:prstGeom prst="roundRect">
+            <a:avLst>
+              <a:gd name="adj" fmla="val 2535"/>
+            </a:avLst>
+          </a:prstGeom>
+          <a:solidFill>
+            <a:srgbClr val="E8F2E9"/>
+          </a:solidFill>
+          <a:ln/>
+          <a:effectLst>
+            <a:outerShdw sx="100000" sy="100000" kx="0" ky="0" algn="bl" rotWithShape="0" blurRad="88900" dist="25400" dir="5400000">
+              <a:srgbClr val="22303C">
+                <a:alpha val="12000"/>
+              </a:srgbClr>
+            </a:outerShdw>
+          </a:effectLst>
+        </p:spPr>
+        <p:txBody>
+          <a:bodyPr/>
+          <a:p/>
+        </p:txBody>
+      </p:sp>
+      <p:sp>
+        <p:nvSpPr>
+          <p:cNvPr id="7" name="Text 5"/>
+          <p:cNvSpPr/>
+          <p:nvPr/>
+        </p:nvSpPr>
+        <p:spPr>
+          <a:xfrm>
+            <a:off x="7439376" y="2578608"/>
+            <a:ext cx="3965936" cy="457200"/>
+          </a:xfrm>
+          <a:prstGeom prst="rect">
+            <a:avLst/>
+          </a:prstGeom>
+          <a:noFill/>
+          <a:ln/>
+        </p:spPr>
+        <p:txBody>
+          <a:bodyPr wrap="square" lIns="0" tIns="0" rIns="0" bIns="0" rtlCol="0" anchor="ctr"/>
+          <a:lstStyle/>
+          <a:p>
+            <a:pPr indent="0" marL="0">
+              <a:buNone/>
+            </a:pPr>
+            <a:r>
+              <a:rPr lang="en-US" sz="1500" b="1" dirty="0">
+                <a:solidFill>
+                  <a:srgbClr val="2E7D32"/>
+                </a:solidFill>
+                <a:latin typeface="Calibri" pitchFamily="34" charset="0"/>
+                <a:ea typeface="Calibri" pitchFamily="34" charset="-122"/>
+                <a:cs typeface="Calibri" pitchFamily="34" charset="-120"/>
+              </a:rPr>
+              <a:t>ANSWER  </a:t>
+            </a:r>
+            <a:pPr indent="0" marL="0">
+              <a:buNone/>
+            </a:pPr>
+            <a:r>
+              <a:rPr lang="en-US" sz="1500" b="1" dirty="0">
+                <a:solidFill>
+                  <a:srgbClr val="1B2A38"/>
+                </a:solidFill>
+                <a:latin typeface="Calibri" pitchFamily="34" charset="0"/>
+                <a:ea typeface="Calibri" pitchFamily="34" charset="-122"/>
+                <a:cs typeface="Calibri" pitchFamily="34" charset="-120"/>
+              </a:rPr>
+              <a:t>B — Always significant</a:t>
+            </a:r>
+            <a:endParaRPr lang="en-US" sz="1500" dirty="0"/>
+          </a:p>
+        </p:txBody>
+      </p:sp>
+      <p:sp>
+        <p:nvSpPr>
+          <p:cNvPr id="8" name="Text 6"/>
+          <p:cNvSpPr/>
+          <p:nvPr/>
+        </p:nvSpPr>
+        <p:spPr>
+          <a:xfrm>
+            <a:off x="7439376" y="3127248"/>
+            <a:ext cx="3947648" cy="2377440"/>
+          </a:xfrm>
+          <a:prstGeom prst="rect">
+            <a:avLst/>
+          </a:prstGeom>
+          <a:noFill/>
+          <a:ln/>
+        </p:spPr>
+        <p:txBody>
+          <a:bodyPr wrap="square" lIns="0" tIns="0" rIns="0" bIns="0" rtlCol="0" anchor="t"/>
+          <a:lstStyle/>
+          <a:p>
+            <a:pPr algn="l" indent="0" marL="0">
+              <a:lnSpc>
+                <a:spcPct val="108000"/>
+              </a:lnSpc>
+              <a:buNone/>
+            </a:pPr>
+            <a:r>
+              <a:rPr lang="en-US" sz="1250" dirty="0">
+                <a:solidFill>
+                  <a:srgbClr val="33444F"/>
+                </a:solidFill>
+                <a:latin typeface="Calibri" pitchFamily="34" charset="0"/>
+                <a:ea typeface="Calibri" pitchFamily="34" charset="-122"/>
+                <a:cs typeface="Calibri" pitchFamily="34" charset="-120"/>
+              </a:rPr>
+              <a:t>S. aureus bacteremia is never treated as a contaminant; it requires source evaluation, therapy, and clearance cultures.</a:t>
+            </a:r>
+            <a:endParaRPr lang="en-US" sz="1250" dirty="0"/>
+          </a:p>
+        </p:txBody>
+      </p:sp>
+      <p:sp>
+        <p:nvSpPr>
+          <p:cNvPr id="9" name="Text 7"/>
+          <p:cNvSpPr/>
+          <p:nvPr/>
+        </p:nvSpPr>
+        <p:spPr>
+          <a:xfrm>
+            <a:off x="566928" y="6473952"/>
+            <a:ext cx="7772400" cy="274320"/>
+          </a:xfrm>
+          <a:prstGeom prst="rect">
+            <a:avLst/>
+          </a:prstGeom>
+          <a:noFill/>
+          <a:ln/>
+        </p:spPr>
+        <p:txBody>
+          <a:bodyPr wrap="square" lIns="0" tIns="0" rIns="0" bIns="0" rtlCol="0" anchor="ctr"/>
+          <a:lstStyle/>
+          <a:p>
+            <a:pPr algn="l" indent="0" marL="0">
+              <a:buNone/>
+            </a:pPr>
+            <a:r>
+              <a:rPr lang="en-US" sz="850" dirty="0">
+                <a:solidFill>
+                  <a:srgbClr val="9AA8B4"/>
+                </a:solidFill>
+                <a:latin typeface="Calibri" pitchFamily="34" charset="0"/>
+                <a:ea typeface="Calibri" pitchFamily="34" charset="-122"/>
+                <a:cs typeface="Calibri" pitchFamily="34" charset="-120"/>
+              </a:rPr>
+              <a:t>Makassed General Hospital  ·  Department of Laboratory Medicine</a:t>
+            </a:r>
+            <a:endParaRPr lang="en-US" sz="850" dirty="0"/>
+          </a:p>
+        </p:txBody>
+      </p:sp>
+      <p:sp>
+        <p:nvSpPr>
+          <p:cNvPr id="10" name="Text 8"/>
+          <p:cNvSpPr/>
+          <p:nvPr/>
+        </p:nvSpPr>
+        <p:spPr>
+          <a:xfrm>
+            <a:off x="9814255" y="6473952"/>
+            <a:ext cx="1828800" cy="274320"/>
+          </a:xfrm>
+          <a:prstGeom prst="rect">
+            <a:avLst/>
+          </a:prstGeom>
+          <a:noFill/>
+          <a:ln/>
+        </p:spPr>
+        <p:txBody>
+          <a:bodyPr wrap="square" lIns="0" tIns="0" rIns="0" bIns="0" rtlCol="0" anchor="ctr"/>
+          <a:lstStyle/>
+          <a:p>
+            <a:pPr algn="r" indent="0" marL="0">
+              <a:buNone/>
+            </a:pPr>
+            <a:r>
+              <a:rPr lang="en-US" sz="850" dirty="0">
+                <a:solidFill>
+                  <a:srgbClr val="9AA8B4"/>
+                </a:solidFill>
+                <a:latin typeface="Calibri" pitchFamily="34" charset="0"/>
+                <a:ea typeface="Calibri" pitchFamily="34" charset="-122"/>
+                <a:cs typeface="Calibri" pitchFamily="34" charset="-120"/>
+              </a:rPr>
+              <a:t>CP Lecture Series</a:t>
+            </a:r>
+            <a:pPr algn="r" indent="0" marL="0">
+              <a:buNone/>
+            </a:pPr>
+            <a:r>
+              <a:rPr lang="en-US" sz="850" dirty="0">
+                <a:solidFill>
+                  <a:srgbClr val="DCE4EC"/>
+                </a:solidFill>
+                <a:latin typeface="Calibri" pitchFamily="34" charset="0"/>
+                <a:ea typeface="Calibri" pitchFamily="34" charset="-122"/>
+                <a:cs typeface="Calibri" pitchFamily="34" charset="-120"/>
+              </a:rPr>
+              <a:t>   ·   </a:t>
+            </a:r>
+            <a:pPr algn="r" indent="0" marL="0">
+              <a:buNone/>
+            </a:pPr>
+            <a:r>
+              <a:rPr lang="en-US" sz="850" b="1" dirty="0">
+                <a:solidFill>
+                  <a:srgbClr val="2E7D32"/>
+                </a:solidFill>
+                <a:latin typeface="Calibri" pitchFamily="34" charset="0"/>
+                <a:ea typeface="Calibri" pitchFamily="34" charset="-122"/>
+                <a:cs typeface="Calibri" pitchFamily="34" charset="-120"/>
+              </a:rPr>
+              <a:t>19</a:t>
+            </a:r>
+            <a:endParaRPr lang="en-US" sz="850" dirty="0"/>
+          </a:p>
+        </p:txBody>
+      </p:sp>
+    </p:spTree>
+  </p:cSld>
+  <p:clrMapOvr>
+    <a:masterClrMapping/>
+  </p:clrMapOvr>
+</p:sld>
+</file>
+
+<file path=ppt/slides/slide28.xml><?xml version="1.0" encoding="utf-8"?>
+<p:sld xmlns:a="http://schemas.openxmlformats.org/drawingml/2006/main" xmlns:p="http://schemas.openxmlformats.org/presentationml/2006/main" xmlns:r="http://schemas.openxmlformats.org/officeDocument/2006/relationships">
+  <p:cSld>
+    <p:spTree>
+      <p:nvGrpSpPr>
+        <p:cNvPr id="1" name=""/>
+        <p:cNvGrpSpPr/>
+        <p:nvPr/>
+      </p:nvGrpSpPr>
+      <p:grpSpPr/>
+      <p:sp>
+        <p:nvSpPr>
+          <p:cNvPr id="2" name="Text 0"/>
+          <p:cNvSpPr/>
+          <p:nvPr/>
+        </p:nvSpPr>
+        <p:spPr>
+          <a:xfrm>
+            <a:off x="566928" y="329184"/>
+            <a:ext cx="10515600" cy="310896"/>
+          </a:xfrm>
+          <a:prstGeom prst="rect">
+            <a:avLst/>
+          </a:prstGeom>
+          <a:noFill/>
+          <a:ln/>
+        </p:spPr>
+        <p:txBody>
+          <a:bodyPr wrap="square" lIns="0" tIns="0" rIns="0" bIns="0" rtlCol="0" anchor="ctr"/>
+          <a:lstStyle/>
+          <a:p>
+            <a:pPr algn="l" indent="0" marL="0">
+              <a:buNone/>
+            </a:pPr>
+            <a:r>
+              <a:rPr lang="en-US" sz="1100" b="1" spc="150" kern="0" dirty="0">
+                <a:solidFill>
+                  <a:srgbClr val="2E7D32"/>
+                </a:solidFill>
+                <a:latin typeface="Calibri" pitchFamily="34" charset="0"/>
+                <a:ea typeface="Calibri" pitchFamily="34" charset="-122"/>
+                <a:cs typeface="Calibri" pitchFamily="34" charset="-120"/>
+              </a:rPr>
+              <a:t>MICROBIOLOGY   ·   BOARD REVIEW  ·  Q2</a:t>
+            </a:r>
+            <a:endParaRPr lang="en-US" sz="1100" dirty="0"/>
+          </a:p>
+        </p:txBody>
+      </p:sp>
+      <p:sp>
+        <p:nvSpPr>
+          <p:cNvPr id="3" name="Text 1"/>
+          <p:cNvSpPr/>
+          <p:nvPr/>
+        </p:nvSpPr>
+        <p:spPr>
+          <a:xfrm>
+            <a:off x="566928" y="713232"/>
+            <a:ext cx="11064240" cy="749808"/>
+          </a:xfrm>
+          <a:prstGeom prst="rect">
+            <a:avLst/>
+          </a:prstGeom>
+          <a:noFill/>
+          <a:ln/>
+        </p:spPr>
+        <p:txBody>
+          <a:bodyPr wrap="square" lIns="0" tIns="0" rIns="0" bIns="0" rtlCol="0" anchor="ctr"/>
+          <a:lstStyle/>
+          <a:p>
+            <a:pPr algn="l" indent="0" marL="0">
+              <a:buNone/>
+            </a:pPr>
+            <a:r>
+              <a:rPr lang="en-US" sz="2600" b="1" dirty="0">
+                <a:solidFill>
+                  <a:srgbClr val="0E3A5F"/>
+                </a:solidFill>
+                <a:latin typeface="Calibri" pitchFamily="34" charset="0"/>
+                <a:ea typeface="Calibri" pitchFamily="34" charset="-122"/>
+                <a:cs typeface="Calibri" pitchFamily="34" charset="-120"/>
+              </a:rPr>
+              <a:t>Board-Style Review</a:t>
+            </a:r>
+            <a:endParaRPr lang="en-US" sz="2600" dirty="0"/>
+          </a:p>
+        </p:txBody>
+      </p:sp>
+      <p:sp>
+        <p:nvSpPr>
+          <p:cNvPr id="4" name="Text 2"/>
+          <p:cNvSpPr/>
+          <p:nvPr/>
+        </p:nvSpPr>
+        <p:spPr>
+          <a:xfrm>
+            <a:off x="566928" y="1417320"/>
+            <a:ext cx="11057839" cy="914400"/>
+          </a:xfrm>
+          <a:prstGeom prst="rect">
+            <a:avLst/>
+          </a:prstGeom>
+          <a:noFill/>
+          <a:ln/>
+        </p:spPr>
+        <p:txBody>
+          <a:bodyPr wrap="square" lIns="0" tIns="0" rIns="0" bIns="0" rtlCol="0" anchor="t"/>
+          <a:lstStyle/>
+          <a:p>
+            <a:pPr algn="l" indent="0" marL="0">
+              <a:lnSpc>
+                <a:spcPct val="105000"/>
+              </a:lnSpc>
+              <a:buNone/>
+            </a:pPr>
+            <a:r>
+              <a:rPr lang="en-US" sz="1450" b="1" dirty="0">
+                <a:solidFill>
+                  <a:srgbClr val="1B2A38"/>
+                </a:solidFill>
+                <a:latin typeface="Calibri" pitchFamily="34" charset="0"/>
+                <a:ea typeface="Calibri" pitchFamily="34" charset="-122"/>
+                <a:cs typeface="Calibri" pitchFamily="34" charset="-120"/>
+              </a:rPr>
+              <a:t>Which finding most strongly indicates true bacteremia rather than contamination?</a:t>
+            </a:r>
+            <a:endParaRPr lang="en-US" sz="1450" dirty="0"/>
+          </a:p>
+        </p:txBody>
+      </p:sp>
+      <p:sp>
+        <p:nvSpPr>
+          <p:cNvPr id="5" name="Text 3"/>
+          <p:cNvSpPr/>
+          <p:nvPr/>
+        </p:nvSpPr>
+        <p:spPr>
+          <a:xfrm>
+            <a:off x="658368" y="2395728"/>
+            <a:ext cx="6192390" cy="3017520"/>
+          </a:xfrm>
+          <a:prstGeom prst="rect">
+            <a:avLst/>
+          </a:prstGeom>
+          <a:noFill/>
+          <a:ln/>
+        </p:spPr>
+        <p:txBody>
+          <a:bodyPr wrap="square" lIns="0" tIns="0" rIns="0" bIns="0" rtlCol="0" anchor="t"/>
+          <a:lstStyle/>
+          <a:p>
+            <a:pPr algn="l" indent="0" marL="0">
+              <a:spcAft>
+                <a:spcPts val="600"/>
+              </a:spcAft>
+              <a:buNone/>
+            </a:pPr>
+            <a:r>
+              <a:rPr lang="en-US" sz="1350" dirty="0">
+                <a:solidFill>
+                  <a:srgbClr val="33444F"/>
+                </a:solidFill>
+                <a:latin typeface="Calibri" pitchFamily="34" charset="0"/>
+                <a:ea typeface="Calibri" pitchFamily="34" charset="-122"/>
+                <a:cs typeface="Calibri" pitchFamily="34" charset="-120"/>
+              </a:rPr>
+              <a:t>A. Single bottle growing CoNS at day 4</a:t>
+            </a:r>
+            <a:endParaRPr lang="en-US" sz="1350" dirty="0"/>
+          </a:p>
+          <a:p>
+            <a:pPr algn="l" indent="0" marL="0">
+              <a:spcAft>
+                <a:spcPts val="600"/>
+              </a:spcAft>
+              <a:buNone/>
+            </a:pPr>
+            <a:r>
+              <a:rPr lang="en-US" sz="1350" b="1" dirty="0">
+                <a:solidFill>
+                  <a:srgbClr val="1F5722"/>
+                </a:solidFill>
+                <a:latin typeface="Calibri" pitchFamily="34" charset="0"/>
+                <a:ea typeface="Calibri" pitchFamily="34" charset="-122"/>
+                <a:cs typeface="Calibri" pitchFamily="34" charset="-120"/>
+              </a:rPr>
+              <a:t>B. Same virulent organism in multiple sets</a:t>
+            </a:r>
+            <a:endParaRPr lang="en-US" sz="1350" dirty="0"/>
+          </a:p>
+          <a:p>
+            <a:pPr algn="l" indent="0" marL="0">
+              <a:spcAft>
+                <a:spcPts val="600"/>
+              </a:spcAft>
+              <a:buNone/>
+            </a:pPr>
+            <a:r>
+              <a:rPr lang="en-US" sz="1350" dirty="0">
+                <a:solidFill>
+                  <a:srgbClr val="33444F"/>
+                </a:solidFill>
+                <a:latin typeface="Calibri" pitchFamily="34" charset="0"/>
+                <a:ea typeface="Calibri" pitchFamily="34" charset="-122"/>
+                <a:cs typeface="Calibri" pitchFamily="34" charset="-120"/>
+              </a:rPr>
+              <a:t>C. Multiple different skin organisms</a:t>
+            </a:r>
+            <a:endParaRPr lang="en-US" sz="1350" dirty="0"/>
+          </a:p>
+          <a:p>
+            <a:pPr algn="l" indent="0" marL="0">
+              <a:spcAft>
+                <a:spcPts val="600"/>
+              </a:spcAft>
+              <a:buNone/>
+            </a:pPr>
+            <a:r>
+              <a:rPr lang="en-US" sz="1350" dirty="0">
+                <a:solidFill>
+                  <a:srgbClr val="33444F"/>
+                </a:solidFill>
+                <a:latin typeface="Calibri" pitchFamily="34" charset="0"/>
+                <a:ea typeface="Calibri" pitchFamily="34" charset="-122"/>
+                <a:cs typeface="Calibri" pitchFamily="34" charset="-120"/>
+              </a:rPr>
+              <a:t>D. Late single-bottle positivity</a:t>
+            </a:r>
+            <a:endParaRPr lang="en-US" sz="1350" dirty="0"/>
+          </a:p>
+          <a:p>
+            <a:pPr algn="l" indent="0" marL="0">
+              <a:spcAft>
+                <a:spcPts val="600"/>
+              </a:spcAft>
+              <a:buNone/>
+            </a:pPr>
+            <a:r>
+              <a:rPr lang="en-US" sz="1350" dirty="0">
+                <a:solidFill>
+                  <a:srgbClr val="33444F"/>
+                </a:solidFill>
+                <a:latin typeface="Calibri" pitchFamily="34" charset="0"/>
+                <a:ea typeface="Calibri" pitchFamily="34" charset="-122"/>
+                <a:cs typeface="Calibri" pitchFamily="34" charset="-120"/>
+              </a:rPr>
+              <a:t>E. Growth only after subculture</a:t>
+            </a:r>
+            <a:endParaRPr lang="en-US" sz="1350" dirty="0"/>
+          </a:p>
+        </p:txBody>
+      </p:sp>
+      <p:sp>
+        <p:nvSpPr>
+          <p:cNvPr id="6" name="Shape 4"/>
+          <p:cNvSpPr/>
+          <p:nvPr/>
+        </p:nvSpPr>
+        <p:spPr>
+          <a:xfrm>
+            <a:off x="7201632" y="2395728"/>
+            <a:ext cx="4423136" cy="3246120"/>
+          </a:xfrm>
+          <a:prstGeom prst="roundRect">
+            <a:avLst>
+              <a:gd name="adj" fmla="val 2535"/>
+            </a:avLst>
+          </a:prstGeom>
+          <a:solidFill>
+            <a:srgbClr val="E8F2E9"/>
+          </a:solidFill>
+          <a:ln/>
+          <a:effectLst>
+            <a:outerShdw sx="100000" sy="100000" kx="0" ky="0" algn="bl" rotWithShape="0" blurRad="88900" dist="25400" dir="5400000">
+              <a:srgbClr val="22303C">
+                <a:alpha val="12000"/>
+              </a:srgbClr>
+            </a:outerShdw>
+          </a:effectLst>
+        </p:spPr>
+        <p:txBody>
+          <a:bodyPr/>
+          <a:p/>
+        </p:txBody>
+      </p:sp>
+      <p:sp>
+        <p:nvSpPr>
+          <p:cNvPr id="7" name="Text 5"/>
+          <p:cNvSpPr/>
+          <p:nvPr/>
+        </p:nvSpPr>
+        <p:spPr>
+          <a:xfrm>
+            <a:off x="7439376" y="2578608"/>
+            <a:ext cx="3965936" cy="457200"/>
+          </a:xfrm>
+          <a:prstGeom prst="rect">
+            <a:avLst/>
+          </a:prstGeom>
+          <a:noFill/>
+          <a:ln/>
+        </p:spPr>
+        <p:txBody>
+          <a:bodyPr wrap="square" lIns="0" tIns="0" rIns="0" bIns="0" rtlCol="0" anchor="ctr"/>
+          <a:lstStyle/>
+          <a:p>
+            <a:pPr indent="0" marL="0">
+              <a:buNone/>
+            </a:pPr>
+            <a:r>
+              <a:rPr lang="en-US" sz="1500" b="1" dirty="0">
+                <a:solidFill>
+                  <a:srgbClr val="2E7D32"/>
+                </a:solidFill>
+                <a:latin typeface="Calibri" pitchFamily="34" charset="0"/>
+                <a:ea typeface="Calibri" pitchFamily="34" charset="-122"/>
+                <a:cs typeface="Calibri" pitchFamily="34" charset="-120"/>
+              </a:rPr>
+              <a:t>ANSWER  </a:t>
+            </a:r>
+            <a:pPr indent="0" marL="0">
+              <a:buNone/>
+            </a:pPr>
+            <a:r>
+              <a:rPr lang="en-US" sz="1500" b="1" dirty="0">
+                <a:solidFill>
+                  <a:srgbClr val="1B2A38"/>
+                </a:solidFill>
+                <a:latin typeface="Calibri" pitchFamily="34" charset="0"/>
+                <a:ea typeface="Calibri" pitchFamily="34" charset="-122"/>
+                <a:cs typeface="Calibri" pitchFamily="34" charset="-120"/>
+              </a:rPr>
+              <a:t>B — Same organism in multiple sets</a:t>
+            </a:r>
+            <a:endParaRPr lang="en-US" sz="1500" dirty="0"/>
+          </a:p>
+        </p:txBody>
+      </p:sp>
+      <p:sp>
+        <p:nvSpPr>
+          <p:cNvPr id="8" name="Text 6"/>
+          <p:cNvSpPr/>
+          <p:nvPr/>
+        </p:nvSpPr>
+        <p:spPr>
+          <a:xfrm>
+            <a:off x="7439376" y="3127248"/>
+            <a:ext cx="3947648" cy="2377440"/>
+          </a:xfrm>
+          <a:prstGeom prst="rect">
+            <a:avLst/>
+          </a:prstGeom>
+          <a:noFill/>
+          <a:ln/>
+        </p:spPr>
+        <p:txBody>
+          <a:bodyPr wrap="square" lIns="0" tIns="0" rIns="0" bIns="0" rtlCol="0" anchor="t"/>
+          <a:lstStyle/>
+          <a:p>
+            <a:pPr algn="l" indent="0" marL="0">
+              <a:lnSpc>
+                <a:spcPct val="108000"/>
+              </a:lnSpc>
+              <a:buNone/>
+            </a:pPr>
+            <a:r>
+              <a:rPr lang="en-US" sz="1250" dirty="0">
+                <a:solidFill>
+                  <a:srgbClr val="33444F"/>
+                </a:solidFill>
+                <a:latin typeface="Calibri" pitchFamily="34" charset="0"/>
+                <a:ea typeface="Calibri" pitchFamily="34" charset="-122"/>
+                <a:cs typeface="Calibri" pitchFamily="34" charset="-120"/>
+              </a:rPr>
+              <a:t>Concordant growth across sets, especially of virulent organisms, supports true bacteremia; isolated skin flora suggests contamination.</a:t>
+            </a:r>
+            <a:endParaRPr lang="en-US" sz="1250" dirty="0"/>
+          </a:p>
+        </p:txBody>
+      </p:sp>
+      <p:sp>
+        <p:nvSpPr>
+          <p:cNvPr id="9" name="Text 7"/>
+          <p:cNvSpPr/>
+          <p:nvPr/>
+        </p:nvSpPr>
+        <p:spPr>
+          <a:xfrm>
+            <a:off x="566928" y="6473952"/>
+            <a:ext cx="7772400" cy="274320"/>
+          </a:xfrm>
+          <a:prstGeom prst="rect">
+            <a:avLst/>
+          </a:prstGeom>
+          <a:noFill/>
+          <a:ln/>
+        </p:spPr>
+        <p:txBody>
+          <a:bodyPr wrap="square" lIns="0" tIns="0" rIns="0" bIns="0" rtlCol="0" anchor="ctr"/>
+          <a:lstStyle/>
+          <a:p>
+            <a:pPr algn="l" indent="0" marL="0">
+              <a:buNone/>
+            </a:pPr>
+            <a:r>
+              <a:rPr lang="en-US" sz="850" dirty="0">
+                <a:solidFill>
+                  <a:srgbClr val="9AA8B4"/>
+                </a:solidFill>
+                <a:latin typeface="Calibri" pitchFamily="34" charset="0"/>
+                <a:ea typeface="Calibri" pitchFamily="34" charset="-122"/>
+                <a:cs typeface="Calibri" pitchFamily="34" charset="-120"/>
+              </a:rPr>
+              <a:t>Makassed General Hospital  ·  Department of Laboratory Medicine</a:t>
+            </a:r>
+            <a:endParaRPr lang="en-US" sz="850" dirty="0"/>
+          </a:p>
+        </p:txBody>
+      </p:sp>
+      <p:sp>
+        <p:nvSpPr>
+          <p:cNvPr id="10" name="Text 8"/>
+          <p:cNvSpPr/>
+          <p:nvPr/>
+        </p:nvSpPr>
+        <p:spPr>
+          <a:xfrm>
+            <a:off x="9814255" y="6473952"/>
+            <a:ext cx="1828800" cy="274320"/>
+          </a:xfrm>
+          <a:prstGeom prst="rect">
+            <a:avLst/>
+          </a:prstGeom>
+          <a:noFill/>
+          <a:ln/>
+        </p:spPr>
+        <p:txBody>
+          <a:bodyPr wrap="square" lIns="0" tIns="0" rIns="0" bIns="0" rtlCol="0" anchor="ctr"/>
+          <a:lstStyle/>
+          <a:p>
+            <a:pPr algn="r" indent="0" marL="0">
+              <a:buNone/>
+            </a:pPr>
+            <a:r>
+              <a:rPr lang="en-US" sz="850" dirty="0">
+                <a:solidFill>
+                  <a:srgbClr val="9AA8B4"/>
+                </a:solidFill>
+                <a:latin typeface="Calibri" pitchFamily="34" charset="0"/>
+                <a:ea typeface="Calibri" pitchFamily="34" charset="-122"/>
+                <a:cs typeface="Calibri" pitchFamily="34" charset="-120"/>
+              </a:rPr>
+              <a:t>CP Lecture Series</a:t>
+            </a:r>
+            <a:pPr algn="r" indent="0" marL="0">
+              <a:buNone/>
+            </a:pPr>
+            <a:r>
+              <a:rPr lang="en-US" sz="850" dirty="0">
+                <a:solidFill>
+                  <a:srgbClr val="DCE4EC"/>
+                </a:solidFill>
+                <a:latin typeface="Calibri" pitchFamily="34" charset="0"/>
+                <a:ea typeface="Calibri" pitchFamily="34" charset="-122"/>
+                <a:cs typeface="Calibri" pitchFamily="34" charset="-120"/>
+              </a:rPr>
+              <a:t>   ·   </a:t>
+            </a:r>
+            <a:pPr algn="r" indent="0" marL="0">
+              <a:buNone/>
+            </a:pPr>
+            <a:r>
+              <a:rPr lang="en-US" sz="850" b="1" dirty="0">
+                <a:solidFill>
+                  <a:srgbClr val="2E7D32"/>
+                </a:solidFill>
+                <a:latin typeface="Calibri" pitchFamily="34" charset="0"/>
+                <a:ea typeface="Calibri" pitchFamily="34" charset="-122"/>
+                <a:cs typeface="Calibri" pitchFamily="34" charset="-120"/>
+              </a:rPr>
+              <a:t>18</a:t>
+            </a:r>
+            <a:endParaRPr lang="en-US" sz="850" dirty="0"/>
+          </a:p>
+        </p:txBody>
+      </p:sp>
+    </p:spTree>
+  </p:cSld>
+  <p:clrMapOvr>
+    <a:masterClrMapping/>
+  </p:clrMapOvr>
+</p:sld>
+</file>
+
+<file path=ppt/slides/slide29.xml><?xml version="1.0" encoding="utf-8"?>
+<p:sld xmlns:a="http://schemas.openxmlformats.org/drawingml/2006/main" xmlns:p="http://schemas.openxmlformats.org/presentationml/2006/main" xmlns:r="http://schemas.openxmlformats.org/officeDocument/2006/relationships">
+  <p:cSld>
+    <p:spTree>
+      <p:nvGrpSpPr>
+        <p:cNvPr id="1" name=""/>
+        <p:cNvGrpSpPr/>
+        <p:nvPr/>
+      </p:nvGrpSpPr>
+      <p:grpSpPr/>
+      <p:sp>
+        <p:nvSpPr>
+          <p:cNvPr id="2" name="Text 0"/>
+          <p:cNvSpPr/>
+          <p:nvPr/>
+        </p:nvSpPr>
+        <p:spPr>
+          <a:xfrm>
+            <a:off x="566928" y="329184"/>
+            <a:ext cx="10515600" cy="310896"/>
+          </a:xfrm>
+          <a:prstGeom prst="rect">
+            <a:avLst/>
+          </a:prstGeom>
+          <a:noFill/>
+          <a:ln/>
+        </p:spPr>
+        <p:txBody>
+          <a:bodyPr wrap="square" lIns="0" tIns="0" rIns="0" bIns="0" rtlCol="0" anchor="ctr"/>
+          <a:lstStyle/>
+          <a:p>
+            <a:pPr algn="l" indent="0" marL="0">
+              <a:buNone/>
+            </a:pPr>
+            <a:r>
+              <a:rPr lang="en-US" sz="1100" b="1" spc="150" kern="0" dirty="0">
+                <a:solidFill>
+                  <a:srgbClr val="2E7D32"/>
+                </a:solidFill>
+                <a:latin typeface="Calibri" pitchFamily="34" charset="0"/>
+                <a:ea typeface="Calibri" pitchFamily="34" charset="-122"/>
+                <a:cs typeface="Calibri" pitchFamily="34" charset="-120"/>
+              </a:rPr>
+              <a:t>MICROBIOLOGY   ·   BOARD REVIEW  ·  Q1</a:t>
+            </a:r>
+            <a:endParaRPr lang="en-US" sz="1100" dirty="0"/>
+          </a:p>
+        </p:txBody>
+      </p:sp>
+      <p:sp>
+        <p:nvSpPr>
+          <p:cNvPr id="3" name="Text 1"/>
+          <p:cNvSpPr/>
+          <p:nvPr/>
+        </p:nvSpPr>
+        <p:spPr>
+          <a:xfrm>
+            <a:off x="566928" y="713232"/>
+            <a:ext cx="11064240" cy="749808"/>
+          </a:xfrm>
+          <a:prstGeom prst="rect">
+            <a:avLst/>
+          </a:prstGeom>
+          <a:noFill/>
+          <a:ln/>
+        </p:spPr>
+        <p:txBody>
+          <a:bodyPr wrap="square" lIns="0" tIns="0" rIns="0" bIns="0" rtlCol="0" anchor="ctr"/>
+          <a:lstStyle/>
+          <a:p>
+            <a:pPr algn="l" indent="0" marL="0">
+              <a:buNone/>
+            </a:pPr>
+            <a:r>
+              <a:rPr lang="en-US" sz="2600" b="1" dirty="0">
+                <a:solidFill>
+                  <a:srgbClr val="0E3A5F"/>
+                </a:solidFill>
+                <a:latin typeface="Calibri" pitchFamily="34" charset="0"/>
+                <a:ea typeface="Calibri" pitchFamily="34" charset="-122"/>
+                <a:cs typeface="Calibri" pitchFamily="34" charset="-120"/>
+              </a:rPr>
+              <a:t>Board-Style Review</a:t>
+            </a:r>
+            <a:endParaRPr lang="en-US" sz="2600" dirty="0"/>
+          </a:p>
+        </p:txBody>
+      </p:sp>
+      <p:sp>
+        <p:nvSpPr>
+          <p:cNvPr id="4" name="Text 2"/>
+          <p:cNvSpPr/>
+          <p:nvPr/>
+        </p:nvSpPr>
+        <p:spPr>
+          <a:xfrm>
+            <a:off x="566928" y="1417320"/>
+            <a:ext cx="11057839" cy="914400"/>
+          </a:xfrm>
+          <a:prstGeom prst="rect">
+            <a:avLst/>
+          </a:prstGeom>
+          <a:noFill/>
+          <a:ln/>
+        </p:spPr>
+        <p:txBody>
+          <a:bodyPr wrap="square" lIns="0" tIns="0" rIns="0" bIns="0" rtlCol="0" anchor="t"/>
+          <a:lstStyle/>
+          <a:p>
+            <a:pPr algn="l" indent="0" marL="0">
+              <a:lnSpc>
+                <a:spcPct val="105000"/>
+              </a:lnSpc>
+              <a:buNone/>
+            </a:pPr>
+            <a:r>
+              <a:rPr lang="en-US" sz="1450" b="1" dirty="0">
+                <a:solidFill>
+                  <a:srgbClr val="1B2A38"/>
+                </a:solidFill>
+                <a:latin typeface="Calibri" pitchFamily="34" charset="0"/>
+                <a:ea typeface="Calibri" pitchFamily="34" charset="-122"/>
+                <a:cs typeface="Calibri" pitchFamily="34" charset="-120"/>
+              </a:rPr>
+              <a:t>The most important determinant of blood-culture sensitivity is:</a:t>
+            </a:r>
+            <a:endParaRPr lang="en-US" sz="1450" dirty="0"/>
+          </a:p>
+        </p:txBody>
+      </p:sp>
+      <p:sp>
+        <p:nvSpPr>
+          <p:cNvPr id="5" name="Text 3"/>
+          <p:cNvSpPr/>
+          <p:nvPr/>
+        </p:nvSpPr>
+        <p:spPr>
+          <a:xfrm>
+            <a:off x="658368" y="2395728"/>
+            <a:ext cx="6192390" cy="3017520"/>
+          </a:xfrm>
+          <a:prstGeom prst="rect">
+            <a:avLst/>
+          </a:prstGeom>
+          <a:noFill/>
+          <a:ln/>
+        </p:spPr>
+        <p:txBody>
+          <a:bodyPr wrap="square" lIns="0" tIns="0" rIns="0" bIns="0" rtlCol="0" anchor="t"/>
+          <a:lstStyle/>
+          <a:p>
+            <a:pPr algn="l" indent="0" marL="0">
+              <a:spcAft>
+                <a:spcPts val="600"/>
+              </a:spcAft>
+              <a:buNone/>
+            </a:pPr>
+            <a:r>
+              <a:rPr lang="en-US" sz="1350" dirty="0">
+                <a:solidFill>
+                  <a:srgbClr val="33444F"/>
+                </a:solidFill>
+                <a:latin typeface="Calibri" pitchFamily="34" charset="0"/>
+                <a:ea typeface="Calibri" pitchFamily="34" charset="-122"/>
+                <a:cs typeface="Calibri" pitchFamily="34" charset="-120"/>
+              </a:rPr>
+              <a:t>A. Skin antiseptic choice</a:t>
+            </a:r>
+            <a:endParaRPr lang="en-US" sz="1350" dirty="0"/>
+          </a:p>
+          <a:p>
+            <a:pPr algn="l" indent="0" marL="0">
+              <a:spcAft>
+                <a:spcPts val="600"/>
+              </a:spcAft>
+              <a:buNone/>
+            </a:pPr>
+            <a:r>
+              <a:rPr lang="en-US" sz="1350" b="1" dirty="0">
+                <a:solidFill>
+                  <a:srgbClr val="1F5722"/>
+                </a:solidFill>
+                <a:latin typeface="Calibri" pitchFamily="34" charset="0"/>
+                <a:ea typeface="Calibri" pitchFamily="34" charset="-122"/>
+                <a:cs typeface="Calibri" pitchFamily="34" charset="-120"/>
+              </a:rPr>
+              <a:t>B. Total blood volume cultured</a:t>
+            </a:r>
+            <a:endParaRPr lang="en-US" sz="1350" dirty="0"/>
+          </a:p>
+          <a:p>
+            <a:pPr algn="l" indent="0" marL="0">
+              <a:spcAft>
+                <a:spcPts val="600"/>
+              </a:spcAft>
+              <a:buNone/>
+            </a:pPr>
+            <a:r>
+              <a:rPr lang="en-US" sz="1350" dirty="0">
+                <a:solidFill>
+                  <a:srgbClr val="33444F"/>
+                </a:solidFill>
+                <a:latin typeface="Calibri" pitchFamily="34" charset="0"/>
+                <a:ea typeface="Calibri" pitchFamily="34" charset="-122"/>
+                <a:cs typeface="Calibri" pitchFamily="34" charset="-120"/>
+              </a:rPr>
+              <a:t>C. Incubation temperature</a:t>
+            </a:r>
+            <a:endParaRPr lang="en-US" sz="1350" dirty="0"/>
+          </a:p>
+          <a:p>
+            <a:pPr algn="l" indent="0" marL="0">
+              <a:spcAft>
+                <a:spcPts val="600"/>
+              </a:spcAft>
+              <a:buNone/>
+            </a:pPr>
+            <a:r>
+              <a:rPr lang="en-US" sz="1350" dirty="0">
+                <a:solidFill>
+                  <a:srgbClr val="33444F"/>
+                </a:solidFill>
+                <a:latin typeface="Calibri" pitchFamily="34" charset="0"/>
+                <a:ea typeface="Calibri" pitchFamily="34" charset="-122"/>
+                <a:cs typeface="Calibri" pitchFamily="34" charset="-120"/>
+              </a:rPr>
+              <a:t>D. Bottle manufacturer</a:t>
+            </a:r>
+            <a:endParaRPr lang="en-US" sz="1350" dirty="0"/>
+          </a:p>
+          <a:p>
+            <a:pPr algn="l" indent="0" marL="0">
+              <a:spcAft>
+                <a:spcPts val="600"/>
+              </a:spcAft>
+              <a:buNone/>
+            </a:pPr>
+            <a:r>
+              <a:rPr lang="en-US" sz="1350" dirty="0">
+                <a:solidFill>
+                  <a:srgbClr val="33444F"/>
+                </a:solidFill>
+                <a:latin typeface="Calibri" pitchFamily="34" charset="0"/>
+                <a:ea typeface="Calibri" pitchFamily="34" charset="-122"/>
+                <a:cs typeface="Calibri" pitchFamily="34" charset="-120"/>
+              </a:rPr>
+              <a:t>E. Time of day</a:t>
+            </a:r>
+            <a:endParaRPr lang="en-US" sz="1350" dirty="0"/>
+          </a:p>
+        </p:txBody>
+      </p:sp>
+      <p:sp>
+        <p:nvSpPr>
+          <p:cNvPr id="6" name="Shape 4"/>
+          <p:cNvSpPr/>
+          <p:nvPr/>
+        </p:nvSpPr>
+        <p:spPr>
+          <a:xfrm>
+            <a:off x="7201632" y="2395728"/>
+            <a:ext cx="4423136" cy="3246120"/>
+          </a:xfrm>
+          <a:prstGeom prst="roundRect">
+            <a:avLst>
+              <a:gd name="adj" fmla="val 2535"/>
+            </a:avLst>
+          </a:prstGeom>
+          <a:solidFill>
+            <a:srgbClr val="E8F2E9"/>
+          </a:solidFill>
+          <a:ln/>
+          <a:effectLst>
+            <a:outerShdw sx="100000" sy="100000" kx="0" ky="0" algn="bl" rotWithShape="0" blurRad="88900" dist="25400" dir="5400000">
+              <a:srgbClr val="22303C">
+                <a:alpha val="12000"/>
+              </a:srgbClr>
+            </a:outerShdw>
+          </a:effectLst>
+        </p:spPr>
+        <p:txBody>
+          <a:bodyPr/>
+          <a:p/>
+        </p:txBody>
+      </p:sp>
+      <p:sp>
+        <p:nvSpPr>
+          <p:cNvPr id="7" name="Text 5"/>
+          <p:cNvSpPr/>
+          <p:nvPr/>
+        </p:nvSpPr>
+        <p:spPr>
+          <a:xfrm>
+            <a:off x="7439376" y="2578608"/>
+            <a:ext cx="3965936" cy="457200"/>
+          </a:xfrm>
+          <a:prstGeom prst="rect">
+            <a:avLst/>
+          </a:prstGeom>
+          <a:noFill/>
+          <a:ln/>
+        </p:spPr>
+        <p:txBody>
+          <a:bodyPr wrap="square" lIns="0" tIns="0" rIns="0" bIns="0" rtlCol="0" anchor="ctr"/>
+          <a:lstStyle/>
+          <a:p>
+            <a:pPr indent="0" marL="0">
+              <a:buNone/>
+            </a:pPr>
+            <a:r>
+              <a:rPr lang="en-US" sz="1500" b="1" dirty="0">
+                <a:solidFill>
+                  <a:srgbClr val="2E7D32"/>
+                </a:solidFill>
+                <a:latin typeface="Calibri" pitchFamily="34" charset="0"/>
+                <a:ea typeface="Calibri" pitchFamily="34" charset="-122"/>
+                <a:cs typeface="Calibri" pitchFamily="34" charset="-120"/>
+              </a:rPr>
+              <a:t>ANSWER  </a:t>
+            </a:r>
+            <a:pPr indent="0" marL="0">
+              <a:buNone/>
+            </a:pPr>
+            <a:r>
+              <a:rPr lang="en-US" sz="1500" b="1" dirty="0">
+                <a:solidFill>
+                  <a:srgbClr val="1B2A38"/>
+                </a:solidFill>
+                <a:latin typeface="Calibri" pitchFamily="34" charset="0"/>
+                <a:ea typeface="Calibri" pitchFamily="34" charset="-122"/>
+                <a:cs typeface="Calibri" pitchFamily="34" charset="-120"/>
+              </a:rPr>
+              <a:t>B — Total blood volume cultured</a:t>
+            </a:r>
+            <a:endParaRPr lang="en-US" sz="1500" dirty="0"/>
+          </a:p>
+        </p:txBody>
+      </p:sp>
+      <p:sp>
+        <p:nvSpPr>
+          <p:cNvPr id="8" name="Text 6"/>
+          <p:cNvSpPr/>
+          <p:nvPr/>
+        </p:nvSpPr>
+        <p:spPr>
+          <a:xfrm>
+            <a:off x="7439376" y="3127248"/>
+            <a:ext cx="3947648" cy="2377440"/>
+          </a:xfrm>
+          <a:prstGeom prst="rect">
+            <a:avLst/>
+          </a:prstGeom>
+          <a:noFill/>
+          <a:ln/>
+        </p:spPr>
+        <p:txBody>
+          <a:bodyPr wrap="square" lIns="0" tIns="0" rIns="0" bIns="0" rtlCol="0" anchor="t"/>
+          <a:lstStyle/>
+          <a:p>
+            <a:pPr algn="l" indent="0" marL="0">
+              <a:lnSpc>
+                <a:spcPct val="108000"/>
+              </a:lnSpc>
+              <a:buNone/>
+            </a:pPr>
+            <a:r>
+              <a:rPr lang="en-US" sz="1250" dirty="0">
+                <a:solidFill>
+                  <a:srgbClr val="33444F"/>
+                </a:solidFill>
+                <a:latin typeface="Calibri" pitchFamily="34" charset="0"/>
+                <a:ea typeface="Calibri" pitchFamily="34" charset="-122"/>
+                <a:cs typeface="Calibri" pitchFamily="34" charset="-120"/>
+              </a:rPr>
+              <a:t>Yield is directly related to inoculated volume; under-filling bottles is a leading preventable cause of false negatives.</a:t>
+            </a:r>
+            <a:endParaRPr lang="en-US" sz="1250" dirty="0"/>
+          </a:p>
+        </p:txBody>
+      </p:sp>
+      <p:sp>
+        <p:nvSpPr>
+          <p:cNvPr id="9" name="Text 7"/>
+          <p:cNvSpPr/>
+          <p:nvPr/>
+        </p:nvSpPr>
+        <p:spPr>
+          <a:xfrm>
+            <a:off x="566928" y="6473952"/>
+            <a:ext cx="7772400" cy="274320"/>
+          </a:xfrm>
+          <a:prstGeom prst="rect">
+            <a:avLst/>
+          </a:prstGeom>
+          <a:noFill/>
+          <a:ln/>
+        </p:spPr>
+        <p:txBody>
+          <a:bodyPr wrap="square" lIns="0" tIns="0" rIns="0" bIns="0" rtlCol="0" anchor="ctr"/>
+          <a:lstStyle/>
+          <a:p>
+            <a:pPr algn="l" indent="0" marL="0">
+              <a:buNone/>
+            </a:pPr>
+            <a:r>
+              <a:rPr lang="en-US" sz="850" dirty="0">
+                <a:solidFill>
+                  <a:srgbClr val="9AA8B4"/>
+                </a:solidFill>
+                <a:latin typeface="Calibri" pitchFamily="34" charset="0"/>
+                <a:ea typeface="Calibri" pitchFamily="34" charset="-122"/>
+                <a:cs typeface="Calibri" pitchFamily="34" charset="-120"/>
+              </a:rPr>
+              <a:t>Makassed General Hospital  ·  Department of Laboratory Medicine</a:t>
+            </a:r>
+            <a:endParaRPr lang="en-US" sz="850" dirty="0"/>
+          </a:p>
+        </p:txBody>
+      </p:sp>
+      <p:sp>
+        <p:nvSpPr>
+          <p:cNvPr id="10" name="Text 8"/>
+          <p:cNvSpPr/>
+          <p:nvPr/>
+        </p:nvSpPr>
+        <p:spPr>
+          <a:xfrm>
+            <a:off x="9814255" y="6473952"/>
+            <a:ext cx="1828800" cy="274320"/>
+          </a:xfrm>
+          <a:prstGeom prst="rect">
+            <a:avLst/>
+          </a:prstGeom>
+          <a:noFill/>
+          <a:ln/>
+        </p:spPr>
+        <p:txBody>
+          <a:bodyPr wrap="square" lIns="0" tIns="0" rIns="0" bIns="0" rtlCol="0" anchor="ctr"/>
+          <a:lstStyle/>
+          <a:p>
+            <a:pPr algn="r" indent="0" marL="0">
+              <a:buNone/>
+            </a:pPr>
+            <a:r>
+              <a:rPr lang="en-US" sz="850" dirty="0">
+                <a:solidFill>
+                  <a:srgbClr val="9AA8B4"/>
+                </a:solidFill>
+                <a:latin typeface="Calibri" pitchFamily="34" charset="0"/>
+                <a:ea typeface="Calibri" pitchFamily="34" charset="-122"/>
+                <a:cs typeface="Calibri" pitchFamily="34" charset="-120"/>
+              </a:rPr>
+              <a:t>CP Lecture Series</a:t>
+            </a:r>
+            <a:pPr algn="r" indent="0" marL="0">
+              <a:buNone/>
+            </a:pPr>
+            <a:r>
+              <a:rPr lang="en-US" sz="850" dirty="0">
+                <a:solidFill>
+                  <a:srgbClr val="DCE4EC"/>
+                </a:solidFill>
+                <a:latin typeface="Calibri" pitchFamily="34" charset="0"/>
+                <a:ea typeface="Calibri" pitchFamily="34" charset="-122"/>
+                <a:cs typeface="Calibri" pitchFamily="34" charset="-120"/>
+              </a:rPr>
+              <a:t>   ·   </a:t>
+            </a:r>
+            <a:pPr algn="r" indent="0" marL="0">
+              <a:buNone/>
+            </a:pPr>
+            <a:r>
+              <a:rPr lang="en-US" sz="850" b="1" dirty="0">
+                <a:solidFill>
+                  <a:srgbClr val="2E7D32"/>
+                </a:solidFill>
+                <a:latin typeface="Calibri" pitchFamily="34" charset="0"/>
+                <a:ea typeface="Calibri" pitchFamily="34" charset="-122"/>
+                <a:cs typeface="Calibri" pitchFamily="34" charset="-120"/>
+              </a:rPr>
+              <a:t>17</a:t>
+            </a:r>
+            <a:endParaRPr lang="en-US" sz="850" dirty="0"/>
+          </a:p>
+        </p:txBody>
+      </p:sp>
+    </p:spTree>
+  </p:cSld>
+  <p:clrMapOvr>
+    <a:masterClrMapping/>
+  </p:clrMapOvr>
+</p:sld>
+</file>
+
 <file path=ppt/slides/slide3.xml><?xml version="1.0" encoding="utf-8"?>
 <p:sld xmlns:a="http://schemas.openxmlformats.org/drawingml/2006/main" xmlns:r="http://schemas.openxmlformats.org/officeDocument/2006/relationships" xmlns:p="http://schemas.openxmlformats.org/presentationml/2006/main">
   <p:cSld name="Slide 3">
@@ -11802,6 +13426,10 @@
             </a:outerShdw>
           </a:effectLst>
         </p:spPr>
+        <p:txBody>
+          <a:bodyPr/>
+          <a:p/>
+        </p:txBody>
       </p:sp>
       <p:sp>
         <p:nvSpPr>
@@ -11829,6 +13457,10 @@
             </a:outerShdw>
           </a:effectLst>
         </p:spPr>
+        <p:txBody>
+          <a:bodyPr/>
+          <a:p/>
+        </p:txBody>
       </p:sp>
       <p:sp>
         <p:nvSpPr>
@@ -11936,6 +13568,10 @@
             </a:outerShdw>
           </a:effectLst>
         </p:spPr>
+        <p:txBody>
+          <a:bodyPr/>
+          <a:p/>
+        </p:txBody>
       </p:sp>
       <p:sp>
         <p:nvSpPr>
@@ -11963,6 +13599,10 @@
             </a:outerShdw>
           </a:effectLst>
         </p:spPr>
+        <p:txBody>
+          <a:bodyPr/>
+          <a:p/>
+        </p:txBody>
       </p:sp>
       <p:sp>
         <p:nvSpPr>
@@ -12070,6 +13710,10 @@
             </a:outerShdw>
           </a:effectLst>
         </p:spPr>
+        <p:txBody>
+          <a:bodyPr/>
+          <a:p/>
+        </p:txBody>
       </p:sp>
       <p:sp>
         <p:nvSpPr>
@@ -12097,6 +13741,10 @@
             </a:outerShdw>
           </a:effectLst>
         </p:spPr>
+        <p:txBody>
+          <a:bodyPr/>
+          <a:p/>
+        </p:txBody>
       </p:sp>
       <p:sp>
         <p:nvSpPr>
@@ -12204,6 +13852,10 @@
             </a:outerShdw>
           </a:effectLst>
         </p:spPr>
+        <p:txBody>
+          <a:bodyPr/>
+          <a:p/>
+        </p:txBody>
       </p:sp>
       <p:sp>
         <p:nvSpPr>
@@ -12231,6 +13883,10 @@
             </a:outerShdw>
           </a:effectLst>
         </p:spPr>
+        <p:txBody>
+          <a:bodyPr/>
+          <a:p/>
+        </p:txBody>
       </p:sp>
       <p:sp>
         <p:nvSpPr>
@@ -12338,6 +13994,10 @@
             </a:outerShdw>
           </a:effectLst>
         </p:spPr>
+        <p:txBody>
+          <a:bodyPr/>
+          <a:p/>
+        </p:txBody>
       </p:sp>
       <p:sp>
         <p:nvSpPr>
@@ -12365,6 +14025,10 @@
             </a:outerShdw>
           </a:effectLst>
         </p:spPr>
+        <p:txBody>
+          <a:bodyPr/>
+          <a:p/>
+        </p:txBody>
       </p:sp>
       <p:sp>
         <p:nvSpPr>
@@ -12472,6 +14136,10 @@
             </a:outerShdw>
           </a:effectLst>
         </p:spPr>
+        <p:txBody>
+          <a:bodyPr/>
+          <a:p/>
+        </p:txBody>
       </p:sp>
       <p:sp>
         <p:nvSpPr>
@@ -12499,6 +14167,10 @@
             </a:outerShdw>
           </a:effectLst>
         </p:spPr>
+        <p:txBody>
+          <a:bodyPr/>
+          <a:p/>
+        </p:txBody>
       </p:sp>
       <p:sp>
         <p:nvSpPr>
@@ -12822,6 +14494,10 @@
             </a:outerShdw>
           </a:effectLst>
         </p:spPr>
+        <p:txBody>
+          <a:bodyPr/>
+          <a:p/>
+        </p:txBody>
       </p:sp>
       <p:sp>
         <p:nvSpPr>
@@ -12849,6 +14525,10 @@
             </a:outerShdw>
           </a:effectLst>
         </p:spPr>
+        <p:txBody>
+          <a:bodyPr/>
+          <a:p/>
+        </p:txBody>
       </p:sp>
       <p:sp>
         <p:nvSpPr>
@@ -12963,6 +14643,10 @@
           </a:solidFill>
           <a:ln/>
         </p:spPr>
+        <p:txBody>
+          <a:bodyPr/>
+          <a:p/>
+        </p:txBody>
       </p:sp>
       <p:sp>
         <p:nvSpPr>
@@ -12990,6 +14674,10 @@
             </a:outerShdw>
           </a:effectLst>
         </p:spPr>
+        <p:txBody>
+          <a:bodyPr/>
+          <a:p/>
+        </p:txBody>
       </p:sp>
       <p:sp>
         <p:nvSpPr>
@@ -13111,6 +14799,10 @@
             </a:outerShdw>
           </a:effectLst>
         </p:spPr>
+        <p:txBody>
+          <a:bodyPr/>
+          <a:p/>
+        </p:txBody>
       </p:sp>
       <p:sp>
         <p:nvSpPr>
@@ -13138,6 +14830,10 @@
             </a:outerShdw>
           </a:effectLst>
         </p:spPr>
+        <p:txBody>
+          <a:bodyPr/>
+          <a:p/>
+        </p:txBody>
       </p:sp>
       <p:sp>
         <p:nvSpPr>
@@ -13252,6 +14948,10 @@
           </a:solidFill>
           <a:ln/>
         </p:spPr>
+        <p:txBody>
+          <a:bodyPr/>
+          <a:p/>
+        </p:txBody>
       </p:sp>
       <p:sp>
         <p:nvSpPr>
@@ -13279,6 +14979,10 @@
             </a:outerShdw>
           </a:effectLst>
         </p:spPr>
+        <p:txBody>
+          <a:bodyPr/>
+          <a:p/>
+        </p:txBody>
       </p:sp>
       <p:sp>
         <p:nvSpPr>
@@ -13400,6 +15104,10 @@
             </a:outerShdw>
           </a:effectLst>
         </p:spPr>
+        <p:txBody>
+          <a:bodyPr/>
+          <a:p/>
+        </p:txBody>
       </p:sp>
       <p:sp>
         <p:nvSpPr>
@@ -13427,6 +15135,10 @@
             </a:outerShdw>
           </a:effectLst>
         </p:spPr>
+        <p:txBody>
+          <a:bodyPr/>
+          <a:p/>
+        </p:txBody>
       </p:sp>
       <p:sp>
         <p:nvSpPr>
@@ -13665,6 +15377,10 @@
           </a:solidFill>
           <a:ln/>
         </p:spPr>
+        <p:txBody>
+          <a:bodyPr/>
+          <a:p/>
+        </p:txBody>
       </p:sp>
       <p:sp>
         <p:nvSpPr>
@@ -13687,6 +15403,10 @@
           </a:solidFill>
           <a:ln/>
         </p:spPr>
+        <p:txBody>
+          <a:bodyPr/>
+          <a:p/>
+        </p:txBody>
       </p:sp>
       <p:sp>
         <p:nvSpPr>
@@ -13948,6 +15668,10 @@
             </a:outerShdw>
           </a:effectLst>
         </p:spPr>
+        <p:txBody>
+          <a:bodyPr/>
+          <a:p/>
+        </p:txBody>
       </p:sp>
       <p:pic>
         <p:nvPicPr>
@@ -14256,6 +15980,10 @@
             </a:outerShdw>
           </a:effectLst>
         </p:spPr>
+        <p:txBody>
+          <a:bodyPr/>
+          <a:p/>
+        </p:txBody>
       </p:sp>
       <p:sp>
         <p:nvSpPr>
@@ -14430,6 +16158,10 @@
             </a:outerShdw>
           </a:effectLst>
         </p:spPr>
+        <p:txBody>
+          <a:bodyPr/>
+          <a:p/>
+        </p:txBody>
       </p:sp>
       <p:sp>
         <p:nvSpPr>
@@ -14735,6 +16467,10 @@
           </a:solidFill>
           <a:ln/>
         </p:spPr>
+        <p:txBody>
+          <a:bodyPr/>
+          <a:p/>
+        </p:txBody>
       </p:sp>
       <p:sp>
         <p:nvSpPr>
@@ -14757,6 +16493,10 @@
           </a:solidFill>
           <a:ln/>
         </p:spPr>
+        <p:txBody>
+          <a:bodyPr/>
+          <a:p/>
+        </p:txBody>
       </p:sp>
       <p:sp>
         <p:nvSpPr>
@@ -15013,6 +16753,10 @@
             </a:outerShdw>
           </a:effectLst>
         </p:spPr>
+        <p:txBody>
+          <a:bodyPr/>
+          <a:p/>
+        </p:txBody>
       </p:sp>
       <p:sp>
         <p:nvSpPr>
@@ -15187,6 +16931,10 @@
             </a:outerShdw>
           </a:effectLst>
         </p:spPr>
+        <p:txBody>
+          <a:bodyPr/>
+          <a:p/>
+        </p:txBody>
       </p:sp>
       <p:sp>
         <p:nvSpPr>
